--- a/output/wordlabs-pay-3day.pptx
+++ b/output/wordlabs-pay-3day.pptx
@@ -4240,7 +4240,7 @@
                 <a:ea typeface="Calibri" pitchFamily="34" charset="-122"/>
                 <a:cs typeface="Calibri" pitchFamily="34" charset="-120"/>
               </a:rPr>
-              <a:t>"give money in exchange"</a:t>
+              <a:t>"give money owed"</a:t>
             </a:r>
             <a:endParaRPr lang="en-US" sz="2200" dirty="0"/>
           </a:p>
@@ -5288,7 +5288,7 @@
                 <a:ea typeface="Calibri" pitchFamily="34" charset="-122"/>
                 <a:cs typeface="Calibri" pitchFamily="34" charset="-120"/>
               </a:rPr>
-              <a:t>Word Labs  •  wordlabs.app  •  Root: 'pay' = give money in exchange</a:t>
+              <a:t>Word Labs  •  wordlabs.app  •  Root: 'pay' = give money owed</a:t>
             </a:r>
             <a:endParaRPr lang="en-US" sz="800" dirty="0"/>
           </a:p>
@@ -5622,7 +5622,7 @@
                 <a:ea typeface="Trebuchet MS" pitchFamily="34" charset="-122"/>
                 <a:cs typeface="Trebuchet MS" pitchFamily="34" charset="-120"/>
               </a:rPr>
-              <a:t>0</a:t>
+              <a:t>1</a:t>
             </a:r>
             <a:pPr algn="ctr" indent="0" marL="0">
               <a:buNone/>
@@ -5928,7 +5928,7 @@
                 <a:ea typeface="Calibri" pitchFamily="34" charset="-122"/>
                 <a:cs typeface="Calibri" pitchFamily="34" charset="-120"/>
               </a:rPr>
-              <a:t>Word Labs  •  wordlabs.app  •  Root: 'pay' = give money in exchange</a:t>
+              <a:t>Word Labs  •  wordlabs.app  •  Root: 'pay' = give money owed</a:t>
             </a:r>
             <a:endParaRPr lang="en-US" sz="800" dirty="0"/>
           </a:p>
@@ -6040,7 +6040,7 @@
                 <a:ea typeface="Calibri" pitchFamily="34" charset="-122"/>
                 <a:cs typeface="Calibri" pitchFamily="34" charset="-120"/>
               </a:rPr>
-              <a:t>The company agreed to </a:t>
+              <a:t>Mum made a </a:t>
             </a:r>
             <a:pPr algn="l" indent="0" marL="0">
               <a:buNone/>
@@ -6057,7 +6057,7 @@
                 <a:ea typeface="Calibri" pitchFamily="34" charset="-122"/>
                 <a:cs typeface="Calibri" pitchFamily="34" charset="-120"/>
               </a:rPr>
-              <a:t>repay</a:t>
+              <a:t>payment</a:t>
             </a:r>
             <a:pPr algn="l" indent="0" marL="0">
               <a:buNone/>
@@ -6071,7 +6071,7 @@
                 <a:ea typeface="Calibri" pitchFamily="34" charset="-122"/>
                 <a:cs typeface="Calibri" pitchFamily="34" charset="-120"/>
               </a:rPr>
-              <a:t> the workers because it had decided to </a:t>
+              <a:t> at the shop, but she was worried she might </a:t>
             </a:r>
             <a:pPr algn="l" indent="0" marL="0">
               <a:buNone/>
@@ -6088,7 +6088,7 @@
                 <a:ea typeface="Calibri" pitchFamily="34" charset="-122"/>
                 <a:cs typeface="Calibri" pitchFamily="34" charset="-120"/>
               </a:rPr>
-              <a:t>underpay</a:t>
+              <a:t>overpay</a:t>
             </a:r>
             <a:pPr algn="l" indent="0" marL="0">
               <a:buNone/>
@@ -6102,7 +6102,7 @@
                 <a:ea typeface="Calibri" pitchFamily="34" charset="-122"/>
                 <a:cs typeface="Calibri" pitchFamily="34" charset="-120"/>
               </a:rPr>
-              <a:t> them.</a:t>
+              <a:t> for the jacket.</a:t>
             </a:r>
             <a:endParaRPr lang="en-US" sz="1800" dirty="0"/>
           </a:p>
@@ -6257,7 +6257,7 @@
                 <a:ea typeface="Trebuchet MS" pitchFamily="34" charset="-122"/>
                 <a:cs typeface="Trebuchet MS" pitchFamily="34" charset="-120"/>
               </a:rPr>
-              <a:t>repay</a:t>
+              <a:t>payment</a:t>
             </a:r>
             <a:endParaRPr lang="en-US" sz="1400" dirty="0"/>
           </a:p>
@@ -6385,7 +6385,7 @@
                 <a:ea typeface="Trebuchet MS" pitchFamily="34" charset="-122"/>
                 <a:cs typeface="Trebuchet MS" pitchFamily="34" charset="-120"/>
               </a:rPr>
-              <a:t>underpay</a:t>
+              <a:t>overpay</a:t>
             </a:r>
             <a:endParaRPr lang="en-US" sz="1400" dirty="0"/>
           </a:p>
@@ -6716,7 +6716,7 @@
                 <a:ea typeface="Calibri" pitchFamily="34" charset="-122"/>
                 <a:cs typeface="Calibri" pitchFamily="34" charset="-120"/>
               </a:rPr>
-              <a:t>Word Labs  •  wordlabs.app  •  Root: 'pay' = give money in exchange</a:t>
+              <a:t>Word Labs  •  wordlabs.app  •  Root: 'pay' = give money owed</a:t>
             </a:r>
             <a:endParaRPr lang="en-US" sz="800" dirty="0"/>
           </a:p>
@@ -6855,7 +6855,7 @@
                 <a:ea typeface="Trebuchet MS" pitchFamily="34" charset="-122"/>
                 <a:cs typeface="Trebuchet MS" pitchFamily="34" charset="-120"/>
               </a:rPr>
-              <a:t>repay</a:t>
+              <a:t>payment</a:t>
             </a:r>
             <a:endParaRPr lang="en-US" sz="2800" dirty="0"/>
           </a:p>
@@ -7543,7 +7543,7 @@
                 <a:ea typeface="Calibri" pitchFamily="34" charset="-122"/>
                 <a:cs typeface="Calibri" pitchFamily="34" charset="-120"/>
               </a:rPr>
-              <a:t>Word Labs  •  wordlabs.app  •  Root: 'pay' = give money in exchange</a:t>
+              <a:t>Word Labs  •  wordlabs.app  •  Root: 'pay' = give money owed</a:t>
             </a:r>
             <a:endParaRPr lang="en-US" sz="800" dirty="0"/>
           </a:p>
@@ -7682,7 +7682,7 @@
                 <a:ea typeface="Trebuchet MS" pitchFamily="34" charset="-122"/>
                 <a:cs typeface="Trebuchet MS" pitchFamily="34" charset="-120"/>
               </a:rPr>
-              <a:t>repay</a:t>
+              <a:t>payment</a:t>
             </a:r>
             <a:endParaRPr lang="en-US" sz="2800" dirty="0"/>
           </a:p>
@@ -7771,11 +7771,11 @@
             </a:avLst>
           </a:prstGeom>
           <a:solidFill>
-            <a:srgbClr val="DDD6FE"/>
+            <a:srgbClr val="CCFBF1"/>
           </a:solidFill>
           <a:ln w="19050">
             <a:solidFill>
-              <a:srgbClr val="7C3AED"/>
+              <a:srgbClr val="0D9488"/>
             </a:solidFill>
             <a:prstDash val="solid"/>
           </a:ln>
@@ -7815,13 +7815,13 @@
             <a:r>
               <a:rPr lang="en-US" sz="1300" b="1" dirty="0">
                 <a:solidFill>
-                  <a:srgbClr val="4C1D95"/>
+                  <a:srgbClr val="0F766E"/>
                 </a:solidFill>
                 <a:latin typeface="Trebuchet MS" pitchFamily="34" charset="0"/>
                 <a:ea typeface="Trebuchet MS" pitchFamily="34" charset="-122"/>
                 <a:cs typeface="Trebuchet MS" pitchFamily="34" charset="-120"/>
               </a:rPr>
-              <a:t>re</a:t>
+              <a:t>pay</a:t>
             </a:r>
             <a:endParaRPr lang="en-US" sz="1300" dirty="0"/>
           </a:p>
@@ -7860,7 +7860,7 @@
                 <a:ea typeface="Calibri" pitchFamily="34" charset="-122"/>
                 <a:cs typeface="Calibri" pitchFamily="34" charset="-120"/>
               </a:rPr>
-              <a:t>again, back</a:t>
+              <a:t>give money owed</a:t>
             </a:r>
             <a:endParaRPr lang="en-US" sz="850" dirty="0"/>
           </a:p>
@@ -7883,11 +7883,11 @@
             </a:avLst>
           </a:prstGeom>
           <a:solidFill>
-            <a:srgbClr val="CCFBF1"/>
+            <a:srgbClr val="FCE7F3"/>
           </a:solidFill>
           <a:ln w="19050">
             <a:solidFill>
-              <a:srgbClr val="0D9488"/>
+              <a:srgbClr val="DB2777"/>
             </a:solidFill>
             <a:prstDash val="solid"/>
           </a:ln>
@@ -7927,13 +7927,13 @@
             <a:r>
               <a:rPr lang="en-US" sz="1300" b="1" dirty="0">
                 <a:solidFill>
-                  <a:srgbClr val="0F766E"/>
+                  <a:srgbClr val="9D174D"/>
                 </a:solidFill>
                 <a:latin typeface="Trebuchet MS" pitchFamily="34" charset="0"/>
                 <a:ea typeface="Trebuchet MS" pitchFamily="34" charset="-122"/>
                 <a:cs typeface="Trebuchet MS" pitchFamily="34" charset="-120"/>
               </a:rPr>
-              <a:t>pay</a:t>
+              <a:t>ment</a:t>
             </a:r>
             <a:endParaRPr lang="en-US" sz="1300" dirty="0"/>
           </a:p>
@@ -7972,7 +7972,7 @@
                 <a:ea typeface="Calibri" pitchFamily="34" charset="-122"/>
                 <a:cs typeface="Calibri" pitchFamily="34" charset="-120"/>
               </a:rPr>
-              <a:t>give money</a:t>
+              <a:t>action or result</a:t>
             </a:r>
             <a:endParaRPr lang="en-US" sz="850" dirty="0"/>
           </a:p>
@@ -8528,7 +8528,7 @@
                 <a:ea typeface="Calibri" pitchFamily="34" charset="-122"/>
                 <a:cs typeface="Calibri" pitchFamily="34" charset="-120"/>
               </a:rPr>
-              <a:t>Word Labs  •  wordlabs.app  •  Root: 'pay' = give money in exchange</a:t>
+              <a:t>Word Labs  •  wordlabs.app  •  Root: 'pay' = give money owed</a:t>
             </a:r>
             <a:endParaRPr lang="en-US" sz="800" dirty="0"/>
           </a:p>
@@ -8667,7 +8667,7 @@
                 <a:ea typeface="Trebuchet MS" pitchFamily="34" charset="-122"/>
                 <a:cs typeface="Trebuchet MS" pitchFamily="34" charset="-120"/>
               </a:rPr>
-              <a:t>repay</a:t>
+              <a:t>payment</a:t>
             </a:r>
             <a:endParaRPr lang="en-US" sz="2800" dirty="0"/>
           </a:p>
@@ -8756,11 +8756,11 @@
             </a:avLst>
           </a:prstGeom>
           <a:solidFill>
-            <a:srgbClr val="DDD6FE"/>
+            <a:srgbClr val="CCFBF1"/>
           </a:solidFill>
           <a:ln w="19050">
             <a:solidFill>
-              <a:srgbClr val="7C3AED"/>
+              <a:srgbClr val="0D9488"/>
             </a:solidFill>
             <a:prstDash val="solid"/>
           </a:ln>
@@ -8800,13 +8800,13 @@
             <a:r>
               <a:rPr lang="en-US" sz="1300" b="1" dirty="0">
                 <a:solidFill>
-                  <a:srgbClr val="4C1D95"/>
+                  <a:srgbClr val="0F766E"/>
                 </a:solidFill>
                 <a:latin typeface="Trebuchet MS" pitchFamily="34" charset="0"/>
                 <a:ea typeface="Trebuchet MS" pitchFamily="34" charset="-122"/>
                 <a:cs typeface="Trebuchet MS" pitchFamily="34" charset="-120"/>
               </a:rPr>
-              <a:t>re</a:t>
+              <a:t>pay</a:t>
             </a:r>
             <a:endParaRPr lang="en-US" sz="1300" dirty="0"/>
           </a:p>
@@ -8845,7 +8845,7 @@
                 <a:ea typeface="Calibri" pitchFamily="34" charset="-122"/>
                 <a:cs typeface="Calibri" pitchFamily="34" charset="-120"/>
               </a:rPr>
-              <a:t>again, back</a:t>
+              <a:t>give money owed</a:t>
             </a:r>
             <a:endParaRPr lang="en-US" sz="850" dirty="0"/>
           </a:p>
@@ -8868,11 +8868,11 @@
             </a:avLst>
           </a:prstGeom>
           <a:solidFill>
-            <a:srgbClr val="CCFBF1"/>
+            <a:srgbClr val="FCE7F3"/>
           </a:solidFill>
           <a:ln w="19050">
             <a:solidFill>
-              <a:srgbClr val="0D9488"/>
+              <a:srgbClr val="DB2777"/>
             </a:solidFill>
             <a:prstDash val="solid"/>
           </a:ln>
@@ -8912,13 +8912,13 @@
             <a:r>
               <a:rPr lang="en-US" sz="1300" b="1" dirty="0">
                 <a:solidFill>
-                  <a:srgbClr val="0F766E"/>
+                  <a:srgbClr val="9D174D"/>
                 </a:solidFill>
                 <a:latin typeface="Trebuchet MS" pitchFamily="34" charset="0"/>
                 <a:ea typeface="Trebuchet MS" pitchFamily="34" charset="-122"/>
                 <a:cs typeface="Trebuchet MS" pitchFamily="34" charset="-120"/>
               </a:rPr>
-              <a:t>pay</a:t>
+              <a:t>ment</a:t>
             </a:r>
             <a:endParaRPr lang="en-US" sz="1300" dirty="0"/>
           </a:p>
@@ -8957,7 +8957,7 @@
                 <a:ea typeface="Calibri" pitchFamily="34" charset="-122"/>
                 <a:cs typeface="Calibri" pitchFamily="34" charset="-120"/>
               </a:rPr>
-              <a:t>give money</a:t>
+              <a:t>action or result</a:t>
             </a:r>
             <a:endParaRPr lang="en-US" sz="850" dirty="0"/>
           </a:p>
@@ -9116,7 +9116,7 @@
                 <a:ea typeface="Trebuchet MS" pitchFamily="34" charset="-122"/>
                 <a:cs typeface="Trebuchet MS" pitchFamily="34" charset="-120"/>
               </a:rPr>
-              <a:t>re</a:t>
+              <a:t>pay</a:t>
             </a:r>
             <a:endParaRPr lang="en-US" sz="1400" dirty="0"/>
           </a:p>
@@ -9221,7 +9221,7 @@
                 <a:ea typeface="Trebuchet MS" pitchFamily="34" charset="-122"/>
                 <a:cs typeface="Trebuchet MS" pitchFamily="34" charset="-120"/>
               </a:rPr>
-              <a:t>pay</a:t>
+              <a:t>ment</a:t>
             </a:r>
             <a:endParaRPr lang="en-US" sz="1400" dirty="0"/>
           </a:p>
@@ -9645,7 +9645,7 @@
                 <a:ea typeface="Calibri" pitchFamily="34" charset="-122"/>
                 <a:cs typeface="Calibri" pitchFamily="34" charset="-120"/>
               </a:rPr>
-              <a:t>Word Labs  •  wordlabs.app  •  Root: 'pay' = give money in exchange</a:t>
+              <a:t>Word Labs  •  wordlabs.app  •  Root: 'pay' = give money owed</a:t>
             </a:r>
             <a:endParaRPr lang="en-US" sz="800" dirty="0"/>
           </a:p>
@@ -9784,7 +9784,7 @@
                 <a:ea typeface="Trebuchet MS" pitchFamily="34" charset="-122"/>
                 <a:cs typeface="Trebuchet MS" pitchFamily="34" charset="-120"/>
               </a:rPr>
-              <a:t>repay</a:t>
+              <a:t>payment</a:t>
             </a:r>
             <a:endParaRPr lang="en-US" sz="2800" dirty="0"/>
           </a:p>
@@ -9873,11 +9873,11 @@
             </a:avLst>
           </a:prstGeom>
           <a:solidFill>
-            <a:srgbClr val="DDD6FE"/>
+            <a:srgbClr val="CCFBF1"/>
           </a:solidFill>
           <a:ln w="19050">
             <a:solidFill>
-              <a:srgbClr val="7C3AED"/>
+              <a:srgbClr val="0D9488"/>
             </a:solidFill>
             <a:prstDash val="solid"/>
           </a:ln>
@@ -9917,13 +9917,13 @@
             <a:r>
               <a:rPr lang="en-US" sz="1300" b="1" dirty="0">
                 <a:solidFill>
-                  <a:srgbClr val="4C1D95"/>
+                  <a:srgbClr val="0F766E"/>
                 </a:solidFill>
                 <a:latin typeface="Trebuchet MS" pitchFamily="34" charset="0"/>
                 <a:ea typeface="Trebuchet MS" pitchFamily="34" charset="-122"/>
                 <a:cs typeface="Trebuchet MS" pitchFamily="34" charset="-120"/>
               </a:rPr>
-              <a:t>re</a:t>
+              <a:t>pay</a:t>
             </a:r>
             <a:endParaRPr lang="en-US" sz="1300" dirty="0"/>
           </a:p>
@@ -9962,7 +9962,7 @@
                 <a:ea typeface="Calibri" pitchFamily="34" charset="-122"/>
                 <a:cs typeface="Calibri" pitchFamily="34" charset="-120"/>
               </a:rPr>
-              <a:t>again, back</a:t>
+              <a:t>give money owed</a:t>
             </a:r>
             <a:endParaRPr lang="en-US" sz="850" dirty="0"/>
           </a:p>
@@ -9985,11 +9985,11 @@
             </a:avLst>
           </a:prstGeom>
           <a:solidFill>
-            <a:srgbClr val="CCFBF1"/>
+            <a:srgbClr val="FCE7F3"/>
           </a:solidFill>
           <a:ln w="19050">
             <a:solidFill>
-              <a:srgbClr val="0D9488"/>
+              <a:srgbClr val="DB2777"/>
             </a:solidFill>
             <a:prstDash val="solid"/>
           </a:ln>
@@ -10029,13 +10029,13 @@
             <a:r>
               <a:rPr lang="en-US" sz="1300" b="1" dirty="0">
                 <a:solidFill>
-                  <a:srgbClr val="0F766E"/>
+                  <a:srgbClr val="9D174D"/>
                 </a:solidFill>
                 <a:latin typeface="Trebuchet MS" pitchFamily="34" charset="0"/>
                 <a:ea typeface="Trebuchet MS" pitchFamily="34" charset="-122"/>
                 <a:cs typeface="Trebuchet MS" pitchFamily="34" charset="-120"/>
               </a:rPr>
-              <a:t>pay</a:t>
+              <a:t>ment</a:t>
             </a:r>
             <a:endParaRPr lang="en-US" sz="1300" dirty="0"/>
           </a:p>
@@ -10074,7 +10074,7 @@
                 <a:ea typeface="Calibri" pitchFamily="34" charset="-122"/>
                 <a:cs typeface="Calibri" pitchFamily="34" charset="-120"/>
               </a:rPr>
-              <a:t>give money</a:t>
+              <a:t>action or result</a:t>
             </a:r>
             <a:endParaRPr lang="en-US" sz="850" dirty="0"/>
           </a:p>
@@ -10233,7 +10233,7 @@
                 <a:ea typeface="Trebuchet MS" pitchFamily="34" charset="-122"/>
                 <a:cs typeface="Trebuchet MS" pitchFamily="34" charset="-120"/>
               </a:rPr>
-              <a:t>re</a:t>
+              <a:t>pay</a:t>
             </a:r>
             <a:endParaRPr lang="en-US" sz="1400" dirty="0"/>
           </a:p>
@@ -10338,7 +10338,7 @@
                 <a:ea typeface="Trebuchet MS" pitchFamily="34" charset="-122"/>
                 <a:cs typeface="Trebuchet MS" pitchFamily="34" charset="-120"/>
               </a:rPr>
-              <a:t>pay</a:t>
+              <a:t>ment</a:t>
             </a:r>
             <a:endParaRPr lang="en-US" sz="1400" dirty="0"/>
           </a:p>
@@ -10445,7 +10445,7 @@
         </p:nvSpPr>
         <p:spPr>
           <a:xfrm>
-            <a:off x="2670048" y="4169664"/>
+            <a:off x="2254649" y="4169664"/>
             <a:ext cx="685800" cy="475488"/>
           </a:xfrm>
           <a:prstGeom prst="rect">
@@ -10472,7 +10472,7 @@
         </p:nvSpPr>
         <p:spPr>
           <a:xfrm>
-            <a:off x="2670048" y="4169664"/>
+            <a:off x="2254649" y="4169664"/>
             <a:ext cx="685800" cy="475488"/>
           </a:xfrm>
           <a:prstGeom prst="rect">
@@ -10497,7 +10497,7 @@
                 <a:ea typeface="Trebuchet MS" pitchFamily="34" charset="-122"/>
                 <a:cs typeface="Trebuchet MS" pitchFamily="34" charset="-120"/>
               </a:rPr>
-              <a:t>r</a:t>
+              <a:t>p</a:t>
             </a:r>
             <a:endParaRPr lang="en-US" sz="900" dirty="0"/>
           </a:p>
@@ -10511,7 +10511,7 @@
         </p:nvSpPr>
         <p:spPr>
           <a:xfrm>
-            <a:off x="4123944" y="4169664"/>
+            <a:off x="3293146" y="4169664"/>
             <a:ext cx="685800" cy="475488"/>
           </a:xfrm>
           <a:prstGeom prst="rect">
@@ -10538,7 +10538,7 @@
         </p:nvSpPr>
         <p:spPr>
           <a:xfrm>
-            <a:off x="4123944" y="4169664"/>
+            <a:off x="3293146" y="4169664"/>
             <a:ext cx="685800" cy="475488"/>
           </a:xfrm>
           <a:prstGeom prst="rect">
@@ -10563,7 +10563,7 @@
                 <a:ea typeface="Trebuchet MS" pitchFamily="34" charset="-122"/>
                 <a:cs typeface="Trebuchet MS" pitchFamily="34" charset="-120"/>
               </a:rPr>
-              <a:t>e</a:t>
+              <a:t>ay</a:t>
             </a:r>
             <a:endParaRPr lang="en-US" sz="900" dirty="0"/>
           </a:p>
@@ -10577,7 +10577,7 @@
         </p:nvSpPr>
         <p:spPr>
           <a:xfrm>
-            <a:off x="5577840" y="4169664"/>
+            <a:off x="4331643" y="4169664"/>
             <a:ext cx="685800" cy="475488"/>
           </a:xfrm>
           <a:prstGeom prst="rect">
@@ -10604,7 +10604,7 @@
         </p:nvSpPr>
         <p:spPr>
           <a:xfrm>
-            <a:off x="5577840" y="4169664"/>
+            <a:off x="4331643" y="4169664"/>
             <a:ext cx="685800" cy="475488"/>
           </a:xfrm>
           <a:prstGeom prst="rect">
@@ -10629,7 +10629,7 @@
                 <a:ea typeface="Trebuchet MS" pitchFamily="34" charset="-122"/>
                 <a:cs typeface="Trebuchet MS" pitchFamily="34" charset="-120"/>
               </a:rPr>
-              <a:t>p</a:t>
+              <a:t>m</a:t>
             </a:r>
             <a:endParaRPr lang="en-US" sz="900" dirty="0"/>
           </a:p>
@@ -10643,7 +10643,7 @@
         </p:nvSpPr>
         <p:spPr>
           <a:xfrm>
-            <a:off x="7031736" y="4169664"/>
+            <a:off x="5370141" y="4169664"/>
             <a:ext cx="685800" cy="475488"/>
           </a:xfrm>
           <a:prstGeom prst="rect">
@@ -10670,7 +10670,7 @@
         </p:nvSpPr>
         <p:spPr>
           <a:xfrm>
-            <a:off x="7031736" y="4169664"/>
+            <a:off x="5370141" y="4169664"/>
             <a:ext cx="685800" cy="475488"/>
           </a:xfrm>
           <a:prstGeom prst="rect">
@@ -10695,7 +10695,139 @@
                 <a:ea typeface="Trebuchet MS" pitchFamily="34" charset="-122"/>
                 <a:cs typeface="Trebuchet MS" pitchFamily="34" charset="-120"/>
               </a:rPr>
-              <a:t>ay</a:t>
+              <a:t>e</a:t>
+            </a:r>
+            <a:endParaRPr lang="en-US" sz="900" dirty="0"/>
+          </a:p>
+        </p:txBody>
+      </p:sp>
+      <p:sp>
+        <p:nvSpPr>
+          <p:cNvPr id="41" name="Shape 39"/>
+          <p:cNvSpPr/>
+          <p:nvPr/>
+        </p:nvSpPr>
+        <p:spPr>
+          <a:xfrm>
+            <a:off x="6408638" y="4169664"/>
+            <a:ext cx="685800" cy="475488"/>
+          </a:xfrm>
+          <a:prstGeom prst="rect">
+            <a:avLst>
+              <a:gd name="adj" fmla="val 7692"/>
+            </a:avLst>
+          </a:prstGeom>
+          <a:solidFill>
+            <a:srgbClr val="FFFFFF"/>
+          </a:solidFill>
+          <a:ln w="12700">
+            <a:solidFill>
+              <a:srgbClr val="DB2777"/>
+            </a:solidFill>
+            <a:prstDash val="solid"/>
+          </a:ln>
+        </p:spPr>
+      </p:sp>
+      <p:sp>
+        <p:nvSpPr>
+          <p:cNvPr id="42" name="Text 40"/>
+          <p:cNvSpPr/>
+          <p:nvPr/>
+        </p:nvSpPr>
+        <p:spPr>
+          <a:xfrm>
+            <a:off x="6408638" y="4169664"/>
+            <a:ext cx="685800" cy="475488"/>
+          </a:xfrm>
+          <a:prstGeom prst="rect">
+            <a:avLst/>
+          </a:prstGeom>
+          <a:noFill/>
+          <a:ln/>
+        </p:spPr>
+        <p:txBody>
+          <a:bodyPr wrap="square" lIns="0" tIns="0" rIns="0" bIns="0" rtlCol="0" anchor="ctr"/>
+          <a:lstStyle/>
+          <a:p>
+            <a:pPr algn="ctr" indent="0" marL="0">
+              <a:buNone/>
+            </a:pPr>
+            <a:r>
+              <a:rPr lang="en-US" sz="900" b="1" dirty="0">
+                <a:solidFill>
+                  <a:srgbClr val="9D174D"/>
+                </a:solidFill>
+                <a:latin typeface="Trebuchet MS" pitchFamily="34" charset="0"/>
+                <a:ea typeface="Trebuchet MS" pitchFamily="34" charset="-122"/>
+                <a:cs typeface="Trebuchet MS" pitchFamily="34" charset="-120"/>
+              </a:rPr>
+              <a:t>n</a:t>
+            </a:r>
+            <a:endParaRPr lang="en-US" sz="900" dirty="0"/>
+          </a:p>
+        </p:txBody>
+      </p:sp>
+      <p:sp>
+        <p:nvSpPr>
+          <p:cNvPr id="43" name="Shape 41"/>
+          <p:cNvSpPr/>
+          <p:nvPr/>
+        </p:nvSpPr>
+        <p:spPr>
+          <a:xfrm>
+            <a:off x="7447135" y="4169664"/>
+            <a:ext cx="685800" cy="475488"/>
+          </a:xfrm>
+          <a:prstGeom prst="rect">
+            <a:avLst>
+              <a:gd name="adj" fmla="val 7692"/>
+            </a:avLst>
+          </a:prstGeom>
+          <a:solidFill>
+            <a:srgbClr val="FFFFFF"/>
+          </a:solidFill>
+          <a:ln w="12700">
+            <a:solidFill>
+              <a:srgbClr val="DB2777"/>
+            </a:solidFill>
+            <a:prstDash val="solid"/>
+          </a:ln>
+        </p:spPr>
+      </p:sp>
+      <p:sp>
+        <p:nvSpPr>
+          <p:cNvPr id="44" name="Text 42"/>
+          <p:cNvSpPr/>
+          <p:nvPr/>
+        </p:nvSpPr>
+        <p:spPr>
+          <a:xfrm>
+            <a:off x="7447135" y="4169664"/>
+            <a:ext cx="685800" cy="475488"/>
+          </a:xfrm>
+          <a:prstGeom prst="rect">
+            <a:avLst/>
+          </a:prstGeom>
+          <a:noFill/>
+          <a:ln/>
+        </p:spPr>
+        <p:txBody>
+          <a:bodyPr wrap="square" lIns="0" tIns="0" rIns="0" bIns="0" rtlCol="0" anchor="ctr"/>
+          <a:lstStyle/>
+          <a:p>
+            <a:pPr algn="ctr" indent="0" marL="0">
+              <a:buNone/>
+            </a:pPr>
+            <a:r>
+              <a:rPr lang="en-US" sz="900" b="1" dirty="0">
+                <a:solidFill>
+                  <a:srgbClr val="9D174D"/>
+                </a:solidFill>
+                <a:latin typeface="Trebuchet MS" pitchFamily="34" charset="0"/>
+                <a:ea typeface="Trebuchet MS" pitchFamily="34" charset="-122"/>
+                <a:cs typeface="Trebuchet MS" pitchFamily="34" charset="-120"/>
+              </a:rPr>
+              <a:t>t</a:t>
             </a:r>
             <a:endParaRPr lang="en-US" sz="900" dirty="0"/>
           </a:p>
@@ -10987,7 +11119,7 @@
                 <a:ea typeface="Calibri" pitchFamily="34" charset="-122"/>
                 <a:cs typeface="Calibri" pitchFamily="34" charset="-120"/>
               </a:rPr>
-              <a:t>Word Labs  •  wordlabs.app  •  Root: 'pay' = give money in exchange</a:t>
+              <a:t>Word Labs  •  wordlabs.app  •  Root: 'pay' = give money owed</a:t>
             </a:r>
             <a:endParaRPr lang="en-US" sz="800" dirty="0"/>
           </a:p>
@@ -11126,7 +11258,7 @@
                 <a:ea typeface="Trebuchet MS" pitchFamily="34" charset="-122"/>
                 <a:cs typeface="Trebuchet MS" pitchFamily="34" charset="-120"/>
               </a:rPr>
-              <a:t>underpay</a:t>
+              <a:t>overpay</a:t>
             </a:r>
             <a:endParaRPr lang="en-US" sz="2800" dirty="0"/>
           </a:p>
@@ -11814,7 +11946,7 @@
                 <a:ea typeface="Calibri" pitchFamily="34" charset="-122"/>
                 <a:cs typeface="Calibri" pitchFamily="34" charset="-120"/>
               </a:rPr>
-              <a:t>Word Labs  •  wordlabs.app  •  Root: 'pay' = give money in exchange</a:t>
+              <a:t>Word Labs  •  wordlabs.app  •  Root: 'pay' = give money owed</a:t>
             </a:r>
             <a:endParaRPr lang="en-US" sz="800" dirty="0"/>
           </a:p>
@@ -11953,7 +12085,7 @@
                 <a:ea typeface="Trebuchet MS" pitchFamily="34" charset="-122"/>
                 <a:cs typeface="Trebuchet MS" pitchFamily="34" charset="-120"/>
               </a:rPr>
-              <a:t>underpay</a:t>
+              <a:t>overpay</a:t>
             </a:r>
             <a:endParaRPr lang="en-US" sz="2800" dirty="0"/>
           </a:p>
@@ -12092,7 +12224,7 @@
                 <a:ea typeface="Trebuchet MS" pitchFamily="34" charset="-122"/>
                 <a:cs typeface="Trebuchet MS" pitchFamily="34" charset="-120"/>
               </a:rPr>
-              <a:t>under</a:t>
+              <a:t>over</a:t>
             </a:r>
             <a:endParaRPr lang="en-US" sz="1300" dirty="0"/>
           </a:p>
@@ -12131,7 +12263,7 @@
                 <a:ea typeface="Calibri" pitchFamily="34" charset="-122"/>
                 <a:cs typeface="Calibri" pitchFamily="34" charset="-120"/>
               </a:rPr>
-              <a:t>below, less than</a:t>
+              <a:t>too much</a:t>
             </a:r>
             <a:endParaRPr lang="en-US" sz="850" dirty="0"/>
           </a:p>
@@ -12243,7 +12375,7 @@
                 <a:ea typeface="Calibri" pitchFamily="34" charset="-122"/>
                 <a:cs typeface="Calibri" pitchFamily="34" charset="-120"/>
               </a:rPr>
-              <a:t>give money</a:t>
+              <a:t>give money owed</a:t>
             </a:r>
             <a:endParaRPr lang="en-US" sz="850" dirty="0"/>
           </a:p>
@@ -12799,7 +12931,7 @@
                 <a:ea typeface="Calibri" pitchFamily="34" charset="-122"/>
                 <a:cs typeface="Calibri" pitchFamily="34" charset="-120"/>
               </a:rPr>
-              <a:t>Word Labs  •  wordlabs.app  •  Root: 'pay' = give money in exchange</a:t>
+              <a:t>Word Labs  •  wordlabs.app  •  Root: 'pay' = give money owed</a:t>
             </a:r>
             <a:endParaRPr lang="en-US" sz="800" dirty="0"/>
           </a:p>
@@ -12938,7 +13070,7 @@
                 <a:ea typeface="Trebuchet MS" pitchFamily="34" charset="-122"/>
                 <a:cs typeface="Trebuchet MS" pitchFamily="34" charset="-120"/>
               </a:rPr>
-              <a:t>underpay</a:t>
+              <a:t>overpay</a:t>
             </a:r>
             <a:endParaRPr lang="en-US" sz="2800" dirty="0"/>
           </a:p>
@@ -13077,7 +13209,7 @@
                 <a:ea typeface="Trebuchet MS" pitchFamily="34" charset="-122"/>
                 <a:cs typeface="Trebuchet MS" pitchFamily="34" charset="-120"/>
               </a:rPr>
-              <a:t>under</a:t>
+              <a:t>over</a:t>
             </a:r>
             <a:endParaRPr lang="en-US" sz="1300" dirty="0"/>
           </a:p>
@@ -13116,7 +13248,7 @@
                 <a:ea typeface="Calibri" pitchFamily="34" charset="-122"/>
                 <a:cs typeface="Calibri" pitchFamily="34" charset="-120"/>
               </a:rPr>
-              <a:t>below, less than</a:t>
+              <a:t>too much</a:t>
             </a:r>
             <a:endParaRPr lang="en-US" sz="850" dirty="0"/>
           </a:p>
@@ -13228,7 +13360,7 @@
                 <a:ea typeface="Calibri" pitchFamily="34" charset="-122"/>
                 <a:cs typeface="Calibri" pitchFamily="34" charset="-120"/>
               </a:rPr>
-              <a:t>give money</a:t>
+              <a:t>give money owed</a:t>
             </a:r>
             <a:endParaRPr lang="en-US" sz="850" dirty="0"/>
           </a:p>
@@ -13387,7 +13519,7 @@
                 <a:ea typeface="Trebuchet MS" pitchFamily="34" charset="-122"/>
                 <a:cs typeface="Trebuchet MS" pitchFamily="34" charset="-120"/>
               </a:rPr>
-              <a:t>un</a:t>
+              <a:t>o</a:t>
             </a:r>
             <a:endParaRPr lang="en-US" sz="1400" dirty="0"/>
           </a:p>
@@ -13492,7 +13624,7 @@
                 <a:ea typeface="Trebuchet MS" pitchFamily="34" charset="-122"/>
                 <a:cs typeface="Trebuchet MS" pitchFamily="34" charset="-120"/>
               </a:rPr>
-              <a:t>der</a:t>
+              <a:t>ver</a:t>
             </a:r>
             <a:endParaRPr lang="en-US" sz="1400" dirty="0"/>
           </a:p>
@@ -13930,7 +14062,7 @@
                 <a:ea typeface="Calibri" pitchFamily="34" charset="-122"/>
                 <a:cs typeface="Calibri" pitchFamily="34" charset="-120"/>
               </a:rPr>
-              <a:t>Root 'pay' — give money in exchange</a:t>
+              <a:t>Root 'pay' — give money owed</a:t>
             </a:r>
             <a:endParaRPr lang="en-US" sz="1600" dirty="0"/>
           </a:p>
@@ -14286,7 +14418,7 @@
                 <a:ea typeface="Calibri" pitchFamily="34" charset="-122"/>
                 <a:cs typeface="Calibri" pitchFamily="34" charset="-120"/>
               </a:rPr>
-              <a:t>Word Labs  •  wordlabs.app  •  Root: 'pay' = give money in exchange</a:t>
+              <a:t>Word Labs  •  wordlabs.app  •  Root: 'pay' = give money owed</a:t>
             </a:r>
             <a:endParaRPr lang="en-US" sz="800" dirty="0"/>
           </a:p>
@@ -14425,7 +14557,7 @@
                 <a:ea typeface="Trebuchet MS" pitchFamily="34" charset="-122"/>
                 <a:cs typeface="Trebuchet MS" pitchFamily="34" charset="-120"/>
               </a:rPr>
-              <a:t>underpay</a:t>
+              <a:t>overpay</a:t>
             </a:r>
             <a:endParaRPr lang="en-US" sz="2800" dirty="0"/>
           </a:p>
@@ -14564,7 +14696,7 @@
                 <a:ea typeface="Trebuchet MS" pitchFamily="34" charset="-122"/>
                 <a:cs typeface="Trebuchet MS" pitchFamily="34" charset="-120"/>
               </a:rPr>
-              <a:t>under</a:t>
+              <a:t>over</a:t>
             </a:r>
             <a:endParaRPr lang="en-US" sz="1300" dirty="0"/>
           </a:p>
@@ -14603,7 +14735,7 @@
                 <a:ea typeface="Calibri" pitchFamily="34" charset="-122"/>
                 <a:cs typeface="Calibri" pitchFamily="34" charset="-120"/>
               </a:rPr>
-              <a:t>below, less than</a:t>
+              <a:t>too much</a:t>
             </a:r>
             <a:endParaRPr lang="en-US" sz="850" dirty="0"/>
           </a:p>
@@ -14715,7 +14847,7 @@
                 <a:ea typeface="Calibri" pitchFamily="34" charset="-122"/>
                 <a:cs typeface="Calibri" pitchFamily="34" charset="-120"/>
               </a:rPr>
-              <a:t>give money</a:t>
+              <a:t>give money owed</a:t>
             </a:r>
             <a:endParaRPr lang="en-US" sz="850" dirty="0"/>
           </a:p>
@@ -14874,7 +15006,7 @@
                 <a:ea typeface="Trebuchet MS" pitchFamily="34" charset="-122"/>
                 <a:cs typeface="Trebuchet MS" pitchFamily="34" charset="-120"/>
               </a:rPr>
-              <a:t>un</a:t>
+              <a:t>o</a:t>
             </a:r>
             <a:endParaRPr lang="en-US" sz="1400" dirty="0"/>
           </a:p>
@@ -14979,7 +15111,7 @@
                 <a:ea typeface="Trebuchet MS" pitchFamily="34" charset="-122"/>
                 <a:cs typeface="Trebuchet MS" pitchFamily="34" charset="-120"/>
               </a:rPr>
-              <a:t>der</a:t>
+              <a:t>ver</a:t>
             </a:r>
             <a:endParaRPr lang="en-US" sz="1400" dirty="0"/>
           </a:p>
@@ -15191,7 +15323,7 @@
         </p:nvSpPr>
         <p:spPr>
           <a:xfrm>
-            <a:off x="2254649" y="4169664"/>
+            <a:off x="2427732" y="4169664"/>
             <a:ext cx="685800" cy="475488"/>
           </a:xfrm>
           <a:prstGeom prst="rect">
@@ -15218,7 +15350,7 @@
         </p:nvSpPr>
         <p:spPr>
           <a:xfrm>
-            <a:off x="2254649" y="4169664"/>
+            <a:off x="2427732" y="4169664"/>
             <a:ext cx="685800" cy="475488"/>
           </a:xfrm>
           <a:prstGeom prst="rect">
@@ -15243,7 +15375,7 @@
                 <a:ea typeface="Trebuchet MS" pitchFamily="34" charset="-122"/>
                 <a:cs typeface="Trebuchet MS" pitchFamily="34" charset="-120"/>
               </a:rPr>
-              <a:t>u</a:t>
+              <a:t>o</a:t>
             </a:r>
             <a:endParaRPr lang="en-US" sz="900" dirty="0"/>
           </a:p>
@@ -15257,7 +15389,7 @@
         </p:nvSpPr>
         <p:spPr>
           <a:xfrm>
-            <a:off x="3293146" y="4169664"/>
+            <a:off x="3639312" y="4169664"/>
             <a:ext cx="685800" cy="475488"/>
           </a:xfrm>
           <a:prstGeom prst="rect">
@@ -15284,7 +15416,7 @@
         </p:nvSpPr>
         <p:spPr>
           <a:xfrm>
-            <a:off x="3293146" y="4169664"/>
+            <a:off x="3639312" y="4169664"/>
             <a:ext cx="685800" cy="475488"/>
           </a:xfrm>
           <a:prstGeom prst="rect">
@@ -15309,7 +15441,7 @@
                 <a:ea typeface="Trebuchet MS" pitchFamily="34" charset="-122"/>
                 <a:cs typeface="Trebuchet MS" pitchFamily="34" charset="-120"/>
               </a:rPr>
-              <a:t>n</a:t>
+              <a:t>v</a:t>
             </a:r>
             <a:endParaRPr lang="en-US" sz="900" dirty="0"/>
           </a:p>
@@ -15323,7 +15455,7 @@
         </p:nvSpPr>
         <p:spPr>
           <a:xfrm>
-            <a:off x="4331643" y="4169664"/>
+            <a:off x="4850892" y="4169664"/>
             <a:ext cx="685800" cy="475488"/>
           </a:xfrm>
           <a:prstGeom prst="rect">
@@ -15350,7 +15482,7 @@
         </p:nvSpPr>
         <p:spPr>
           <a:xfrm>
-            <a:off x="4331643" y="4169664"/>
+            <a:off x="4850892" y="4169664"/>
             <a:ext cx="685800" cy="475488"/>
           </a:xfrm>
           <a:prstGeom prst="rect">
@@ -15375,7 +15507,7 @@
                 <a:ea typeface="Trebuchet MS" pitchFamily="34" charset="-122"/>
                 <a:cs typeface="Trebuchet MS" pitchFamily="34" charset="-120"/>
               </a:rPr>
-              <a:t>d</a:t>
+              <a:t>er</a:t>
             </a:r>
             <a:endParaRPr lang="en-US" sz="900" dirty="0"/>
           </a:p>
@@ -15389,7 +15521,7 @@
         </p:nvSpPr>
         <p:spPr>
           <a:xfrm>
-            <a:off x="5370141" y="4169664"/>
+            <a:off x="6062472" y="4169664"/>
             <a:ext cx="685800" cy="475488"/>
           </a:xfrm>
           <a:prstGeom prst="rect">
@@ -15416,7 +15548,7 @@
         </p:nvSpPr>
         <p:spPr>
           <a:xfrm>
-            <a:off x="5370141" y="4169664"/>
+            <a:off x="6062472" y="4169664"/>
             <a:ext cx="685800" cy="475488"/>
           </a:xfrm>
           <a:prstGeom prst="rect">
@@ -15441,7 +15573,7 @@
                 <a:ea typeface="Trebuchet MS" pitchFamily="34" charset="-122"/>
                 <a:cs typeface="Trebuchet MS" pitchFamily="34" charset="-120"/>
               </a:rPr>
-              <a:t>er</a:t>
+              <a:t>p</a:t>
             </a:r>
             <a:endParaRPr lang="en-US" sz="900" dirty="0"/>
           </a:p>
@@ -15455,7 +15587,7 @@
         </p:nvSpPr>
         <p:spPr>
           <a:xfrm>
-            <a:off x="6408638" y="4169664"/>
+            <a:off x="7274052" y="4169664"/>
             <a:ext cx="685800" cy="475488"/>
           </a:xfrm>
           <a:prstGeom prst="rect">
@@ -15482,73 +15614,7 @@
         </p:nvSpPr>
         <p:spPr>
           <a:xfrm>
-            <a:off x="6408638" y="4169664"/>
-            <a:ext cx="685800" cy="475488"/>
-          </a:xfrm>
-          <a:prstGeom prst="rect">
-            <a:avLst/>
-          </a:prstGeom>
-          <a:noFill/>
-          <a:ln/>
-        </p:spPr>
-        <p:txBody>
-          <a:bodyPr wrap="square" lIns="0" tIns="0" rIns="0" bIns="0" rtlCol="0" anchor="ctr"/>
-          <a:lstStyle/>
-          <a:p>
-            <a:pPr algn="ctr" indent="0" marL="0">
-              <a:buNone/>
-            </a:pPr>
-            <a:r>
-              <a:rPr lang="en-US" sz="900" b="1" dirty="0">
-                <a:solidFill>
-                  <a:srgbClr val="9D174D"/>
-                </a:solidFill>
-                <a:latin typeface="Trebuchet MS" pitchFamily="34" charset="0"/>
-                <a:ea typeface="Trebuchet MS" pitchFamily="34" charset="-122"/>
-                <a:cs typeface="Trebuchet MS" pitchFamily="34" charset="-120"/>
-              </a:rPr>
-              <a:t>p</a:t>
-            </a:r>
-            <a:endParaRPr lang="en-US" sz="900" dirty="0"/>
-          </a:p>
-        </p:txBody>
-      </p:sp>
-      <p:sp>
-        <p:nvSpPr>
-          <p:cNvPr id="46" name="Shape 44"/>
-          <p:cNvSpPr/>
-          <p:nvPr/>
-        </p:nvSpPr>
-        <p:spPr>
-          <a:xfrm>
-            <a:off x="7447135" y="4169664"/>
-            <a:ext cx="685800" cy="475488"/>
-          </a:xfrm>
-          <a:prstGeom prst="rect">
-            <a:avLst>
-              <a:gd name="adj" fmla="val 7692"/>
-            </a:avLst>
-          </a:prstGeom>
-          <a:solidFill>
-            <a:srgbClr val="FFFFFF"/>
-          </a:solidFill>
-          <a:ln w="12700">
-            <a:solidFill>
-              <a:srgbClr val="DB2777"/>
-            </a:solidFill>
-            <a:prstDash val="solid"/>
-          </a:ln>
-        </p:spPr>
-      </p:sp>
-      <p:sp>
-        <p:nvSpPr>
-          <p:cNvPr id="47" name="Text 45"/>
-          <p:cNvSpPr/>
-          <p:nvPr/>
-        </p:nvSpPr>
-        <p:spPr>
-          <a:xfrm>
-            <a:off x="7447135" y="4169664"/>
+            <a:off x="7274052" y="4169664"/>
             <a:ext cx="685800" cy="475488"/>
           </a:xfrm>
           <a:prstGeom prst="rect">
@@ -16147,7 +16213,7 @@
                 <a:ea typeface="Calibri" pitchFamily="34" charset="-122"/>
                 <a:cs typeface="Calibri" pitchFamily="34" charset="-120"/>
               </a:rPr>
-              <a:t>Word Labs  •  wordlabs.app  •  Root: 'pay' = give money in exchange</a:t>
+              <a:t>Word Labs  •  wordlabs.app  •  Root: 'pay' = give money owed</a:t>
             </a:r>
             <a:endParaRPr lang="en-US" sz="800" dirty="0"/>
           </a:p>
@@ -16481,7 +16547,7 @@
                 <a:ea typeface="Trebuchet MS" pitchFamily="34" charset="-122"/>
                 <a:cs typeface="Trebuchet MS" pitchFamily="34" charset="-120"/>
               </a:rPr>
-              <a:t>1</a:t>
+              <a:t>2</a:t>
             </a:r>
             <a:pPr algn="ctr" indent="0" marL="0">
               <a:buNone/>
@@ -16495,7 +16561,7 @@
                 <a:ea typeface="Trebuchet MS" pitchFamily="34" charset="-122"/>
                 <a:cs typeface="Trebuchet MS" pitchFamily="34" charset="-120"/>
               </a:rPr>
-              <a:t>  punctuation mark</a:t>
+              <a:t>  punctuation marks</a:t>
             </a:r>
             <a:endParaRPr lang="en-US" sz="2800" dirty="0"/>
           </a:p>
@@ -16787,7 +16853,7 @@
                 <a:ea typeface="Calibri" pitchFamily="34" charset="-122"/>
                 <a:cs typeface="Calibri" pitchFamily="34" charset="-120"/>
               </a:rPr>
-              <a:t>Word Labs  •  wordlabs.app  •  Root: 'pay' = give money in exchange</a:t>
+              <a:t>Word Labs  •  wordlabs.app  •  Root: 'pay' = give money owed</a:t>
             </a:r>
             <a:endParaRPr lang="en-US" sz="800" dirty="0"/>
           </a:p>
@@ -16899,7 +16965,7 @@
                 <a:ea typeface="Calibri" pitchFamily="34" charset="-122"/>
                 <a:cs typeface="Calibri" pitchFamily="34" charset="-120"/>
               </a:rPr>
-              <a:t>The </a:t>
+              <a:t>On </a:t>
             </a:r>
             <a:pPr algn="l" indent="0" marL="0">
               <a:buNone/>
@@ -16916,7 +16982,7 @@
                 <a:ea typeface="Calibri" pitchFamily="34" charset="-122"/>
                 <a:cs typeface="Calibri" pitchFamily="34" charset="-120"/>
               </a:rPr>
-              <a:t>payment</a:t>
+              <a:t>payday</a:t>
             </a:r>
             <a:pPr algn="l" indent="0" marL="0">
               <a:buNone/>
@@ -16930,7 +16996,7 @@
                 <a:ea typeface="Calibri" pitchFamily="34" charset="-122"/>
                 <a:cs typeface="Calibri" pitchFamily="34" charset="-120"/>
               </a:rPr>
-              <a:t> was overdue, but the manager agreed to </a:t>
+              <a:t>, the manager had to </a:t>
             </a:r>
             <a:pPr algn="l" indent="0" marL="0">
               <a:buNone/>
@@ -16947,7 +17013,7 @@
                 <a:ea typeface="Calibri" pitchFamily="34" charset="-122"/>
                 <a:cs typeface="Calibri" pitchFamily="34" charset="-120"/>
               </a:rPr>
-              <a:t>overpay</a:t>
+              <a:t>repay</a:t>
             </a:r>
             <a:pPr algn="l" indent="0" marL="0">
               <a:buNone/>
@@ -16961,7 +17027,7 @@
                 <a:ea typeface="Calibri" pitchFamily="34" charset="-122"/>
                 <a:cs typeface="Calibri" pitchFamily="34" charset="-120"/>
               </a:rPr>
-              <a:t> the staff to </a:t>
+              <a:t> her staff; however, she was careful not to </a:t>
             </a:r>
             <a:pPr algn="l" indent="0" marL="0">
               <a:buNone/>
@@ -16978,7 +17044,7 @@
                 <a:ea typeface="Calibri" pitchFamily="34" charset="-122"/>
                 <a:cs typeface="Calibri" pitchFamily="34" charset="-120"/>
               </a:rPr>
-              <a:t>repay</a:t>
+              <a:t>underpay</a:t>
             </a:r>
             <a:pPr algn="l" indent="0" marL="0">
               <a:buNone/>
@@ -16992,7 +17058,7 @@
                 <a:ea typeface="Calibri" pitchFamily="34" charset="-122"/>
                 <a:cs typeface="Calibri" pitchFamily="34" charset="-120"/>
               </a:rPr>
-              <a:t> their loyalty.</a:t>
+              <a:t> anyone.</a:t>
             </a:r>
             <a:endParaRPr lang="en-US" sz="1800" dirty="0"/>
           </a:p>
@@ -17147,7 +17213,7 @@
                 <a:ea typeface="Trebuchet MS" pitchFamily="34" charset="-122"/>
                 <a:cs typeface="Trebuchet MS" pitchFamily="34" charset="-120"/>
               </a:rPr>
-              <a:t>payment</a:t>
+              <a:t>payday</a:t>
             </a:r>
             <a:endParaRPr lang="en-US" sz="1400" dirty="0"/>
           </a:p>
@@ -17275,7 +17341,7 @@
                 <a:ea typeface="Trebuchet MS" pitchFamily="34" charset="-122"/>
                 <a:cs typeface="Trebuchet MS" pitchFamily="34" charset="-120"/>
               </a:rPr>
-              <a:t>overpay</a:t>
+              <a:t>repay</a:t>
             </a:r>
             <a:endParaRPr lang="en-US" sz="1400" dirty="0"/>
           </a:p>
@@ -17403,7 +17469,7 @@
                 <a:ea typeface="Trebuchet MS" pitchFamily="34" charset="-122"/>
                 <a:cs typeface="Trebuchet MS" pitchFamily="34" charset="-120"/>
               </a:rPr>
-              <a:t>repay</a:t>
+              <a:t>underpay</a:t>
             </a:r>
             <a:endParaRPr lang="en-US" sz="1400" dirty="0"/>
           </a:p>
@@ -17734,7 +17800,7 @@
                 <a:ea typeface="Calibri" pitchFamily="34" charset="-122"/>
                 <a:cs typeface="Calibri" pitchFamily="34" charset="-120"/>
               </a:rPr>
-              <a:t>Word Labs  •  wordlabs.app  •  Root: 'pay' = give money in exchange</a:t>
+              <a:t>Word Labs  •  wordlabs.app  •  Root: 'pay' = give money owed</a:t>
             </a:r>
             <a:endParaRPr lang="en-US" sz="800" dirty="0"/>
           </a:p>
@@ -17873,7 +17939,7 @@
                 <a:ea typeface="Trebuchet MS" pitchFamily="34" charset="-122"/>
                 <a:cs typeface="Trebuchet MS" pitchFamily="34" charset="-120"/>
               </a:rPr>
-              <a:t>payment</a:t>
+              <a:t>payday</a:t>
             </a:r>
             <a:endParaRPr lang="en-US" sz="2800" dirty="0"/>
           </a:p>
@@ -18561,7 +18627,7 @@
                 <a:ea typeface="Calibri" pitchFamily="34" charset="-122"/>
                 <a:cs typeface="Calibri" pitchFamily="34" charset="-120"/>
               </a:rPr>
-              <a:t>Word Labs  •  wordlabs.app  •  Root: 'pay' = give money in exchange</a:t>
+              <a:t>Word Labs  •  wordlabs.app  •  Root: 'pay' = give money owed</a:t>
             </a:r>
             <a:endParaRPr lang="en-US" sz="800" dirty="0"/>
           </a:p>
@@ -18700,7 +18766,7 @@
                 <a:ea typeface="Trebuchet MS" pitchFamily="34" charset="-122"/>
                 <a:cs typeface="Trebuchet MS" pitchFamily="34" charset="-120"/>
               </a:rPr>
-              <a:t>payment</a:t>
+              <a:t>payday</a:t>
             </a:r>
             <a:endParaRPr lang="en-US" sz="2800" dirty="0"/>
           </a:p>
@@ -18878,7 +18944,7 @@
                 <a:ea typeface="Calibri" pitchFamily="34" charset="-122"/>
                 <a:cs typeface="Calibri" pitchFamily="34" charset="-120"/>
               </a:rPr>
-              <a:t>give money</a:t>
+              <a:t>give money owed</a:t>
             </a:r>
             <a:endParaRPr lang="en-US" sz="850" dirty="0"/>
           </a:p>
@@ -18951,7 +19017,7 @@
                 <a:ea typeface="Trebuchet MS" pitchFamily="34" charset="-122"/>
                 <a:cs typeface="Trebuchet MS" pitchFamily="34" charset="-120"/>
               </a:rPr>
-              <a:t>ment</a:t>
+              <a:t>day</a:t>
             </a:r>
             <a:endParaRPr lang="en-US" sz="1300" dirty="0"/>
           </a:p>
@@ -18990,7 +19056,7 @@
                 <a:ea typeface="Calibri" pitchFamily="34" charset="-122"/>
                 <a:cs typeface="Calibri" pitchFamily="34" charset="-120"/>
               </a:rPr>
-              <a:t>action or result of</a:t>
+              <a:t>a period of time</a:t>
             </a:r>
             <a:endParaRPr lang="en-US" sz="850" dirty="0"/>
           </a:p>
@@ -19546,7 +19612,7 @@
                 <a:ea typeface="Calibri" pitchFamily="34" charset="-122"/>
                 <a:cs typeface="Calibri" pitchFamily="34" charset="-120"/>
               </a:rPr>
-              <a:t>Word Labs  •  wordlabs.app  •  Root: 'pay' = give money in exchange</a:t>
+              <a:t>Word Labs  •  wordlabs.app  •  Root: 'pay' = give money owed</a:t>
             </a:r>
             <a:endParaRPr lang="en-US" sz="800" dirty="0"/>
           </a:p>
@@ -19685,7 +19751,7 @@
                 <a:ea typeface="Trebuchet MS" pitchFamily="34" charset="-122"/>
                 <a:cs typeface="Trebuchet MS" pitchFamily="34" charset="-120"/>
               </a:rPr>
-              <a:t>payment</a:t>
+              <a:t>payday</a:t>
             </a:r>
             <a:endParaRPr lang="en-US" sz="2800" dirty="0"/>
           </a:p>
@@ -19863,7 +19929,7 @@
                 <a:ea typeface="Calibri" pitchFamily="34" charset="-122"/>
                 <a:cs typeface="Calibri" pitchFamily="34" charset="-120"/>
               </a:rPr>
-              <a:t>give money</a:t>
+              <a:t>give money owed</a:t>
             </a:r>
             <a:endParaRPr lang="en-US" sz="850" dirty="0"/>
           </a:p>
@@ -19936,7 +20002,7 @@
                 <a:ea typeface="Trebuchet MS" pitchFamily="34" charset="-122"/>
                 <a:cs typeface="Trebuchet MS" pitchFamily="34" charset="-120"/>
               </a:rPr>
-              <a:t>ment</a:t>
+              <a:t>day</a:t>
             </a:r>
             <a:endParaRPr lang="en-US" sz="1300" dirty="0"/>
           </a:p>
@@ -19975,7 +20041,7 @@
                 <a:ea typeface="Calibri" pitchFamily="34" charset="-122"/>
                 <a:cs typeface="Calibri" pitchFamily="34" charset="-120"/>
               </a:rPr>
-              <a:t>action or result of</a:t>
+              <a:t>a period of time</a:t>
             </a:r>
             <a:endParaRPr lang="en-US" sz="850" dirty="0"/>
           </a:p>
@@ -20239,7 +20305,7 @@
                 <a:ea typeface="Trebuchet MS" pitchFamily="34" charset="-122"/>
                 <a:cs typeface="Trebuchet MS" pitchFamily="34" charset="-120"/>
               </a:rPr>
-              <a:t>ment</a:t>
+              <a:t>day</a:t>
             </a:r>
             <a:endParaRPr lang="en-US" sz="1400" dirty="0"/>
           </a:p>
@@ -20663,7 +20729,7 @@
                 <a:ea typeface="Calibri" pitchFamily="34" charset="-122"/>
                 <a:cs typeface="Calibri" pitchFamily="34" charset="-120"/>
               </a:rPr>
-              <a:t>Word Labs  •  wordlabs.app  •  Root: 'pay' = give money in exchange</a:t>
+              <a:t>Word Labs  •  wordlabs.app  •  Root: 'pay' = give money owed</a:t>
             </a:r>
             <a:endParaRPr lang="en-US" sz="800" dirty="0"/>
           </a:p>
@@ -20802,7 +20868,7 @@
                 <a:ea typeface="Trebuchet MS" pitchFamily="34" charset="-122"/>
                 <a:cs typeface="Trebuchet MS" pitchFamily="34" charset="-120"/>
               </a:rPr>
-              <a:t>payment</a:t>
+              <a:t>payday</a:t>
             </a:r>
             <a:endParaRPr lang="en-US" sz="2800" dirty="0"/>
           </a:p>
@@ -20980,7 +21046,7 @@
                 <a:ea typeface="Calibri" pitchFamily="34" charset="-122"/>
                 <a:cs typeface="Calibri" pitchFamily="34" charset="-120"/>
               </a:rPr>
-              <a:t>give money</a:t>
+              <a:t>give money owed</a:t>
             </a:r>
             <a:endParaRPr lang="en-US" sz="850" dirty="0"/>
           </a:p>
@@ -21053,7 +21119,7 @@
                 <a:ea typeface="Trebuchet MS" pitchFamily="34" charset="-122"/>
                 <a:cs typeface="Trebuchet MS" pitchFamily="34" charset="-120"/>
               </a:rPr>
-              <a:t>ment</a:t>
+              <a:t>day</a:t>
             </a:r>
             <a:endParaRPr lang="en-US" sz="1300" dirty="0"/>
           </a:p>
@@ -21092,7 +21158,7 @@
                 <a:ea typeface="Calibri" pitchFamily="34" charset="-122"/>
                 <a:cs typeface="Calibri" pitchFamily="34" charset="-120"/>
               </a:rPr>
-              <a:t>action or result of</a:t>
+              <a:t>a period of time</a:t>
             </a:r>
             <a:endParaRPr lang="en-US" sz="850" dirty="0"/>
           </a:p>
@@ -21356,7 +21422,7 @@
                 <a:ea typeface="Trebuchet MS" pitchFamily="34" charset="-122"/>
                 <a:cs typeface="Trebuchet MS" pitchFamily="34" charset="-120"/>
               </a:rPr>
-              <a:t>ment</a:t>
+              <a:t>day</a:t>
             </a:r>
             <a:endParaRPr lang="en-US" sz="1400" dirty="0"/>
           </a:p>
@@ -21463,7 +21529,7 @@
         </p:nvSpPr>
         <p:spPr>
           <a:xfrm>
-            <a:off x="2254649" y="4169664"/>
+            <a:off x="2670048" y="4169664"/>
             <a:ext cx="685800" cy="475488"/>
           </a:xfrm>
           <a:prstGeom prst="rect">
@@ -21490,7 +21556,7 @@
         </p:nvSpPr>
         <p:spPr>
           <a:xfrm>
-            <a:off x="2254649" y="4169664"/>
+            <a:off x="2670048" y="4169664"/>
             <a:ext cx="685800" cy="475488"/>
           </a:xfrm>
           <a:prstGeom prst="rect">
@@ -21529,7 +21595,7 @@
         </p:nvSpPr>
         <p:spPr>
           <a:xfrm>
-            <a:off x="3293146" y="4169664"/>
+            <a:off x="4123944" y="4169664"/>
             <a:ext cx="685800" cy="475488"/>
           </a:xfrm>
           <a:prstGeom prst="rect">
@@ -21556,7 +21622,7 @@
         </p:nvSpPr>
         <p:spPr>
           <a:xfrm>
-            <a:off x="3293146" y="4169664"/>
+            <a:off x="4123944" y="4169664"/>
             <a:ext cx="685800" cy="475488"/>
           </a:xfrm>
           <a:prstGeom prst="rect">
@@ -21595,7 +21661,7 @@
         </p:nvSpPr>
         <p:spPr>
           <a:xfrm>
-            <a:off x="4331643" y="4169664"/>
+            <a:off x="5577840" y="4169664"/>
             <a:ext cx="685800" cy="475488"/>
           </a:xfrm>
           <a:prstGeom prst="rect">
@@ -21622,7 +21688,7 @@
         </p:nvSpPr>
         <p:spPr>
           <a:xfrm>
-            <a:off x="4331643" y="4169664"/>
+            <a:off x="5577840" y="4169664"/>
             <a:ext cx="685800" cy="475488"/>
           </a:xfrm>
           <a:prstGeom prst="rect">
@@ -21647,7 +21713,7 @@
                 <a:ea typeface="Trebuchet MS" pitchFamily="34" charset="-122"/>
                 <a:cs typeface="Trebuchet MS" pitchFamily="34" charset="-120"/>
               </a:rPr>
-              <a:t>m</a:t>
+              <a:t>d</a:t>
             </a:r>
             <a:endParaRPr lang="en-US" sz="900" dirty="0"/>
           </a:p>
@@ -21661,7 +21727,7 @@
         </p:nvSpPr>
         <p:spPr>
           <a:xfrm>
-            <a:off x="5370141" y="4169664"/>
+            <a:off x="7031736" y="4169664"/>
             <a:ext cx="685800" cy="475488"/>
           </a:xfrm>
           <a:prstGeom prst="rect">
@@ -21688,7 +21754,7 @@
         </p:nvSpPr>
         <p:spPr>
           <a:xfrm>
-            <a:off x="5370141" y="4169664"/>
+            <a:off x="7031736" y="4169664"/>
             <a:ext cx="685800" cy="475488"/>
           </a:xfrm>
           <a:prstGeom prst="rect">
@@ -21713,139 +21779,7 @@
                 <a:ea typeface="Trebuchet MS" pitchFamily="34" charset="-122"/>
                 <a:cs typeface="Trebuchet MS" pitchFamily="34" charset="-120"/>
               </a:rPr>
-              <a:t>e</a:t>
-            </a:r>
-            <a:endParaRPr lang="en-US" sz="900" dirty="0"/>
-          </a:p>
-        </p:txBody>
-      </p:sp>
-      <p:sp>
-        <p:nvSpPr>
-          <p:cNvPr id="41" name="Shape 39"/>
-          <p:cNvSpPr/>
-          <p:nvPr/>
-        </p:nvSpPr>
-        <p:spPr>
-          <a:xfrm>
-            <a:off x="6408638" y="4169664"/>
-            <a:ext cx="685800" cy="475488"/>
-          </a:xfrm>
-          <a:prstGeom prst="rect">
-            <a:avLst>
-              <a:gd name="adj" fmla="val 7692"/>
-            </a:avLst>
-          </a:prstGeom>
-          <a:solidFill>
-            <a:srgbClr val="FFFFFF"/>
-          </a:solidFill>
-          <a:ln w="12700">
-            <a:solidFill>
-              <a:srgbClr val="DB2777"/>
-            </a:solidFill>
-            <a:prstDash val="solid"/>
-          </a:ln>
-        </p:spPr>
-      </p:sp>
-      <p:sp>
-        <p:nvSpPr>
-          <p:cNvPr id="42" name="Text 40"/>
-          <p:cNvSpPr/>
-          <p:nvPr/>
-        </p:nvSpPr>
-        <p:spPr>
-          <a:xfrm>
-            <a:off x="6408638" y="4169664"/>
-            <a:ext cx="685800" cy="475488"/>
-          </a:xfrm>
-          <a:prstGeom prst="rect">
-            <a:avLst/>
-          </a:prstGeom>
-          <a:noFill/>
-          <a:ln/>
-        </p:spPr>
-        <p:txBody>
-          <a:bodyPr wrap="square" lIns="0" tIns="0" rIns="0" bIns="0" rtlCol="0" anchor="ctr"/>
-          <a:lstStyle/>
-          <a:p>
-            <a:pPr algn="ctr" indent="0" marL="0">
-              <a:buNone/>
-            </a:pPr>
-            <a:r>
-              <a:rPr lang="en-US" sz="900" b="1" dirty="0">
-                <a:solidFill>
-                  <a:srgbClr val="9D174D"/>
-                </a:solidFill>
-                <a:latin typeface="Trebuchet MS" pitchFamily="34" charset="0"/>
-                <a:ea typeface="Trebuchet MS" pitchFamily="34" charset="-122"/>
-                <a:cs typeface="Trebuchet MS" pitchFamily="34" charset="-120"/>
-              </a:rPr>
-              <a:t>n</a:t>
-            </a:r>
-            <a:endParaRPr lang="en-US" sz="900" dirty="0"/>
-          </a:p>
-        </p:txBody>
-      </p:sp>
-      <p:sp>
-        <p:nvSpPr>
-          <p:cNvPr id="43" name="Shape 41"/>
-          <p:cNvSpPr/>
-          <p:nvPr/>
-        </p:nvSpPr>
-        <p:spPr>
-          <a:xfrm>
-            <a:off x="7447135" y="4169664"/>
-            <a:ext cx="685800" cy="475488"/>
-          </a:xfrm>
-          <a:prstGeom prst="rect">
-            <a:avLst>
-              <a:gd name="adj" fmla="val 7692"/>
-            </a:avLst>
-          </a:prstGeom>
-          <a:solidFill>
-            <a:srgbClr val="FFFFFF"/>
-          </a:solidFill>
-          <a:ln w="12700">
-            <a:solidFill>
-              <a:srgbClr val="DB2777"/>
-            </a:solidFill>
-            <a:prstDash val="solid"/>
-          </a:ln>
-        </p:spPr>
-      </p:sp>
-      <p:sp>
-        <p:nvSpPr>
-          <p:cNvPr id="44" name="Text 42"/>
-          <p:cNvSpPr/>
-          <p:nvPr/>
-        </p:nvSpPr>
-        <p:spPr>
-          <a:xfrm>
-            <a:off x="7447135" y="4169664"/>
-            <a:ext cx="685800" cy="475488"/>
-          </a:xfrm>
-          <a:prstGeom prst="rect">
-            <a:avLst/>
-          </a:prstGeom>
-          <a:noFill/>
-          <a:ln/>
-        </p:spPr>
-        <p:txBody>
-          <a:bodyPr wrap="square" lIns="0" tIns="0" rIns="0" bIns="0" rtlCol="0" anchor="ctr"/>
-          <a:lstStyle/>
-          <a:p>
-            <a:pPr algn="ctr" indent="0" marL="0">
-              <a:buNone/>
-            </a:pPr>
-            <a:r>
-              <a:rPr lang="en-US" sz="900" b="1" dirty="0">
-                <a:solidFill>
-                  <a:srgbClr val="9D174D"/>
-                </a:solidFill>
-                <a:latin typeface="Trebuchet MS" pitchFamily="34" charset="0"/>
-                <a:ea typeface="Trebuchet MS" pitchFamily="34" charset="-122"/>
-                <a:cs typeface="Trebuchet MS" pitchFamily="34" charset="-120"/>
-              </a:rPr>
-              <a:t>t</a:t>
+              <a:t>ay</a:t>
             </a:r>
             <a:endParaRPr lang="en-US" sz="900" dirty="0"/>
           </a:p>
@@ -22137,7 +22071,7 @@
                 <a:ea typeface="Calibri" pitchFamily="34" charset="-122"/>
                 <a:cs typeface="Calibri" pitchFamily="34" charset="-120"/>
               </a:rPr>
-              <a:t>Word Labs  •  wordlabs.app  •  Root: 'pay' = give money in exchange</a:t>
+              <a:t>Word Labs  •  wordlabs.app  •  Root: 'pay' = give money owed</a:t>
             </a:r>
             <a:endParaRPr lang="en-US" sz="800" dirty="0"/>
           </a:p>
@@ -22276,7 +22210,7 @@
                 <a:ea typeface="Trebuchet MS" pitchFamily="34" charset="-122"/>
                 <a:cs typeface="Trebuchet MS" pitchFamily="34" charset="-120"/>
               </a:rPr>
-              <a:t>overpay</a:t>
+              <a:t>repay</a:t>
             </a:r>
             <a:endParaRPr lang="en-US" sz="2800" dirty="0"/>
           </a:p>
@@ -22964,7 +22898,7 @@
                 <a:ea typeface="Calibri" pitchFamily="34" charset="-122"/>
                 <a:cs typeface="Calibri" pitchFamily="34" charset="-120"/>
               </a:rPr>
-              <a:t>Word Labs  •  wordlabs.app  •  Root: 'pay' = give money in exchange</a:t>
+              <a:t>Word Labs  •  wordlabs.app  •  Root: 'pay' = give money owed</a:t>
             </a:r>
             <a:endParaRPr lang="en-US" sz="800" dirty="0"/>
           </a:p>
@@ -23103,7 +23037,7 @@
                 <a:ea typeface="Trebuchet MS" pitchFamily="34" charset="-122"/>
                 <a:cs typeface="Trebuchet MS" pitchFamily="34" charset="-120"/>
               </a:rPr>
-              <a:t>overpay</a:t>
+              <a:t>repay</a:t>
             </a:r>
             <a:endParaRPr lang="en-US" sz="2800" dirty="0"/>
           </a:p>
@@ -23242,7 +23176,7 @@
                 <a:ea typeface="Trebuchet MS" pitchFamily="34" charset="-122"/>
                 <a:cs typeface="Trebuchet MS" pitchFamily="34" charset="-120"/>
               </a:rPr>
-              <a:t>over</a:t>
+              <a:t>re</a:t>
             </a:r>
             <a:endParaRPr lang="en-US" sz="1300" dirty="0"/>
           </a:p>
@@ -23281,7 +23215,7 @@
                 <a:ea typeface="Calibri" pitchFamily="34" charset="-122"/>
                 <a:cs typeface="Calibri" pitchFamily="34" charset="-120"/>
               </a:rPr>
-              <a:t>too much, above</a:t>
+              <a:t>again or back</a:t>
             </a:r>
             <a:endParaRPr lang="en-US" sz="850" dirty="0"/>
           </a:p>
@@ -23393,7 +23327,7 @@
                 <a:ea typeface="Calibri" pitchFamily="34" charset="-122"/>
                 <a:cs typeface="Calibri" pitchFamily="34" charset="-120"/>
               </a:rPr>
-              <a:t>give money</a:t>
+              <a:t>give money owed</a:t>
             </a:r>
             <a:endParaRPr lang="en-US" sz="850" dirty="0"/>
           </a:p>
@@ -23949,7 +23883,7 @@
                 <a:ea typeface="Calibri" pitchFamily="34" charset="-122"/>
                 <a:cs typeface="Calibri" pitchFamily="34" charset="-120"/>
               </a:rPr>
-              <a:t>Word Labs  •  wordlabs.app  •  Root: 'pay' = give money in exchange</a:t>
+              <a:t>Word Labs  •  wordlabs.app  •  Root: 'pay' = give money owed</a:t>
             </a:r>
             <a:endParaRPr lang="en-US" sz="800" dirty="0"/>
           </a:p>
@@ -24022,7 +23956,7 @@
                 <a:ea typeface="Trebuchet MS" pitchFamily="34" charset="-122"/>
                 <a:cs typeface="Trebuchet MS" pitchFamily="34" charset="-120"/>
               </a:rPr>
-              <a:t>We are learning that the root 'pay' means 'give money in exchange'.</a:t>
+              <a:t>We are learning that the root 'pay' means 'give money owed'.</a:t>
             </a:r>
             <a:endParaRPr lang="en-US" sz="2000" dirty="0"/>
           </a:p>
@@ -24668,7 +24602,7 @@
                 <a:ea typeface="Calibri" pitchFamily="34" charset="-122"/>
                 <a:cs typeface="Calibri" pitchFamily="34" charset="-120"/>
               </a:rPr>
-              <a:t>Word Labs  •  wordlabs.app  •  Root: 'pay' = give money in exchange</a:t>
+              <a:t>Word Labs  •  wordlabs.app  •  Root: 'pay' = give money owed</a:t>
             </a:r>
             <a:endParaRPr lang="en-US" sz="800" dirty="0"/>
           </a:p>
@@ -24807,7 +24741,7 @@
                 <a:ea typeface="Trebuchet MS" pitchFamily="34" charset="-122"/>
                 <a:cs typeface="Trebuchet MS" pitchFamily="34" charset="-120"/>
               </a:rPr>
-              <a:t>overpay</a:t>
+              <a:t>repay</a:t>
             </a:r>
             <a:endParaRPr lang="en-US" sz="2800" dirty="0"/>
           </a:p>
@@ -24946,7 +24880,7 @@
                 <a:ea typeface="Trebuchet MS" pitchFamily="34" charset="-122"/>
                 <a:cs typeface="Trebuchet MS" pitchFamily="34" charset="-120"/>
               </a:rPr>
-              <a:t>over</a:t>
+              <a:t>re</a:t>
             </a:r>
             <a:endParaRPr lang="en-US" sz="1300" dirty="0"/>
           </a:p>
@@ -24985,7 +24919,7 @@
                 <a:ea typeface="Calibri" pitchFamily="34" charset="-122"/>
                 <a:cs typeface="Calibri" pitchFamily="34" charset="-120"/>
               </a:rPr>
-              <a:t>too much, above</a:t>
+              <a:t>again or back</a:t>
             </a:r>
             <a:endParaRPr lang="en-US" sz="850" dirty="0"/>
           </a:p>
@@ -25097,7 +25031,7 @@
                 <a:ea typeface="Calibri" pitchFamily="34" charset="-122"/>
                 <a:cs typeface="Calibri" pitchFamily="34" charset="-120"/>
               </a:rPr>
-              <a:t>give money</a:t>
+              <a:t>give money owed</a:t>
             </a:r>
             <a:endParaRPr lang="en-US" sz="850" dirty="0"/>
           </a:p>
@@ -25204,7 +25138,7 @@
         </p:nvSpPr>
         <p:spPr>
           <a:xfrm>
-            <a:off x="2313432" y="3364992"/>
+            <a:off x="2999232" y="3364992"/>
             <a:ext cx="1645920" cy="475488"/>
           </a:xfrm>
           <a:prstGeom prst="rect">
@@ -25231,7 +25165,7 @@
         </p:nvSpPr>
         <p:spPr>
           <a:xfrm>
-            <a:off x="2313432" y="3364992"/>
+            <a:off x="2999232" y="3364992"/>
             <a:ext cx="1645920" cy="475488"/>
           </a:xfrm>
           <a:prstGeom prst="rect">
@@ -25256,7 +25190,7 @@
                 <a:ea typeface="Trebuchet MS" pitchFamily="34" charset="-122"/>
                 <a:cs typeface="Trebuchet MS" pitchFamily="34" charset="-120"/>
               </a:rPr>
-              <a:t>o</a:t>
+              <a:t>re</a:t>
             </a:r>
             <a:endParaRPr lang="en-US" sz="1400" dirty="0"/>
           </a:p>
@@ -25270,8 +25204,8 @@
         </p:nvSpPr>
         <p:spPr>
           <a:xfrm>
-            <a:off x="3959352" y="3364992"/>
-            <a:ext cx="411480" cy="475488"/>
+            <a:off x="4645152" y="3364992"/>
+            <a:ext cx="1097280" cy="475488"/>
           </a:xfrm>
           <a:prstGeom prst="rect">
             <a:avLst/>
@@ -25309,7 +25243,7 @@
         </p:nvSpPr>
         <p:spPr>
           <a:xfrm>
-            <a:off x="4370832" y="3364992"/>
+            <a:off x="5742432" y="3364992"/>
             <a:ext cx="1645920" cy="475488"/>
           </a:xfrm>
           <a:prstGeom prst="rect">
@@ -25336,7 +25270,7 @@
         </p:nvSpPr>
         <p:spPr>
           <a:xfrm>
-            <a:off x="4370832" y="3364992"/>
+            <a:off x="5742432" y="3364992"/>
             <a:ext cx="1645920" cy="475488"/>
           </a:xfrm>
           <a:prstGeom prst="rect">
@@ -25361,7 +25295,7 @@
                 <a:ea typeface="Trebuchet MS" pitchFamily="34" charset="-122"/>
                 <a:cs typeface="Trebuchet MS" pitchFamily="34" charset="-120"/>
               </a:rPr>
-              <a:t>ver</a:t>
+              <a:t>pay</a:t>
             </a:r>
             <a:endParaRPr lang="en-US" sz="1400" dirty="0"/>
           </a:p>
@@ -25369,14 +25303,41 @@
       </p:sp>
       <p:sp>
         <p:nvSpPr>
-          <p:cNvPr id="30" name="Text 28"/>
-          <p:cNvSpPr/>
-          <p:nvPr/>
-        </p:nvSpPr>
-        <p:spPr>
-          <a:xfrm>
-            <a:off x="6016752" y="3364992"/>
-            <a:ext cx="411480" cy="475488"/>
+          <p:cNvPr id="30" name="Shape 28"/>
+          <p:cNvSpPr/>
+          <p:nvPr/>
+        </p:nvSpPr>
+        <p:spPr>
+          <a:xfrm>
+            <a:off x="365760" y="4096512"/>
+            <a:ext cx="1371600" cy="804672"/>
+          </a:xfrm>
+          <a:prstGeom prst="rect">
+            <a:avLst>
+              <a:gd name="adj" fmla="val 6818"/>
+            </a:avLst>
+          </a:prstGeom>
+          <a:solidFill>
+            <a:srgbClr val="E2E8F0"/>
+          </a:solidFill>
+          <a:ln w="12700">
+            <a:solidFill>
+              <a:srgbClr val="E2E8F0"/>
+            </a:solidFill>
+            <a:prstDash val="solid"/>
+          </a:ln>
+        </p:spPr>
+      </p:sp>
+      <p:sp>
+        <p:nvSpPr>
+          <p:cNvPr id="31" name="Text 29"/>
+          <p:cNvSpPr/>
+          <p:nvPr/>
+        </p:nvSpPr>
+        <p:spPr>
+          <a:xfrm>
+            <a:off x="365760" y="4096512"/>
+            <a:ext cx="1371600" cy="804672"/>
           </a:xfrm>
           <a:prstGeom prst="rect">
             <a:avLst/>
@@ -25392,96 +25353,30 @@
               <a:buNone/>
             </a:pPr>
             <a:r>
-              <a:rPr lang="en-US" sz="1600" b="1" dirty="0">
-                <a:solidFill>
-                  <a:srgbClr val="0D9488"/>
+              <a:rPr lang="en-US" sz="1100" b="1" dirty="0">
+                <a:solidFill>
+                  <a:srgbClr val="475569"/>
                 </a:solidFill>
                 <a:latin typeface="Trebuchet MS" pitchFamily="34" charset="0"/>
                 <a:ea typeface="Trebuchet MS" pitchFamily="34" charset="-122"/>
                 <a:cs typeface="Trebuchet MS" pitchFamily="34" charset="-120"/>
               </a:rPr>
-              <a:t>·</a:t>
-            </a:r>
-            <a:endParaRPr lang="en-US" sz="1600" dirty="0"/>
-          </a:p>
-        </p:txBody>
-      </p:sp>
-      <p:sp>
-        <p:nvSpPr>
-          <p:cNvPr id="31" name="Shape 29"/>
-          <p:cNvSpPr/>
-          <p:nvPr/>
-        </p:nvSpPr>
-        <p:spPr>
-          <a:xfrm>
-            <a:off x="6428232" y="3364992"/>
-            <a:ext cx="1645920" cy="475488"/>
-          </a:xfrm>
-          <a:prstGeom prst="rect">
-            <a:avLst>
-              <a:gd name="adj" fmla="val 9615"/>
-            </a:avLst>
-          </a:prstGeom>
-          <a:solidFill>
-            <a:srgbClr val="FFFFFF"/>
-          </a:solidFill>
-          <a:ln w="12700">
-            <a:solidFill>
-              <a:srgbClr val="0D9488"/>
-            </a:solidFill>
-            <a:prstDash val="solid"/>
-          </a:ln>
-        </p:spPr>
-      </p:sp>
-      <p:sp>
-        <p:nvSpPr>
-          <p:cNvPr id="32" name="Text 30"/>
-          <p:cNvSpPr/>
-          <p:nvPr/>
-        </p:nvSpPr>
-        <p:spPr>
-          <a:xfrm>
-            <a:off x="6428232" y="3364992"/>
-            <a:ext cx="1645920" cy="475488"/>
-          </a:xfrm>
-          <a:prstGeom prst="rect">
-            <a:avLst/>
-          </a:prstGeom>
-          <a:noFill/>
-          <a:ln/>
-        </p:spPr>
-        <p:txBody>
-          <a:bodyPr wrap="square" lIns="0" tIns="0" rIns="0" bIns="0" rtlCol="0" anchor="ctr"/>
-          <a:lstStyle/>
-          <a:p>
-            <a:pPr algn="ctr" indent="0" marL="0">
-              <a:buNone/>
-            </a:pPr>
-            <a:r>
-              <a:rPr lang="en-US" sz="1400" b="1" dirty="0">
-                <a:solidFill>
-                  <a:srgbClr val="0D9488"/>
-                </a:solidFill>
-                <a:latin typeface="Trebuchet MS" pitchFamily="34" charset="0"/>
-                <a:ea typeface="Trebuchet MS" pitchFamily="34" charset="-122"/>
-                <a:cs typeface="Trebuchet MS" pitchFamily="34" charset="-120"/>
-              </a:rPr>
-              <a:t>pay</a:t>
-            </a:r>
-            <a:endParaRPr lang="en-US" sz="1400" dirty="0"/>
-          </a:p>
-        </p:txBody>
-      </p:sp>
-      <p:sp>
-        <p:nvSpPr>
-          <p:cNvPr id="33" name="Shape 31"/>
-          <p:cNvSpPr/>
-          <p:nvPr/>
-        </p:nvSpPr>
-        <p:spPr>
-          <a:xfrm>
-            <a:off x="365760" y="4096512"/>
-            <a:ext cx="1371600" cy="804672"/>
+              <a:t>Phonemes</a:t>
+            </a:r>
+            <a:endParaRPr lang="en-US" sz="1100" dirty="0"/>
+          </a:p>
+        </p:txBody>
+      </p:sp>
+      <p:sp>
+        <p:nvSpPr>
+          <p:cNvPr id="32" name="Shape 30"/>
+          <p:cNvSpPr/>
+          <p:nvPr/>
+        </p:nvSpPr>
+        <p:spPr>
+          <a:xfrm>
+            <a:off x="1874520" y="4096512"/>
+            <a:ext cx="6903720" cy="804672"/>
           </a:xfrm>
           <a:prstGeom prst="rect">
             <a:avLst>
@@ -25489,85 +25384,19 @@
             </a:avLst>
           </a:prstGeom>
           <a:solidFill>
-            <a:srgbClr val="E2E8F0"/>
+            <a:srgbClr val="F8FAFC"/>
           </a:solidFill>
           <a:ln w="12700">
             <a:solidFill>
               <a:srgbClr val="E2E8F0"/>
             </a:solidFill>
-            <a:prstDash val="solid"/>
-          </a:ln>
-        </p:spPr>
-      </p:sp>
-      <p:sp>
-        <p:nvSpPr>
-          <p:cNvPr id="34" name="Text 32"/>
-          <p:cNvSpPr/>
-          <p:nvPr/>
-        </p:nvSpPr>
-        <p:spPr>
-          <a:xfrm>
-            <a:off x="365760" y="4096512"/>
-            <a:ext cx="1371600" cy="804672"/>
-          </a:xfrm>
-          <a:prstGeom prst="rect">
-            <a:avLst/>
-          </a:prstGeom>
-          <a:noFill/>
-          <a:ln/>
-        </p:spPr>
-        <p:txBody>
-          <a:bodyPr wrap="square" lIns="0" tIns="0" rIns="0" bIns="0" rtlCol="0" anchor="ctr"/>
-          <a:lstStyle/>
-          <a:p>
-            <a:pPr algn="ctr" indent="0" marL="0">
-              <a:buNone/>
-            </a:pPr>
-            <a:r>
-              <a:rPr lang="en-US" sz="1100" b="1" dirty="0">
-                <a:solidFill>
-                  <a:srgbClr val="475569"/>
-                </a:solidFill>
-                <a:latin typeface="Trebuchet MS" pitchFamily="34" charset="0"/>
-                <a:ea typeface="Trebuchet MS" pitchFamily="34" charset="-122"/>
-                <a:cs typeface="Trebuchet MS" pitchFamily="34" charset="-120"/>
-              </a:rPr>
-              <a:t>Phonemes</a:t>
-            </a:r>
-            <a:endParaRPr lang="en-US" sz="1100" dirty="0"/>
-          </a:p>
-        </p:txBody>
-      </p:sp>
-      <p:sp>
-        <p:nvSpPr>
-          <p:cNvPr id="35" name="Shape 33"/>
-          <p:cNvSpPr/>
-          <p:nvPr/>
-        </p:nvSpPr>
-        <p:spPr>
-          <a:xfrm>
-            <a:off x="1874520" y="4096512"/>
-            <a:ext cx="6903720" cy="804672"/>
-          </a:xfrm>
-          <a:prstGeom prst="rect">
-            <a:avLst>
-              <a:gd name="adj" fmla="val 6818"/>
-            </a:avLst>
-          </a:prstGeom>
-          <a:solidFill>
-            <a:srgbClr val="F8FAFC"/>
-          </a:solidFill>
-          <a:ln w="12700">
-            <a:solidFill>
-              <a:srgbClr val="E2E8F0"/>
-            </a:solidFill>
             <a:prstDash val="dash"/>
           </a:ln>
         </p:spPr>
       </p:sp>
       <p:sp>
         <p:nvSpPr>
-          <p:cNvPr id="36" name="Text 34"/>
+          <p:cNvPr id="33" name="Text 31"/>
           <p:cNvSpPr/>
           <p:nvPr/>
         </p:nvSpPr>
@@ -25890,7 +25719,7 @@
                 <a:ea typeface="Calibri" pitchFamily="34" charset="-122"/>
                 <a:cs typeface="Calibri" pitchFamily="34" charset="-120"/>
               </a:rPr>
-              <a:t>Word Labs  •  wordlabs.app  •  Root: 'pay' = give money in exchange</a:t>
+              <a:t>Word Labs  •  wordlabs.app  •  Root: 'pay' = give money owed</a:t>
             </a:r>
             <a:endParaRPr lang="en-US" sz="800" dirty="0"/>
           </a:p>
@@ -26029,7 +25858,7 @@
                 <a:ea typeface="Trebuchet MS" pitchFamily="34" charset="-122"/>
                 <a:cs typeface="Trebuchet MS" pitchFamily="34" charset="-120"/>
               </a:rPr>
-              <a:t>overpay</a:t>
+              <a:t>repay</a:t>
             </a:r>
             <a:endParaRPr lang="en-US" sz="2800" dirty="0"/>
           </a:p>
@@ -26168,7 +25997,7 @@
                 <a:ea typeface="Trebuchet MS" pitchFamily="34" charset="-122"/>
                 <a:cs typeface="Trebuchet MS" pitchFamily="34" charset="-120"/>
               </a:rPr>
-              <a:t>over</a:t>
+              <a:t>re</a:t>
             </a:r>
             <a:endParaRPr lang="en-US" sz="1300" dirty="0"/>
           </a:p>
@@ -26207,7 +26036,7 @@
                 <a:ea typeface="Calibri" pitchFamily="34" charset="-122"/>
                 <a:cs typeface="Calibri" pitchFamily="34" charset="-120"/>
               </a:rPr>
-              <a:t>too much, above</a:t>
+              <a:t>again or back</a:t>
             </a:r>
             <a:endParaRPr lang="en-US" sz="850" dirty="0"/>
           </a:p>
@@ -26319,7 +26148,7 @@
                 <a:ea typeface="Calibri" pitchFamily="34" charset="-122"/>
                 <a:cs typeface="Calibri" pitchFamily="34" charset="-120"/>
               </a:rPr>
-              <a:t>give money</a:t>
+              <a:t>give money owed</a:t>
             </a:r>
             <a:endParaRPr lang="en-US" sz="850" dirty="0"/>
           </a:p>
@@ -26426,7 +26255,7 @@
         </p:nvSpPr>
         <p:spPr>
           <a:xfrm>
-            <a:off x="2313432" y="3364992"/>
+            <a:off x="2999232" y="3364992"/>
             <a:ext cx="1645920" cy="475488"/>
           </a:xfrm>
           <a:prstGeom prst="rect">
@@ -26453,7 +26282,7 @@
         </p:nvSpPr>
         <p:spPr>
           <a:xfrm>
-            <a:off x="2313432" y="3364992"/>
+            <a:off x="2999232" y="3364992"/>
             <a:ext cx="1645920" cy="475488"/>
           </a:xfrm>
           <a:prstGeom prst="rect">
@@ -26478,7 +26307,7 @@
                 <a:ea typeface="Trebuchet MS" pitchFamily="34" charset="-122"/>
                 <a:cs typeface="Trebuchet MS" pitchFamily="34" charset="-120"/>
               </a:rPr>
-              <a:t>o</a:t>
+              <a:t>re</a:t>
             </a:r>
             <a:endParaRPr lang="en-US" sz="1400" dirty="0"/>
           </a:p>
@@ -26492,8 +26321,8 @@
         </p:nvSpPr>
         <p:spPr>
           <a:xfrm>
-            <a:off x="3959352" y="3364992"/>
-            <a:ext cx="411480" cy="475488"/>
+            <a:off x="4645152" y="3364992"/>
+            <a:ext cx="1097280" cy="475488"/>
           </a:xfrm>
           <a:prstGeom prst="rect">
             <a:avLst/>
@@ -26531,7 +26360,7 @@
         </p:nvSpPr>
         <p:spPr>
           <a:xfrm>
-            <a:off x="4370832" y="3364992"/>
+            <a:off x="5742432" y="3364992"/>
             <a:ext cx="1645920" cy="475488"/>
           </a:xfrm>
           <a:prstGeom prst="rect">
@@ -26558,7 +26387,7 @@
         </p:nvSpPr>
         <p:spPr>
           <a:xfrm>
-            <a:off x="4370832" y="3364992"/>
+            <a:off x="5742432" y="3364992"/>
             <a:ext cx="1645920" cy="475488"/>
           </a:xfrm>
           <a:prstGeom prst="rect">
@@ -26583,7 +26412,7 @@
                 <a:ea typeface="Trebuchet MS" pitchFamily="34" charset="-122"/>
                 <a:cs typeface="Trebuchet MS" pitchFamily="34" charset="-120"/>
               </a:rPr>
-              <a:t>ver</a:t>
+              <a:t>pay</a:t>
             </a:r>
             <a:endParaRPr lang="en-US" sz="1400" dirty="0"/>
           </a:p>
@@ -26591,14 +26420,41 @@
       </p:sp>
       <p:sp>
         <p:nvSpPr>
-          <p:cNvPr id="30" name="Text 28"/>
-          <p:cNvSpPr/>
-          <p:nvPr/>
-        </p:nvSpPr>
-        <p:spPr>
-          <a:xfrm>
-            <a:off x="6016752" y="3364992"/>
-            <a:ext cx="411480" cy="475488"/>
+          <p:cNvPr id="30" name="Shape 28"/>
+          <p:cNvSpPr/>
+          <p:nvPr/>
+        </p:nvSpPr>
+        <p:spPr>
+          <a:xfrm>
+            <a:off x="365760" y="4096512"/>
+            <a:ext cx="1371600" cy="804672"/>
+          </a:xfrm>
+          <a:prstGeom prst="rect">
+            <a:avLst>
+              <a:gd name="adj" fmla="val 6818"/>
+            </a:avLst>
+          </a:prstGeom>
+          <a:solidFill>
+            <a:srgbClr val="E2E8F0"/>
+          </a:solidFill>
+          <a:ln w="12700">
+            <a:solidFill>
+              <a:srgbClr val="E2E8F0"/>
+            </a:solidFill>
+            <a:prstDash val="solid"/>
+          </a:ln>
+        </p:spPr>
+      </p:sp>
+      <p:sp>
+        <p:nvSpPr>
+          <p:cNvPr id="31" name="Text 29"/>
+          <p:cNvSpPr/>
+          <p:nvPr/>
+        </p:nvSpPr>
+        <p:spPr>
+          <a:xfrm>
+            <a:off x="365760" y="4096512"/>
+            <a:ext cx="1371600" cy="804672"/>
           </a:xfrm>
           <a:prstGeom prst="rect">
             <a:avLst/>
@@ -26614,57 +26470,84 @@
               <a:buNone/>
             </a:pPr>
             <a:r>
-              <a:rPr lang="en-US" sz="1600" b="1" dirty="0">
-                <a:solidFill>
-                  <a:srgbClr val="0D9488"/>
+              <a:rPr lang="en-US" sz="1100" b="1" dirty="0">
+                <a:solidFill>
+                  <a:srgbClr val="475569"/>
                 </a:solidFill>
                 <a:latin typeface="Trebuchet MS" pitchFamily="34" charset="0"/>
                 <a:ea typeface="Trebuchet MS" pitchFamily="34" charset="-122"/>
                 <a:cs typeface="Trebuchet MS" pitchFamily="34" charset="-120"/>
               </a:rPr>
-              <a:t>·</a:t>
-            </a:r>
-            <a:endParaRPr lang="en-US" sz="1600" dirty="0"/>
-          </a:p>
-        </p:txBody>
-      </p:sp>
-      <p:sp>
-        <p:nvSpPr>
-          <p:cNvPr id="31" name="Shape 29"/>
-          <p:cNvSpPr/>
-          <p:nvPr/>
-        </p:nvSpPr>
-        <p:spPr>
-          <a:xfrm>
-            <a:off x="6428232" y="3364992"/>
-            <a:ext cx="1645920" cy="475488"/>
+              <a:t>Phonemes</a:t>
+            </a:r>
+            <a:endParaRPr lang="en-US" sz="1100" dirty="0"/>
+          </a:p>
+        </p:txBody>
+      </p:sp>
+      <p:sp>
+        <p:nvSpPr>
+          <p:cNvPr id="32" name="Shape 30"/>
+          <p:cNvSpPr/>
+          <p:nvPr/>
+        </p:nvSpPr>
+        <p:spPr>
+          <a:xfrm>
+            <a:off x="1874520" y="4096512"/>
+            <a:ext cx="6903720" cy="658368"/>
           </a:xfrm>
           <a:prstGeom prst="rect">
             <a:avLst>
-              <a:gd name="adj" fmla="val 9615"/>
+              <a:gd name="adj" fmla="val 8333"/>
             </a:avLst>
           </a:prstGeom>
           <a:solidFill>
+            <a:srgbClr val="FCE7F3"/>
+          </a:solidFill>
+          <a:ln w="12700">
+            <a:solidFill>
+              <a:srgbClr val="DB2777"/>
+            </a:solidFill>
+            <a:prstDash val="solid"/>
+          </a:ln>
+        </p:spPr>
+      </p:sp>
+      <p:sp>
+        <p:nvSpPr>
+          <p:cNvPr id="33" name="Shape 31"/>
+          <p:cNvSpPr/>
+          <p:nvPr/>
+        </p:nvSpPr>
+        <p:spPr>
+          <a:xfrm>
+            <a:off x="2670048" y="4169664"/>
+            <a:ext cx="685800" cy="475488"/>
+          </a:xfrm>
+          <a:prstGeom prst="rect">
+            <a:avLst>
+              <a:gd name="adj" fmla="val 7692"/>
+            </a:avLst>
+          </a:prstGeom>
+          <a:solidFill>
             <a:srgbClr val="FFFFFF"/>
           </a:solidFill>
           <a:ln w="12700">
             <a:solidFill>
-              <a:srgbClr val="0D9488"/>
-            </a:solidFill>
-            <a:prstDash val="solid"/>
-          </a:ln>
-        </p:spPr>
-      </p:sp>
-      <p:sp>
-        <p:nvSpPr>
-          <p:cNvPr id="32" name="Text 30"/>
-          <p:cNvSpPr/>
-          <p:nvPr/>
-        </p:nvSpPr>
-        <p:spPr>
-          <a:xfrm>
-            <a:off x="6428232" y="3364992"/>
-            <a:ext cx="1645920" cy="475488"/>
+              <a:srgbClr val="DB2777"/>
+            </a:solidFill>
+            <a:prstDash val="solid"/>
+          </a:ln>
+        </p:spPr>
+      </p:sp>
+      <p:sp>
+        <p:nvSpPr>
+          <p:cNvPr id="34" name="Text 32"/>
+          <p:cNvSpPr/>
+          <p:nvPr/>
+        </p:nvSpPr>
+        <p:spPr>
+          <a:xfrm>
+            <a:off x="2670048" y="4169664"/>
+            <a:ext cx="685800" cy="475488"/>
           </a:xfrm>
           <a:prstGeom prst="rect">
             <a:avLst/>
@@ -26680,57 +26563,57 @@
               <a:buNone/>
             </a:pPr>
             <a:r>
-              <a:rPr lang="en-US" sz="1400" b="1" dirty="0">
-                <a:solidFill>
-                  <a:srgbClr val="0D9488"/>
+              <a:rPr lang="en-US" sz="900" b="1" dirty="0">
+                <a:solidFill>
+                  <a:srgbClr val="9D174D"/>
                 </a:solidFill>
                 <a:latin typeface="Trebuchet MS" pitchFamily="34" charset="0"/>
                 <a:ea typeface="Trebuchet MS" pitchFamily="34" charset="-122"/>
                 <a:cs typeface="Trebuchet MS" pitchFamily="34" charset="-120"/>
               </a:rPr>
-              <a:t>pay</a:t>
-            </a:r>
-            <a:endParaRPr lang="en-US" sz="1400" dirty="0"/>
-          </a:p>
-        </p:txBody>
-      </p:sp>
-      <p:sp>
-        <p:nvSpPr>
-          <p:cNvPr id="33" name="Shape 31"/>
-          <p:cNvSpPr/>
-          <p:nvPr/>
-        </p:nvSpPr>
-        <p:spPr>
-          <a:xfrm>
-            <a:off x="365760" y="4096512"/>
-            <a:ext cx="1371600" cy="804672"/>
+              <a:t>r</a:t>
+            </a:r>
+            <a:endParaRPr lang="en-US" sz="900" dirty="0"/>
+          </a:p>
+        </p:txBody>
+      </p:sp>
+      <p:sp>
+        <p:nvSpPr>
+          <p:cNvPr id="35" name="Shape 33"/>
+          <p:cNvSpPr/>
+          <p:nvPr/>
+        </p:nvSpPr>
+        <p:spPr>
+          <a:xfrm>
+            <a:off x="4123944" y="4169664"/>
+            <a:ext cx="685800" cy="475488"/>
           </a:xfrm>
           <a:prstGeom prst="rect">
             <a:avLst>
-              <a:gd name="adj" fmla="val 6818"/>
+              <a:gd name="adj" fmla="val 7692"/>
             </a:avLst>
           </a:prstGeom>
           <a:solidFill>
-            <a:srgbClr val="E2E8F0"/>
-          </a:solidFill>
-          <a:ln w="12700">
-            <a:solidFill>
-              <a:srgbClr val="E2E8F0"/>
-            </a:solidFill>
-            <a:prstDash val="solid"/>
-          </a:ln>
-        </p:spPr>
-      </p:sp>
-      <p:sp>
-        <p:nvSpPr>
-          <p:cNvPr id="34" name="Text 32"/>
-          <p:cNvSpPr/>
-          <p:nvPr/>
-        </p:nvSpPr>
-        <p:spPr>
-          <a:xfrm>
-            <a:off x="365760" y="4096512"/>
-            <a:ext cx="1371600" cy="804672"/>
+            <a:srgbClr val="FFFFFF"/>
+          </a:solidFill>
+          <a:ln w="12700">
+            <a:solidFill>
+              <a:srgbClr val="DB2777"/>
+            </a:solidFill>
+            <a:prstDash val="solid"/>
+          </a:ln>
+        </p:spPr>
+      </p:sp>
+      <p:sp>
+        <p:nvSpPr>
+          <p:cNvPr id="36" name="Text 34"/>
+          <p:cNvSpPr/>
+          <p:nvPr/>
+        </p:nvSpPr>
+        <p:spPr>
+          <a:xfrm>
+            <a:off x="4123944" y="4169664"/>
+            <a:ext cx="685800" cy="475488"/>
           </a:xfrm>
           <a:prstGeom prst="rect">
             <a:avLst/>
@@ -26746,56 +26629,29 @@
               <a:buNone/>
             </a:pPr>
             <a:r>
-              <a:rPr lang="en-US" sz="1100" b="1" dirty="0">
-                <a:solidFill>
-                  <a:srgbClr val="475569"/>
+              <a:rPr lang="en-US" sz="900" b="1" dirty="0">
+                <a:solidFill>
+                  <a:srgbClr val="9D174D"/>
                 </a:solidFill>
                 <a:latin typeface="Trebuchet MS" pitchFamily="34" charset="0"/>
                 <a:ea typeface="Trebuchet MS" pitchFamily="34" charset="-122"/>
                 <a:cs typeface="Trebuchet MS" pitchFamily="34" charset="-120"/>
               </a:rPr>
-              <a:t>Phonemes</a:t>
-            </a:r>
-            <a:endParaRPr lang="en-US" sz="1100" dirty="0"/>
-          </a:p>
-        </p:txBody>
-      </p:sp>
-      <p:sp>
-        <p:nvSpPr>
-          <p:cNvPr id="35" name="Shape 33"/>
-          <p:cNvSpPr/>
-          <p:nvPr/>
-        </p:nvSpPr>
-        <p:spPr>
-          <a:xfrm>
-            <a:off x="1874520" y="4096512"/>
-            <a:ext cx="6903720" cy="658368"/>
-          </a:xfrm>
-          <a:prstGeom prst="rect">
-            <a:avLst>
-              <a:gd name="adj" fmla="val 8333"/>
-            </a:avLst>
-          </a:prstGeom>
-          <a:solidFill>
-            <a:srgbClr val="FCE7F3"/>
-          </a:solidFill>
-          <a:ln w="12700">
-            <a:solidFill>
-              <a:srgbClr val="DB2777"/>
-            </a:solidFill>
-            <a:prstDash val="solid"/>
-          </a:ln>
-        </p:spPr>
-      </p:sp>
-      <p:sp>
-        <p:nvSpPr>
-          <p:cNvPr id="36" name="Shape 34"/>
-          <p:cNvSpPr/>
-          <p:nvPr/>
-        </p:nvSpPr>
-        <p:spPr>
-          <a:xfrm>
-            <a:off x="2427732" y="4169664"/>
+              <a:t>e</a:t>
+            </a:r>
+            <a:endParaRPr lang="en-US" sz="900" dirty="0"/>
+          </a:p>
+        </p:txBody>
+      </p:sp>
+      <p:sp>
+        <p:nvSpPr>
+          <p:cNvPr id="37" name="Shape 35"/>
+          <p:cNvSpPr/>
+          <p:nvPr/>
+        </p:nvSpPr>
+        <p:spPr>
+          <a:xfrm>
+            <a:off x="5577840" y="4169664"/>
             <a:ext cx="685800" cy="475488"/>
           </a:xfrm>
           <a:prstGeom prst="rect">
@@ -26816,13 +26672,13 @@
       </p:sp>
       <p:sp>
         <p:nvSpPr>
-          <p:cNvPr id="37" name="Text 35"/>
-          <p:cNvSpPr/>
-          <p:nvPr/>
-        </p:nvSpPr>
-        <p:spPr>
-          <a:xfrm>
-            <a:off x="2427732" y="4169664"/>
+          <p:cNvPr id="38" name="Text 36"/>
+          <p:cNvSpPr/>
+          <p:nvPr/>
+        </p:nvSpPr>
+        <p:spPr>
+          <a:xfrm>
+            <a:off x="5577840" y="4169664"/>
             <a:ext cx="685800" cy="475488"/>
           </a:xfrm>
           <a:prstGeom prst="rect">
@@ -26847,7 +26703,7 @@
                 <a:ea typeface="Trebuchet MS" pitchFamily="34" charset="-122"/>
                 <a:cs typeface="Trebuchet MS" pitchFamily="34" charset="-120"/>
               </a:rPr>
-              <a:t>o</a:t>
+              <a:t>p</a:t>
             </a:r>
             <a:endParaRPr lang="en-US" sz="900" dirty="0"/>
           </a:p>
@@ -26855,13 +26711,13 @@
       </p:sp>
       <p:sp>
         <p:nvSpPr>
-          <p:cNvPr id="38" name="Shape 36"/>
-          <p:cNvSpPr/>
-          <p:nvPr/>
-        </p:nvSpPr>
-        <p:spPr>
-          <a:xfrm>
-            <a:off x="3639312" y="4169664"/>
+          <p:cNvPr id="39" name="Shape 37"/>
+          <p:cNvSpPr/>
+          <p:nvPr/>
+        </p:nvSpPr>
+        <p:spPr>
+          <a:xfrm>
+            <a:off x="7031736" y="4169664"/>
             <a:ext cx="685800" cy="475488"/>
           </a:xfrm>
           <a:prstGeom prst="rect">
@@ -26882,211 +26738,13 @@
       </p:sp>
       <p:sp>
         <p:nvSpPr>
-          <p:cNvPr id="39" name="Text 37"/>
-          <p:cNvSpPr/>
-          <p:nvPr/>
-        </p:nvSpPr>
-        <p:spPr>
-          <a:xfrm>
-            <a:off x="3639312" y="4169664"/>
-            <a:ext cx="685800" cy="475488"/>
-          </a:xfrm>
-          <a:prstGeom prst="rect">
-            <a:avLst/>
-          </a:prstGeom>
-          <a:noFill/>
-          <a:ln/>
-        </p:spPr>
-        <p:txBody>
-          <a:bodyPr wrap="square" lIns="0" tIns="0" rIns="0" bIns="0" rtlCol="0" anchor="ctr"/>
-          <a:lstStyle/>
-          <a:p>
-            <a:pPr algn="ctr" indent="0" marL="0">
-              <a:buNone/>
-            </a:pPr>
-            <a:r>
-              <a:rPr lang="en-US" sz="900" b="1" dirty="0">
-                <a:solidFill>
-                  <a:srgbClr val="9D174D"/>
-                </a:solidFill>
-                <a:latin typeface="Trebuchet MS" pitchFamily="34" charset="0"/>
-                <a:ea typeface="Trebuchet MS" pitchFamily="34" charset="-122"/>
-                <a:cs typeface="Trebuchet MS" pitchFamily="34" charset="-120"/>
-              </a:rPr>
-              <a:t>v</a:t>
-            </a:r>
-            <a:endParaRPr lang="en-US" sz="900" dirty="0"/>
-          </a:p>
-        </p:txBody>
-      </p:sp>
-      <p:sp>
-        <p:nvSpPr>
-          <p:cNvPr id="40" name="Shape 38"/>
-          <p:cNvSpPr/>
-          <p:nvPr/>
-        </p:nvSpPr>
-        <p:spPr>
-          <a:xfrm>
-            <a:off x="4850892" y="4169664"/>
-            <a:ext cx="685800" cy="475488"/>
-          </a:xfrm>
-          <a:prstGeom prst="rect">
-            <a:avLst>
-              <a:gd name="adj" fmla="val 7692"/>
-            </a:avLst>
-          </a:prstGeom>
-          <a:solidFill>
-            <a:srgbClr val="FFFFFF"/>
-          </a:solidFill>
-          <a:ln w="12700">
-            <a:solidFill>
-              <a:srgbClr val="DB2777"/>
-            </a:solidFill>
-            <a:prstDash val="solid"/>
-          </a:ln>
-        </p:spPr>
-      </p:sp>
-      <p:sp>
-        <p:nvSpPr>
-          <p:cNvPr id="41" name="Text 39"/>
-          <p:cNvSpPr/>
-          <p:nvPr/>
-        </p:nvSpPr>
-        <p:spPr>
-          <a:xfrm>
-            <a:off x="4850892" y="4169664"/>
-            <a:ext cx="685800" cy="475488"/>
-          </a:xfrm>
-          <a:prstGeom prst="rect">
-            <a:avLst/>
-          </a:prstGeom>
-          <a:noFill/>
-          <a:ln/>
-        </p:spPr>
-        <p:txBody>
-          <a:bodyPr wrap="square" lIns="0" tIns="0" rIns="0" bIns="0" rtlCol="0" anchor="ctr"/>
-          <a:lstStyle/>
-          <a:p>
-            <a:pPr algn="ctr" indent="0" marL="0">
-              <a:buNone/>
-            </a:pPr>
-            <a:r>
-              <a:rPr lang="en-US" sz="900" b="1" dirty="0">
-                <a:solidFill>
-                  <a:srgbClr val="9D174D"/>
-                </a:solidFill>
-                <a:latin typeface="Trebuchet MS" pitchFamily="34" charset="0"/>
-                <a:ea typeface="Trebuchet MS" pitchFamily="34" charset="-122"/>
-                <a:cs typeface="Trebuchet MS" pitchFamily="34" charset="-120"/>
-              </a:rPr>
-              <a:t>er</a:t>
-            </a:r>
-            <a:endParaRPr lang="en-US" sz="900" dirty="0"/>
-          </a:p>
-        </p:txBody>
-      </p:sp>
-      <p:sp>
-        <p:nvSpPr>
-          <p:cNvPr id="42" name="Shape 40"/>
-          <p:cNvSpPr/>
-          <p:nvPr/>
-        </p:nvSpPr>
-        <p:spPr>
-          <a:xfrm>
-            <a:off x="6062472" y="4169664"/>
-            <a:ext cx="685800" cy="475488"/>
-          </a:xfrm>
-          <a:prstGeom prst="rect">
-            <a:avLst>
-              <a:gd name="adj" fmla="val 7692"/>
-            </a:avLst>
-          </a:prstGeom>
-          <a:solidFill>
-            <a:srgbClr val="FFFFFF"/>
-          </a:solidFill>
-          <a:ln w="12700">
-            <a:solidFill>
-              <a:srgbClr val="DB2777"/>
-            </a:solidFill>
-            <a:prstDash val="solid"/>
-          </a:ln>
-        </p:spPr>
-      </p:sp>
-      <p:sp>
-        <p:nvSpPr>
-          <p:cNvPr id="43" name="Text 41"/>
-          <p:cNvSpPr/>
-          <p:nvPr/>
-        </p:nvSpPr>
-        <p:spPr>
-          <a:xfrm>
-            <a:off x="6062472" y="4169664"/>
-            <a:ext cx="685800" cy="475488"/>
-          </a:xfrm>
-          <a:prstGeom prst="rect">
-            <a:avLst/>
-          </a:prstGeom>
-          <a:noFill/>
-          <a:ln/>
-        </p:spPr>
-        <p:txBody>
-          <a:bodyPr wrap="square" lIns="0" tIns="0" rIns="0" bIns="0" rtlCol="0" anchor="ctr"/>
-          <a:lstStyle/>
-          <a:p>
-            <a:pPr algn="ctr" indent="0" marL="0">
-              <a:buNone/>
-            </a:pPr>
-            <a:r>
-              <a:rPr lang="en-US" sz="900" b="1" dirty="0">
-                <a:solidFill>
-                  <a:srgbClr val="9D174D"/>
-                </a:solidFill>
-                <a:latin typeface="Trebuchet MS" pitchFamily="34" charset="0"/>
-                <a:ea typeface="Trebuchet MS" pitchFamily="34" charset="-122"/>
-                <a:cs typeface="Trebuchet MS" pitchFamily="34" charset="-120"/>
-              </a:rPr>
-              <a:t>p</a:t>
-            </a:r>
-            <a:endParaRPr lang="en-US" sz="900" dirty="0"/>
-          </a:p>
-        </p:txBody>
-      </p:sp>
-      <p:sp>
-        <p:nvSpPr>
-          <p:cNvPr id="44" name="Shape 42"/>
-          <p:cNvSpPr/>
-          <p:nvPr/>
-        </p:nvSpPr>
-        <p:spPr>
-          <a:xfrm>
-            <a:off x="7274052" y="4169664"/>
-            <a:ext cx="685800" cy="475488"/>
-          </a:xfrm>
-          <a:prstGeom prst="rect">
-            <a:avLst>
-              <a:gd name="adj" fmla="val 7692"/>
-            </a:avLst>
-          </a:prstGeom>
-          <a:solidFill>
-            <a:srgbClr val="FFFFFF"/>
-          </a:solidFill>
-          <a:ln w="12700">
-            <a:solidFill>
-              <a:srgbClr val="DB2777"/>
-            </a:solidFill>
-            <a:prstDash val="solid"/>
-          </a:ln>
-        </p:spPr>
-      </p:sp>
-      <p:sp>
-        <p:nvSpPr>
-          <p:cNvPr id="45" name="Text 43"/>
-          <p:cNvSpPr/>
-          <p:nvPr/>
-        </p:nvSpPr>
-        <p:spPr>
-          <a:xfrm>
-            <a:off x="7274052" y="4169664"/>
+          <p:cNvPr id="40" name="Text 38"/>
+          <p:cNvSpPr/>
+          <p:nvPr/>
+        </p:nvSpPr>
+        <p:spPr>
+          <a:xfrm>
+            <a:off x="7031736" y="4169664"/>
             <a:ext cx="685800" cy="475488"/>
           </a:xfrm>
           <a:prstGeom prst="rect">
@@ -27403,7 +27061,7 @@
                 <a:ea typeface="Calibri" pitchFamily="34" charset="-122"/>
                 <a:cs typeface="Calibri" pitchFamily="34" charset="-120"/>
               </a:rPr>
-              <a:t>Word Labs  •  wordlabs.app  •  Root: 'pay' = give money in exchange</a:t>
+              <a:t>Word Labs  •  wordlabs.app  •  Root: 'pay' = give money owed</a:t>
             </a:r>
             <a:endParaRPr lang="en-US" sz="800" dirty="0"/>
           </a:p>
@@ -27542,7 +27200,7 @@
                 <a:ea typeface="Trebuchet MS" pitchFamily="34" charset="-122"/>
                 <a:cs typeface="Trebuchet MS" pitchFamily="34" charset="-120"/>
               </a:rPr>
-              <a:t>repay</a:t>
+              <a:t>underpay</a:t>
             </a:r>
             <a:endParaRPr lang="en-US" sz="2800" dirty="0"/>
           </a:p>
@@ -28230,7 +27888,7 @@
                 <a:ea typeface="Calibri" pitchFamily="34" charset="-122"/>
                 <a:cs typeface="Calibri" pitchFamily="34" charset="-120"/>
               </a:rPr>
-              <a:t>Word Labs  •  wordlabs.app  •  Root: 'pay' = give money in exchange</a:t>
+              <a:t>Word Labs  •  wordlabs.app  •  Root: 'pay' = give money owed</a:t>
             </a:r>
             <a:endParaRPr lang="en-US" sz="800" dirty="0"/>
           </a:p>
@@ -28369,7 +28027,7 @@
                 <a:ea typeface="Trebuchet MS" pitchFamily="34" charset="-122"/>
                 <a:cs typeface="Trebuchet MS" pitchFamily="34" charset="-120"/>
               </a:rPr>
-              <a:t>repay</a:t>
+              <a:t>underpay</a:t>
             </a:r>
             <a:endParaRPr lang="en-US" sz="2800" dirty="0"/>
           </a:p>
@@ -28508,7 +28166,7 @@
                 <a:ea typeface="Trebuchet MS" pitchFamily="34" charset="-122"/>
                 <a:cs typeface="Trebuchet MS" pitchFamily="34" charset="-120"/>
               </a:rPr>
-              <a:t>re</a:t>
+              <a:t>under</a:t>
             </a:r>
             <a:endParaRPr lang="en-US" sz="1300" dirty="0"/>
           </a:p>
@@ -28547,7 +28205,7 @@
                 <a:ea typeface="Calibri" pitchFamily="34" charset="-122"/>
                 <a:cs typeface="Calibri" pitchFamily="34" charset="-120"/>
               </a:rPr>
-              <a:t>again, back</a:t>
+              <a:t>below or less than</a:t>
             </a:r>
             <a:endParaRPr lang="en-US" sz="850" dirty="0"/>
           </a:p>
@@ -28659,7 +28317,7 @@
                 <a:ea typeface="Calibri" pitchFamily="34" charset="-122"/>
                 <a:cs typeface="Calibri" pitchFamily="34" charset="-120"/>
               </a:rPr>
-              <a:t>give money</a:t>
+              <a:t>give money owed</a:t>
             </a:r>
             <a:endParaRPr lang="en-US" sz="850" dirty="0"/>
           </a:p>
@@ -29215,7 +28873,7 @@
                 <a:ea typeface="Calibri" pitchFamily="34" charset="-122"/>
                 <a:cs typeface="Calibri" pitchFamily="34" charset="-120"/>
               </a:rPr>
-              <a:t>Word Labs  •  wordlabs.app  •  Root: 'pay' = give money in exchange</a:t>
+              <a:t>Word Labs  •  wordlabs.app  •  Root: 'pay' = give money owed</a:t>
             </a:r>
             <a:endParaRPr lang="en-US" sz="800" dirty="0"/>
           </a:p>
@@ -29354,7 +29012,7 @@
                 <a:ea typeface="Trebuchet MS" pitchFamily="34" charset="-122"/>
                 <a:cs typeface="Trebuchet MS" pitchFamily="34" charset="-120"/>
               </a:rPr>
-              <a:t>repay</a:t>
+              <a:t>underpay</a:t>
             </a:r>
             <a:endParaRPr lang="en-US" sz="2800" dirty="0"/>
           </a:p>
@@ -29493,7 +29151,7 @@
                 <a:ea typeface="Trebuchet MS" pitchFamily="34" charset="-122"/>
                 <a:cs typeface="Trebuchet MS" pitchFamily="34" charset="-120"/>
               </a:rPr>
-              <a:t>re</a:t>
+              <a:t>under</a:t>
             </a:r>
             <a:endParaRPr lang="en-US" sz="1300" dirty="0"/>
           </a:p>
@@ -29532,7 +29190,7 @@
                 <a:ea typeface="Calibri" pitchFamily="34" charset="-122"/>
                 <a:cs typeface="Calibri" pitchFamily="34" charset="-120"/>
               </a:rPr>
-              <a:t>again, back</a:t>
+              <a:t>below or less than</a:t>
             </a:r>
             <a:endParaRPr lang="en-US" sz="850" dirty="0"/>
           </a:p>
@@ -29644,7 +29302,7 @@
                 <a:ea typeface="Calibri" pitchFamily="34" charset="-122"/>
                 <a:cs typeface="Calibri" pitchFamily="34" charset="-120"/>
               </a:rPr>
-              <a:t>give money</a:t>
+              <a:t>give money owed</a:t>
             </a:r>
             <a:endParaRPr lang="en-US" sz="850" dirty="0"/>
           </a:p>
@@ -29751,7 +29409,7 @@
         </p:nvSpPr>
         <p:spPr>
           <a:xfrm>
-            <a:off x="2999232" y="3364992"/>
+            <a:off x="2313432" y="3364992"/>
             <a:ext cx="1645920" cy="475488"/>
           </a:xfrm>
           <a:prstGeom prst="rect">
@@ -29778,7 +29436,7 @@
         </p:nvSpPr>
         <p:spPr>
           <a:xfrm>
-            <a:off x="2999232" y="3364992"/>
+            <a:off x="2313432" y="3364992"/>
             <a:ext cx="1645920" cy="475488"/>
           </a:xfrm>
           <a:prstGeom prst="rect">
@@ -29803,7 +29461,7 @@
                 <a:ea typeface="Trebuchet MS" pitchFamily="34" charset="-122"/>
                 <a:cs typeface="Trebuchet MS" pitchFamily="34" charset="-120"/>
               </a:rPr>
-              <a:t>re</a:t>
+              <a:t>un</a:t>
             </a:r>
             <a:endParaRPr lang="en-US" sz="1400" dirty="0"/>
           </a:p>
@@ -29817,8 +29475,8 @@
         </p:nvSpPr>
         <p:spPr>
           <a:xfrm>
-            <a:off x="4645152" y="3364992"/>
-            <a:ext cx="1097280" cy="475488"/>
+            <a:off x="3959352" y="3364992"/>
+            <a:ext cx="411480" cy="475488"/>
           </a:xfrm>
           <a:prstGeom prst="rect">
             <a:avLst/>
@@ -29856,7 +29514,7 @@
         </p:nvSpPr>
         <p:spPr>
           <a:xfrm>
-            <a:off x="5742432" y="3364992"/>
+            <a:off x="4370832" y="3364992"/>
             <a:ext cx="1645920" cy="475488"/>
           </a:xfrm>
           <a:prstGeom prst="rect">
@@ -29883,7 +29541,7 @@
         </p:nvSpPr>
         <p:spPr>
           <a:xfrm>
-            <a:off x="5742432" y="3364992"/>
+            <a:off x="4370832" y="3364992"/>
             <a:ext cx="1645920" cy="475488"/>
           </a:xfrm>
           <a:prstGeom prst="rect">
@@ -29908,6 +29566,111 @@
                 <a:ea typeface="Trebuchet MS" pitchFamily="34" charset="-122"/>
                 <a:cs typeface="Trebuchet MS" pitchFamily="34" charset="-120"/>
               </a:rPr>
+              <a:t>der</a:t>
+            </a:r>
+            <a:endParaRPr lang="en-US" sz="1400" dirty="0"/>
+          </a:p>
+        </p:txBody>
+      </p:sp>
+      <p:sp>
+        <p:nvSpPr>
+          <p:cNvPr id="30" name="Text 28"/>
+          <p:cNvSpPr/>
+          <p:nvPr/>
+        </p:nvSpPr>
+        <p:spPr>
+          <a:xfrm>
+            <a:off x="6016752" y="3364992"/>
+            <a:ext cx="411480" cy="475488"/>
+          </a:xfrm>
+          <a:prstGeom prst="rect">
+            <a:avLst/>
+          </a:prstGeom>
+          <a:noFill/>
+          <a:ln/>
+        </p:spPr>
+        <p:txBody>
+          <a:bodyPr wrap="square" lIns="0" tIns="0" rIns="0" bIns="0" rtlCol="0" anchor="ctr"/>
+          <a:lstStyle/>
+          <a:p>
+            <a:pPr algn="ctr" indent="0" marL="0">
+              <a:buNone/>
+            </a:pPr>
+            <a:r>
+              <a:rPr lang="en-US" sz="1600" b="1" dirty="0">
+                <a:solidFill>
+                  <a:srgbClr val="0D9488"/>
+                </a:solidFill>
+                <a:latin typeface="Trebuchet MS" pitchFamily="34" charset="0"/>
+                <a:ea typeface="Trebuchet MS" pitchFamily="34" charset="-122"/>
+                <a:cs typeface="Trebuchet MS" pitchFamily="34" charset="-120"/>
+              </a:rPr>
+              <a:t>·</a:t>
+            </a:r>
+            <a:endParaRPr lang="en-US" sz="1600" dirty="0"/>
+          </a:p>
+        </p:txBody>
+      </p:sp>
+      <p:sp>
+        <p:nvSpPr>
+          <p:cNvPr id="31" name="Shape 29"/>
+          <p:cNvSpPr/>
+          <p:nvPr/>
+        </p:nvSpPr>
+        <p:spPr>
+          <a:xfrm>
+            <a:off x="6428232" y="3364992"/>
+            <a:ext cx="1645920" cy="475488"/>
+          </a:xfrm>
+          <a:prstGeom prst="rect">
+            <a:avLst>
+              <a:gd name="adj" fmla="val 9615"/>
+            </a:avLst>
+          </a:prstGeom>
+          <a:solidFill>
+            <a:srgbClr val="FFFFFF"/>
+          </a:solidFill>
+          <a:ln w="12700">
+            <a:solidFill>
+              <a:srgbClr val="0D9488"/>
+            </a:solidFill>
+            <a:prstDash val="solid"/>
+          </a:ln>
+        </p:spPr>
+      </p:sp>
+      <p:sp>
+        <p:nvSpPr>
+          <p:cNvPr id="32" name="Text 30"/>
+          <p:cNvSpPr/>
+          <p:nvPr/>
+        </p:nvSpPr>
+        <p:spPr>
+          <a:xfrm>
+            <a:off x="6428232" y="3364992"/>
+            <a:ext cx="1645920" cy="475488"/>
+          </a:xfrm>
+          <a:prstGeom prst="rect">
+            <a:avLst/>
+          </a:prstGeom>
+          <a:noFill/>
+          <a:ln/>
+        </p:spPr>
+        <p:txBody>
+          <a:bodyPr wrap="square" lIns="0" tIns="0" rIns="0" bIns="0" rtlCol="0" anchor="ctr"/>
+          <a:lstStyle/>
+          <a:p>
+            <a:pPr algn="ctr" indent="0" marL="0">
+              <a:buNone/>
+            </a:pPr>
+            <a:r>
+              <a:rPr lang="en-US" sz="1400" b="1" dirty="0">
+                <a:solidFill>
+                  <a:srgbClr val="0D9488"/>
+                </a:solidFill>
+                <a:latin typeface="Trebuchet MS" pitchFamily="34" charset="0"/>
+                <a:ea typeface="Trebuchet MS" pitchFamily="34" charset="-122"/>
+                <a:cs typeface="Trebuchet MS" pitchFamily="34" charset="-120"/>
+              </a:rPr>
               <a:t>pay</a:t>
             </a:r>
             <a:endParaRPr lang="en-US" sz="1400" dirty="0"/>
@@ -29916,7 +29679,7 @@
       </p:sp>
       <p:sp>
         <p:nvSpPr>
-          <p:cNvPr id="30" name="Shape 28"/>
+          <p:cNvPr id="33" name="Shape 31"/>
           <p:cNvSpPr/>
           <p:nvPr/>
         </p:nvSpPr>
@@ -29943,7 +29706,7 @@
       </p:sp>
       <p:sp>
         <p:nvSpPr>
-          <p:cNvPr id="31" name="Text 29"/>
+          <p:cNvPr id="34" name="Text 32"/>
           <p:cNvSpPr/>
           <p:nvPr/>
         </p:nvSpPr>
@@ -29982,7 +29745,7 @@
       </p:sp>
       <p:sp>
         <p:nvSpPr>
-          <p:cNvPr id="32" name="Shape 30"/>
+          <p:cNvPr id="35" name="Shape 33"/>
           <p:cNvSpPr/>
           <p:nvPr/>
         </p:nvSpPr>
@@ -30009,7 +29772,7 @@
       </p:sp>
       <p:sp>
         <p:nvSpPr>
-          <p:cNvPr id="33" name="Text 31"/>
+          <p:cNvPr id="36" name="Text 34"/>
           <p:cNvSpPr/>
           <p:nvPr/>
         </p:nvSpPr>
@@ -30332,7 +30095,7 @@
                 <a:ea typeface="Calibri" pitchFamily="34" charset="-122"/>
                 <a:cs typeface="Calibri" pitchFamily="34" charset="-120"/>
               </a:rPr>
-              <a:t>Word Labs  •  wordlabs.app  •  Root: 'pay' = give money in exchange</a:t>
+              <a:t>Word Labs  •  wordlabs.app  •  Root: 'pay' = give money owed</a:t>
             </a:r>
             <a:endParaRPr lang="en-US" sz="800" dirty="0"/>
           </a:p>
@@ -30471,7 +30234,7 @@
                 <a:ea typeface="Trebuchet MS" pitchFamily="34" charset="-122"/>
                 <a:cs typeface="Trebuchet MS" pitchFamily="34" charset="-120"/>
               </a:rPr>
-              <a:t>repay</a:t>
+              <a:t>underpay</a:t>
             </a:r>
             <a:endParaRPr lang="en-US" sz="2800" dirty="0"/>
           </a:p>
@@ -30610,7 +30373,7 @@
                 <a:ea typeface="Trebuchet MS" pitchFamily="34" charset="-122"/>
                 <a:cs typeface="Trebuchet MS" pitchFamily="34" charset="-120"/>
               </a:rPr>
-              <a:t>re</a:t>
+              <a:t>under</a:t>
             </a:r>
             <a:endParaRPr lang="en-US" sz="1300" dirty="0"/>
           </a:p>
@@ -30649,7 +30412,7 @@
                 <a:ea typeface="Calibri" pitchFamily="34" charset="-122"/>
                 <a:cs typeface="Calibri" pitchFamily="34" charset="-120"/>
               </a:rPr>
-              <a:t>again, back</a:t>
+              <a:t>below or less than</a:t>
             </a:r>
             <a:endParaRPr lang="en-US" sz="850" dirty="0"/>
           </a:p>
@@ -30761,7 +30524,7 @@
                 <a:ea typeface="Calibri" pitchFamily="34" charset="-122"/>
                 <a:cs typeface="Calibri" pitchFamily="34" charset="-120"/>
               </a:rPr>
-              <a:t>give money</a:t>
+              <a:t>give money owed</a:t>
             </a:r>
             <a:endParaRPr lang="en-US" sz="850" dirty="0"/>
           </a:p>
@@ -30868,7 +30631,7 @@
         </p:nvSpPr>
         <p:spPr>
           <a:xfrm>
-            <a:off x="2999232" y="3364992"/>
+            <a:off x="2313432" y="3364992"/>
             <a:ext cx="1645920" cy="475488"/>
           </a:xfrm>
           <a:prstGeom prst="rect">
@@ -30895,7 +30658,7 @@
         </p:nvSpPr>
         <p:spPr>
           <a:xfrm>
-            <a:off x="2999232" y="3364992"/>
+            <a:off x="2313432" y="3364992"/>
             <a:ext cx="1645920" cy="475488"/>
           </a:xfrm>
           <a:prstGeom prst="rect">
@@ -30920,7 +30683,7 @@
                 <a:ea typeface="Trebuchet MS" pitchFamily="34" charset="-122"/>
                 <a:cs typeface="Trebuchet MS" pitchFamily="34" charset="-120"/>
               </a:rPr>
-              <a:t>re</a:t>
+              <a:t>un</a:t>
             </a:r>
             <a:endParaRPr lang="en-US" sz="1400" dirty="0"/>
           </a:p>
@@ -30934,8 +30697,8 @@
         </p:nvSpPr>
         <p:spPr>
           <a:xfrm>
-            <a:off x="4645152" y="3364992"/>
-            <a:ext cx="1097280" cy="475488"/>
+            <a:off x="3959352" y="3364992"/>
+            <a:ext cx="411480" cy="475488"/>
           </a:xfrm>
           <a:prstGeom prst="rect">
             <a:avLst/>
@@ -30973,7 +30736,7 @@
         </p:nvSpPr>
         <p:spPr>
           <a:xfrm>
-            <a:off x="5742432" y="3364992"/>
+            <a:off x="4370832" y="3364992"/>
             <a:ext cx="1645920" cy="475488"/>
           </a:xfrm>
           <a:prstGeom prst="rect">
@@ -31000,7 +30763,7 @@
         </p:nvSpPr>
         <p:spPr>
           <a:xfrm>
-            <a:off x="5742432" y="3364992"/>
+            <a:off x="4370832" y="3364992"/>
             <a:ext cx="1645920" cy="475488"/>
           </a:xfrm>
           <a:prstGeom prst="rect">
@@ -31025,6 +30788,111 @@
                 <a:ea typeface="Trebuchet MS" pitchFamily="34" charset="-122"/>
                 <a:cs typeface="Trebuchet MS" pitchFamily="34" charset="-120"/>
               </a:rPr>
+              <a:t>der</a:t>
+            </a:r>
+            <a:endParaRPr lang="en-US" sz="1400" dirty="0"/>
+          </a:p>
+        </p:txBody>
+      </p:sp>
+      <p:sp>
+        <p:nvSpPr>
+          <p:cNvPr id="30" name="Text 28"/>
+          <p:cNvSpPr/>
+          <p:nvPr/>
+        </p:nvSpPr>
+        <p:spPr>
+          <a:xfrm>
+            <a:off x="6016752" y="3364992"/>
+            <a:ext cx="411480" cy="475488"/>
+          </a:xfrm>
+          <a:prstGeom prst="rect">
+            <a:avLst/>
+          </a:prstGeom>
+          <a:noFill/>
+          <a:ln/>
+        </p:spPr>
+        <p:txBody>
+          <a:bodyPr wrap="square" lIns="0" tIns="0" rIns="0" bIns="0" rtlCol="0" anchor="ctr"/>
+          <a:lstStyle/>
+          <a:p>
+            <a:pPr algn="ctr" indent="0" marL="0">
+              <a:buNone/>
+            </a:pPr>
+            <a:r>
+              <a:rPr lang="en-US" sz="1600" b="1" dirty="0">
+                <a:solidFill>
+                  <a:srgbClr val="0D9488"/>
+                </a:solidFill>
+                <a:latin typeface="Trebuchet MS" pitchFamily="34" charset="0"/>
+                <a:ea typeface="Trebuchet MS" pitchFamily="34" charset="-122"/>
+                <a:cs typeface="Trebuchet MS" pitchFamily="34" charset="-120"/>
+              </a:rPr>
+              <a:t>·</a:t>
+            </a:r>
+            <a:endParaRPr lang="en-US" sz="1600" dirty="0"/>
+          </a:p>
+        </p:txBody>
+      </p:sp>
+      <p:sp>
+        <p:nvSpPr>
+          <p:cNvPr id="31" name="Shape 29"/>
+          <p:cNvSpPr/>
+          <p:nvPr/>
+        </p:nvSpPr>
+        <p:spPr>
+          <a:xfrm>
+            <a:off x="6428232" y="3364992"/>
+            <a:ext cx="1645920" cy="475488"/>
+          </a:xfrm>
+          <a:prstGeom prst="rect">
+            <a:avLst>
+              <a:gd name="adj" fmla="val 9615"/>
+            </a:avLst>
+          </a:prstGeom>
+          <a:solidFill>
+            <a:srgbClr val="FFFFFF"/>
+          </a:solidFill>
+          <a:ln w="12700">
+            <a:solidFill>
+              <a:srgbClr val="0D9488"/>
+            </a:solidFill>
+            <a:prstDash val="solid"/>
+          </a:ln>
+        </p:spPr>
+      </p:sp>
+      <p:sp>
+        <p:nvSpPr>
+          <p:cNvPr id="32" name="Text 30"/>
+          <p:cNvSpPr/>
+          <p:nvPr/>
+        </p:nvSpPr>
+        <p:spPr>
+          <a:xfrm>
+            <a:off x="6428232" y="3364992"/>
+            <a:ext cx="1645920" cy="475488"/>
+          </a:xfrm>
+          <a:prstGeom prst="rect">
+            <a:avLst/>
+          </a:prstGeom>
+          <a:noFill/>
+          <a:ln/>
+        </p:spPr>
+        <p:txBody>
+          <a:bodyPr wrap="square" lIns="0" tIns="0" rIns="0" bIns="0" rtlCol="0" anchor="ctr"/>
+          <a:lstStyle/>
+          <a:p>
+            <a:pPr algn="ctr" indent="0" marL="0">
+              <a:buNone/>
+            </a:pPr>
+            <a:r>
+              <a:rPr lang="en-US" sz="1400" b="1" dirty="0">
+                <a:solidFill>
+                  <a:srgbClr val="0D9488"/>
+                </a:solidFill>
+                <a:latin typeface="Trebuchet MS" pitchFamily="34" charset="0"/>
+                <a:ea typeface="Trebuchet MS" pitchFamily="34" charset="-122"/>
+                <a:cs typeface="Trebuchet MS" pitchFamily="34" charset="-120"/>
+              </a:rPr>
               <a:t>pay</a:t>
             </a:r>
             <a:endParaRPr lang="en-US" sz="1400" dirty="0"/>
@@ -31033,7 +30901,7 @@
       </p:sp>
       <p:sp>
         <p:nvSpPr>
-          <p:cNvPr id="30" name="Shape 28"/>
+          <p:cNvPr id="33" name="Shape 31"/>
           <p:cNvSpPr/>
           <p:nvPr/>
         </p:nvSpPr>
@@ -31060,7 +30928,7 @@
       </p:sp>
       <p:sp>
         <p:nvSpPr>
-          <p:cNvPr id="31" name="Text 29"/>
+          <p:cNvPr id="34" name="Text 32"/>
           <p:cNvSpPr/>
           <p:nvPr/>
         </p:nvSpPr>
@@ -31099,7 +30967,7 @@
       </p:sp>
       <p:sp>
         <p:nvSpPr>
-          <p:cNvPr id="32" name="Shape 30"/>
+          <p:cNvPr id="35" name="Shape 33"/>
           <p:cNvSpPr/>
           <p:nvPr/>
         </p:nvSpPr>
@@ -31126,13 +30994,13 @@
       </p:sp>
       <p:sp>
         <p:nvSpPr>
-          <p:cNvPr id="33" name="Shape 31"/>
-          <p:cNvSpPr/>
-          <p:nvPr/>
-        </p:nvSpPr>
-        <p:spPr>
-          <a:xfrm>
-            <a:off x="2670048" y="4169664"/>
+          <p:cNvPr id="36" name="Shape 34"/>
+          <p:cNvSpPr/>
+          <p:nvPr/>
+        </p:nvSpPr>
+        <p:spPr>
+          <a:xfrm>
+            <a:off x="2254649" y="4169664"/>
             <a:ext cx="685800" cy="475488"/>
           </a:xfrm>
           <a:prstGeom prst="rect">
@@ -31153,13 +31021,13 @@
       </p:sp>
       <p:sp>
         <p:nvSpPr>
-          <p:cNvPr id="34" name="Text 32"/>
-          <p:cNvSpPr/>
-          <p:nvPr/>
-        </p:nvSpPr>
-        <p:spPr>
-          <a:xfrm>
-            <a:off x="2670048" y="4169664"/>
+          <p:cNvPr id="37" name="Text 35"/>
+          <p:cNvSpPr/>
+          <p:nvPr/>
+        </p:nvSpPr>
+        <p:spPr>
+          <a:xfrm>
+            <a:off x="2254649" y="4169664"/>
             <a:ext cx="685800" cy="475488"/>
           </a:xfrm>
           <a:prstGeom prst="rect">
@@ -31184,7 +31052,7 @@
                 <a:ea typeface="Trebuchet MS" pitchFamily="34" charset="-122"/>
                 <a:cs typeface="Trebuchet MS" pitchFamily="34" charset="-120"/>
               </a:rPr>
-              <a:t>r</a:t>
+              <a:t>u</a:t>
             </a:r>
             <a:endParaRPr lang="en-US" sz="900" dirty="0"/>
           </a:p>
@@ -31192,13 +31060,13 @@
       </p:sp>
       <p:sp>
         <p:nvSpPr>
-          <p:cNvPr id="35" name="Shape 33"/>
-          <p:cNvSpPr/>
-          <p:nvPr/>
-        </p:nvSpPr>
-        <p:spPr>
-          <a:xfrm>
-            <a:off x="4123944" y="4169664"/>
+          <p:cNvPr id="38" name="Shape 36"/>
+          <p:cNvSpPr/>
+          <p:nvPr/>
+        </p:nvSpPr>
+        <p:spPr>
+          <a:xfrm>
+            <a:off x="3293146" y="4169664"/>
             <a:ext cx="685800" cy="475488"/>
           </a:xfrm>
           <a:prstGeom prst="rect">
@@ -31219,13 +31087,13 @@
       </p:sp>
       <p:sp>
         <p:nvSpPr>
-          <p:cNvPr id="36" name="Text 34"/>
-          <p:cNvSpPr/>
-          <p:nvPr/>
-        </p:nvSpPr>
-        <p:spPr>
-          <a:xfrm>
-            <a:off x="4123944" y="4169664"/>
+          <p:cNvPr id="39" name="Text 37"/>
+          <p:cNvSpPr/>
+          <p:nvPr/>
+        </p:nvSpPr>
+        <p:spPr>
+          <a:xfrm>
+            <a:off x="3293146" y="4169664"/>
             <a:ext cx="685800" cy="475488"/>
           </a:xfrm>
           <a:prstGeom prst="rect">
@@ -31250,7 +31118,7 @@
                 <a:ea typeface="Trebuchet MS" pitchFamily="34" charset="-122"/>
                 <a:cs typeface="Trebuchet MS" pitchFamily="34" charset="-120"/>
               </a:rPr>
-              <a:t>e</a:t>
+              <a:t>n</a:t>
             </a:r>
             <a:endParaRPr lang="en-US" sz="900" dirty="0"/>
           </a:p>
@@ -31258,13 +31126,13 @@
       </p:sp>
       <p:sp>
         <p:nvSpPr>
-          <p:cNvPr id="37" name="Shape 35"/>
-          <p:cNvSpPr/>
-          <p:nvPr/>
-        </p:nvSpPr>
-        <p:spPr>
-          <a:xfrm>
-            <a:off x="5577840" y="4169664"/>
+          <p:cNvPr id="40" name="Shape 38"/>
+          <p:cNvSpPr/>
+          <p:nvPr/>
+        </p:nvSpPr>
+        <p:spPr>
+          <a:xfrm>
+            <a:off x="4331643" y="4169664"/>
             <a:ext cx="685800" cy="475488"/>
           </a:xfrm>
           <a:prstGeom prst="rect">
@@ -31285,13 +31153,13 @@
       </p:sp>
       <p:sp>
         <p:nvSpPr>
-          <p:cNvPr id="38" name="Text 36"/>
-          <p:cNvSpPr/>
-          <p:nvPr/>
-        </p:nvSpPr>
-        <p:spPr>
-          <a:xfrm>
-            <a:off x="5577840" y="4169664"/>
+          <p:cNvPr id="41" name="Text 39"/>
+          <p:cNvSpPr/>
+          <p:nvPr/>
+        </p:nvSpPr>
+        <p:spPr>
+          <a:xfrm>
+            <a:off x="4331643" y="4169664"/>
             <a:ext cx="685800" cy="475488"/>
           </a:xfrm>
           <a:prstGeom prst="rect">
@@ -31316,7 +31184,7 @@
                 <a:ea typeface="Trebuchet MS" pitchFamily="34" charset="-122"/>
                 <a:cs typeface="Trebuchet MS" pitchFamily="34" charset="-120"/>
               </a:rPr>
-              <a:t>p</a:t>
+              <a:t>d</a:t>
             </a:r>
             <a:endParaRPr lang="en-US" sz="900" dirty="0"/>
           </a:p>
@@ -31324,13 +31192,13 @@
       </p:sp>
       <p:sp>
         <p:nvSpPr>
-          <p:cNvPr id="39" name="Shape 37"/>
-          <p:cNvSpPr/>
-          <p:nvPr/>
-        </p:nvSpPr>
-        <p:spPr>
-          <a:xfrm>
-            <a:off x="7031736" y="4169664"/>
+          <p:cNvPr id="42" name="Shape 40"/>
+          <p:cNvSpPr/>
+          <p:nvPr/>
+        </p:nvSpPr>
+        <p:spPr>
+          <a:xfrm>
+            <a:off x="5370141" y="4169664"/>
             <a:ext cx="685800" cy="475488"/>
           </a:xfrm>
           <a:prstGeom prst="rect">
@@ -31351,13 +31219,145 @@
       </p:sp>
       <p:sp>
         <p:nvSpPr>
-          <p:cNvPr id="40" name="Text 38"/>
-          <p:cNvSpPr/>
-          <p:nvPr/>
-        </p:nvSpPr>
-        <p:spPr>
-          <a:xfrm>
-            <a:off x="7031736" y="4169664"/>
+          <p:cNvPr id="43" name="Text 41"/>
+          <p:cNvSpPr/>
+          <p:nvPr/>
+        </p:nvSpPr>
+        <p:spPr>
+          <a:xfrm>
+            <a:off x="5370141" y="4169664"/>
+            <a:ext cx="685800" cy="475488"/>
+          </a:xfrm>
+          <a:prstGeom prst="rect">
+            <a:avLst/>
+          </a:prstGeom>
+          <a:noFill/>
+          <a:ln/>
+        </p:spPr>
+        <p:txBody>
+          <a:bodyPr wrap="square" lIns="0" tIns="0" rIns="0" bIns="0" rtlCol="0" anchor="ctr"/>
+          <a:lstStyle/>
+          <a:p>
+            <a:pPr algn="ctr" indent="0" marL="0">
+              <a:buNone/>
+            </a:pPr>
+            <a:r>
+              <a:rPr lang="en-US" sz="900" b="1" dirty="0">
+                <a:solidFill>
+                  <a:srgbClr val="9D174D"/>
+                </a:solidFill>
+                <a:latin typeface="Trebuchet MS" pitchFamily="34" charset="0"/>
+                <a:ea typeface="Trebuchet MS" pitchFamily="34" charset="-122"/>
+                <a:cs typeface="Trebuchet MS" pitchFamily="34" charset="-120"/>
+              </a:rPr>
+              <a:t>er</a:t>
+            </a:r>
+            <a:endParaRPr lang="en-US" sz="900" dirty="0"/>
+          </a:p>
+        </p:txBody>
+      </p:sp>
+      <p:sp>
+        <p:nvSpPr>
+          <p:cNvPr id="44" name="Shape 42"/>
+          <p:cNvSpPr/>
+          <p:nvPr/>
+        </p:nvSpPr>
+        <p:spPr>
+          <a:xfrm>
+            <a:off x="6408638" y="4169664"/>
+            <a:ext cx="685800" cy="475488"/>
+          </a:xfrm>
+          <a:prstGeom prst="rect">
+            <a:avLst>
+              <a:gd name="adj" fmla="val 7692"/>
+            </a:avLst>
+          </a:prstGeom>
+          <a:solidFill>
+            <a:srgbClr val="FFFFFF"/>
+          </a:solidFill>
+          <a:ln w="12700">
+            <a:solidFill>
+              <a:srgbClr val="DB2777"/>
+            </a:solidFill>
+            <a:prstDash val="solid"/>
+          </a:ln>
+        </p:spPr>
+      </p:sp>
+      <p:sp>
+        <p:nvSpPr>
+          <p:cNvPr id="45" name="Text 43"/>
+          <p:cNvSpPr/>
+          <p:nvPr/>
+        </p:nvSpPr>
+        <p:spPr>
+          <a:xfrm>
+            <a:off x="6408638" y="4169664"/>
+            <a:ext cx="685800" cy="475488"/>
+          </a:xfrm>
+          <a:prstGeom prst="rect">
+            <a:avLst/>
+          </a:prstGeom>
+          <a:noFill/>
+          <a:ln/>
+        </p:spPr>
+        <p:txBody>
+          <a:bodyPr wrap="square" lIns="0" tIns="0" rIns="0" bIns="0" rtlCol="0" anchor="ctr"/>
+          <a:lstStyle/>
+          <a:p>
+            <a:pPr algn="ctr" indent="0" marL="0">
+              <a:buNone/>
+            </a:pPr>
+            <a:r>
+              <a:rPr lang="en-US" sz="900" b="1" dirty="0">
+                <a:solidFill>
+                  <a:srgbClr val="9D174D"/>
+                </a:solidFill>
+                <a:latin typeface="Trebuchet MS" pitchFamily="34" charset="0"/>
+                <a:ea typeface="Trebuchet MS" pitchFamily="34" charset="-122"/>
+                <a:cs typeface="Trebuchet MS" pitchFamily="34" charset="-120"/>
+              </a:rPr>
+              <a:t>p</a:t>
+            </a:r>
+            <a:endParaRPr lang="en-US" sz="900" dirty="0"/>
+          </a:p>
+        </p:txBody>
+      </p:sp>
+      <p:sp>
+        <p:nvSpPr>
+          <p:cNvPr id="46" name="Shape 44"/>
+          <p:cNvSpPr/>
+          <p:nvPr/>
+        </p:nvSpPr>
+        <p:spPr>
+          <a:xfrm>
+            <a:off x="7447135" y="4169664"/>
+            <a:ext cx="685800" cy="475488"/>
+          </a:xfrm>
+          <a:prstGeom prst="rect">
+            <a:avLst>
+              <a:gd name="adj" fmla="val 7692"/>
+            </a:avLst>
+          </a:prstGeom>
+          <a:solidFill>
+            <a:srgbClr val="FFFFFF"/>
+          </a:solidFill>
+          <a:ln w="12700">
+            <a:solidFill>
+              <a:srgbClr val="DB2777"/>
+            </a:solidFill>
+            <a:prstDash val="solid"/>
+          </a:ln>
+        </p:spPr>
+      </p:sp>
+      <p:sp>
+        <p:nvSpPr>
+          <p:cNvPr id="47" name="Text 45"/>
+          <p:cNvSpPr/>
+          <p:nvPr/>
+        </p:nvSpPr>
+        <p:spPr>
+          <a:xfrm>
+            <a:off x="7447135" y="4169664"/>
             <a:ext cx="685800" cy="475488"/>
           </a:xfrm>
           <a:prstGeom prst="rect">
@@ -31674,7 +31674,7 @@
                 <a:ea typeface="Calibri" pitchFamily="34" charset="-122"/>
                 <a:cs typeface="Calibri" pitchFamily="34" charset="-120"/>
               </a:rPr>
-              <a:t>Word Labs  •  wordlabs.app  •  Root: 'pay' = give money in exchange</a:t>
+              <a:t>Word Labs  •  wordlabs.app  •  Root: 'pay' = give money owed</a:t>
             </a:r>
             <a:endParaRPr lang="en-US" sz="800" dirty="0"/>
           </a:p>
@@ -32843,7 +32843,7 @@
                 <a:ea typeface="Calibri" pitchFamily="34" charset="-122"/>
                 <a:cs typeface="Calibri" pitchFamily="34" charset="-120"/>
               </a:rPr>
-              <a:t>Word Labs  •  wordlabs.app  •  Root: 'pay' = give money in exchange</a:t>
+              <a:t>Word Labs  •  wordlabs.app  •  Root: 'pay' = give money owed</a:t>
             </a:r>
             <a:endParaRPr lang="en-US" sz="800" dirty="0"/>
           </a:p>
@@ -33642,7 +33642,7 @@
                 <a:ea typeface="Trebuchet MS" pitchFamily="34" charset="-122"/>
                 <a:cs typeface="Trebuchet MS" pitchFamily="34" charset="-120"/>
               </a:rPr>
-              <a:t>over-</a:t>
+              <a:t>un-</a:t>
             </a:r>
             <a:endParaRPr lang="en-US" sz="1300" dirty="0"/>
           </a:p>
@@ -33795,7 +33795,7 @@
                 <a:ea typeface="Trebuchet MS" pitchFamily="34" charset="-122"/>
                 <a:cs typeface="Trebuchet MS" pitchFamily="34" charset="-120"/>
               </a:rPr>
-              <a:t>under-</a:t>
+              <a:t>over-</a:t>
             </a:r>
             <a:endParaRPr lang="en-US" sz="1300" dirty="0"/>
           </a:p>
@@ -34253,7 +34253,7 @@
                 <a:ea typeface="Trebuchet MS" pitchFamily="34" charset="-122"/>
                 <a:cs typeface="Trebuchet MS" pitchFamily="34" charset="-120"/>
               </a:rPr>
-              <a:t>employee</a:t>
+              <a:t>overpay</a:t>
             </a:r>
             <a:endParaRPr lang="en-US" sz="1200" dirty="0"/>
           </a:p>
@@ -34319,7 +34319,7 @@
                 <a:ea typeface="Trebuchet MS" pitchFamily="34" charset="-122"/>
                 <a:cs typeface="Trebuchet MS" pitchFamily="34" charset="-120"/>
               </a:rPr>
-              <a:t>overpay</a:t>
+              <a:t>payday</a:t>
             </a:r>
             <a:endParaRPr lang="en-US" sz="1200" dirty="0"/>
           </a:p>
@@ -34385,7 +34385,7 @@
                 <a:ea typeface="Trebuchet MS" pitchFamily="34" charset="-122"/>
                 <a:cs typeface="Trebuchet MS" pitchFamily="34" charset="-120"/>
               </a:rPr>
-              <a:t>underpay</a:t>
+              <a:t>unpaid</a:t>
             </a:r>
             <a:endParaRPr lang="en-US" sz="1200" dirty="0"/>
           </a:p>
@@ -34451,7 +34451,7 @@
                 <a:ea typeface="Trebuchet MS" pitchFamily="34" charset="-122"/>
                 <a:cs typeface="Trebuchet MS" pitchFamily="34" charset="-120"/>
               </a:rPr>
-              <a:t>payday</a:t>
+              <a:t>payee</a:t>
             </a:r>
             <a:endParaRPr lang="en-US" sz="1200" dirty="0"/>
           </a:p>
@@ -34743,7 +34743,7 @@
                 <a:ea typeface="Calibri" pitchFamily="34" charset="-122"/>
                 <a:cs typeface="Calibri" pitchFamily="34" charset="-120"/>
               </a:rPr>
-              <a:t>Word Labs  •  wordlabs.app  •  Root: 'pay' = give money in exchange</a:t>
+              <a:t>Word Labs  •  wordlabs.app  •  Root: 'pay' = give money owed</a:t>
             </a:r>
             <a:endParaRPr lang="en-US" sz="800" dirty="0"/>
           </a:p>
@@ -34907,7 +34907,7 @@
                 <a:ea typeface="Calibri" pitchFamily="34" charset="-122"/>
                 <a:cs typeface="Calibri" pitchFamily="34" charset="-120"/>
               </a:rPr>
-              <a:t>The core part of a word carrying its basic meaning. For example, 'pay' means 'give money in exchange'.</a:t>
+              <a:t>The core part of a word carrying its basic meaning. For example, 'pay' means 'give money owed'.</a:t>
             </a:r>
             <a:endParaRPr lang="en-US" sz="1350" dirty="0"/>
           </a:p>
@@ -35527,7 +35527,7 @@
                 <a:ea typeface="Calibri" pitchFamily="34" charset="-122"/>
                 <a:cs typeface="Calibri" pitchFamily="34" charset="-120"/>
               </a:rPr>
-              <a:t>Word Labs  •  wordlabs.app  •  Root: 'pay' = give money in exchange</a:t>
+              <a:t>Word Labs  •  wordlabs.app  •  Root: 'pay' = give money owed</a:t>
             </a:r>
             <a:endParaRPr lang="en-US" sz="800" dirty="0"/>
           </a:p>
@@ -35639,7 +35639,7 @@
                 <a:ea typeface="Calibri" pitchFamily="34" charset="-122"/>
                 <a:cs typeface="Calibri" pitchFamily="34" charset="-120"/>
               </a:rPr>
-              <a:t>1.  The word 'repay' means to pay back money you owe.</a:t>
+              <a:t>1.  The root 'pay' comes from an ancient Greek word.</a:t>
             </a:r>
             <a:endParaRPr lang="en-US" sz="1300" dirty="0"/>
           </a:p>
@@ -35662,11 +35662,11 @@
             </a:avLst>
           </a:prstGeom>
           <a:solidFill>
-            <a:srgbClr val="DCFCE7"/>
-          </a:solidFill>
-          <a:ln w="12700">
-            <a:solidFill>
-              <a:srgbClr val="16A34A"/>
+            <a:srgbClr val="FEE2E2"/>
+          </a:solidFill>
+          <a:ln w="12700">
+            <a:solidFill>
+              <a:srgbClr val="DC2626"/>
             </a:solidFill>
             <a:prstDash val="solid"/>
           </a:ln>
@@ -35699,13 +35699,13 @@
             <a:r>
               <a:rPr lang="en-US" sz="1100" b="1" dirty="0">
                 <a:solidFill>
-                  <a:srgbClr val="16A34A"/>
+                  <a:srgbClr val="DC2626"/>
                 </a:solidFill>
                 <a:latin typeface="Trebuchet MS" pitchFamily="34" charset="0"/>
                 <a:ea typeface="Trebuchet MS" pitchFamily="34" charset="-122"/>
                 <a:cs typeface="Trebuchet MS" pitchFamily="34" charset="-120"/>
               </a:rPr>
-              <a:t>TRUE</a:t>
+              <a:t>FALSE</a:t>
             </a:r>
             <a:endParaRPr lang="en-US" sz="1100" dirty="0"/>
           </a:p>
@@ -35778,7 +35778,7 @@
                 <a:ea typeface="Calibri" pitchFamily="34" charset="-122"/>
                 <a:cs typeface="Calibri" pitchFamily="34" charset="-120"/>
               </a:rPr>
-              <a:t>2.  The root 'pay' comes from a Greek word.</a:t>
+              <a:t>2.  The word 'payee' refers to the person who sends money rather than receives it.</a:t>
             </a:r>
             <a:endParaRPr lang="en-US" sz="1300" dirty="0"/>
           </a:p>
@@ -35917,7 +35917,7 @@
                 <a:ea typeface="Calibri" pitchFamily="34" charset="-122"/>
                 <a:cs typeface="Calibri" pitchFamily="34" charset="-120"/>
               </a:rPr>
-              <a:t>3.  'Payment' contains the root 'pay' and the suffix '-ment'.</a:t>
+              <a:t>3.  Adding the prefix 're-' to 'pay' makes the word 'repay', meaning to pay back.</a:t>
             </a:r>
             <a:endParaRPr lang="en-US" sz="1300" dirty="0"/>
           </a:p>
@@ -36056,7 +36056,7 @@
                 <a:ea typeface="Calibri" pitchFamily="34" charset="-122"/>
                 <a:cs typeface="Calibri" pitchFamily="34" charset="-120"/>
               </a:rPr>
-              <a:t>4.  'Overpay' means to pay more than something is worth.</a:t>
+              <a:t>4.  The word 'payment' uses the suffix '-ment' to turn the verb 'pay' into a noun.</a:t>
             </a:r>
             <a:endParaRPr lang="en-US" sz="1300" dirty="0"/>
           </a:p>
@@ -36195,7 +36195,7 @@
                 <a:ea typeface="Calibri" pitchFamily="34" charset="-122"/>
                 <a:cs typeface="Calibri" pitchFamily="34" charset="-120"/>
               </a:rPr>
-              <a:t>5.  'Prepay' means to pay after you have used something.</a:t>
+              <a:t>5.  The word 'repay' contains the root 'pay' meaning to give money owed.</a:t>
             </a:r>
             <a:endParaRPr lang="en-US" sz="1300" dirty="0"/>
           </a:p>
@@ -36218,11 +36218,11 @@
             </a:avLst>
           </a:prstGeom>
           <a:solidFill>
-            <a:srgbClr val="FEE2E2"/>
-          </a:solidFill>
-          <a:ln w="12700">
-            <a:solidFill>
-              <a:srgbClr val="DC2626"/>
+            <a:srgbClr val="DCFCE7"/>
+          </a:solidFill>
+          <a:ln w="12700">
+            <a:solidFill>
+              <a:srgbClr val="16A34A"/>
             </a:solidFill>
             <a:prstDash val="solid"/>
           </a:ln>
@@ -36255,13 +36255,13 @@
             <a:r>
               <a:rPr lang="en-US" sz="1100" b="1" dirty="0">
                 <a:solidFill>
-                  <a:srgbClr val="DC2626"/>
+                  <a:srgbClr val="16A34A"/>
                 </a:solidFill>
                 <a:latin typeface="Trebuchet MS" pitchFamily="34" charset="0"/>
                 <a:ea typeface="Trebuchet MS" pitchFamily="34" charset="-122"/>
                 <a:cs typeface="Trebuchet MS" pitchFamily="34" charset="-120"/>
               </a:rPr>
-              <a:t>FALSE</a:t>
+              <a:t>TRUE</a:t>
             </a:r>
             <a:endParaRPr lang="en-US" sz="1100" dirty="0"/>
           </a:p>
@@ -36553,7 +36553,7 @@
                 <a:ea typeface="Calibri" pitchFamily="34" charset="-122"/>
                 <a:cs typeface="Calibri" pitchFamily="34" charset="-120"/>
               </a:rPr>
-              <a:t>Word Labs  •  wordlabs.app  •  Root: 'pay' = give money in exchange</a:t>
+              <a:t>Word Labs  •  wordlabs.app  •  Root: 'pay' = give money owed</a:t>
             </a:r>
             <a:endParaRPr lang="en-US" sz="800" dirty="0"/>
           </a:p>
@@ -36690,7 +36690,7 @@
                 <a:ea typeface="Trebuchet MS" pitchFamily="34" charset="-122"/>
                 <a:cs typeface="Trebuchet MS" pitchFamily="34" charset="-120"/>
               </a:rPr>
-              <a:t>give money in exchange</a:t>
+              <a:t>give money owed</a:t>
             </a:r>
             <a:endParaRPr lang="en-US" sz="2000" dirty="0"/>
           </a:p>
@@ -37098,7 +37098,7 @@
                 <a:ea typeface="Trebuchet MS" pitchFamily="34" charset="-122"/>
                 <a:cs typeface="Trebuchet MS" pitchFamily="34" charset="-120"/>
               </a:rPr>
-              <a:t>employee</a:t>
+              <a:t>overpay</a:t>
             </a:r>
             <a:endParaRPr lang="en-US" sz="1300" dirty="0"/>
           </a:p>
@@ -37164,7 +37164,7 @@
                 <a:ea typeface="Trebuchet MS" pitchFamily="34" charset="-122"/>
                 <a:cs typeface="Trebuchet MS" pitchFamily="34" charset="-120"/>
               </a:rPr>
-              <a:t>overpay</a:t>
+              <a:t>payday</a:t>
             </a:r>
             <a:endParaRPr lang="en-US" sz="1300" dirty="0"/>
           </a:p>
@@ -37230,7 +37230,7 @@
                 <a:ea typeface="Trebuchet MS" pitchFamily="34" charset="-122"/>
                 <a:cs typeface="Trebuchet MS" pitchFamily="34" charset="-120"/>
               </a:rPr>
-              <a:t>underpay</a:t>
+              <a:t>unpaid</a:t>
             </a:r>
             <a:endParaRPr lang="en-US" sz="1300" dirty="0"/>
           </a:p>
@@ -37522,7 +37522,7 @@
                 <a:ea typeface="Calibri" pitchFamily="34" charset="-122"/>
                 <a:cs typeface="Calibri" pitchFamily="34" charset="-120"/>
               </a:rPr>
-              <a:t>Word Labs  •  wordlabs.app  •  Root: 'pay' = give money in exchange</a:t>
+              <a:t>Word Labs  •  wordlabs.app  •  Root: 'pay' = give money owed</a:t>
             </a:r>
             <a:endParaRPr lang="en-US" sz="800" dirty="0"/>
           </a:p>
@@ -38321,7 +38321,7 @@
                 <a:ea typeface="Trebuchet MS" pitchFamily="34" charset="-122"/>
                 <a:cs typeface="Trebuchet MS" pitchFamily="34" charset="-120"/>
               </a:rPr>
-              <a:t>over-</a:t>
+              <a:t>un-</a:t>
             </a:r>
             <a:endParaRPr lang="en-US" sz="1300" dirty="0"/>
           </a:p>
@@ -38474,7 +38474,7 @@
                 <a:ea typeface="Trebuchet MS" pitchFamily="34" charset="-122"/>
                 <a:cs typeface="Trebuchet MS" pitchFamily="34" charset="-120"/>
               </a:rPr>
-              <a:t>under-</a:t>
+              <a:t>over-</a:t>
             </a:r>
             <a:endParaRPr lang="en-US" sz="1300" dirty="0"/>
           </a:p>
@@ -39296,7 +39296,7 @@
                 <a:ea typeface="Calibri" pitchFamily="34" charset="-122"/>
                 <a:cs typeface="Calibri" pitchFamily="34" charset="-120"/>
               </a:rPr>
-              <a:t>Word Labs  •  wordlabs.app  •  Root: 'pay' = give money in exchange</a:t>
+              <a:t>Word Labs  •  wordlabs.app  •  Root: 'pay' = give money owed</a:t>
             </a:r>
             <a:endParaRPr lang="en-US" sz="800" dirty="0"/>
           </a:p>
@@ -39474,7 +39474,7 @@
                 <a:ea typeface="Calibri" pitchFamily="34" charset="-122"/>
                 <a:cs typeface="Calibri" pitchFamily="34" charset="-120"/>
               </a:rPr>
-              <a:t>To pay for something before you receive or use it.</a:t>
+              <a:t>To pay for something before you receive it or use it.</a:t>
             </a:r>
             <a:endParaRPr lang="en-US" sz="1200" dirty="0"/>
           </a:p>
@@ -39613,7 +39613,7 @@
                 <a:ea typeface="Calibri" pitchFamily="34" charset="-122"/>
                 <a:cs typeface="Calibri" pitchFamily="34" charset="-120"/>
               </a:rPr>
-              <a:t>A person who works for someone and receives pay.</a:t>
+              <a:t>To pay more money than something is actually worth.</a:t>
             </a:r>
             <a:endParaRPr lang="en-US" sz="1200" dirty="0"/>
           </a:p>
@@ -39752,7 +39752,7 @@
                 <a:ea typeface="Calibri" pitchFamily="34" charset="-122"/>
                 <a:cs typeface="Calibri" pitchFamily="34" charset="-120"/>
               </a:rPr>
-              <a:t>An amount of money given to someone for something.</a:t>
+              <a:t>Money given to someone for goods or work done.</a:t>
             </a:r>
             <a:endParaRPr lang="en-US" sz="1200" dirty="0"/>
           </a:p>
@@ -39891,7 +39891,7 @@
                 <a:ea typeface="Calibri" pitchFamily="34" charset="-122"/>
                 <a:cs typeface="Calibri" pitchFamily="34" charset="-120"/>
               </a:rPr>
-              <a:t>To pay more money than something is actually worth.</a:t>
+              <a:t>The special day when workers receive their wages or salary.</a:t>
             </a:r>
             <a:endParaRPr lang="en-US" sz="1200" dirty="0"/>
           </a:p>
@@ -39964,7 +39964,7 @@
                 <a:ea typeface="Trebuchet MS" pitchFamily="34" charset="-122"/>
                 <a:cs typeface="Trebuchet MS" pitchFamily="34" charset="-120"/>
               </a:rPr>
-              <a:t>employee</a:t>
+              <a:t>overpay</a:t>
             </a:r>
             <a:endParaRPr lang="en-US" sz="1200" dirty="0"/>
           </a:p>
@@ -40030,7 +40030,7 @@
                 <a:ea typeface="Calibri" pitchFamily="34" charset="-122"/>
                 <a:cs typeface="Calibri" pitchFamily="34" charset="-120"/>
               </a:rPr>
-              <a:t>To pay someone less money than they deserve for their work.</a:t>
+              <a:t>Describing work or a bill that has not been paid yet.</a:t>
             </a:r>
             <a:endParaRPr lang="en-US" sz="1200" dirty="0"/>
           </a:p>
@@ -40103,7 +40103,7 @@
                 <a:ea typeface="Trebuchet MS" pitchFamily="34" charset="-122"/>
                 <a:cs typeface="Trebuchet MS" pitchFamily="34" charset="-120"/>
               </a:rPr>
-              <a:t>overpay</a:t>
+              <a:t>payday</a:t>
             </a:r>
             <a:endParaRPr lang="en-US" sz="1200" dirty="0"/>
           </a:p>
@@ -40169,7 +40169,7 @@
                 <a:ea typeface="Calibri" pitchFamily="34" charset="-122"/>
                 <a:cs typeface="Calibri" pitchFamily="34" charset="-120"/>
               </a:rPr>
-              <a:t>Money that needs to be paid or is ready to be paid.</a:t>
+              <a:t>Describing money that needs to be paid or is ready to be paid.</a:t>
             </a:r>
             <a:endParaRPr lang="en-US" sz="1200" dirty="0"/>
           </a:p>
@@ -40242,7 +40242,7 @@
                 <a:ea typeface="Trebuchet MS" pitchFamily="34" charset="-122"/>
                 <a:cs typeface="Trebuchet MS" pitchFamily="34" charset="-120"/>
               </a:rPr>
-              <a:t>underpay</a:t>
+              <a:t>unpaid</a:t>
             </a:r>
             <a:endParaRPr lang="en-US" sz="1200" dirty="0"/>
           </a:p>
@@ -40600,7 +40600,7 @@
                 <a:ea typeface="Calibri" pitchFamily="34" charset="-122"/>
                 <a:cs typeface="Calibri" pitchFamily="34" charset="-120"/>
               </a:rPr>
-              <a:t>Word Labs  •  wordlabs.app  •  Root: 'pay' = give money in exchange</a:t>
+              <a:t>Word Labs  •  wordlabs.app  •  Root: 'pay' = give money owed</a:t>
             </a:r>
             <a:endParaRPr lang="en-US" sz="800" dirty="0"/>
           </a:p>
@@ -40803,7 +40803,7 @@
                 <a:ea typeface="Calibri" pitchFamily="34" charset="-122"/>
                 <a:cs typeface="Calibri" pitchFamily="34" charset="-120"/>
               </a:rPr>
-              <a:t>Mum had to make a payment at the shop before she could take the new bike home.</a:t>
+              <a:t>Mia received her first payment for helping at the school canteen all week.</a:t>
             </a:r>
             <a:endParaRPr lang="en-US" sz="1500" dirty="0"/>
           </a:p>
@@ -40967,7 +40967,7 @@
                 <a:ea typeface="Calibri" pitchFamily="34" charset="-122"/>
                 <a:cs typeface="Calibri" pitchFamily="34" charset="-120"/>
               </a:rPr>
-              <a:t>The farmer promised to repay his neighbour after borrowing money to fix the fence.</a:t>
+              <a:t>Dad had to repay the money he borrowed from Grandma after his car was fixed.</a:t>
             </a:r>
             <a:endParaRPr lang="en-US" sz="1500" dirty="0"/>
           </a:p>
@@ -41131,7 +41131,7 @@
                 <a:ea typeface="Calibri" pitchFamily="34" charset="-122"/>
                 <a:cs typeface="Calibri" pitchFamily="34" charset="-120"/>
               </a:rPr>
-              <a:t>Dad was excited because Friday was his payday and he could buy us a treat.</a:t>
+              <a:t>The family chose to prepay for their holiday activities so they would not have to worry later.</a:t>
             </a:r>
             <a:endParaRPr lang="en-US" sz="1500" dirty="0"/>
           </a:p>

--- a/output/wordlabs-pay-3day.pptx
+++ b/output/wordlabs-pay-3day.pptx
@@ -4240,7 +4240,7 @@
                 <a:ea typeface="Calibri" pitchFamily="34" charset="-122"/>
                 <a:cs typeface="Calibri" pitchFamily="34" charset="-120"/>
               </a:rPr>
-              <a:t>"give money owed"</a:t>
+              <a:t>"to give money for something"</a:t>
             </a:r>
             <a:endParaRPr lang="en-US" sz="2200" dirty="0"/>
           </a:p>
@@ -4279,7 +4279,7 @@
                 <a:ea typeface="Calibri" pitchFamily="34" charset="-122"/>
                 <a:cs typeface="Calibri" pitchFamily="34" charset="-120"/>
               </a:rPr>
-              <a:t>Origin: Latin: pacare</a:t>
+              <a:t>Origin: Anglo-Saxon (Old English) root</a:t>
             </a:r>
             <a:endParaRPr lang="en-US" sz="1300" dirty="0"/>
           </a:p>
@@ -5288,7 +5288,7 @@
                 <a:ea typeface="Calibri" pitchFamily="34" charset="-122"/>
                 <a:cs typeface="Calibri" pitchFamily="34" charset="-120"/>
               </a:rPr>
-              <a:t>Word Labs  •  wordlabs.app  •  Root: 'pay' = give money owed</a:t>
+              <a:t>Word Labs  •  wordlabs.app  •  Root: 'pay' = to give money for something</a:t>
             </a:r>
             <a:endParaRPr lang="en-US" sz="800" dirty="0"/>
           </a:p>
@@ -5622,7 +5622,7 @@
                 <a:ea typeface="Trebuchet MS" pitchFamily="34" charset="-122"/>
                 <a:cs typeface="Trebuchet MS" pitchFamily="34" charset="-120"/>
               </a:rPr>
-              <a:t>1</a:t>
+              <a:t>0</a:t>
             </a:r>
             <a:pPr algn="ctr" indent="0" marL="0">
               <a:buNone/>
@@ -5928,7 +5928,7 @@
                 <a:ea typeface="Calibri" pitchFamily="34" charset="-122"/>
                 <a:cs typeface="Calibri" pitchFamily="34" charset="-120"/>
               </a:rPr>
-              <a:t>Word Labs  •  wordlabs.app  •  Root: 'pay' = give money owed</a:t>
+              <a:t>Word Labs  •  wordlabs.app  •  Root: 'pay' = to give money for something</a:t>
             </a:r>
             <a:endParaRPr lang="en-US" sz="800" dirty="0"/>
           </a:p>
@@ -6040,7 +6040,7 @@
                 <a:ea typeface="Calibri" pitchFamily="34" charset="-122"/>
                 <a:cs typeface="Calibri" pitchFamily="34" charset="-120"/>
               </a:rPr>
-              <a:t>Mum made a </a:t>
+              <a:t>She is slowly </a:t>
             </a:r>
             <a:pPr algn="l" indent="0" marL="0">
               <a:buNone/>
@@ -6057,7 +6057,7 @@
                 <a:ea typeface="Calibri" pitchFamily="34" charset="-122"/>
                 <a:cs typeface="Calibri" pitchFamily="34" charset="-120"/>
               </a:rPr>
-              <a:t>payment</a:t>
+              <a:t>repaying</a:t>
             </a:r>
             <a:pPr algn="l" indent="0" marL="0">
               <a:buNone/>
@@ -6071,7 +6071,7 @@
                 <a:ea typeface="Calibri" pitchFamily="34" charset="-122"/>
                 <a:cs typeface="Calibri" pitchFamily="34" charset="-120"/>
               </a:rPr>
-              <a:t> at the shop, but she was worried she might </a:t>
+              <a:t> the loan she took out for her car. The monthly </a:t>
             </a:r>
             <a:pPr algn="l" indent="0" marL="0">
               <a:buNone/>
@@ -6088,7 +6088,7 @@
                 <a:ea typeface="Calibri" pitchFamily="34" charset="-122"/>
                 <a:cs typeface="Calibri" pitchFamily="34" charset="-120"/>
               </a:rPr>
-              <a:t>overpay</a:t>
+              <a:t>repayment</a:t>
             </a:r>
             <a:pPr algn="l" indent="0" marL="0">
               <a:buNone/>
@@ -6102,7 +6102,7 @@
                 <a:ea typeface="Calibri" pitchFamily="34" charset="-122"/>
                 <a:cs typeface="Calibri" pitchFamily="34" charset="-120"/>
               </a:rPr>
-              <a:t> for the jacket.</a:t>
+              <a:t> on the loan was due on Friday.</a:t>
             </a:r>
             <a:endParaRPr lang="en-US" sz="1800" dirty="0"/>
           </a:p>
@@ -6257,7 +6257,7 @@
                 <a:ea typeface="Trebuchet MS" pitchFamily="34" charset="-122"/>
                 <a:cs typeface="Trebuchet MS" pitchFamily="34" charset="-120"/>
               </a:rPr>
-              <a:t>payment</a:t>
+              <a:t>repaying</a:t>
             </a:r>
             <a:endParaRPr lang="en-US" sz="1400" dirty="0"/>
           </a:p>
@@ -6385,7 +6385,7 @@
                 <a:ea typeface="Trebuchet MS" pitchFamily="34" charset="-122"/>
                 <a:cs typeface="Trebuchet MS" pitchFamily="34" charset="-120"/>
               </a:rPr>
-              <a:t>overpay</a:t>
+              <a:t>repayment</a:t>
             </a:r>
             <a:endParaRPr lang="en-US" sz="1400" dirty="0"/>
           </a:p>
@@ -6716,7 +6716,7 @@
                 <a:ea typeface="Calibri" pitchFamily="34" charset="-122"/>
                 <a:cs typeface="Calibri" pitchFamily="34" charset="-120"/>
               </a:rPr>
-              <a:t>Word Labs  •  wordlabs.app  •  Root: 'pay' = give money owed</a:t>
+              <a:t>Word Labs  •  wordlabs.app  •  Root: 'pay' = to give money for something</a:t>
             </a:r>
             <a:endParaRPr lang="en-US" sz="800" dirty="0"/>
           </a:p>
@@ -6855,7 +6855,7 @@
                 <a:ea typeface="Trebuchet MS" pitchFamily="34" charset="-122"/>
                 <a:cs typeface="Trebuchet MS" pitchFamily="34" charset="-120"/>
               </a:rPr>
-              <a:t>payment</a:t>
+              <a:t>repaying</a:t>
             </a:r>
             <a:endParaRPr lang="en-US" sz="2800" dirty="0"/>
           </a:p>
@@ -7543,7 +7543,7 @@
                 <a:ea typeface="Calibri" pitchFamily="34" charset="-122"/>
                 <a:cs typeface="Calibri" pitchFamily="34" charset="-120"/>
               </a:rPr>
-              <a:t>Word Labs  •  wordlabs.app  •  Root: 'pay' = give money owed</a:t>
+              <a:t>Word Labs  •  wordlabs.app  •  Root: 'pay' = to give money for something</a:t>
             </a:r>
             <a:endParaRPr lang="en-US" sz="800" dirty="0"/>
           </a:p>
@@ -7682,7 +7682,7 @@
                 <a:ea typeface="Trebuchet MS" pitchFamily="34" charset="-122"/>
                 <a:cs typeface="Trebuchet MS" pitchFamily="34" charset="-120"/>
               </a:rPr>
-              <a:t>payment</a:t>
+              <a:t>repaying</a:t>
             </a:r>
             <a:endParaRPr lang="en-US" sz="2800" dirty="0"/>
           </a:p>
@@ -7762,7 +7762,7 @@
         </p:nvSpPr>
         <p:spPr>
           <a:xfrm>
-            <a:off x="2938272" y="2258568"/>
+            <a:off x="2221992" y="2258568"/>
             <a:ext cx="1828800" cy="292608"/>
           </a:xfrm>
           <a:prstGeom prst="rect">
@@ -7771,11 +7771,11 @@
             </a:avLst>
           </a:prstGeom>
           <a:solidFill>
-            <a:srgbClr val="CCFBF1"/>
+            <a:srgbClr val="DDD6FE"/>
           </a:solidFill>
           <a:ln w="19050">
             <a:solidFill>
-              <a:srgbClr val="0D9488"/>
+              <a:srgbClr val="7C3AED"/>
             </a:solidFill>
             <a:prstDash val="solid"/>
           </a:ln>
@@ -7796,7 +7796,7 @@
         </p:nvSpPr>
         <p:spPr>
           <a:xfrm>
-            <a:off x="2938272" y="2258568"/>
+            <a:off x="2221992" y="2258568"/>
             <a:ext cx="1828800" cy="292608"/>
           </a:xfrm>
           <a:prstGeom prst="rect">
@@ -7815,13 +7815,13 @@
             <a:r>
               <a:rPr lang="en-US" sz="1300" b="1" dirty="0">
                 <a:solidFill>
-                  <a:srgbClr val="0F766E"/>
+                  <a:srgbClr val="4C1D95"/>
                 </a:solidFill>
                 <a:latin typeface="Trebuchet MS" pitchFamily="34" charset="0"/>
                 <a:ea typeface="Trebuchet MS" pitchFamily="34" charset="-122"/>
                 <a:cs typeface="Trebuchet MS" pitchFamily="34" charset="-120"/>
               </a:rPr>
-              <a:t>pay</a:t>
+              <a:t>re</a:t>
             </a:r>
             <a:endParaRPr lang="en-US" sz="1300" dirty="0"/>
           </a:p>
@@ -7835,7 +7835,7 @@
         </p:nvSpPr>
         <p:spPr>
           <a:xfrm>
-            <a:off x="2938272" y="2569464"/>
+            <a:off x="2221992" y="2569464"/>
             <a:ext cx="1828800" cy="201168"/>
           </a:xfrm>
           <a:prstGeom prst="rect">
@@ -7860,7 +7860,7 @@
                 <a:ea typeface="Calibri" pitchFamily="34" charset="-122"/>
                 <a:cs typeface="Calibri" pitchFamily="34" charset="-120"/>
               </a:rPr>
-              <a:t>give money owed</a:t>
+              <a:t>again</a:t>
             </a:r>
             <a:endParaRPr lang="en-US" sz="850" dirty="0"/>
           </a:p>
@@ -7874,7 +7874,7 @@
         </p:nvSpPr>
         <p:spPr>
           <a:xfrm>
-            <a:off x="5803392" y="2258568"/>
+            <a:off x="4370832" y="2258568"/>
             <a:ext cx="1828800" cy="292608"/>
           </a:xfrm>
           <a:prstGeom prst="rect">
@@ -7883,11 +7883,11 @@
             </a:avLst>
           </a:prstGeom>
           <a:solidFill>
-            <a:srgbClr val="FCE7F3"/>
+            <a:srgbClr val="CCFBF1"/>
           </a:solidFill>
           <a:ln w="19050">
             <a:solidFill>
-              <a:srgbClr val="DB2777"/>
+              <a:srgbClr val="0D9488"/>
             </a:solidFill>
             <a:prstDash val="solid"/>
           </a:ln>
@@ -7908,7 +7908,7 @@
         </p:nvSpPr>
         <p:spPr>
           <a:xfrm>
-            <a:off x="5803392" y="2258568"/>
+            <a:off x="4370832" y="2258568"/>
             <a:ext cx="1828800" cy="292608"/>
           </a:xfrm>
           <a:prstGeom prst="rect">
@@ -7927,13 +7927,13 @@
             <a:r>
               <a:rPr lang="en-US" sz="1300" b="1" dirty="0">
                 <a:solidFill>
-                  <a:srgbClr val="9D174D"/>
+                  <a:srgbClr val="0F766E"/>
                 </a:solidFill>
                 <a:latin typeface="Trebuchet MS" pitchFamily="34" charset="0"/>
                 <a:ea typeface="Trebuchet MS" pitchFamily="34" charset="-122"/>
                 <a:cs typeface="Trebuchet MS" pitchFamily="34" charset="-120"/>
               </a:rPr>
-              <a:t>ment</a:t>
+              <a:t>pay</a:t>
             </a:r>
             <a:endParaRPr lang="en-US" sz="1300" dirty="0"/>
           </a:p>
@@ -7947,7 +7947,7 @@
         </p:nvSpPr>
         <p:spPr>
           <a:xfrm>
-            <a:off x="5803392" y="2569464"/>
+            <a:off x="4370832" y="2569464"/>
             <a:ext cx="1828800" cy="201168"/>
           </a:xfrm>
           <a:prstGeom prst="rect">
@@ -7972,7 +7972,7 @@
                 <a:ea typeface="Calibri" pitchFamily="34" charset="-122"/>
                 <a:cs typeface="Calibri" pitchFamily="34" charset="-120"/>
               </a:rPr>
-              <a:t>action or result</a:t>
+              <a:t>to give money for something</a:t>
             </a:r>
             <a:endParaRPr lang="en-US" sz="850" dirty="0"/>
           </a:p>
@@ -7981,6 +7981,118 @@
       <p:sp>
         <p:nvSpPr>
           <p:cNvPr id="22" name="Shape 20"/>
+          <p:cNvSpPr/>
+          <p:nvPr/>
+        </p:nvSpPr>
+        <p:spPr>
+          <a:xfrm>
+            <a:off x="6519672" y="2258568"/>
+            <a:ext cx="1828800" cy="292608"/>
+          </a:xfrm>
+          <a:prstGeom prst="rect">
+            <a:avLst>
+              <a:gd name="adj" fmla="val 25000"/>
+            </a:avLst>
+          </a:prstGeom>
+          <a:solidFill>
+            <a:srgbClr val="FCE7F3"/>
+          </a:solidFill>
+          <a:ln w="19050">
+            <a:solidFill>
+              <a:srgbClr val="DB2777"/>
+            </a:solidFill>
+            <a:prstDash val="solid"/>
+          </a:ln>
+          <a:effectLst>
+            <a:outerShdw sx="100000" sy="100000" kx="0" ky="0" algn="bl" rotWithShape="0" blurRad="101600" dist="38100" dir="8100000">
+              <a:srgbClr val="000000">
+                <a:alpha val="12000"/>
+              </a:srgbClr>
+            </a:outerShdw>
+          </a:effectLst>
+        </p:spPr>
+      </p:sp>
+      <p:sp>
+        <p:nvSpPr>
+          <p:cNvPr id="23" name="Text 21"/>
+          <p:cNvSpPr/>
+          <p:nvPr/>
+        </p:nvSpPr>
+        <p:spPr>
+          <a:xfrm>
+            <a:off x="6519672" y="2258568"/>
+            <a:ext cx="1828800" cy="292608"/>
+          </a:xfrm>
+          <a:prstGeom prst="rect">
+            <a:avLst/>
+          </a:prstGeom>
+          <a:noFill/>
+          <a:ln/>
+        </p:spPr>
+        <p:txBody>
+          <a:bodyPr wrap="square" lIns="0" tIns="0" rIns="0" bIns="0" rtlCol="0" anchor="ctr"/>
+          <a:lstStyle/>
+          <a:p>
+            <a:pPr algn="ctr" indent="0" marL="0">
+              <a:buNone/>
+            </a:pPr>
+            <a:r>
+              <a:rPr lang="en-US" sz="1300" b="1" dirty="0">
+                <a:solidFill>
+                  <a:srgbClr val="9D174D"/>
+                </a:solidFill>
+                <a:latin typeface="Trebuchet MS" pitchFamily="34" charset="0"/>
+                <a:ea typeface="Trebuchet MS" pitchFamily="34" charset="-122"/>
+                <a:cs typeface="Trebuchet MS" pitchFamily="34" charset="-120"/>
+              </a:rPr>
+              <a:t>ing</a:t>
+            </a:r>
+            <a:endParaRPr lang="en-US" sz="1300" dirty="0"/>
+          </a:p>
+        </p:txBody>
+      </p:sp>
+      <p:sp>
+        <p:nvSpPr>
+          <p:cNvPr id="24" name="Text 22"/>
+          <p:cNvSpPr/>
+          <p:nvPr/>
+        </p:nvSpPr>
+        <p:spPr>
+          <a:xfrm>
+            <a:off x="6519672" y="2569464"/>
+            <a:ext cx="1828800" cy="201168"/>
+          </a:xfrm>
+          <a:prstGeom prst="rect">
+            <a:avLst/>
+          </a:prstGeom>
+          <a:noFill/>
+          <a:ln/>
+        </p:spPr>
+        <p:txBody>
+          <a:bodyPr wrap="square" lIns="0" tIns="0" rIns="0" bIns="0" rtlCol="0" anchor="t"/>
+          <a:lstStyle/>
+          <a:p>
+            <a:pPr algn="ctr" indent="0" marL="0">
+              <a:buNone/>
+            </a:pPr>
+            <a:r>
+              <a:rPr lang="en-US" sz="850" dirty="0">
+                <a:solidFill>
+                  <a:srgbClr val="475569"/>
+                </a:solidFill>
+                <a:latin typeface="Calibri" pitchFamily="34" charset="0"/>
+                <a:ea typeface="Calibri" pitchFamily="34" charset="-122"/>
+                <a:cs typeface="Calibri" pitchFamily="34" charset="-120"/>
+              </a:rPr>
+              <a:t>happening now</a:t>
+            </a:r>
+            <a:endParaRPr lang="en-US" sz="850" dirty="0"/>
+          </a:p>
+        </p:txBody>
+      </p:sp>
+      <p:sp>
+        <p:nvSpPr>
+          <p:cNvPr id="25" name="Shape 23"/>
           <p:cNvSpPr/>
           <p:nvPr/>
         </p:nvSpPr>
@@ -8007,7 +8119,7 @@
       </p:sp>
       <p:sp>
         <p:nvSpPr>
-          <p:cNvPr id="23" name="Text 21"/>
+          <p:cNvPr id="26" name="Text 24"/>
           <p:cNvSpPr/>
           <p:nvPr/>
         </p:nvSpPr>
@@ -8046,7 +8158,7 @@
       </p:sp>
       <p:sp>
         <p:nvSpPr>
-          <p:cNvPr id="24" name="Shape 22"/>
+          <p:cNvPr id="27" name="Shape 25"/>
           <p:cNvSpPr/>
           <p:nvPr/>
         </p:nvSpPr>
@@ -8073,7 +8185,7 @@
       </p:sp>
       <p:sp>
         <p:nvSpPr>
-          <p:cNvPr id="25" name="Text 23"/>
+          <p:cNvPr id="28" name="Text 26"/>
           <p:cNvSpPr/>
           <p:nvPr/>
         </p:nvSpPr>
@@ -8112,7 +8224,7 @@
       </p:sp>
       <p:sp>
         <p:nvSpPr>
-          <p:cNvPr id="26" name="Shape 24"/>
+          <p:cNvPr id="29" name="Shape 27"/>
           <p:cNvSpPr/>
           <p:nvPr/>
         </p:nvSpPr>
@@ -8139,7 +8251,7 @@
       </p:sp>
       <p:sp>
         <p:nvSpPr>
-          <p:cNvPr id="27" name="Text 25"/>
+          <p:cNvPr id="30" name="Text 28"/>
           <p:cNvSpPr/>
           <p:nvPr/>
         </p:nvSpPr>
@@ -8178,7 +8290,7 @@
       </p:sp>
       <p:sp>
         <p:nvSpPr>
-          <p:cNvPr id="28" name="Shape 26"/>
+          <p:cNvPr id="31" name="Shape 29"/>
           <p:cNvSpPr/>
           <p:nvPr/>
         </p:nvSpPr>
@@ -8205,7 +8317,7 @@
       </p:sp>
       <p:sp>
         <p:nvSpPr>
-          <p:cNvPr id="29" name="Text 27"/>
+          <p:cNvPr id="32" name="Text 30"/>
           <p:cNvSpPr/>
           <p:nvPr/>
         </p:nvSpPr>
@@ -8528,7 +8640,7 @@
                 <a:ea typeface="Calibri" pitchFamily="34" charset="-122"/>
                 <a:cs typeface="Calibri" pitchFamily="34" charset="-120"/>
               </a:rPr>
-              <a:t>Word Labs  •  wordlabs.app  •  Root: 'pay' = give money owed</a:t>
+              <a:t>Word Labs  •  wordlabs.app  •  Root: 'pay' = to give money for something</a:t>
             </a:r>
             <a:endParaRPr lang="en-US" sz="800" dirty="0"/>
           </a:p>
@@ -8667,7 +8779,7 @@
                 <a:ea typeface="Trebuchet MS" pitchFamily="34" charset="-122"/>
                 <a:cs typeface="Trebuchet MS" pitchFamily="34" charset="-120"/>
               </a:rPr>
-              <a:t>payment</a:t>
+              <a:t>repaying</a:t>
             </a:r>
             <a:endParaRPr lang="en-US" sz="2800" dirty="0"/>
           </a:p>
@@ -8747,7 +8859,7 @@
         </p:nvSpPr>
         <p:spPr>
           <a:xfrm>
-            <a:off x="2938272" y="2258568"/>
+            <a:off x="2221992" y="2258568"/>
             <a:ext cx="1828800" cy="292608"/>
           </a:xfrm>
           <a:prstGeom prst="rect">
@@ -8756,11 +8868,11 @@
             </a:avLst>
           </a:prstGeom>
           <a:solidFill>
-            <a:srgbClr val="CCFBF1"/>
+            <a:srgbClr val="DDD6FE"/>
           </a:solidFill>
           <a:ln w="19050">
             <a:solidFill>
-              <a:srgbClr val="0D9488"/>
+              <a:srgbClr val="7C3AED"/>
             </a:solidFill>
             <a:prstDash val="solid"/>
           </a:ln>
@@ -8781,7 +8893,7 @@
         </p:nvSpPr>
         <p:spPr>
           <a:xfrm>
-            <a:off x="2938272" y="2258568"/>
+            <a:off x="2221992" y="2258568"/>
             <a:ext cx="1828800" cy="292608"/>
           </a:xfrm>
           <a:prstGeom prst="rect">
@@ -8800,13 +8912,13 @@
             <a:r>
               <a:rPr lang="en-US" sz="1300" b="1" dirty="0">
                 <a:solidFill>
-                  <a:srgbClr val="0F766E"/>
+                  <a:srgbClr val="4C1D95"/>
                 </a:solidFill>
                 <a:latin typeface="Trebuchet MS" pitchFamily="34" charset="0"/>
                 <a:ea typeface="Trebuchet MS" pitchFamily="34" charset="-122"/>
                 <a:cs typeface="Trebuchet MS" pitchFamily="34" charset="-120"/>
               </a:rPr>
-              <a:t>pay</a:t>
+              <a:t>re</a:t>
             </a:r>
             <a:endParaRPr lang="en-US" sz="1300" dirty="0"/>
           </a:p>
@@ -8820,7 +8932,7 @@
         </p:nvSpPr>
         <p:spPr>
           <a:xfrm>
-            <a:off x="2938272" y="2569464"/>
+            <a:off x="2221992" y="2569464"/>
             <a:ext cx="1828800" cy="201168"/>
           </a:xfrm>
           <a:prstGeom prst="rect">
@@ -8845,7 +8957,7 @@
                 <a:ea typeface="Calibri" pitchFamily="34" charset="-122"/>
                 <a:cs typeface="Calibri" pitchFamily="34" charset="-120"/>
               </a:rPr>
-              <a:t>give money owed</a:t>
+              <a:t>again</a:t>
             </a:r>
             <a:endParaRPr lang="en-US" sz="850" dirty="0"/>
           </a:p>
@@ -8859,7 +8971,7 @@
         </p:nvSpPr>
         <p:spPr>
           <a:xfrm>
-            <a:off x="5803392" y="2258568"/>
+            <a:off x="4370832" y="2258568"/>
             <a:ext cx="1828800" cy="292608"/>
           </a:xfrm>
           <a:prstGeom prst="rect">
@@ -8868,11 +8980,11 @@
             </a:avLst>
           </a:prstGeom>
           <a:solidFill>
-            <a:srgbClr val="FCE7F3"/>
+            <a:srgbClr val="CCFBF1"/>
           </a:solidFill>
           <a:ln w="19050">
             <a:solidFill>
-              <a:srgbClr val="DB2777"/>
+              <a:srgbClr val="0D9488"/>
             </a:solidFill>
             <a:prstDash val="solid"/>
           </a:ln>
@@ -8893,7 +9005,7 @@
         </p:nvSpPr>
         <p:spPr>
           <a:xfrm>
-            <a:off x="5803392" y="2258568"/>
+            <a:off x="4370832" y="2258568"/>
             <a:ext cx="1828800" cy="292608"/>
           </a:xfrm>
           <a:prstGeom prst="rect">
@@ -8912,13 +9024,13 @@
             <a:r>
               <a:rPr lang="en-US" sz="1300" b="1" dirty="0">
                 <a:solidFill>
-                  <a:srgbClr val="9D174D"/>
+                  <a:srgbClr val="0F766E"/>
                 </a:solidFill>
                 <a:latin typeface="Trebuchet MS" pitchFamily="34" charset="0"/>
                 <a:ea typeface="Trebuchet MS" pitchFamily="34" charset="-122"/>
                 <a:cs typeface="Trebuchet MS" pitchFamily="34" charset="-120"/>
               </a:rPr>
-              <a:t>ment</a:t>
+              <a:t>pay</a:t>
             </a:r>
             <a:endParaRPr lang="en-US" sz="1300" dirty="0"/>
           </a:p>
@@ -8932,7 +9044,7 @@
         </p:nvSpPr>
         <p:spPr>
           <a:xfrm>
-            <a:off x="5803392" y="2569464"/>
+            <a:off x="4370832" y="2569464"/>
             <a:ext cx="1828800" cy="201168"/>
           </a:xfrm>
           <a:prstGeom prst="rect">
@@ -8957,7 +9069,7 @@
                 <a:ea typeface="Calibri" pitchFamily="34" charset="-122"/>
                 <a:cs typeface="Calibri" pitchFamily="34" charset="-120"/>
               </a:rPr>
-              <a:t>action or result</a:t>
+              <a:t>to give money for something</a:t>
             </a:r>
             <a:endParaRPr lang="en-US" sz="850" dirty="0"/>
           </a:p>
@@ -8966,6 +9078,118 @@
       <p:sp>
         <p:nvSpPr>
           <p:cNvPr id="22" name="Shape 20"/>
+          <p:cNvSpPr/>
+          <p:nvPr/>
+        </p:nvSpPr>
+        <p:spPr>
+          <a:xfrm>
+            <a:off x="6519672" y="2258568"/>
+            <a:ext cx="1828800" cy="292608"/>
+          </a:xfrm>
+          <a:prstGeom prst="rect">
+            <a:avLst>
+              <a:gd name="adj" fmla="val 25000"/>
+            </a:avLst>
+          </a:prstGeom>
+          <a:solidFill>
+            <a:srgbClr val="FCE7F3"/>
+          </a:solidFill>
+          <a:ln w="19050">
+            <a:solidFill>
+              <a:srgbClr val="DB2777"/>
+            </a:solidFill>
+            <a:prstDash val="solid"/>
+          </a:ln>
+          <a:effectLst>
+            <a:outerShdw sx="100000" sy="100000" kx="0" ky="0" algn="bl" rotWithShape="0" blurRad="101600" dist="38100" dir="8100000">
+              <a:srgbClr val="000000">
+                <a:alpha val="12000"/>
+              </a:srgbClr>
+            </a:outerShdw>
+          </a:effectLst>
+        </p:spPr>
+      </p:sp>
+      <p:sp>
+        <p:nvSpPr>
+          <p:cNvPr id="23" name="Text 21"/>
+          <p:cNvSpPr/>
+          <p:nvPr/>
+        </p:nvSpPr>
+        <p:spPr>
+          <a:xfrm>
+            <a:off x="6519672" y="2258568"/>
+            <a:ext cx="1828800" cy="292608"/>
+          </a:xfrm>
+          <a:prstGeom prst="rect">
+            <a:avLst/>
+          </a:prstGeom>
+          <a:noFill/>
+          <a:ln/>
+        </p:spPr>
+        <p:txBody>
+          <a:bodyPr wrap="square" lIns="0" tIns="0" rIns="0" bIns="0" rtlCol="0" anchor="ctr"/>
+          <a:lstStyle/>
+          <a:p>
+            <a:pPr algn="ctr" indent="0" marL="0">
+              <a:buNone/>
+            </a:pPr>
+            <a:r>
+              <a:rPr lang="en-US" sz="1300" b="1" dirty="0">
+                <a:solidFill>
+                  <a:srgbClr val="9D174D"/>
+                </a:solidFill>
+                <a:latin typeface="Trebuchet MS" pitchFamily="34" charset="0"/>
+                <a:ea typeface="Trebuchet MS" pitchFamily="34" charset="-122"/>
+                <a:cs typeface="Trebuchet MS" pitchFamily="34" charset="-120"/>
+              </a:rPr>
+              <a:t>ing</a:t>
+            </a:r>
+            <a:endParaRPr lang="en-US" sz="1300" dirty="0"/>
+          </a:p>
+        </p:txBody>
+      </p:sp>
+      <p:sp>
+        <p:nvSpPr>
+          <p:cNvPr id="24" name="Text 22"/>
+          <p:cNvSpPr/>
+          <p:nvPr/>
+        </p:nvSpPr>
+        <p:spPr>
+          <a:xfrm>
+            <a:off x="6519672" y="2569464"/>
+            <a:ext cx="1828800" cy="201168"/>
+          </a:xfrm>
+          <a:prstGeom prst="rect">
+            <a:avLst/>
+          </a:prstGeom>
+          <a:noFill/>
+          <a:ln/>
+        </p:spPr>
+        <p:txBody>
+          <a:bodyPr wrap="square" lIns="0" tIns="0" rIns="0" bIns="0" rtlCol="0" anchor="t"/>
+          <a:lstStyle/>
+          <a:p>
+            <a:pPr algn="ctr" indent="0" marL="0">
+              <a:buNone/>
+            </a:pPr>
+            <a:r>
+              <a:rPr lang="en-US" sz="850" dirty="0">
+                <a:solidFill>
+                  <a:srgbClr val="475569"/>
+                </a:solidFill>
+                <a:latin typeface="Calibri" pitchFamily="34" charset="0"/>
+                <a:ea typeface="Calibri" pitchFamily="34" charset="-122"/>
+                <a:cs typeface="Calibri" pitchFamily="34" charset="-120"/>
+              </a:rPr>
+              <a:t>happening now</a:t>
+            </a:r>
+            <a:endParaRPr lang="en-US" sz="850" dirty="0"/>
+          </a:p>
+        </p:txBody>
+      </p:sp>
+      <p:sp>
+        <p:nvSpPr>
+          <p:cNvPr id="25" name="Shape 23"/>
           <p:cNvSpPr/>
           <p:nvPr/>
         </p:nvSpPr>
@@ -8992,7 +9216,7 @@
       </p:sp>
       <p:sp>
         <p:nvSpPr>
-          <p:cNvPr id="23" name="Text 21"/>
+          <p:cNvPr id="26" name="Text 24"/>
           <p:cNvSpPr/>
           <p:nvPr/>
         </p:nvSpPr>
@@ -9031,7 +9255,7 @@
       </p:sp>
       <p:sp>
         <p:nvSpPr>
-          <p:cNvPr id="24" name="Shape 22"/>
+          <p:cNvPr id="27" name="Shape 25"/>
           <p:cNvSpPr/>
           <p:nvPr/>
         </p:nvSpPr>
@@ -9058,13 +9282,13 @@
       </p:sp>
       <p:sp>
         <p:nvSpPr>
-          <p:cNvPr id="25" name="Shape 23"/>
-          <p:cNvSpPr/>
-          <p:nvPr/>
-        </p:nvSpPr>
-        <p:spPr>
-          <a:xfrm>
-            <a:off x="2999232" y="3364992"/>
+          <p:cNvPr id="28" name="Shape 26"/>
+          <p:cNvSpPr/>
+          <p:nvPr/>
+        </p:nvSpPr>
+        <p:spPr>
+          <a:xfrm>
+            <a:off x="2313432" y="3364992"/>
             <a:ext cx="1645920" cy="475488"/>
           </a:xfrm>
           <a:prstGeom prst="rect">
@@ -9085,13 +9309,13 @@
       </p:sp>
       <p:sp>
         <p:nvSpPr>
-          <p:cNvPr id="26" name="Text 24"/>
-          <p:cNvSpPr/>
-          <p:nvPr/>
-        </p:nvSpPr>
-        <p:spPr>
-          <a:xfrm>
-            <a:off x="2999232" y="3364992"/>
+          <p:cNvPr id="29" name="Text 27"/>
+          <p:cNvSpPr/>
+          <p:nvPr/>
+        </p:nvSpPr>
+        <p:spPr>
+          <a:xfrm>
+            <a:off x="2313432" y="3364992"/>
             <a:ext cx="1645920" cy="475488"/>
           </a:xfrm>
           <a:prstGeom prst="rect">
@@ -9116,7 +9340,7 @@
                 <a:ea typeface="Trebuchet MS" pitchFamily="34" charset="-122"/>
                 <a:cs typeface="Trebuchet MS" pitchFamily="34" charset="-120"/>
               </a:rPr>
-              <a:t>pay</a:t>
+              <a:t>re</a:t>
             </a:r>
             <a:endParaRPr lang="en-US" sz="1400" dirty="0"/>
           </a:p>
@@ -9124,14 +9348,14 @@
       </p:sp>
       <p:sp>
         <p:nvSpPr>
-          <p:cNvPr id="27" name="Text 25"/>
-          <p:cNvSpPr/>
-          <p:nvPr/>
-        </p:nvSpPr>
-        <p:spPr>
-          <a:xfrm>
-            <a:off x="4645152" y="3364992"/>
-            <a:ext cx="1097280" cy="475488"/>
+          <p:cNvPr id="30" name="Text 28"/>
+          <p:cNvSpPr/>
+          <p:nvPr/>
+        </p:nvSpPr>
+        <p:spPr>
+          <a:xfrm>
+            <a:off x="3959352" y="3364992"/>
+            <a:ext cx="411480" cy="475488"/>
           </a:xfrm>
           <a:prstGeom prst="rect">
             <a:avLst/>
@@ -9163,13 +9387,13 @@
       </p:sp>
       <p:sp>
         <p:nvSpPr>
-          <p:cNvPr id="28" name="Shape 26"/>
-          <p:cNvSpPr/>
-          <p:nvPr/>
-        </p:nvSpPr>
-        <p:spPr>
-          <a:xfrm>
-            <a:off x="5742432" y="3364992"/>
+          <p:cNvPr id="31" name="Shape 29"/>
+          <p:cNvSpPr/>
+          <p:nvPr/>
+        </p:nvSpPr>
+        <p:spPr>
+          <a:xfrm>
+            <a:off x="4370832" y="3364992"/>
             <a:ext cx="1645920" cy="475488"/>
           </a:xfrm>
           <a:prstGeom prst="rect">
@@ -9190,13 +9414,13 @@
       </p:sp>
       <p:sp>
         <p:nvSpPr>
-          <p:cNvPr id="29" name="Text 27"/>
-          <p:cNvSpPr/>
-          <p:nvPr/>
-        </p:nvSpPr>
-        <p:spPr>
-          <a:xfrm>
-            <a:off x="5742432" y="3364992"/>
+          <p:cNvPr id="32" name="Text 30"/>
+          <p:cNvSpPr/>
+          <p:nvPr/>
+        </p:nvSpPr>
+        <p:spPr>
+          <a:xfrm>
+            <a:off x="4370832" y="3364992"/>
             <a:ext cx="1645920" cy="475488"/>
           </a:xfrm>
           <a:prstGeom prst="rect">
@@ -9221,7 +9445,7 @@
                 <a:ea typeface="Trebuchet MS" pitchFamily="34" charset="-122"/>
                 <a:cs typeface="Trebuchet MS" pitchFamily="34" charset="-120"/>
               </a:rPr>
-              <a:t>ment</a:t>
+              <a:t>pay</a:t>
             </a:r>
             <a:endParaRPr lang="en-US" sz="1400" dirty="0"/>
           </a:p>
@@ -9229,7 +9453,112 @@
       </p:sp>
       <p:sp>
         <p:nvSpPr>
-          <p:cNvPr id="30" name="Shape 28"/>
+          <p:cNvPr id="33" name="Text 31"/>
+          <p:cNvSpPr/>
+          <p:nvPr/>
+        </p:nvSpPr>
+        <p:spPr>
+          <a:xfrm>
+            <a:off x="6016752" y="3364992"/>
+            <a:ext cx="411480" cy="475488"/>
+          </a:xfrm>
+          <a:prstGeom prst="rect">
+            <a:avLst/>
+          </a:prstGeom>
+          <a:noFill/>
+          <a:ln/>
+        </p:spPr>
+        <p:txBody>
+          <a:bodyPr wrap="square" lIns="0" tIns="0" rIns="0" bIns="0" rtlCol="0" anchor="ctr"/>
+          <a:lstStyle/>
+          <a:p>
+            <a:pPr algn="ctr" indent="0" marL="0">
+              <a:buNone/>
+            </a:pPr>
+            <a:r>
+              <a:rPr lang="en-US" sz="1600" b="1" dirty="0">
+                <a:solidFill>
+                  <a:srgbClr val="0D9488"/>
+                </a:solidFill>
+                <a:latin typeface="Trebuchet MS" pitchFamily="34" charset="0"/>
+                <a:ea typeface="Trebuchet MS" pitchFamily="34" charset="-122"/>
+                <a:cs typeface="Trebuchet MS" pitchFamily="34" charset="-120"/>
+              </a:rPr>
+              <a:t>·</a:t>
+            </a:r>
+            <a:endParaRPr lang="en-US" sz="1600" dirty="0"/>
+          </a:p>
+        </p:txBody>
+      </p:sp>
+      <p:sp>
+        <p:nvSpPr>
+          <p:cNvPr id="34" name="Shape 32"/>
+          <p:cNvSpPr/>
+          <p:nvPr/>
+        </p:nvSpPr>
+        <p:spPr>
+          <a:xfrm>
+            <a:off x="6428232" y="3364992"/>
+            <a:ext cx="1645920" cy="475488"/>
+          </a:xfrm>
+          <a:prstGeom prst="rect">
+            <a:avLst>
+              <a:gd name="adj" fmla="val 9615"/>
+            </a:avLst>
+          </a:prstGeom>
+          <a:solidFill>
+            <a:srgbClr val="FFFFFF"/>
+          </a:solidFill>
+          <a:ln w="12700">
+            <a:solidFill>
+              <a:srgbClr val="0D9488"/>
+            </a:solidFill>
+            <a:prstDash val="solid"/>
+          </a:ln>
+        </p:spPr>
+      </p:sp>
+      <p:sp>
+        <p:nvSpPr>
+          <p:cNvPr id="35" name="Text 33"/>
+          <p:cNvSpPr/>
+          <p:nvPr/>
+        </p:nvSpPr>
+        <p:spPr>
+          <a:xfrm>
+            <a:off x="6428232" y="3364992"/>
+            <a:ext cx="1645920" cy="475488"/>
+          </a:xfrm>
+          <a:prstGeom prst="rect">
+            <a:avLst/>
+          </a:prstGeom>
+          <a:noFill/>
+          <a:ln/>
+        </p:spPr>
+        <p:txBody>
+          <a:bodyPr wrap="square" lIns="0" tIns="0" rIns="0" bIns="0" rtlCol="0" anchor="ctr"/>
+          <a:lstStyle/>
+          <a:p>
+            <a:pPr algn="ctr" indent="0" marL="0">
+              <a:buNone/>
+            </a:pPr>
+            <a:r>
+              <a:rPr lang="en-US" sz="1400" b="1" dirty="0">
+                <a:solidFill>
+                  <a:srgbClr val="0D9488"/>
+                </a:solidFill>
+                <a:latin typeface="Trebuchet MS" pitchFamily="34" charset="0"/>
+                <a:ea typeface="Trebuchet MS" pitchFamily="34" charset="-122"/>
+                <a:cs typeface="Trebuchet MS" pitchFamily="34" charset="-120"/>
+              </a:rPr>
+              <a:t>ing</a:t>
+            </a:r>
+            <a:endParaRPr lang="en-US" sz="1400" dirty="0"/>
+          </a:p>
+        </p:txBody>
+      </p:sp>
+      <p:sp>
+        <p:nvSpPr>
+          <p:cNvPr id="36" name="Shape 34"/>
           <p:cNvSpPr/>
           <p:nvPr/>
         </p:nvSpPr>
@@ -9256,7 +9585,7 @@
       </p:sp>
       <p:sp>
         <p:nvSpPr>
-          <p:cNvPr id="31" name="Text 29"/>
+          <p:cNvPr id="37" name="Text 35"/>
           <p:cNvSpPr/>
           <p:nvPr/>
         </p:nvSpPr>
@@ -9295,7 +9624,7 @@
       </p:sp>
       <p:sp>
         <p:nvSpPr>
-          <p:cNvPr id="32" name="Shape 30"/>
+          <p:cNvPr id="38" name="Shape 36"/>
           <p:cNvSpPr/>
           <p:nvPr/>
         </p:nvSpPr>
@@ -9322,7 +9651,7 @@
       </p:sp>
       <p:sp>
         <p:nvSpPr>
-          <p:cNvPr id="33" name="Text 31"/>
+          <p:cNvPr id="39" name="Text 37"/>
           <p:cNvSpPr/>
           <p:nvPr/>
         </p:nvSpPr>
@@ -9645,7 +9974,7 @@
                 <a:ea typeface="Calibri" pitchFamily="34" charset="-122"/>
                 <a:cs typeface="Calibri" pitchFamily="34" charset="-120"/>
               </a:rPr>
-              <a:t>Word Labs  •  wordlabs.app  •  Root: 'pay' = give money owed</a:t>
+              <a:t>Word Labs  •  wordlabs.app  •  Root: 'pay' = to give money for something</a:t>
             </a:r>
             <a:endParaRPr lang="en-US" sz="800" dirty="0"/>
           </a:p>
@@ -9784,7 +10113,7 @@
                 <a:ea typeface="Trebuchet MS" pitchFamily="34" charset="-122"/>
                 <a:cs typeface="Trebuchet MS" pitchFamily="34" charset="-120"/>
               </a:rPr>
-              <a:t>payment</a:t>
+              <a:t>repaying</a:t>
             </a:r>
             <a:endParaRPr lang="en-US" sz="2800" dirty="0"/>
           </a:p>
@@ -9864,7 +10193,7 @@
         </p:nvSpPr>
         <p:spPr>
           <a:xfrm>
-            <a:off x="2938272" y="2258568"/>
+            <a:off x="2221992" y="2258568"/>
             <a:ext cx="1828800" cy="292608"/>
           </a:xfrm>
           <a:prstGeom prst="rect">
@@ -9873,11 +10202,11 @@
             </a:avLst>
           </a:prstGeom>
           <a:solidFill>
-            <a:srgbClr val="CCFBF1"/>
+            <a:srgbClr val="DDD6FE"/>
           </a:solidFill>
           <a:ln w="19050">
             <a:solidFill>
-              <a:srgbClr val="0D9488"/>
+              <a:srgbClr val="7C3AED"/>
             </a:solidFill>
             <a:prstDash val="solid"/>
           </a:ln>
@@ -9898,7 +10227,7 @@
         </p:nvSpPr>
         <p:spPr>
           <a:xfrm>
-            <a:off x="2938272" y="2258568"/>
+            <a:off x="2221992" y="2258568"/>
             <a:ext cx="1828800" cy="292608"/>
           </a:xfrm>
           <a:prstGeom prst="rect">
@@ -9917,13 +10246,13 @@
             <a:r>
               <a:rPr lang="en-US" sz="1300" b="1" dirty="0">
                 <a:solidFill>
-                  <a:srgbClr val="0F766E"/>
+                  <a:srgbClr val="4C1D95"/>
                 </a:solidFill>
                 <a:latin typeface="Trebuchet MS" pitchFamily="34" charset="0"/>
                 <a:ea typeface="Trebuchet MS" pitchFamily="34" charset="-122"/>
                 <a:cs typeface="Trebuchet MS" pitchFamily="34" charset="-120"/>
               </a:rPr>
-              <a:t>pay</a:t>
+              <a:t>re</a:t>
             </a:r>
             <a:endParaRPr lang="en-US" sz="1300" dirty="0"/>
           </a:p>
@@ -9937,7 +10266,7 @@
         </p:nvSpPr>
         <p:spPr>
           <a:xfrm>
-            <a:off x="2938272" y="2569464"/>
+            <a:off x="2221992" y="2569464"/>
             <a:ext cx="1828800" cy="201168"/>
           </a:xfrm>
           <a:prstGeom prst="rect">
@@ -9962,7 +10291,7 @@
                 <a:ea typeface="Calibri" pitchFamily="34" charset="-122"/>
                 <a:cs typeface="Calibri" pitchFamily="34" charset="-120"/>
               </a:rPr>
-              <a:t>give money owed</a:t>
+              <a:t>again</a:t>
             </a:r>
             <a:endParaRPr lang="en-US" sz="850" dirty="0"/>
           </a:p>
@@ -9976,7 +10305,7 @@
         </p:nvSpPr>
         <p:spPr>
           <a:xfrm>
-            <a:off x="5803392" y="2258568"/>
+            <a:off x="4370832" y="2258568"/>
             <a:ext cx="1828800" cy="292608"/>
           </a:xfrm>
           <a:prstGeom prst="rect">
@@ -9985,11 +10314,11 @@
             </a:avLst>
           </a:prstGeom>
           <a:solidFill>
-            <a:srgbClr val="FCE7F3"/>
+            <a:srgbClr val="CCFBF1"/>
           </a:solidFill>
           <a:ln w="19050">
             <a:solidFill>
-              <a:srgbClr val="DB2777"/>
+              <a:srgbClr val="0D9488"/>
             </a:solidFill>
             <a:prstDash val="solid"/>
           </a:ln>
@@ -10010,7 +10339,7 @@
         </p:nvSpPr>
         <p:spPr>
           <a:xfrm>
-            <a:off x="5803392" y="2258568"/>
+            <a:off x="4370832" y="2258568"/>
             <a:ext cx="1828800" cy="292608"/>
           </a:xfrm>
           <a:prstGeom prst="rect">
@@ -10029,13 +10358,13 @@
             <a:r>
               <a:rPr lang="en-US" sz="1300" b="1" dirty="0">
                 <a:solidFill>
-                  <a:srgbClr val="9D174D"/>
+                  <a:srgbClr val="0F766E"/>
                 </a:solidFill>
                 <a:latin typeface="Trebuchet MS" pitchFamily="34" charset="0"/>
                 <a:ea typeface="Trebuchet MS" pitchFamily="34" charset="-122"/>
                 <a:cs typeface="Trebuchet MS" pitchFamily="34" charset="-120"/>
               </a:rPr>
-              <a:t>ment</a:t>
+              <a:t>pay</a:t>
             </a:r>
             <a:endParaRPr lang="en-US" sz="1300" dirty="0"/>
           </a:p>
@@ -10049,7 +10378,7 @@
         </p:nvSpPr>
         <p:spPr>
           <a:xfrm>
-            <a:off x="5803392" y="2569464"/>
+            <a:off x="4370832" y="2569464"/>
             <a:ext cx="1828800" cy="201168"/>
           </a:xfrm>
           <a:prstGeom prst="rect">
@@ -10074,7 +10403,7 @@
                 <a:ea typeface="Calibri" pitchFamily="34" charset="-122"/>
                 <a:cs typeface="Calibri" pitchFamily="34" charset="-120"/>
               </a:rPr>
-              <a:t>action or result</a:t>
+              <a:t>to give money for something</a:t>
             </a:r>
             <a:endParaRPr lang="en-US" sz="850" dirty="0"/>
           </a:p>
@@ -10083,6 +10412,118 @@
       <p:sp>
         <p:nvSpPr>
           <p:cNvPr id="22" name="Shape 20"/>
+          <p:cNvSpPr/>
+          <p:nvPr/>
+        </p:nvSpPr>
+        <p:spPr>
+          <a:xfrm>
+            <a:off x="6519672" y="2258568"/>
+            <a:ext cx="1828800" cy="292608"/>
+          </a:xfrm>
+          <a:prstGeom prst="rect">
+            <a:avLst>
+              <a:gd name="adj" fmla="val 25000"/>
+            </a:avLst>
+          </a:prstGeom>
+          <a:solidFill>
+            <a:srgbClr val="FCE7F3"/>
+          </a:solidFill>
+          <a:ln w="19050">
+            <a:solidFill>
+              <a:srgbClr val="DB2777"/>
+            </a:solidFill>
+            <a:prstDash val="solid"/>
+          </a:ln>
+          <a:effectLst>
+            <a:outerShdw sx="100000" sy="100000" kx="0" ky="0" algn="bl" rotWithShape="0" blurRad="101600" dist="38100" dir="8100000">
+              <a:srgbClr val="000000">
+                <a:alpha val="12000"/>
+              </a:srgbClr>
+            </a:outerShdw>
+          </a:effectLst>
+        </p:spPr>
+      </p:sp>
+      <p:sp>
+        <p:nvSpPr>
+          <p:cNvPr id="23" name="Text 21"/>
+          <p:cNvSpPr/>
+          <p:nvPr/>
+        </p:nvSpPr>
+        <p:spPr>
+          <a:xfrm>
+            <a:off x="6519672" y="2258568"/>
+            <a:ext cx="1828800" cy="292608"/>
+          </a:xfrm>
+          <a:prstGeom prst="rect">
+            <a:avLst/>
+          </a:prstGeom>
+          <a:noFill/>
+          <a:ln/>
+        </p:spPr>
+        <p:txBody>
+          <a:bodyPr wrap="square" lIns="0" tIns="0" rIns="0" bIns="0" rtlCol="0" anchor="ctr"/>
+          <a:lstStyle/>
+          <a:p>
+            <a:pPr algn="ctr" indent="0" marL="0">
+              <a:buNone/>
+            </a:pPr>
+            <a:r>
+              <a:rPr lang="en-US" sz="1300" b="1" dirty="0">
+                <a:solidFill>
+                  <a:srgbClr val="9D174D"/>
+                </a:solidFill>
+                <a:latin typeface="Trebuchet MS" pitchFamily="34" charset="0"/>
+                <a:ea typeface="Trebuchet MS" pitchFamily="34" charset="-122"/>
+                <a:cs typeface="Trebuchet MS" pitchFamily="34" charset="-120"/>
+              </a:rPr>
+              <a:t>ing</a:t>
+            </a:r>
+            <a:endParaRPr lang="en-US" sz="1300" dirty="0"/>
+          </a:p>
+        </p:txBody>
+      </p:sp>
+      <p:sp>
+        <p:nvSpPr>
+          <p:cNvPr id="24" name="Text 22"/>
+          <p:cNvSpPr/>
+          <p:nvPr/>
+        </p:nvSpPr>
+        <p:spPr>
+          <a:xfrm>
+            <a:off x="6519672" y="2569464"/>
+            <a:ext cx="1828800" cy="201168"/>
+          </a:xfrm>
+          <a:prstGeom prst="rect">
+            <a:avLst/>
+          </a:prstGeom>
+          <a:noFill/>
+          <a:ln/>
+        </p:spPr>
+        <p:txBody>
+          <a:bodyPr wrap="square" lIns="0" tIns="0" rIns="0" bIns="0" rtlCol="0" anchor="t"/>
+          <a:lstStyle/>
+          <a:p>
+            <a:pPr algn="ctr" indent="0" marL="0">
+              <a:buNone/>
+            </a:pPr>
+            <a:r>
+              <a:rPr lang="en-US" sz="850" dirty="0">
+                <a:solidFill>
+                  <a:srgbClr val="475569"/>
+                </a:solidFill>
+                <a:latin typeface="Calibri" pitchFamily="34" charset="0"/>
+                <a:ea typeface="Calibri" pitchFamily="34" charset="-122"/>
+                <a:cs typeface="Calibri" pitchFamily="34" charset="-120"/>
+              </a:rPr>
+              <a:t>happening now</a:t>
+            </a:r>
+            <a:endParaRPr lang="en-US" sz="850" dirty="0"/>
+          </a:p>
+        </p:txBody>
+      </p:sp>
+      <p:sp>
+        <p:nvSpPr>
+          <p:cNvPr id="25" name="Shape 23"/>
           <p:cNvSpPr/>
           <p:nvPr/>
         </p:nvSpPr>
@@ -10109,7 +10550,7 @@
       </p:sp>
       <p:sp>
         <p:nvSpPr>
-          <p:cNvPr id="23" name="Text 21"/>
+          <p:cNvPr id="26" name="Text 24"/>
           <p:cNvSpPr/>
           <p:nvPr/>
         </p:nvSpPr>
@@ -10148,7 +10589,7 @@
       </p:sp>
       <p:sp>
         <p:nvSpPr>
-          <p:cNvPr id="24" name="Shape 22"/>
+          <p:cNvPr id="27" name="Shape 25"/>
           <p:cNvSpPr/>
           <p:nvPr/>
         </p:nvSpPr>
@@ -10175,13 +10616,13 @@
       </p:sp>
       <p:sp>
         <p:nvSpPr>
-          <p:cNvPr id="25" name="Shape 23"/>
-          <p:cNvSpPr/>
-          <p:nvPr/>
-        </p:nvSpPr>
-        <p:spPr>
-          <a:xfrm>
-            <a:off x="2999232" y="3364992"/>
+          <p:cNvPr id="28" name="Shape 26"/>
+          <p:cNvSpPr/>
+          <p:nvPr/>
+        </p:nvSpPr>
+        <p:spPr>
+          <a:xfrm>
+            <a:off x="2313432" y="3364992"/>
             <a:ext cx="1645920" cy="475488"/>
           </a:xfrm>
           <a:prstGeom prst="rect">
@@ -10202,13 +10643,13 @@
       </p:sp>
       <p:sp>
         <p:nvSpPr>
-          <p:cNvPr id="26" name="Text 24"/>
-          <p:cNvSpPr/>
-          <p:nvPr/>
-        </p:nvSpPr>
-        <p:spPr>
-          <a:xfrm>
-            <a:off x="2999232" y="3364992"/>
+          <p:cNvPr id="29" name="Text 27"/>
+          <p:cNvSpPr/>
+          <p:nvPr/>
+        </p:nvSpPr>
+        <p:spPr>
+          <a:xfrm>
+            <a:off x="2313432" y="3364992"/>
             <a:ext cx="1645920" cy="475488"/>
           </a:xfrm>
           <a:prstGeom prst="rect">
@@ -10233,7 +10674,7 @@
                 <a:ea typeface="Trebuchet MS" pitchFamily="34" charset="-122"/>
                 <a:cs typeface="Trebuchet MS" pitchFamily="34" charset="-120"/>
               </a:rPr>
-              <a:t>pay</a:t>
+              <a:t>re</a:t>
             </a:r>
             <a:endParaRPr lang="en-US" sz="1400" dirty="0"/>
           </a:p>
@@ -10241,14 +10682,14 @@
       </p:sp>
       <p:sp>
         <p:nvSpPr>
-          <p:cNvPr id="27" name="Text 25"/>
-          <p:cNvSpPr/>
-          <p:nvPr/>
-        </p:nvSpPr>
-        <p:spPr>
-          <a:xfrm>
-            <a:off x="4645152" y="3364992"/>
-            <a:ext cx="1097280" cy="475488"/>
+          <p:cNvPr id="30" name="Text 28"/>
+          <p:cNvSpPr/>
+          <p:nvPr/>
+        </p:nvSpPr>
+        <p:spPr>
+          <a:xfrm>
+            <a:off x="3959352" y="3364992"/>
+            <a:ext cx="411480" cy="475488"/>
           </a:xfrm>
           <a:prstGeom prst="rect">
             <a:avLst/>
@@ -10280,13 +10721,13 @@
       </p:sp>
       <p:sp>
         <p:nvSpPr>
-          <p:cNvPr id="28" name="Shape 26"/>
-          <p:cNvSpPr/>
-          <p:nvPr/>
-        </p:nvSpPr>
-        <p:spPr>
-          <a:xfrm>
-            <a:off x="5742432" y="3364992"/>
+          <p:cNvPr id="31" name="Shape 29"/>
+          <p:cNvSpPr/>
+          <p:nvPr/>
+        </p:nvSpPr>
+        <p:spPr>
+          <a:xfrm>
+            <a:off x="4370832" y="3364992"/>
             <a:ext cx="1645920" cy="475488"/>
           </a:xfrm>
           <a:prstGeom prst="rect">
@@ -10307,13 +10748,13 @@
       </p:sp>
       <p:sp>
         <p:nvSpPr>
-          <p:cNvPr id="29" name="Text 27"/>
-          <p:cNvSpPr/>
-          <p:nvPr/>
-        </p:nvSpPr>
-        <p:spPr>
-          <a:xfrm>
-            <a:off x="5742432" y="3364992"/>
+          <p:cNvPr id="32" name="Text 30"/>
+          <p:cNvSpPr/>
+          <p:nvPr/>
+        </p:nvSpPr>
+        <p:spPr>
+          <a:xfrm>
+            <a:off x="4370832" y="3364992"/>
             <a:ext cx="1645920" cy="475488"/>
           </a:xfrm>
           <a:prstGeom prst="rect">
@@ -10338,7 +10779,7 @@
                 <a:ea typeface="Trebuchet MS" pitchFamily="34" charset="-122"/>
                 <a:cs typeface="Trebuchet MS" pitchFamily="34" charset="-120"/>
               </a:rPr>
-              <a:t>ment</a:t>
+              <a:t>pay</a:t>
             </a:r>
             <a:endParaRPr lang="en-US" sz="1400" dirty="0"/>
           </a:p>
@@ -10346,7 +10787,112 @@
       </p:sp>
       <p:sp>
         <p:nvSpPr>
-          <p:cNvPr id="30" name="Shape 28"/>
+          <p:cNvPr id="33" name="Text 31"/>
+          <p:cNvSpPr/>
+          <p:nvPr/>
+        </p:nvSpPr>
+        <p:spPr>
+          <a:xfrm>
+            <a:off x="6016752" y="3364992"/>
+            <a:ext cx="411480" cy="475488"/>
+          </a:xfrm>
+          <a:prstGeom prst="rect">
+            <a:avLst/>
+          </a:prstGeom>
+          <a:noFill/>
+          <a:ln/>
+        </p:spPr>
+        <p:txBody>
+          <a:bodyPr wrap="square" lIns="0" tIns="0" rIns="0" bIns="0" rtlCol="0" anchor="ctr"/>
+          <a:lstStyle/>
+          <a:p>
+            <a:pPr algn="ctr" indent="0" marL="0">
+              <a:buNone/>
+            </a:pPr>
+            <a:r>
+              <a:rPr lang="en-US" sz="1600" b="1" dirty="0">
+                <a:solidFill>
+                  <a:srgbClr val="0D9488"/>
+                </a:solidFill>
+                <a:latin typeface="Trebuchet MS" pitchFamily="34" charset="0"/>
+                <a:ea typeface="Trebuchet MS" pitchFamily="34" charset="-122"/>
+                <a:cs typeface="Trebuchet MS" pitchFamily="34" charset="-120"/>
+              </a:rPr>
+              <a:t>·</a:t>
+            </a:r>
+            <a:endParaRPr lang="en-US" sz="1600" dirty="0"/>
+          </a:p>
+        </p:txBody>
+      </p:sp>
+      <p:sp>
+        <p:nvSpPr>
+          <p:cNvPr id="34" name="Shape 32"/>
+          <p:cNvSpPr/>
+          <p:nvPr/>
+        </p:nvSpPr>
+        <p:spPr>
+          <a:xfrm>
+            <a:off x="6428232" y="3364992"/>
+            <a:ext cx="1645920" cy="475488"/>
+          </a:xfrm>
+          <a:prstGeom prst="rect">
+            <a:avLst>
+              <a:gd name="adj" fmla="val 9615"/>
+            </a:avLst>
+          </a:prstGeom>
+          <a:solidFill>
+            <a:srgbClr val="FFFFFF"/>
+          </a:solidFill>
+          <a:ln w="12700">
+            <a:solidFill>
+              <a:srgbClr val="0D9488"/>
+            </a:solidFill>
+            <a:prstDash val="solid"/>
+          </a:ln>
+        </p:spPr>
+      </p:sp>
+      <p:sp>
+        <p:nvSpPr>
+          <p:cNvPr id="35" name="Text 33"/>
+          <p:cNvSpPr/>
+          <p:nvPr/>
+        </p:nvSpPr>
+        <p:spPr>
+          <a:xfrm>
+            <a:off x="6428232" y="3364992"/>
+            <a:ext cx="1645920" cy="475488"/>
+          </a:xfrm>
+          <a:prstGeom prst="rect">
+            <a:avLst/>
+          </a:prstGeom>
+          <a:noFill/>
+          <a:ln/>
+        </p:spPr>
+        <p:txBody>
+          <a:bodyPr wrap="square" lIns="0" tIns="0" rIns="0" bIns="0" rtlCol="0" anchor="ctr"/>
+          <a:lstStyle/>
+          <a:p>
+            <a:pPr algn="ctr" indent="0" marL="0">
+              <a:buNone/>
+            </a:pPr>
+            <a:r>
+              <a:rPr lang="en-US" sz="1400" b="1" dirty="0">
+                <a:solidFill>
+                  <a:srgbClr val="0D9488"/>
+                </a:solidFill>
+                <a:latin typeface="Trebuchet MS" pitchFamily="34" charset="0"/>
+                <a:ea typeface="Trebuchet MS" pitchFamily="34" charset="-122"/>
+                <a:cs typeface="Trebuchet MS" pitchFamily="34" charset="-120"/>
+              </a:rPr>
+              <a:t>ing</a:t>
+            </a:r>
+            <a:endParaRPr lang="en-US" sz="1400" dirty="0"/>
+          </a:p>
+        </p:txBody>
+      </p:sp>
+      <p:sp>
+        <p:nvSpPr>
+          <p:cNvPr id="36" name="Shape 34"/>
           <p:cNvSpPr/>
           <p:nvPr/>
         </p:nvSpPr>
@@ -10373,7 +10919,7 @@
       </p:sp>
       <p:sp>
         <p:nvSpPr>
-          <p:cNvPr id="31" name="Text 29"/>
+          <p:cNvPr id="37" name="Text 35"/>
           <p:cNvSpPr/>
           <p:nvPr/>
         </p:nvSpPr>
@@ -10412,7 +10958,7 @@
       </p:sp>
       <p:sp>
         <p:nvSpPr>
-          <p:cNvPr id="32" name="Shape 30"/>
+          <p:cNvPr id="38" name="Shape 36"/>
           <p:cNvSpPr/>
           <p:nvPr/>
         </p:nvSpPr>
@@ -10439,7 +10985,7 @@
       </p:sp>
       <p:sp>
         <p:nvSpPr>
-          <p:cNvPr id="33" name="Shape 31"/>
+          <p:cNvPr id="39" name="Shape 37"/>
           <p:cNvSpPr/>
           <p:nvPr/>
         </p:nvSpPr>
@@ -10466,7 +11012,7 @@
       </p:sp>
       <p:sp>
         <p:nvSpPr>
-          <p:cNvPr id="34" name="Text 32"/>
+          <p:cNvPr id="40" name="Text 38"/>
           <p:cNvSpPr/>
           <p:nvPr/>
         </p:nvSpPr>
@@ -10497,7 +11043,7 @@
                 <a:ea typeface="Trebuchet MS" pitchFamily="34" charset="-122"/>
                 <a:cs typeface="Trebuchet MS" pitchFamily="34" charset="-120"/>
               </a:rPr>
-              <a:t>p</a:t>
+              <a:t>r</a:t>
             </a:r>
             <a:endParaRPr lang="en-US" sz="900" dirty="0"/>
           </a:p>
@@ -10505,7 +11051,7 @@
       </p:sp>
       <p:sp>
         <p:nvSpPr>
-          <p:cNvPr id="35" name="Shape 33"/>
+          <p:cNvPr id="41" name="Shape 39"/>
           <p:cNvSpPr/>
           <p:nvPr/>
         </p:nvSpPr>
@@ -10532,7 +11078,7 @@
       </p:sp>
       <p:sp>
         <p:nvSpPr>
-          <p:cNvPr id="36" name="Text 34"/>
+          <p:cNvPr id="42" name="Text 40"/>
           <p:cNvSpPr/>
           <p:nvPr/>
         </p:nvSpPr>
@@ -10563,7 +11109,7 @@
                 <a:ea typeface="Trebuchet MS" pitchFamily="34" charset="-122"/>
                 <a:cs typeface="Trebuchet MS" pitchFamily="34" charset="-120"/>
               </a:rPr>
-              <a:t>ay</a:t>
+              <a:t>e</a:t>
             </a:r>
             <a:endParaRPr lang="en-US" sz="900" dirty="0"/>
           </a:p>
@@ -10571,7 +11117,7 @@
       </p:sp>
       <p:sp>
         <p:nvSpPr>
-          <p:cNvPr id="37" name="Shape 35"/>
+          <p:cNvPr id="43" name="Shape 41"/>
           <p:cNvSpPr/>
           <p:nvPr/>
         </p:nvSpPr>
@@ -10598,7 +11144,7 @@
       </p:sp>
       <p:sp>
         <p:nvSpPr>
-          <p:cNvPr id="38" name="Text 36"/>
+          <p:cNvPr id="44" name="Text 42"/>
           <p:cNvSpPr/>
           <p:nvPr/>
         </p:nvSpPr>
@@ -10629,7 +11175,7 @@
                 <a:ea typeface="Trebuchet MS" pitchFamily="34" charset="-122"/>
                 <a:cs typeface="Trebuchet MS" pitchFamily="34" charset="-120"/>
               </a:rPr>
-              <a:t>m</a:t>
+              <a:t>p</a:t>
             </a:r>
             <a:endParaRPr lang="en-US" sz="900" dirty="0"/>
           </a:p>
@@ -10637,7 +11183,7 @@
       </p:sp>
       <p:sp>
         <p:nvSpPr>
-          <p:cNvPr id="39" name="Shape 37"/>
+          <p:cNvPr id="45" name="Shape 43"/>
           <p:cNvSpPr/>
           <p:nvPr/>
         </p:nvSpPr>
@@ -10664,7 +11210,7 @@
       </p:sp>
       <p:sp>
         <p:nvSpPr>
-          <p:cNvPr id="40" name="Text 38"/>
+          <p:cNvPr id="46" name="Text 44"/>
           <p:cNvSpPr/>
           <p:nvPr/>
         </p:nvSpPr>
@@ -10695,7 +11241,7 @@
                 <a:ea typeface="Trebuchet MS" pitchFamily="34" charset="-122"/>
                 <a:cs typeface="Trebuchet MS" pitchFamily="34" charset="-120"/>
               </a:rPr>
-              <a:t>e</a:t>
+              <a:t>ay</a:t>
             </a:r>
             <a:endParaRPr lang="en-US" sz="900" dirty="0"/>
           </a:p>
@@ -10703,7 +11249,7 @@
       </p:sp>
       <p:sp>
         <p:nvSpPr>
-          <p:cNvPr id="41" name="Shape 39"/>
+          <p:cNvPr id="47" name="Shape 45"/>
           <p:cNvSpPr/>
           <p:nvPr/>
         </p:nvSpPr>
@@ -10730,7 +11276,7 @@
       </p:sp>
       <p:sp>
         <p:nvSpPr>
-          <p:cNvPr id="42" name="Text 40"/>
+          <p:cNvPr id="48" name="Text 46"/>
           <p:cNvSpPr/>
           <p:nvPr/>
         </p:nvSpPr>
@@ -10761,7 +11307,7 @@
                 <a:ea typeface="Trebuchet MS" pitchFamily="34" charset="-122"/>
                 <a:cs typeface="Trebuchet MS" pitchFamily="34" charset="-120"/>
               </a:rPr>
-              <a:t>n</a:t>
+              <a:t>i</a:t>
             </a:r>
             <a:endParaRPr lang="en-US" sz="900" dirty="0"/>
           </a:p>
@@ -10769,7 +11315,7 @@
       </p:sp>
       <p:sp>
         <p:nvSpPr>
-          <p:cNvPr id="43" name="Shape 41"/>
+          <p:cNvPr id="49" name="Shape 47"/>
           <p:cNvSpPr/>
           <p:nvPr/>
         </p:nvSpPr>
@@ -10796,7 +11342,7 @@
       </p:sp>
       <p:sp>
         <p:nvSpPr>
-          <p:cNvPr id="44" name="Text 42"/>
+          <p:cNvPr id="50" name="Text 48"/>
           <p:cNvSpPr/>
           <p:nvPr/>
         </p:nvSpPr>
@@ -10827,7 +11373,7 @@
                 <a:ea typeface="Trebuchet MS" pitchFamily="34" charset="-122"/>
                 <a:cs typeface="Trebuchet MS" pitchFamily="34" charset="-120"/>
               </a:rPr>
-              <a:t>t</a:t>
+              <a:t>ng</a:t>
             </a:r>
             <a:endParaRPr lang="en-US" sz="900" dirty="0"/>
           </a:p>
@@ -11119,7 +11665,7 @@
                 <a:ea typeface="Calibri" pitchFamily="34" charset="-122"/>
                 <a:cs typeface="Calibri" pitchFamily="34" charset="-120"/>
               </a:rPr>
-              <a:t>Word Labs  •  wordlabs.app  •  Root: 'pay' = give money owed</a:t>
+              <a:t>Word Labs  •  wordlabs.app  •  Root: 'pay' = to give money for something</a:t>
             </a:r>
             <a:endParaRPr lang="en-US" sz="800" dirty="0"/>
           </a:p>
@@ -11258,7 +11804,7 @@
                 <a:ea typeface="Trebuchet MS" pitchFamily="34" charset="-122"/>
                 <a:cs typeface="Trebuchet MS" pitchFamily="34" charset="-120"/>
               </a:rPr>
-              <a:t>overpay</a:t>
+              <a:t>repayment</a:t>
             </a:r>
             <a:endParaRPr lang="en-US" sz="2800" dirty="0"/>
           </a:p>
@@ -11946,7 +12492,7 @@
                 <a:ea typeface="Calibri" pitchFamily="34" charset="-122"/>
                 <a:cs typeface="Calibri" pitchFamily="34" charset="-120"/>
               </a:rPr>
-              <a:t>Word Labs  •  wordlabs.app  •  Root: 'pay' = give money owed</a:t>
+              <a:t>Word Labs  •  wordlabs.app  •  Root: 'pay' = to give money for something</a:t>
             </a:r>
             <a:endParaRPr lang="en-US" sz="800" dirty="0"/>
           </a:p>
@@ -12085,7 +12631,7 @@
                 <a:ea typeface="Trebuchet MS" pitchFamily="34" charset="-122"/>
                 <a:cs typeface="Trebuchet MS" pitchFamily="34" charset="-120"/>
               </a:rPr>
-              <a:t>overpay</a:t>
+              <a:t>repayment</a:t>
             </a:r>
             <a:endParaRPr lang="en-US" sz="2800" dirty="0"/>
           </a:p>
@@ -12165,7 +12711,7 @@
         </p:nvSpPr>
         <p:spPr>
           <a:xfrm>
-            <a:off x="2938272" y="2258568"/>
+            <a:off x="2221992" y="2258568"/>
             <a:ext cx="1828800" cy="292608"/>
           </a:xfrm>
           <a:prstGeom prst="rect">
@@ -12199,7 +12745,7 @@
         </p:nvSpPr>
         <p:spPr>
           <a:xfrm>
-            <a:off x="2938272" y="2258568"/>
+            <a:off x="2221992" y="2258568"/>
             <a:ext cx="1828800" cy="292608"/>
           </a:xfrm>
           <a:prstGeom prst="rect">
@@ -12224,7 +12770,7 @@
                 <a:ea typeface="Trebuchet MS" pitchFamily="34" charset="-122"/>
                 <a:cs typeface="Trebuchet MS" pitchFamily="34" charset="-120"/>
               </a:rPr>
-              <a:t>over</a:t>
+              <a:t>re</a:t>
             </a:r>
             <a:endParaRPr lang="en-US" sz="1300" dirty="0"/>
           </a:p>
@@ -12238,7 +12784,7 @@
         </p:nvSpPr>
         <p:spPr>
           <a:xfrm>
-            <a:off x="2938272" y="2569464"/>
+            <a:off x="2221992" y="2569464"/>
             <a:ext cx="1828800" cy="201168"/>
           </a:xfrm>
           <a:prstGeom prst="rect">
@@ -12263,7 +12809,7 @@
                 <a:ea typeface="Calibri" pitchFamily="34" charset="-122"/>
                 <a:cs typeface="Calibri" pitchFamily="34" charset="-120"/>
               </a:rPr>
-              <a:t>too much</a:t>
+              <a:t>again</a:t>
             </a:r>
             <a:endParaRPr lang="en-US" sz="850" dirty="0"/>
           </a:p>
@@ -12277,7 +12823,7 @@
         </p:nvSpPr>
         <p:spPr>
           <a:xfrm>
-            <a:off x="5803392" y="2258568"/>
+            <a:off x="4370832" y="2258568"/>
             <a:ext cx="1828800" cy="292608"/>
           </a:xfrm>
           <a:prstGeom prst="rect">
@@ -12311,7 +12857,7 @@
         </p:nvSpPr>
         <p:spPr>
           <a:xfrm>
-            <a:off x="5803392" y="2258568"/>
+            <a:off x="4370832" y="2258568"/>
             <a:ext cx="1828800" cy="292608"/>
           </a:xfrm>
           <a:prstGeom prst="rect">
@@ -12350,7 +12896,7 @@
         </p:nvSpPr>
         <p:spPr>
           <a:xfrm>
-            <a:off x="5803392" y="2569464"/>
+            <a:off x="4370832" y="2569464"/>
             <a:ext cx="1828800" cy="201168"/>
           </a:xfrm>
           <a:prstGeom prst="rect">
@@ -12375,7 +12921,7 @@
                 <a:ea typeface="Calibri" pitchFamily="34" charset="-122"/>
                 <a:cs typeface="Calibri" pitchFamily="34" charset="-120"/>
               </a:rPr>
-              <a:t>give money owed</a:t>
+              <a:t>to give money for something</a:t>
             </a:r>
             <a:endParaRPr lang="en-US" sz="850" dirty="0"/>
           </a:p>
@@ -12384,6 +12930,118 @@
       <p:sp>
         <p:nvSpPr>
           <p:cNvPr id="22" name="Shape 20"/>
+          <p:cNvSpPr/>
+          <p:nvPr/>
+        </p:nvSpPr>
+        <p:spPr>
+          <a:xfrm>
+            <a:off x="6519672" y="2258568"/>
+            <a:ext cx="1828800" cy="292608"/>
+          </a:xfrm>
+          <a:prstGeom prst="rect">
+            <a:avLst>
+              <a:gd name="adj" fmla="val 25000"/>
+            </a:avLst>
+          </a:prstGeom>
+          <a:solidFill>
+            <a:srgbClr val="FCE7F3"/>
+          </a:solidFill>
+          <a:ln w="19050">
+            <a:solidFill>
+              <a:srgbClr val="DB2777"/>
+            </a:solidFill>
+            <a:prstDash val="solid"/>
+          </a:ln>
+          <a:effectLst>
+            <a:outerShdw sx="100000" sy="100000" kx="0" ky="0" algn="bl" rotWithShape="0" blurRad="101600" dist="38100" dir="8100000">
+              <a:srgbClr val="000000">
+                <a:alpha val="12000"/>
+              </a:srgbClr>
+            </a:outerShdw>
+          </a:effectLst>
+        </p:spPr>
+      </p:sp>
+      <p:sp>
+        <p:nvSpPr>
+          <p:cNvPr id="23" name="Text 21"/>
+          <p:cNvSpPr/>
+          <p:nvPr/>
+        </p:nvSpPr>
+        <p:spPr>
+          <a:xfrm>
+            <a:off x="6519672" y="2258568"/>
+            <a:ext cx="1828800" cy="292608"/>
+          </a:xfrm>
+          <a:prstGeom prst="rect">
+            <a:avLst/>
+          </a:prstGeom>
+          <a:noFill/>
+          <a:ln/>
+        </p:spPr>
+        <p:txBody>
+          <a:bodyPr wrap="square" lIns="0" tIns="0" rIns="0" bIns="0" rtlCol="0" anchor="ctr"/>
+          <a:lstStyle/>
+          <a:p>
+            <a:pPr algn="ctr" indent="0" marL="0">
+              <a:buNone/>
+            </a:pPr>
+            <a:r>
+              <a:rPr lang="en-US" sz="1300" b="1" dirty="0">
+                <a:solidFill>
+                  <a:srgbClr val="9D174D"/>
+                </a:solidFill>
+                <a:latin typeface="Trebuchet MS" pitchFamily="34" charset="0"/>
+                <a:ea typeface="Trebuchet MS" pitchFamily="34" charset="-122"/>
+                <a:cs typeface="Trebuchet MS" pitchFamily="34" charset="-120"/>
+              </a:rPr>
+              <a:t>ment</a:t>
+            </a:r>
+            <a:endParaRPr lang="en-US" sz="1300" dirty="0"/>
+          </a:p>
+        </p:txBody>
+      </p:sp>
+      <p:sp>
+        <p:nvSpPr>
+          <p:cNvPr id="24" name="Text 22"/>
+          <p:cNvSpPr/>
+          <p:nvPr/>
+        </p:nvSpPr>
+        <p:spPr>
+          <a:xfrm>
+            <a:off x="6519672" y="2569464"/>
+            <a:ext cx="1828800" cy="201168"/>
+          </a:xfrm>
+          <a:prstGeom prst="rect">
+            <a:avLst/>
+          </a:prstGeom>
+          <a:noFill/>
+          <a:ln/>
+        </p:spPr>
+        <p:txBody>
+          <a:bodyPr wrap="square" lIns="0" tIns="0" rIns="0" bIns="0" rtlCol="0" anchor="t"/>
+          <a:lstStyle/>
+          <a:p>
+            <a:pPr algn="ctr" indent="0" marL="0">
+              <a:buNone/>
+            </a:pPr>
+            <a:r>
+              <a:rPr lang="en-US" sz="850" dirty="0">
+                <a:solidFill>
+                  <a:srgbClr val="475569"/>
+                </a:solidFill>
+                <a:latin typeface="Calibri" pitchFamily="34" charset="0"/>
+                <a:ea typeface="Calibri" pitchFamily="34" charset="-122"/>
+                <a:cs typeface="Calibri" pitchFamily="34" charset="-120"/>
+              </a:rPr>
+              <a:t>result of action</a:t>
+            </a:r>
+            <a:endParaRPr lang="en-US" sz="850" dirty="0"/>
+          </a:p>
+        </p:txBody>
+      </p:sp>
+      <p:sp>
+        <p:nvSpPr>
+          <p:cNvPr id="25" name="Shape 23"/>
           <p:cNvSpPr/>
           <p:nvPr/>
         </p:nvSpPr>
@@ -12410,7 +13068,7 @@
       </p:sp>
       <p:sp>
         <p:nvSpPr>
-          <p:cNvPr id="23" name="Text 21"/>
+          <p:cNvPr id="26" name="Text 24"/>
           <p:cNvSpPr/>
           <p:nvPr/>
         </p:nvSpPr>
@@ -12449,7 +13107,7 @@
       </p:sp>
       <p:sp>
         <p:nvSpPr>
-          <p:cNvPr id="24" name="Shape 22"/>
+          <p:cNvPr id="27" name="Shape 25"/>
           <p:cNvSpPr/>
           <p:nvPr/>
         </p:nvSpPr>
@@ -12476,7 +13134,7 @@
       </p:sp>
       <p:sp>
         <p:nvSpPr>
-          <p:cNvPr id="25" name="Text 23"/>
+          <p:cNvPr id="28" name="Text 26"/>
           <p:cNvSpPr/>
           <p:nvPr/>
         </p:nvSpPr>
@@ -12515,7 +13173,7 @@
       </p:sp>
       <p:sp>
         <p:nvSpPr>
-          <p:cNvPr id="26" name="Shape 24"/>
+          <p:cNvPr id="29" name="Shape 27"/>
           <p:cNvSpPr/>
           <p:nvPr/>
         </p:nvSpPr>
@@ -12542,7 +13200,7 @@
       </p:sp>
       <p:sp>
         <p:nvSpPr>
-          <p:cNvPr id="27" name="Text 25"/>
+          <p:cNvPr id="30" name="Text 28"/>
           <p:cNvSpPr/>
           <p:nvPr/>
         </p:nvSpPr>
@@ -12581,7 +13239,7 @@
       </p:sp>
       <p:sp>
         <p:nvSpPr>
-          <p:cNvPr id="28" name="Shape 26"/>
+          <p:cNvPr id="31" name="Shape 29"/>
           <p:cNvSpPr/>
           <p:nvPr/>
         </p:nvSpPr>
@@ -12608,7 +13266,7 @@
       </p:sp>
       <p:sp>
         <p:nvSpPr>
-          <p:cNvPr id="29" name="Text 27"/>
+          <p:cNvPr id="32" name="Text 30"/>
           <p:cNvSpPr/>
           <p:nvPr/>
         </p:nvSpPr>
@@ -12931,7 +13589,7 @@
                 <a:ea typeface="Calibri" pitchFamily="34" charset="-122"/>
                 <a:cs typeface="Calibri" pitchFamily="34" charset="-120"/>
               </a:rPr>
-              <a:t>Word Labs  •  wordlabs.app  •  Root: 'pay' = give money owed</a:t>
+              <a:t>Word Labs  •  wordlabs.app  •  Root: 'pay' = to give money for something</a:t>
             </a:r>
             <a:endParaRPr lang="en-US" sz="800" dirty="0"/>
           </a:p>
@@ -13070,7 +13728,7 @@
                 <a:ea typeface="Trebuchet MS" pitchFamily="34" charset="-122"/>
                 <a:cs typeface="Trebuchet MS" pitchFamily="34" charset="-120"/>
               </a:rPr>
-              <a:t>overpay</a:t>
+              <a:t>repayment</a:t>
             </a:r>
             <a:endParaRPr lang="en-US" sz="2800" dirty="0"/>
           </a:p>
@@ -13150,7 +13808,7 @@
         </p:nvSpPr>
         <p:spPr>
           <a:xfrm>
-            <a:off x="2938272" y="2258568"/>
+            <a:off x="2221992" y="2258568"/>
             <a:ext cx="1828800" cy="292608"/>
           </a:xfrm>
           <a:prstGeom prst="rect">
@@ -13184,7 +13842,7 @@
         </p:nvSpPr>
         <p:spPr>
           <a:xfrm>
-            <a:off x="2938272" y="2258568"/>
+            <a:off x="2221992" y="2258568"/>
             <a:ext cx="1828800" cy="292608"/>
           </a:xfrm>
           <a:prstGeom prst="rect">
@@ -13209,7 +13867,7 @@
                 <a:ea typeface="Trebuchet MS" pitchFamily="34" charset="-122"/>
                 <a:cs typeface="Trebuchet MS" pitchFamily="34" charset="-120"/>
               </a:rPr>
-              <a:t>over</a:t>
+              <a:t>re</a:t>
             </a:r>
             <a:endParaRPr lang="en-US" sz="1300" dirty="0"/>
           </a:p>
@@ -13223,7 +13881,7 @@
         </p:nvSpPr>
         <p:spPr>
           <a:xfrm>
-            <a:off x="2938272" y="2569464"/>
+            <a:off x="2221992" y="2569464"/>
             <a:ext cx="1828800" cy="201168"/>
           </a:xfrm>
           <a:prstGeom prst="rect">
@@ -13248,7 +13906,7 @@
                 <a:ea typeface="Calibri" pitchFamily="34" charset="-122"/>
                 <a:cs typeface="Calibri" pitchFamily="34" charset="-120"/>
               </a:rPr>
-              <a:t>too much</a:t>
+              <a:t>again</a:t>
             </a:r>
             <a:endParaRPr lang="en-US" sz="850" dirty="0"/>
           </a:p>
@@ -13262,7 +13920,7 @@
         </p:nvSpPr>
         <p:spPr>
           <a:xfrm>
-            <a:off x="5803392" y="2258568"/>
+            <a:off x="4370832" y="2258568"/>
             <a:ext cx="1828800" cy="292608"/>
           </a:xfrm>
           <a:prstGeom prst="rect">
@@ -13296,7 +13954,7 @@
         </p:nvSpPr>
         <p:spPr>
           <a:xfrm>
-            <a:off x="5803392" y="2258568"/>
+            <a:off x="4370832" y="2258568"/>
             <a:ext cx="1828800" cy="292608"/>
           </a:xfrm>
           <a:prstGeom prst="rect">
@@ -13335,7 +13993,7 @@
         </p:nvSpPr>
         <p:spPr>
           <a:xfrm>
-            <a:off x="5803392" y="2569464"/>
+            <a:off x="4370832" y="2569464"/>
             <a:ext cx="1828800" cy="201168"/>
           </a:xfrm>
           <a:prstGeom prst="rect">
@@ -13360,7 +14018,7 @@
                 <a:ea typeface="Calibri" pitchFamily="34" charset="-122"/>
                 <a:cs typeface="Calibri" pitchFamily="34" charset="-120"/>
               </a:rPr>
-              <a:t>give money owed</a:t>
+              <a:t>to give money for something</a:t>
             </a:r>
             <a:endParaRPr lang="en-US" sz="850" dirty="0"/>
           </a:p>
@@ -13369,6 +14027,118 @@
       <p:sp>
         <p:nvSpPr>
           <p:cNvPr id="22" name="Shape 20"/>
+          <p:cNvSpPr/>
+          <p:nvPr/>
+        </p:nvSpPr>
+        <p:spPr>
+          <a:xfrm>
+            <a:off x="6519672" y="2258568"/>
+            <a:ext cx="1828800" cy="292608"/>
+          </a:xfrm>
+          <a:prstGeom prst="rect">
+            <a:avLst>
+              <a:gd name="adj" fmla="val 25000"/>
+            </a:avLst>
+          </a:prstGeom>
+          <a:solidFill>
+            <a:srgbClr val="FCE7F3"/>
+          </a:solidFill>
+          <a:ln w="19050">
+            <a:solidFill>
+              <a:srgbClr val="DB2777"/>
+            </a:solidFill>
+            <a:prstDash val="solid"/>
+          </a:ln>
+          <a:effectLst>
+            <a:outerShdw sx="100000" sy="100000" kx="0" ky="0" algn="bl" rotWithShape="0" blurRad="101600" dist="38100" dir="8100000">
+              <a:srgbClr val="000000">
+                <a:alpha val="12000"/>
+              </a:srgbClr>
+            </a:outerShdw>
+          </a:effectLst>
+        </p:spPr>
+      </p:sp>
+      <p:sp>
+        <p:nvSpPr>
+          <p:cNvPr id="23" name="Text 21"/>
+          <p:cNvSpPr/>
+          <p:nvPr/>
+        </p:nvSpPr>
+        <p:spPr>
+          <a:xfrm>
+            <a:off x="6519672" y="2258568"/>
+            <a:ext cx="1828800" cy="292608"/>
+          </a:xfrm>
+          <a:prstGeom prst="rect">
+            <a:avLst/>
+          </a:prstGeom>
+          <a:noFill/>
+          <a:ln/>
+        </p:spPr>
+        <p:txBody>
+          <a:bodyPr wrap="square" lIns="0" tIns="0" rIns="0" bIns="0" rtlCol="0" anchor="ctr"/>
+          <a:lstStyle/>
+          <a:p>
+            <a:pPr algn="ctr" indent="0" marL="0">
+              <a:buNone/>
+            </a:pPr>
+            <a:r>
+              <a:rPr lang="en-US" sz="1300" b="1" dirty="0">
+                <a:solidFill>
+                  <a:srgbClr val="9D174D"/>
+                </a:solidFill>
+                <a:latin typeface="Trebuchet MS" pitchFamily="34" charset="0"/>
+                <a:ea typeface="Trebuchet MS" pitchFamily="34" charset="-122"/>
+                <a:cs typeface="Trebuchet MS" pitchFamily="34" charset="-120"/>
+              </a:rPr>
+              <a:t>ment</a:t>
+            </a:r>
+            <a:endParaRPr lang="en-US" sz="1300" dirty="0"/>
+          </a:p>
+        </p:txBody>
+      </p:sp>
+      <p:sp>
+        <p:nvSpPr>
+          <p:cNvPr id="24" name="Text 22"/>
+          <p:cNvSpPr/>
+          <p:nvPr/>
+        </p:nvSpPr>
+        <p:spPr>
+          <a:xfrm>
+            <a:off x="6519672" y="2569464"/>
+            <a:ext cx="1828800" cy="201168"/>
+          </a:xfrm>
+          <a:prstGeom prst="rect">
+            <a:avLst/>
+          </a:prstGeom>
+          <a:noFill/>
+          <a:ln/>
+        </p:spPr>
+        <p:txBody>
+          <a:bodyPr wrap="square" lIns="0" tIns="0" rIns="0" bIns="0" rtlCol="0" anchor="t"/>
+          <a:lstStyle/>
+          <a:p>
+            <a:pPr algn="ctr" indent="0" marL="0">
+              <a:buNone/>
+            </a:pPr>
+            <a:r>
+              <a:rPr lang="en-US" sz="850" dirty="0">
+                <a:solidFill>
+                  <a:srgbClr val="475569"/>
+                </a:solidFill>
+                <a:latin typeface="Calibri" pitchFamily="34" charset="0"/>
+                <a:ea typeface="Calibri" pitchFamily="34" charset="-122"/>
+                <a:cs typeface="Calibri" pitchFamily="34" charset="-120"/>
+              </a:rPr>
+              <a:t>result of action</a:t>
+            </a:r>
+            <a:endParaRPr lang="en-US" sz="850" dirty="0"/>
+          </a:p>
+        </p:txBody>
+      </p:sp>
+      <p:sp>
+        <p:nvSpPr>
+          <p:cNvPr id="25" name="Shape 23"/>
           <p:cNvSpPr/>
           <p:nvPr/>
         </p:nvSpPr>
@@ -13395,7 +14165,7 @@
       </p:sp>
       <p:sp>
         <p:nvSpPr>
-          <p:cNvPr id="23" name="Text 21"/>
+          <p:cNvPr id="26" name="Text 24"/>
           <p:cNvSpPr/>
           <p:nvPr/>
         </p:nvSpPr>
@@ -13434,7 +14204,7 @@
       </p:sp>
       <p:sp>
         <p:nvSpPr>
-          <p:cNvPr id="24" name="Shape 22"/>
+          <p:cNvPr id="27" name="Shape 25"/>
           <p:cNvSpPr/>
           <p:nvPr/>
         </p:nvSpPr>
@@ -13461,7 +14231,7 @@
       </p:sp>
       <p:sp>
         <p:nvSpPr>
-          <p:cNvPr id="25" name="Shape 23"/>
+          <p:cNvPr id="28" name="Shape 26"/>
           <p:cNvSpPr/>
           <p:nvPr/>
         </p:nvSpPr>
@@ -13488,7 +14258,7 @@
       </p:sp>
       <p:sp>
         <p:nvSpPr>
-          <p:cNvPr id="26" name="Text 24"/>
+          <p:cNvPr id="29" name="Text 27"/>
           <p:cNvSpPr/>
           <p:nvPr/>
         </p:nvSpPr>
@@ -13519,7 +14289,7 @@
                 <a:ea typeface="Trebuchet MS" pitchFamily="34" charset="-122"/>
                 <a:cs typeface="Trebuchet MS" pitchFamily="34" charset="-120"/>
               </a:rPr>
-              <a:t>o</a:t>
+              <a:t>re</a:t>
             </a:r>
             <a:endParaRPr lang="en-US" sz="1400" dirty="0"/>
           </a:p>
@@ -13527,7 +14297,7 @@
       </p:sp>
       <p:sp>
         <p:nvSpPr>
-          <p:cNvPr id="27" name="Text 25"/>
+          <p:cNvPr id="30" name="Text 28"/>
           <p:cNvSpPr/>
           <p:nvPr/>
         </p:nvSpPr>
@@ -13566,7 +14336,7 @@
       </p:sp>
       <p:sp>
         <p:nvSpPr>
-          <p:cNvPr id="28" name="Shape 26"/>
+          <p:cNvPr id="31" name="Shape 29"/>
           <p:cNvSpPr/>
           <p:nvPr/>
         </p:nvSpPr>
@@ -13593,7 +14363,7 @@
       </p:sp>
       <p:sp>
         <p:nvSpPr>
-          <p:cNvPr id="29" name="Text 27"/>
+          <p:cNvPr id="32" name="Text 30"/>
           <p:cNvSpPr/>
           <p:nvPr/>
         </p:nvSpPr>
@@ -13624,7 +14394,7 @@
                 <a:ea typeface="Trebuchet MS" pitchFamily="34" charset="-122"/>
                 <a:cs typeface="Trebuchet MS" pitchFamily="34" charset="-120"/>
               </a:rPr>
-              <a:t>ver</a:t>
+              <a:t>pay</a:t>
             </a:r>
             <a:endParaRPr lang="en-US" sz="1400" dirty="0"/>
           </a:p>
@@ -13632,7 +14402,7 @@
       </p:sp>
       <p:sp>
         <p:nvSpPr>
-          <p:cNvPr id="30" name="Text 28"/>
+          <p:cNvPr id="33" name="Text 31"/>
           <p:cNvSpPr/>
           <p:nvPr/>
         </p:nvSpPr>
@@ -13671,7 +14441,7 @@
       </p:sp>
       <p:sp>
         <p:nvSpPr>
-          <p:cNvPr id="31" name="Shape 29"/>
+          <p:cNvPr id="34" name="Shape 32"/>
           <p:cNvSpPr/>
           <p:nvPr/>
         </p:nvSpPr>
@@ -13698,7 +14468,7 @@
       </p:sp>
       <p:sp>
         <p:nvSpPr>
-          <p:cNvPr id="32" name="Text 30"/>
+          <p:cNvPr id="35" name="Text 33"/>
           <p:cNvSpPr/>
           <p:nvPr/>
         </p:nvSpPr>
@@ -13729,7 +14499,7 @@
                 <a:ea typeface="Trebuchet MS" pitchFamily="34" charset="-122"/>
                 <a:cs typeface="Trebuchet MS" pitchFamily="34" charset="-120"/>
               </a:rPr>
-              <a:t>pay</a:t>
+              <a:t>ment</a:t>
             </a:r>
             <a:endParaRPr lang="en-US" sz="1400" dirty="0"/>
           </a:p>
@@ -13737,7 +14507,7 @@
       </p:sp>
       <p:sp>
         <p:nvSpPr>
-          <p:cNvPr id="33" name="Shape 31"/>
+          <p:cNvPr id="36" name="Shape 34"/>
           <p:cNvSpPr/>
           <p:nvPr/>
         </p:nvSpPr>
@@ -13764,7 +14534,7 @@
       </p:sp>
       <p:sp>
         <p:nvSpPr>
-          <p:cNvPr id="34" name="Text 32"/>
+          <p:cNvPr id="37" name="Text 35"/>
           <p:cNvSpPr/>
           <p:nvPr/>
         </p:nvSpPr>
@@ -13803,7 +14573,7 @@
       </p:sp>
       <p:sp>
         <p:nvSpPr>
-          <p:cNvPr id="35" name="Shape 33"/>
+          <p:cNvPr id="38" name="Shape 36"/>
           <p:cNvSpPr/>
           <p:nvPr/>
         </p:nvSpPr>
@@ -13830,7 +14600,7 @@
       </p:sp>
       <p:sp>
         <p:nvSpPr>
-          <p:cNvPr id="36" name="Text 34"/>
+          <p:cNvPr id="39" name="Text 37"/>
           <p:cNvSpPr/>
           <p:nvPr/>
         </p:nvSpPr>
@@ -14062,7 +14832,7 @@
                 <a:ea typeface="Calibri" pitchFamily="34" charset="-122"/>
                 <a:cs typeface="Calibri" pitchFamily="34" charset="-120"/>
               </a:rPr>
-              <a:t>Root 'pay' — give money owed</a:t>
+              <a:t>Root 'pay' — to give money for something</a:t>
             </a:r>
             <a:endParaRPr lang="en-US" sz="1600" dirty="0"/>
           </a:p>
@@ -14418,7 +15188,7 @@
                 <a:ea typeface="Calibri" pitchFamily="34" charset="-122"/>
                 <a:cs typeface="Calibri" pitchFamily="34" charset="-120"/>
               </a:rPr>
-              <a:t>Word Labs  •  wordlabs.app  •  Root: 'pay' = give money owed</a:t>
+              <a:t>Word Labs  •  wordlabs.app  •  Root: 'pay' = to give money for something</a:t>
             </a:r>
             <a:endParaRPr lang="en-US" sz="800" dirty="0"/>
           </a:p>
@@ -14557,7 +15327,7 @@
                 <a:ea typeface="Trebuchet MS" pitchFamily="34" charset="-122"/>
                 <a:cs typeface="Trebuchet MS" pitchFamily="34" charset="-120"/>
               </a:rPr>
-              <a:t>overpay</a:t>
+              <a:t>repayment</a:t>
             </a:r>
             <a:endParaRPr lang="en-US" sz="2800" dirty="0"/>
           </a:p>
@@ -14637,7 +15407,7 @@
         </p:nvSpPr>
         <p:spPr>
           <a:xfrm>
-            <a:off x="2938272" y="2258568"/>
+            <a:off x="2221992" y="2258568"/>
             <a:ext cx="1828800" cy="292608"/>
           </a:xfrm>
           <a:prstGeom prst="rect">
@@ -14671,7 +15441,7 @@
         </p:nvSpPr>
         <p:spPr>
           <a:xfrm>
-            <a:off x="2938272" y="2258568"/>
+            <a:off x="2221992" y="2258568"/>
             <a:ext cx="1828800" cy="292608"/>
           </a:xfrm>
           <a:prstGeom prst="rect">
@@ -14696,7 +15466,7 @@
                 <a:ea typeface="Trebuchet MS" pitchFamily="34" charset="-122"/>
                 <a:cs typeface="Trebuchet MS" pitchFamily="34" charset="-120"/>
               </a:rPr>
-              <a:t>over</a:t>
+              <a:t>re</a:t>
             </a:r>
             <a:endParaRPr lang="en-US" sz="1300" dirty="0"/>
           </a:p>
@@ -14710,7 +15480,7 @@
         </p:nvSpPr>
         <p:spPr>
           <a:xfrm>
-            <a:off x="2938272" y="2569464"/>
+            <a:off x="2221992" y="2569464"/>
             <a:ext cx="1828800" cy="201168"/>
           </a:xfrm>
           <a:prstGeom prst="rect">
@@ -14735,7 +15505,7 @@
                 <a:ea typeface="Calibri" pitchFamily="34" charset="-122"/>
                 <a:cs typeface="Calibri" pitchFamily="34" charset="-120"/>
               </a:rPr>
-              <a:t>too much</a:t>
+              <a:t>again</a:t>
             </a:r>
             <a:endParaRPr lang="en-US" sz="850" dirty="0"/>
           </a:p>
@@ -14749,7 +15519,7 @@
         </p:nvSpPr>
         <p:spPr>
           <a:xfrm>
-            <a:off x="5803392" y="2258568"/>
+            <a:off x="4370832" y="2258568"/>
             <a:ext cx="1828800" cy="292608"/>
           </a:xfrm>
           <a:prstGeom prst="rect">
@@ -14783,7 +15553,7 @@
         </p:nvSpPr>
         <p:spPr>
           <a:xfrm>
-            <a:off x="5803392" y="2258568"/>
+            <a:off x="4370832" y="2258568"/>
             <a:ext cx="1828800" cy="292608"/>
           </a:xfrm>
           <a:prstGeom prst="rect">
@@ -14822,7 +15592,7 @@
         </p:nvSpPr>
         <p:spPr>
           <a:xfrm>
-            <a:off x="5803392" y="2569464"/>
+            <a:off x="4370832" y="2569464"/>
             <a:ext cx="1828800" cy="201168"/>
           </a:xfrm>
           <a:prstGeom prst="rect">
@@ -14847,7 +15617,7 @@
                 <a:ea typeface="Calibri" pitchFamily="34" charset="-122"/>
                 <a:cs typeface="Calibri" pitchFamily="34" charset="-120"/>
               </a:rPr>
-              <a:t>give money owed</a:t>
+              <a:t>to give money for something</a:t>
             </a:r>
             <a:endParaRPr lang="en-US" sz="850" dirty="0"/>
           </a:p>
@@ -14856,6 +15626,118 @@
       <p:sp>
         <p:nvSpPr>
           <p:cNvPr id="22" name="Shape 20"/>
+          <p:cNvSpPr/>
+          <p:nvPr/>
+        </p:nvSpPr>
+        <p:spPr>
+          <a:xfrm>
+            <a:off x="6519672" y="2258568"/>
+            <a:ext cx="1828800" cy="292608"/>
+          </a:xfrm>
+          <a:prstGeom prst="rect">
+            <a:avLst>
+              <a:gd name="adj" fmla="val 25000"/>
+            </a:avLst>
+          </a:prstGeom>
+          <a:solidFill>
+            <a:srgbClr val="FCE7F3"/>
+          </a:solidFill>
+          <a:ln w="19050">
+            <a:solidFill>
+              <a:srgbClr val="DB2777"/>
+            </a:solidFill>
+            <a:prstDash val="solid"/>
+          </a:ln>
+          <a:effectLst>
+            <a:outerShdw sx="100000" sy="100000" kx="0" ky="0" algn="bl" rotWithShape="0" blurRad="101600" dist="38100" dir="8100000">
+              <a:srgbClr val="000000">
+                <a:alpha val="12000"/>
+              </a:srgbClr>
+            </a:outerShdw>
+          </a:effectLst>
+        </p:spPr>
+      </p:sp>
+      <p:sp>
+        <p:nvSpPr>
+          <p:cNvPr id="23" name="Text 21"/>
+          <p:cNvSpPr/>
+          <p:nvPr/>
+        </p:nvSpPr>
+        <p:spPr>
+          <a:xfrm>
+            <a:off x="6519672" y="2258568"/>
+            <a:ext cx="1828800" cy="292608"/>
+          </a:xfrm>
+          <a:prstGeom prst="rect">
+            <a:avLst/>
+          </a:prstGeom>
+          <a:noFill/>
+          <a:ln/>
+        </p:spPr>
+        <p:txBody>
+          <a:bodyPr wrap="square" lIns="0" tIns="0" rIns="0" bIns="0" rtlCol="0" anchor="ctr"/>
+          <a:lstStyle/>
+          <a:p>
+            <a:pPr algn="ctr" indent="0" marL="0">
+              <a:buNone/>
+            </a:pPr>
+            <a:r>
+              <a:rPr lang="en-US" sz="1300" b="1" dirty="0">
+                <a:solidFill>
+                  <a:srgbClr val="9D174D"/>
+                </a:solidFill>
+                <a:latin typeface="Trebuchet MS" pitchFamily="34" charset="0"/>
+                <a:ea typeface="Trebuchet MS" pitchFamily="34" charset="-122"/>
+                <a:cs typeface="Trebuchet MS" pitchFamily="34" charset="-120"/>
+              </a:rPr>
+              <a:t>ment</a:t>
+            </a:r>
+            <a:endParaRPr lang="en-US" sz="1300" dirty="0"/>
+          </a:p>
+        </p:txBody>
+      </p:sp>
+      <p:sp>
+        <p:nvSpPr>
+          <p:cNvPr id="24" name="Text 22"/>
+          <p:cNvSpPr/>
+          <p:nvPr/>
+        </p:nvSpPr>
+        <p:spPr>
+          <a:xfrm>
+            <a:off x="6519672" y="2569464"/>
+            <a:ext cx="1828800" cy="201168"/>
+          </a:xfrm>
+          <a:prstGeom prst="rect">
+            <a:avLst/>
+          </a:prstGeom>
+          <a:noFill/>
+          <a:ln/>
+        </p:spPr>
+        <p:txBody>
+          <a:bodyPr wrap="square" lIns="0" tIns="0" rIns="0" bIns="0" rtlCol="0" anchor="t"/>
+          <a:lstStyle/>
+          <a:p>
+            <a:pPr algn="ctr" indent="0" marL="0">
+              <a:buNone/>
+            </a:pPr>
+            <a:r>
+              <a:rPr lang="en-US" sz="850" dirty="0">
+                <a:solidFill>
+                  <a:srgbClr val="475569"/>
+                </a:solidFill>
+                <a:latin typeface="Calibri" pitchFamily="34" charset="0"/>
+                <a:ea typeface="Calibri" pitchFamily="34" charset="-122"/>
+                <a:cs typeface="Calibri" pitchFamily="34" charset="-120"/>
+              </a:rPr>
+              <a:t>result of action</a:t>
+            </a:r>
+            <a:endParaRPr lang="en-US" sz="850" dirty="0"/>
+          </a:p>
+        </p:txBody>
+      </p:sp>
+      <p:sp>
+        <p:nvSpPr>
+          <p:cNvPr id="25" name="Shape 23"/>
           <p:cNvSpPr/>
           <p:nvPr/>
         </p:nvSpPr>
@@ -14882,7 +15764,7 @@
       </p:sp>
       <p:sp>
         <p:nvSpPr>
-          <p:cNvPr id="23" name="Text 21"/>
+          <p:cNvPr id="26" name="Text 24"/>
           <p:cNvSpPr/>
           <p:nvPr/>
         </p:nvSpPr>
@@ -14921,7 +15803,7 @@
       </p:sp>
       <p:sp>
         <p:nvSpPr>
-          <p:cNvPr id="24" name="Shape 22"/>
+          <p:cNvPr id="27" name="Shape 25"/>
           <p:cNvSpPr/>
           <p:nvPr/>
         </p:nvSpPr>
@@ -14948,7 +15830,7 @@
       </p:sp>
       <p:sp>
         <p:nvSpPr>
-          <p:cNvPr id="25" name="Shape 23"/>
+          <p:cNvPr id="28" name="Shape 26"/>
           <p:cNvSpPr/>
           <p:nvPr/>
         </p:nvSpPr>
@@ -14975,7 +15857,7 @@
       </p:sp>
       <p:sp>
         <p:nvSpPr>
-          <p:cNvPr id="26" name="Text 24"/>
+          <p:cNvPr id="29" name="Text 27"/>
           <p:cNvSpPr/>
           <p:nvPr/>
         </p:nvSpPr>
@@ -15006,7 +15888,7 @@
                 <a:ea typeface="Trebuchet MS" pitchFamily="34" charset="-122"/>
                 <a:cs typeface="Trebuchet MS" pitchFamily="34" charset="-120"/>
               </a:rPr>
-              <a:t>o</a:t>
+              <a:t>re</a:t>
             </a:r>
             <a:endParaRPr lang="en-US" sz="1400" dirty="0"/>
           </a:p>
@@ -15014,7 +15896,7 @@
       </p:sp>
       <p:sp>
         <p:nvSpPr>
-          <p:cNvPr id="27" name="Text 25"/>
+          <p:cNvPr id="30" name="Text 28"/>
           <p:cNvSpPr/>
           <p:nvPr/>
         </p:nvSpPr>
@@ -15053,7 +15935,7 @@
       </p:sp>
       <p:sp>
         <p:nvSpPr>
-          <p:cNvPr id="28" name="Shape 26"/>
+          <p:cNvPr id="31" name="Shape 29"/>
           <p:cNvSpPr/>
           <p:nvPr/>
         </p:nvSpPr>
@@ -15080,7 +15962,7 @@
       </p:sp>
       <p:sp>
         <p:nvSpPr>
-          <p:cNvPr id="29" name="Text 27"/>
+          <p:cNvPr id="32" name="Text 30"/>
           <p:cNvSpPr/>
           <p:nvPr/>
         </p:nvSpPr>
@@ -15111,7 +15993,7 @@
                 <a:ea typeface="Trebuchet MS" pitchFamily="34" charset="-122"/>
                 <a:cs typeface="Trebuchet MS" pitchFamily="34" charset="-120"/>
               </a:rPr>
-              <a:t>ver</a:t>
+              <a:t>pay</a:t>
             </a:r>
             <a:endParaRPr lang="en-US" sz="1400" dirty="0"/>
           </a:p>
@@ -15119,7 +16001,7 @@
       </p:sp>
       <p:sp>
         <p:nvSpPr>
-          <p:cNvPr id="30" name="Text 28"/>
+          <p:cNvPr id="33" name="Text 31"/>
           <p:cNvSpPr/>
           <p:nvPr/>
         </p:nvSpPr>
@@ -15158,7 +16040,7 @@
       </p:sp>
       <p:sp>
         <p:nvSpPr>
-          <p:cNvPr id="31" name="Shape 29"/>
+          <p:cNvPr id="34" name="Shape 32"/>
           <p:cNvSpPr/>
           <p:nvPr/>
         </p:nvSpPr>
@@ -15185,7 +16067,7 @@
       </p:sp>
       <p:sp>
         <p:nvSpPr>
-          <p:cNvPr id="32" name="Text 30"/>
+          <p:cNvPr id="35" name="Text 33"/>
           <p:cNvSpPr/>
           <p:nvPr/>
         </p:nvSpPr>
@@ -15216,7 +16098,7 @@
                 <a:ea typeface="Trebuchet MS" pitchFamily="34" charset="-122"/>
                 <a:cs typeface="Trebuchet MS" pitchFamily="34" charset="-120"/>
               </a:rPr>
-              <a:t>pay</a:t>
+              <a:t>ment</a:t>
             </a:r>
             <a:endParaRPr lang="en-US" sz="1400" dirty="0"/>
           </a:p>
@@ -15224,7 +16106,7 @@
       </p:sp>
       <p:sp>
         <p:nvSpPr>
-          <p:cNvPr id="33" name="Shape 31"/>
+          <p:cNvPr id="36" name="Shape 34"/>
           <p:cNvSpPr/>
           <p:nvPr/>
         </p:nvSpPr>
@@ -15251,7 +16133,7 @@
       </p:sp>
       <p:sp>
         <p:nvSpPr>
-          <p:cNvPr id="34" name="Text 32"/>
+          <p:cNvPr id="37" name="Text 35"/>
           <p:cNvSpPr/>
           <p:nvPr/>
         </p:nvSpPr>
@@ -15290,7 +16172,7 @@
       </p:sp>
       <p:sp>
         <p:nvSpPr>
-          <p:cNvPr id="35" name="Shape 33"/>
+          <p:cNvPr id="38" name="Shape 36"/>
           <p:cNvSpPr/>
           <p:nvPr/>
         </p:nvSpPr>
@@ -15317,13 +16199,13 @@
       </p:sp>
       <p:sp>
         <p:nvSpPr>
-          <p:cNvPr id="36" name="Shape 34"/>
-          <p:cNvSpPr/>
-          <p:nvPr/>
-        </p:nvSpPr>
-        <p:spPr>
-          <a:xfrm>
-            <a:off x="2427732" y="4169664"/>
+          <p:cNvPr id="39" name="Shape 37"/>
+          <p:cNvSpPr/>
+          <p:nvPr/>
+        </p:nvSpPr>
+        <p:spPr>
+          <a:xfrm>
+            <a:off x="2023872" y="4169664"/>
             <a:ext cx="685800" cy="475488"/>
           </a:xfrm>
           <a:prstGeom prst="rect">
@@ -15344,13 +16226,13 @@
       </p:sp>
       <p:sp>
         <p:nvSpPr>
-          <p:cNvPr id="37" name="Text 35"/>
-          <p:cNvSpPr/>
-          <p:nvPr/>
-        </p:nvSpPr>
-        <p:spPr>
-          <a:xfrm>
-            <a:off x="2427732" y="4169664"/>
+          <p:cNvPr id="40" name="Text 38"/>
+          <p:cNvSpPr/>
+          <p:nvPr/>
+        </p:nvSpPr>
+        <p:spPr>
+          <a:xfrm>
+            <a:off x="2023872" y="4169664"/>
             <a:ext cx="685800" cy="475488"/>
           </a:xfrm>
           <a:prstGeom prst="rect">
@@ -15375,7 +16257,7 @@
                 <a:ea typeface="Trebuchet MS" pitchFamily="34" charset="-122"/>
                 <a:cs typeface="Trebuchet MS" pitchFamily="34" charset="-120"/>
               </a:rPr>
-              <a:t>o</a:t>
+              <a:t>r</a:t>
             </a:r>
             <a:endParaRPr lang="en-US" sz="900" dirty="0"/>
           </a:p>
@@ -15383,13 +16265,13 @@
       </p:sp>
       <p:sp>
         <p:nvSpPr>
-          <p:cNvPr id="38" name="Shape 36"/>
-          <p:cNvSpPr/>
-          <p:nvPr/>
-        </p:nvSpPr>
-        <p:spPr>
-          <a:xfrm>
-            <a:off x="3639312" y="4169664"/>
+          <p:cNvPr id="41" name="Shape 39"/>
+          <p:cNvSpPr/>
+          <p:nvPr/>
+        </p:nvSpPr>
+        <p:spPr>
+          <a:xfrm>
+            <a:off x="2831592" y="4169664"/>
             <a:ext cx="685800" cy="475488"/>
           </a:xfrm>
           <a:prstGeom prst="rect">
@@ -15410,13 +16292,13 @@
       </p:sp>
       <p:sp>
         <p:nvSpPr>
-          <p:cNvPr id="39" name="Text 37"/>
-          <p:cNvSpPr/>
-          <p:nvPr/>
-        </p:nvSpPr>
-        <p:spPr>
-          <a:xfrm>
-            <a:off x="3639312" y="4169664"/>
+          <p:cNvPr id="42" name="Text 40"/>
+          <p:cNvSpPr/>
+          <p:nvPr/>
+        </p:nvSpPr>
+        <p:spPr>
+          <a:xfrm>
+            <a:off x="2831592" y="4169664"/>
             <a:ext cx="685800" cy="475488"/>
           </a:xfrm>
           <a:prstGeom prst="rect">
@@ -15441,7 +16323,7 @@
                 <a:ea typeface="Trebuchet MS" pitchFamily="34" charset="-122"/>
                 <a:cs typeface="Trebuchet MS" pitchFamily="34" charset="-120"/>
               </a:rPr>
-              <a:t>v</a:t>
+              <a:t>e</a:t>
             </a:r>
             <a:endParaRPr lang="en-US" sz="900" dirty="0"/>
           </a:p>
@@ -15449,13 +16331,13 @@
       </p:sp>
       <p:sp>
         <p:nvSpPr>
-          <p:cNvPr id="40" name="Shape 38"/>
-          <p:cNvSpPr/>
-          <p:nvPr/>
-        </p:nvSpPr>
-        <p:spPr>
-          <a:xfrm>
-            <a:off x="4850892" y="4169664"/>
+          <p:cNvPr id="43" name="Shape 41"/>
+          <p:cNvSpPr/>
+          <p:nvPr/>
+        </p:nvSpPr>
+        <p:spPr>
+          <a:xfrm>
+            <a:off x="3639312" y="4169664"/>
             <a:ext cx="685800" cy="475488"/>
           </a:xfrm>
           <a:prstGeom prst="rect">
@@ -15476,13 +16358,13 @@
       </p:sp>
       <p:sp>
         <p:nvSpPr>
-          <p:cNvPr id="41" name="Text 39"/>
-          <p:cNvSpPr/>
-          <p:nvPr/>
-        </p:nvSpPr>
-        <p:spPr>
-          <a:xfrm>
-            <a:off x="4850892" y="4169664"/>
+          <p:cNvPr id="44" name="Text 42"/>
+          <p:cNvSpPr/>
+          <p:nvPr/>
+        </p:nvSpPr>
+        <p:spPr>
+          <a:xfrm>
+            <a:off x="3639312" y="4169664"/>
             <a:ext cx="685800" cy="475488"/>
           </a:xfrm>
           <a:prstGeom prst="rect">
@@ -15507,7 +16389,7 @@
                 <a:ea typeface="Trebuchet MS" pitchFamily="34" charset="-122"/>
                 <a:cs typeface="Trebuchet MS" pitchFamily="34" charset="-120"/>
               </a:rPr>
-              <a:t>er</a:t>
+              <a:t>p</a:t>
             </a:r>
             <a:endParaRPr lang="en-US" sz="900" dirty="0"/>
           </a:p>
@@ -15515,13 +16397,13 @@
       </p:sp>
       <p:sp>
         <p:nvSpPr>
-          <p:cNvPr id="42" name="Shape 40"/>
-          <p:cNvSpPr/>
-          <p:nvPr/>
-        </p:nvSpPr>
-        <p:spPr>
-          <a:xfrm>
-            <a:off x="6062472" y="4169664"/>
+          <p:cNvPr id="45" name="Shape 43"/>
+          <p:cNvSpPr/>
+          <p:nvPr/>
+        </p:nvSpPr>
+        <p:spPr>
+          <a:xfrm>
+            <a:off x="4447032" y="4169664"/>
             <a:ext cx="685800" cy="475488"/>
           </a:xfrm>
           <a:prstGeom prst="rect">
@@ -15542,13 +16424,13 @@
       </p:sp>
       <p:sp>
         <p:nvSpPr>
-          <p:cNvPr id="43" name="Text 41"/>
-          <p:cNvSpPr/>
-          <p:nvPr/>
-        </p:nvSpPr>
-        <p:spPr>
-          <a:xfrm>
-            <a:off x="6062472" y="4169664"/>
+          <p:cNvPr id="46" name="Text 44"/>
+          <p:cNvSpPr/>
+          <p:nvPr/>
+        </p:nvSpPr>
+        <p:spPr>
+          <a:xfrm>
+            <a:off x="4447032" y="4169664"/>
             <a:ext cx="685800" cy="475488"/>
           </a:xfrm>
           <a:prstGeom prst="rect">
@@ -15573,7 +16455,7 @@
                 <a:ea typeface="Trebuchet MS" pitchFamily="34" charset="-122"/>
                 <a:cs typeface="Trebuchet MS" pitchFamily="34" charset="-120"/>
               </a:rPr>
-              <a:t>p</a:t>
+              <a:t>ay</a:t>
             </a:r>
             <a:endParaRPr lang="en-US" sz="900" dirty="0"/>
           </a:p>
@@ -15581,13 +16463,13 @@
       </p:sp>
       <p:sp>
         <p:nvSpPr>
-          <p:cNvPr id="44" name="Shape 42"/>
-          <p:cNvSpPr/>
-          <p:nvPr/>
-        </p:nvSpPr>
-        <p:spPr>
-          <a:xfrm>
-            <a:off x="7274052" y="4169664"/>
+          <p:cNvPr id="47" name="Shape 45"/>
+          <p:cNvSpPr/>
+          <p:nvPr/>
+        </p:nvSpPr>
+        <p:spPr>
+          <a:xfrm>
+            <a:off x="5254752" y="4169664"/>
             <a:ext cx="685800" cy="475488"/>
           </a:xfrm>
           <a:prstGeom prst="rect">
@@ -15608,13 +16490,13 @@
       </p:sp>
       <p:sp>
         <p:nvSpPr>
-          <p:cNvPr id="45" name="Text 43"/>
-          <p:cNvSpPr/>
-          <p:nvPr/>
-        </p:nvSpPr>
-        <p:spPr>
-          <a:xfrm>
-            <a:off x="7274052" y="4169664"/>
+          <p:cNvPr id="48" name="Text 46"/>
+          <p:cNvSpPr/>
+          <p:nvPr/>
+        </p:nvSpPr>
+        <p:spPr>
+          <a:xfrm>
+            <a:off x="5254752" y="4169664"/>
             <a:ext cx="685800" cy="475488"/>
           </a:xfrm>
           <a:prstGeom prst="rect">
@@ -15639,7 +16521,205 @@
                 <a:ea typeface="Trebuchet MS" pitchFamily="34" charset="-122"/>
                 <a:cs typeface="Trebuchet MS" pitchFamily="34" charset="-120"/>
               </a:rPr>
-              <a:t>ay</a:t>
+              <a:t>m</a:t>
+            </a:r>
+            <a:endParaRPr lang="en-US" sz="900" dirty="0"/>
+          </a:p>
+        </p:txBody>
+      </p:sp>
+      <p:sp>
+        <p:nvSpPr>
+          <p:cNvPr id="49" name="Shape 47"/>
+          <p:cNvSpPr/>
+          <p:nvPr/>
+        </p:nvSpPr>
+        <p:spPr>
+          <a:xfrm>
+            <a:off x="6062472" y="4169664"/>
+            <a:ext cx="685800" cy="475488"/>
+          </a:xfrm>
+          <a:prstGeom prst="rect">
+            <a:avLst>
+              <a:gd name="adj" fmla="val 7692"/>
+            </a:avLst>
+          </a:prstGeom>
+          <a:solidFill>
+            <a:srgbClr val="FFFFFF"/>
+          </a:solidFill>
+          <a:ln w="12700">
+            <a:solidFill>
+              <a:srgbClr val="DB2777"/>
+            </a:solidFill>
+            <a:prstDash val="solid"/>
+          </a:ln>
+        </p:spPr>
+      </p:sp>
+      <p:sp>
+        <p:nvSpPr>
+          <p:cNvPr id="50" name="Text 48"/>
+          <p:cNvSpPr/>
+          <p:nvPr/>
+        </p:nvSpPr>
+        <p:spPr>
+          <a:xfrm>
+            <a:off x="6062472" y="4169664"/>
+            <a:ext cx="685800" cy="475488"/>
+          </a:xfrm>
+          <a:prstGeom prst="rect">
+            <a:avLst/>
+          </a:prstGeom>
+          <a:noFill/>
+          <a:ln/>
+        </p:spPr>
+        <p:txBody>
+          <a:bodyPr wrap="square" lIns="0" tIns="0" rIns="0" bIns="0" rtlCol="0" anchor="ctr"/>
+          <a:lstStyle/>
+          <a:p>
+            <a:pPr algn="ctr" indent="0" marL="0">
+              <a:buNone/>
+            </a:pPr>
+            <a:r>
+              <a:rPr lang="en-US" sz="900" b="1" dirty="0">
+                <a:solidFill>
+                  <a:srgbClr val="9D174D"/>
+                </a:solidFill>
+                <a:latin typeface="Trebuchet MS" pitchFamily="34" charset="0"/>
+                <a:ea typeface="Trebuchet MS" pitchFamily="34" charset="-122"/>
+                <a:cs typeface="Trebuchet MS" pitchFamily="34" charset="-120"/>
+              </a:rPr>
+              <a:t>e</a:t>
+            </a:r>
+            <a:endParaRPr lang="en-US" sz="900" dirty="0"/>
+          </a:p>
+        </p:txBody>
+      </p:sp>
+      <p:sp>
+        <p:nvSpPr>
+          <p:cNvPr id="51" name="Shape 49"/>
+          <p:cNvSpPr/>
+          <p:nvPr/>
+        </p:nvSpPr>
+        <p:spPr>
+          <a:xfrm>
+            <a:off x="6870192" y="4169664"/>
+            <a:ext cx="685800" cy="475488"/>
+          </a:xfrm>
+          <a:prstGeom prst="rect">
+            <a:avLst>
+              <a:gd name="adj" fmla="val 7692"/>
+            </a:avLst>
+          </a:prstGeom>
+          <a:solidFill>
+            <a:srgbClr val="FFFFFF"/>
+          </a:solidFill>
+          <a:ln w="12700">
+            <a:solidFill>
+              <a:srgbClr val="DB2777"/>
+            </a:solidFill>
+            <a:prstDash val="solid"/>
+          </a:ln>
+        </p:spPr>
+      </p:sp>
+      <p:sp>
+        <p:nvSpPr>
+          <p:cNvPr id="52" name="Text 50"/>
+          <p:cNvSpPr/>
+          <p:nvPr/>
+        </p:nvSpPr>
+        <p:spPr>
+          <a:xfrm>
+            <a:off x="6870192" y="4169664"/>
+            <a:ext cx="685800" cy="475488"/>
+          </a:xfrm>
+          <a:prstGeom prst="rect">
+            <a:avLst/>
+          </a:prstGeom>
+          <a:noFill/>
+          <a:ln/>
+        </p:spPr>
+        <p:txBody>
+          <a:bodyPr wrap="square" lIns="0" tIns="0" rIns="0" bIns="0" rtlCol="0" anchor="ctr"/>
+          <a:lstStyle/>
+          <a:p>
+            <a:pPr algn="ctr" indent="0" marL="0">
+              <a:buNone/>
+            </a:pPr>
+            <a:r>
+              <a:rPr lang="en-US" sz="900" b="1" dirty="0">
+                <a:solidFill>
+                  <a:srgbClr val="9D174D"/>
+                </a:solidFill>
+                <a:latin typeface="Trebuchet MS" pitchFamily="34" charset="0"/>
+                <a:ea typeface="Trebuchet MS" pitchFamily="34" charset="-122"/>
+                <a:cs typeface="Trebuchet MS" pitchFamily="34" charset="-120"/>
+              </a:rPr>
+              <a:t>n</a:t>
+            </a:r>
+            <a:endParaRPr lang="en-US" sz="900" dirty="0"/>
+          </a:p>
+        </p:txBody>
+      </p:sp>
+      <p:sp>
+        <p:nvSpPr>
+          <p:cNvPr id="53" name="Shape 51"/>
+          <p:cNvSpPr/>
+          <p:nvPr/>
+        </p:nvSpPr>
+        <p:spPr>
+          <a:xfrm>
+            <a:off x="7677912" y="4169664"/>
+            <a:ext cx="685800" cy="475488"/>
+          </a:xfrm>
+          <a:prstGeom prst="rect">
+            <a:avLst>
+              <a:gd name="adj" fmla="val 7692"/>
+            </a:avLst>
+          </a:prstGeom>
+          <a:solidFill>
+            <a:srgbClr val="FFFFFF"/>
+          </a:solidFill>
+          <a:ln w="12700">
+            <a:solidFill>
+              <a:srgbClr val="DB2777"/>
+            </a:solidFill>
+            <a:prstDash val="solid"/>
+          </a:ln>
+        </p:spPr>
+      </p:sp>
+      <p:sp>
+        <p:nvSpPr>
+          <p:cNvPr id="54" name="Text 52"/>
+          <p:cNvSpPr/>
+          <p:nvPr/>
+        </p:nvSpPr>
+        <p:spPr>
+          <a:xfrm>
+            <a:off x="7677912" y="4169664"/>
+            <a:ext cx="685800" cy="475488"/>
+          </a:xfrm>
+          <a:prstGeom prst="rect">
+            <a:avLst/>
+          </a:prstGeom>
+          <a:noFill/>
+          <a:ln/>
+        </p:spPr>
+        <p:txBody>
+          <a:bodyPr wrap="square" lIns="0" tIns="0" rIns="0" bIns="0" rtlCol="0" anchor="ctr"/>
+          <a:lstStyle/>
+          <a:p>
+            <a:pPr algn="ctr" indent="0" marL="0">
+              <a:buNone/>
+            </a:pPr>
+            <a:r>
+              <a:rPr lang="en-US" sz="900" b="1" dirty="0">
+                <a:solidFill>
+                  <a:srgbClr val="9D174D"/>
+                </a:solidFill>
+                <a:latin typeface="Trebuchet MS" pitchFamily="34" charset="0"/>
+                <a:ea typeface="Trebuchet MS" pitchFamily="34" charset="-122"/>
+                <a:cs typeface="Trebuchet MS" pitchFamily="34" charset="-120"/>
+              </a:rPr>
+              <a:t>t</a:t>
             </a:r>
             <a:endParaRPr lang="en-US" sz="900" dirty="0"/>
           </a:p>
@@ -16213,7 +17293,7 @@
                 <a:ea typeface="Calibri" pitchFamily="34" charset="-122"/>
                 <a:cs typeface="Calibri" pitchFamily="34" charset="-120"/>
               </a:rPr>
-              <a:t>Word Labs  •  wordlabs.app  •  Root: 'pay' = give money owed</a:t>
+              <a:t>Word Labs  •  wordlabs.app  •  Root: 'pay' = to give money for something</a:t>
             </a:r>
             <a:endParaRPr lang="en-US" sz="800" dirty="0"/>
           </a:p>
@@ -16547,7 +17627,7 @@
                 <a:ea typeface="Trebuchet MS" pitchFamily="34" charset="-122"/>
                 <a:cs typeface="Trebuchet MS" pitchFamily="34" charset="-120"/>
               </a:rPr>
-              <a:t>2</a:t>
+              <a:t>0</a:t>
             </a:r>
             <a:pPr algn="ctr" indent="0" marL="0">
               <a:buNone/>
@@ -16561,7 +17641,7 @@
                 <a:ea typeface="Trebuchet MS" pitchFamily="34" charset="-122"/>
                 <a:cs typeface="Trebuchet MS" pitchFamily="34" charset="-120"/>
               </a:rPr>
-              <a:t>  punctuation marks</a:t>
+              <a:t>  punctuation mark</a:t>
             </a:r>
             <a:endParaRPr lang="en-US" sz="2800" dirty="0"/>
           </a:p>
@@ -16853,7 +17933,7 @@
                 <a:ea typeface="Calibri" pitchFamily="34" charset="-122"/>
                 <a:cs typeface="Calibri" pitchFamily="34" charset="-120"/>
               </a:rPr>
-              <a:t>Word Labs  •  wordlabs.app  •  Root: 'pay' = give money owed</a:t>
+              <a:t>Word Labs  •  wordlabs.app  •  Root: 'pay' = to give money for something</a:t>
             </a:r>
             <a:endParaRPr lang="en-US" sz="800" dirty="0"/>
           </a:p>
@@ -16965,7 +18045,7 @@
                 <a:ea typeface="Calibri" pitchFamily="34" charset="-122"/>
                 <a:cs typeface="Calibri" pitchFamily="34" charset="-120"/>
               </a:rPr>
-              <a:t>On </a:t>
+              <a:t>Tourists sometimes </a:t>
             </a:r>
             <a:pPr algn="l" indent="0" marL="0">
               <a:buNone/>
@@ -16982,7 +18062,7 @@
                 <a:ea typeface="Calibri" pitchFamily="34" charset="-122"/>
                 <a:cs typeface="Calibri" pitchFamily="34" charset="-120"/>
               </a:rPr>
-              <a:t>payday</a:t>
+              <a:t>overpay</a:t>
             </a:r>
             <a:pPr algn="l" indent="0" marL="0">
               <a:buNone/>
@@ -16996,7 +18076,7 @@
                 <a:ea typeface="Calibri" pitchFamily="34" charset="-122"/>
                 <a:cs typeface="Calibri" pitchFamily="34" charset="-120"/>
               </a:rPr>
-              <a:t>, the manager had to </a:t>
+              <a:t> for souvenirs in busy markets. The invoice is </a:t>
             </a:r>
             <a:pPr algn="l" indent="0" marL="0">
               <a:buNone/>
@@ -17013,7 +18093,7 @@
                 <a:ea typeface="Calibri" pitchFamily="34" charset="-122"/>
                 <a:cs typeface="Calibri" pitchFamily="34" charset="-120"/>
               </a:rPr>
-              <a:t>repay</a:t>
+              <a:t>payable</a:t>
             </a:r>
             <a:pPr algn="l" indent="0" marL="0">
               <a:buNone/>
@@ -17027,7 +18107,7 @@
                 <a:ea typeface="Calibri" pitchFamily="34" charset="-122"/>
                 <a:cs typeface="Calibri" pitchFamily="34" charset="-120"/>
               </a:rPr>
-              <a:t> her staff; however, she was careful not to </a:t>
+              <a:t> within thirty days. The company was criticised for trying to </a:t>
             </a:r>
             <a:pPr algn="l" indent="0" marL="0">
               <a:buNone/>
@@ -17058,7 +18138,7 @@
                 <a:ea typeface="Calibri" pitchFamily="34" charset="-122"/>
                 <a:cs typeface="Calibri" pitchFamily="34" charset="-120"/>
               </a:rPr>
-              <a:t> anyone.</a:t>
+              <a:t> its workers.</a:t>
             </a:r>
             <a:endParaRPr lang="en-US" sz="1800" dirty="0"/>
           </a:p>
@@ -17213,7 +18293,7 @@
                 <a:ea typeface="Trebuchet MS" pitchFamily="34" charset="-122"/>
                 <a:cs typeface="Trebuchet MS" pitchFamily="34" charset="-120"/>
               </a:rPr>
-              <a:t>payday</a:t>
+              <a:t>overpay</a:t>
             </a:r>
             <a:endParaRPr lang="en-US" sz="1400" dirty="0"/>
           </a:p>
@@ -17341,7 +18421,7 @@
                 <a:ea typeface="Trebuchet MS" pitchFamily="34" charset="-122"/>
                 <a:cs typeface="Trebuchet MS" pitchFamily="34" charset="-120"/>
               </a:rPr>
-              <a:t>repay</a:t>
+              <a:t>payable</a:t>
             </a:r>
             <a:endParaRPr lang="en-US" sz="1400" dirty="0"/>
           </a:p>
@@ -17800,7 +18880,7 @@
                 <a:ea typeface="Calibri" pitchFamily="34" charset="-122"/>
                 <a:cs typeface="Calibri" pitchFamily="34" charset="-120"/>
               </a:rPr>
-              <a:t>Word Labs  •  wordlabs.app  •  Root: 'pay' = give money owed</a:t>
+              <a:t>Word Labs  •  wordlabs.app  •  Root: 'pay' = to give money for something</a:t>
             </a:r>
             <a:endParaRPr lang="en-US" sz="800" dirty="0"/>
           </a:p>
@@ -17939,7 +19019,7 @@
                 <a:ea typeface="Trebuchet MS" pitchFamily="34" charset="-122"/>
                 <a:cs typeface="Trebuchet MS" pitchFamily="34" charset="-120"/>
               </a:rPr>
-              <a:t>payday</a:t>
+              <a:t>overpay</a:t>
             </a:r>
             <a:endParaRPr lang="en-US" sz="2800" dirty="0"/>
           </a:p>
@@ -18627,7 +19707,7 @@
                 <a:ea typeface="Calibri" pitchFamily="34" charset="-122"/>
                 <a:cs typeface="Calibri" pitchFamily="34" charset="-120"/>
               </a:rPr>
-              <a:t>Word Labs  •  wordlabs.app  •  Root: 'pay' = give money owed</a:t>
+              <a:t>Word Labs  •  wordlabs.app  •  Root: 'pay' = to give money for something</a:t>
             </a:r>
             <a:endParaRPr lang="en-US" sz="800" dirty="0"/>
           </a:p>
@@ -18766,7 +19846,7 @@
                 <a:ea typeface="Trebuchet MS" pitchFamily="34" charset="-122"/>
                 <a:cs typeface="Trebuchet MS" pitchFamily="34" charset="-120"/>
               </a:rPr>
-              <a:t>payday</a:t>
+              <a:t>overpay</a:t>
             </a:r>
             <a:endParaRPr lang="en-US" sz="2800" dirty="0"/>
           </a:p>
@@ -18855,11 +19935,11 @@
             </a:avLst>
           </a:prstGeom>
           <a:solidFill>
-            <a:srgbClr val="CCFBF1"/>
+            <a:srgbClr val="DDD6FE"/>
           </a:solidFill>
           <a:ln w="19050">
             <a:solidFill>
-              <a:srgbClr val="0D9488"/>
+              <a:srgbClr val="7C3AED"/>
             </a:solidFill>
             <a:prstDash val="solid"/>
           </a:ln>
@@ -18899,13 +19979,13 @@
             <a:r>
               <a:rPr lang="en-US" sz="1300" b="1" dirty="0">
                 <a:solidFill>
-                  <a:srgbClr val="0F766E"/>
+                  <a:srgbClr val="4C1D95"/>
                 </a:solidFill>
                 <a:latin typeface="Trebuchet MS" pitchFamily="34" charset="0"/>
                 <a:ea typeface="Trebuchet MS" pitchFamily="34" charset="-122"/>
                 <a:cs typeface="Trebuchet MS" pitchFamily="34" charset="-120"/>
               </a:rPr>
-              <a:t>pay</a:t>
+              <a:t>over</a:t>
             </a:r>
             <a:endParaRPr lang="en-US" sz="1300" dirty="0"/>
           </a:p>
@@ -18944,7 +20024,7 @@
                 <a:ea typeface="Calibri" pitchFamily="34" charset="-122"/>
                 <a:cs typeface="Calibri" pitchFamily="34" charset="-120"/>
               </a:rPr>
-              <a:t>give money owed</a:t>
+              <a:t>too much</a:t>
             </a:r>
             <a:endParaRPr lang="en-US" sz="850" dirty="0"/>
           </a:p>
@@ -18967,11 +20047,11 @@
             </a:avLst>
           </a:prstGeom>
           <a:solidFill>
-            <a:srgbClr val="FCE7F3"/>
+            <a:srgbClr val="CCFBF1"/>
           </a:solidFill>
           <a:ln w="19050">
             <a:solidFill>
-              <a:srgbClr val="DB2777"/>
+              <a:srgbClr val="0D9488"/>
             </a:solidFill>
             <a:prstDash val="solid"/>
           </a:ln>
@@ -19011,13 +20091,13 @@
             <a:r>
               <a:rPr lang="en-US" sz="1300" b="1" dirty="0">
                 <a:solidFill>
-                  <a:srgbClr val="9D174D"/>
+                  <a:srgbClr val="0F766E"/>
                 </a:solidFill>
                 <a:latin typeface="Trebuchet MS" pitchFamily="34" charset="0"/>
                 <a:ea typeface="Trebuchet MS" pitchFamily="34" charset="-122"/>
                 <a:cs typeface="Trebuchet MS" pitchFamily="34" charset="-120"/>
               </a:rPr>
-              <a:t>day</a:t>
+              <a:t>pay</a:t>
             </a:r>
             <a:endParaRPr lang="en-US" sz="1300" dirty="0"/>
           </a:p>
@@ -19056,7 +20136,7 @@
                 <a:ea typeface="Calibri" pitchFamily="34" charset="-122"/>
                 <a:cs typeface="Calibri" pitchFamily="34" charset="-120"/>
               </a:rPr>
-              <a:t>a period of time</a:t>
+              <a:t>to give money for something</a:t>
             </a:r>
             <a:endParaRPr lang="en-US" sz="850" dirty="0"/>
           </a:p>
@@ -19612,7 +20692,7 @@
                 <a:ea typeface="Calibri" pitchFamily="34" charset="-122"/>
                 <a:cs typeface="Calibri" pitchFamily="34" charset="-120"/>
               </a:rPr>
-              <a:t>Word Labs  •  wordlabs.app  •  Root: 'pay' = give money owed</a:t>
+              <a:t>Word Labs  •  wordlabs.app  •  Root: 'pay' = to give money for something</a:t>
             </a:r>
             <a:endParaRPr lang="en-US" sz="800" dirty="0"/>
           </a:p>
@@ -19751,7 +20831,7 @@
                 <a:ea typeface="Trebuchet MS" pitchFamily="34" charset="-122"/>
                 <a:cs typeface="Trebuchet MS" pitchFamily="34" charset="-120"/>
               </a:rPr>
-              <a:t>payday</a:t>
+              <a:t>overpay</a:t>
             </a:r>
             <a:endParaRPr lang="en-US" sz="2800" dirty="0"/>
           </a:p>
@@ -19840,11 +20920,11 @@
             </a:avLst>
           </a:prstGeom>
           <a:solidFill>
-            <a:srgbClr val="CCFBF1"/>
+            <a:srgbClr val="DDD6FE"/>
           </a:solidFill>
           <a:ln w="19050">
             <a:solidFill>
-              <a:srgbClr val="0D9488"/>
+              <a:srgbClr val="7C3AED"/>
             </a:solidFill>
             <a:prstDash val="solid"/>
           </a:ln>
@@ -19884,13 +20964,13 @@
             <a:r>
               <a:rPr lang="en-US" sz="1300" b="1" dirty="0">
                 <a:solidFill>
-                  <a:srgbClr val="0F766E"/>
+                  <a:srgbClr val="4C1D95"/>
                 </a:solidFill>
                 <a:latin typeface="Trebuchet MS" pitchFamily="34" charset="0"/>
                 <a:ea typeface="Trebuchet MS" pitchFamily="34" charset="-122"/>
                 <a:cs typeface="Trebuchet MS" pitchFamily="34" charset="-120"/>
               </a:rPr>
-              <a:t>pay</a:t>
+              <a:t>over</a:t>
             </a:r>
             <a:endParaRPr lang="en-US" sz="1300" dirty="0"/>
           </a:p>
@@ -19929,7 +21009,7 @@
                 <a:ea typeface="Calibri" pitchFamily="34" charset="-122"/>
                 <a:cs typeface="Calibri" pitchFamily="34" charset="-120"/>
               </a:rPr>
-              <a:t>give money owed</a:t>
+              <a:t>too much</a:t>
             </a:r>
             <a:endParaRPr lang="en-US" sz="850" dirty="0"/>
           </a:p>
@@ -19952,11 +21032,11 @@
             </a:avLst>
           </a:prstGeom>
           <a:solidFill>
-            <a:srgbClr val="FCE7F3"/>
+            <a:srgbClr val="CCFBF1"/>
           </a:solidFill>
           <a:ln w="19050">
             <a:solidFill>
-              <a:srgbClr val="DB2777"/>
+              <a:srgbClr val="0D9488"/>
             </a:solidFill>
             <a:prstDash val="solid"/>
           </a:ln>
@@ -19996,13 +21076,13 @@
             <a:r>
               <a:rPr lang="en-US" sz="1300" b="1" dirty="0">
                 <a:solidFill>
-                  <a:srgbClr val="9D174D"/>
+                  <a:srgbClr val="0F766E"/>
                 </a:solidFill>
                 <a:latin typeface="Trebuchet MS" pitchFamily="34" charset="0"/>
                 <a:ea typeface="Trebuchet MS" pitchFamily="34" charset="-122"/>
                 <a:cs typeface="Trebuchet MS" pitchFamily="34" charset="-120"/>
               </a:rPr>
-              <a:t>day</a:t>
+              <a:t>pay</a:t>
             </a:r>
             <a:endParaRPr lang="en-US" sz="1300" dirty="0"/>
           </a:p>
@@ -20041,7 +21121,7 @@
                 <a:ea typeface="Calibri" pitchFamily="34" charset="-122"/>
                 <a:cs typeface="Calibri" pitchFamily="34" charset="-120"/>
               </a:rPr>
-              <a:t>a period of time</a:t>
+              <a:t>to give money for something</a:t>
             </a:r>
             <a:endParaRPr lang="en-US" sz="850" dirty="0"/>
           </a:p>
@@ -20148,7 +21228,7 @@
         </p:nvSpPr>
         <p:spPr>
           <a:xfrm>
-            <a:off x="2999232" y="3364992"/>
+            <a:off x="2313432" y="3364992"/>
             <a:ext cx="1645920" cy="475488"/>
           </a:xfrm>
           <a:prstGeom prst="rect">
@@ -20175,7 +21255,7 @@
         </p:nvSpPr>
         <p:spPr>
           <a:xfrm>
-            <a:off x="2999232" y="3364992"/>
+            <a:off x="2313432" y="3364992"/>
             <a:ext cx="1645920" cy="475488"/>
           </a:xfrm>
           <a:prstGeom prst="rect">
@@ -20200,7 +21280,7 @@
                 <a:ea typeface="Trebuchet MS" pitchFamily="34" charset="-122"/>
                 <a:cs typeface="Trebuchet MS" pitchFamily="34" charset="-120"/>
               </a:rPr>
-              <a:t>pay</a:t>
+              <a:t>o</a:t>
             </a:r>
             <a:endParaRPr lang="en-US" sz="1400" dirty="0"/>
           </a:p>
@@ -20214,8 +21294,8 @@
         </p:nvSpPr>
         <p:spPr>
           <a:xfrm>
-            <a:off x="4645152" y="3364992"/>
-            <a:ext cx="1097280" cy="475488"/>
+            <a:off x="3959352" y="3364992"/>
+            <a:ext cx="411480" cy="475488"/>
           </a:xfrm>
           <a:prstGeom prst="rect">
             <a:avLst/>
@@ -20253,7 +21333,7 @@
         </p:nvSpPr>
         <p:spPr>
           <a:xfrm>
-            <a:off x="5742432" y="3364992"/>
+            <a:off x="4370832" y="3364992"/>
             <a:ext cx="1645920" cy="475488"/>
           </a:xfrm>
           <a:prstGeom prst="rect">
@@ -20280,7 +21360,7 @@
         </p:nvSpPr>
         <p:spPr>
           <a:xfrm>
-            <a:off x="5742432" y="3364992"/>
+            <a:off x="4370832" y="3364992"/>
             <a:ext cx="1645920" cy="475488"/>
           </a:xfrm>
           <a:prstGeom prst="rect">
@@ -20305,7 +21385,7 @@
                 <a:ea typeface="Trebuchet MS" pitchFamily="34" charset="-122"/>
                 <a:cs typeface="Trebuchet MS" pitchFamily="34" charset="-120"/>
               </a:rPr>
-              <a:t>day</a:t>
+              <a:t>ver</a:t>
             </a:r>
             <a:endParaRPr lang="en-US" sz="1400" dirty="0"/>
           </a:p>
@@ -20313,7 +21393,112 @@
       </p:sp>
       <p:sp>
         <p:nvSpPr>
-          <p:cNvPr id="30" name="Shape 28"/>
+          <p:cNvPr id="30" name="Text 28"/>
+          <p:cNvSpPr/>
+          <p:nvPr/>
+        </p:nvSpPr>
+        <p:spPr>
+          <a:xfrm>
+            <a:off x="6016752" y="3364992"/>
+            <a:ext cx="411480" cy="475488"/>
+          </a:xfrm>
+          <a:prstGeom prst="rect">
+            <a:avLst/>
+          </a:prstGeom>
+          <a:noFill/>
+          <a:ln/>
+        </p:spPr>
+        <p:txBody>
+          <a:bodyPr wrap="square" lIns="0" tIns="0" rIns="0" bIns="0" rtlCol="0" anchor="ctr"/>
+          <a:lstStyle/>
+          <a:p>
+            <a:pPr algn="ctr" indent="0" marL="0">
+              <a:buNone/>
+            </a:pPr>
+            <a:r>
+              <a:rPr lang="en-US" sz="1600" b="1" dirty="0">
+                <a:solidFill>
+                  <a:srgbClr val="0D9488"/>
+                </a:solidFill>
+                <a:latin typeface="Trebuchet MS" pitchFamily="34" charset="0"/>
+                <a:ea typeface="Trebuchet MS" pitchFamily="34" charset="-122"/>
+                <a:cs typeface="Trebuchet MS" pitchFamily="34" charset="-120"/>
+              </a:rPr>
+              <a:t>·</a:t>
+            </a:r>
+            <a:endParaRPr lang="en-US" sz="1600" dirty="0"/>
+          </a:p>
+        </p:txBody>
+      </p:sp>
+      <p:sp>
+        <p:nvSpPr>
+          <p:cNvPr id="31" name="Shape 29"/>
+          <p:cNvSpPr/>
+          <p:nvPr/>
+        </p:nvSpPr>
+        <p:spPr>
+          <a:xfrm>
+            <a:off x="6428232" y="3364992"/>
+            <a:ext cx="1645920" cy="475488"/>
+          </a:xfrm>
+          <a:prstGeom prst="rect">
+            <a:avLst>
+              <a:gd name="adj" fmla="val 9615"/>
+            </a:avLst>
+          </a:prstGeom>
+          <a:solidFill>
+            <a:srgbClr val="FFFFFF"/>
+          </a:solidFill>
+          <a:ln w="12700">
+            <a:solidFill>
+              <a:srgbClr val="0D9488"/>
+            </a:solidFill>
+            <a:prstDash val="solid"/>
+          </a:ln>
+        </p:spPr>
+      </p:sp>
+      <p:sp>
+        <p:nvSpPr>
+          <p:cNvPr id="32" name="Text 30"/>
+          <p:cNvSpPr/>
+          <p:nvPr/>
+        </p:nvSpPr>
+        <p:spPr>
+          <a:xfrm>
+            <a:off x="6428232" y="3364992"/>
+            <a:ext cx="1645920" cy="475488"/>
+          </a:xfrm>
+          <a:prstGeom prst="rect">
+            <a:avLst/>
+          </a:prstGeom>
+          <a:noFill/>
+          <a:ln/>
+        </p:spPr>
+        <p:txBody>
+          <a:bodyPr wrap="square" lIns="0" tIns="0" rIns="0" bIns="0" rtlCol="0" anchor="ctr"/>
+          <a:lstStyle/>
+          <a:p>
+            <a:pPr algn="ctr" indent="0" marL="0">
+              <a:buNone/>
+            </a:pPr>
+            <a:r>
+              <a:rPr lang="en-US" sz="1400" b="1" dirty="0">
+                <a:solidFill>
+                  <a:srgbClr val="0D9488"/>
+                </a:solidFill>
+                <a:latin typeface="Trebuchet MS" pitchFamily="34" charset="0"/>
+                <a:ea typeface="Trebuchet MS" pitchFamily="34" charset="-122"/>
+                <a:cs typeface="Trebuchet MS" pitchFamily="34" charset="-120"/>
+              </a:rPr>
+              <a:t>pay</a:t>
+            </a:r>
+            <a:endParaRPr lang="en-US" sz="1400" dirty="0"/>
+          </a:p>
+        </p:txBody>
+      </p:sp>
+      <p:sp>
+        <p:nvSpPr>
+          <p:cNvPr id="33" name="Shape 31"/>
           <p:cNvSpPr/>
           <p:nvPr/>
         </p:nvSpPr>
@@ -20340,7 +21525,7 @@
       </p:sp>
       <p:sp>
         <p:nvSpPr>
-          <p:cNvPr id="31" name="Text 29"/>
+          <p:cNvPr id="34" name="Text 32"/>
           <p:cNvSpPr/>
           <p:nvPr/>
         </p:nvSpPr>
@@ -20379,7 +21564,7 @@
       </p:sp>
       <p:sp>
         <p:nvSpPr>
-          <p:cNvPr id="32" name="Shape 30"/>
+          <p:cNvPr id="35" name="Shape 33"/>
           <p:cNvSpPr/>
           <p:nvPr/>
         </p:nvSpPr>
@@ -20406,7 +21591,7 @@
       </p:sp>
       <p:sp>
         <p:nvSpPr>
-          <p:cNvPr id="33" name="Text 31"/>
+          <p:cNvPr id="36" name="Text 34"/>
           <p:cNvSpPr/>
           <p:nvPr/>
         </p:nvSpPr>
@@ -20729,7 +21914,7 @@
                 <a:ea typeface="Calibri" pitchFamily="34" charset="-122"/>
                 <a:cs typeface="Calibri" pitchFamily="34" charset="-120"/>
               </a:rPr>
-              <a:t>Word Labs  •  wordlabs.app  •  Root: 'pay' = give money owed</a:t>
+              <a:t>Word Labs  •  wordlabs.app  •  Root: 'pay' = to give money for something</a:t>
             </a:r>
             <a:endParaRPr lang="en-US" sz="800" dirty="0"/>
           </a:p>
@@ -20868,7 +22053,7 @@
                 <a:ea typeface="Trebuchet MS" pitchFamily="34" charset="-122"/>
                 <a:cs typeface="Trebuchet MS" pitchFamily="34" charset="-120"/>
               </a:rPr>
-              <a:t>payday</a:t>
+              <a:t>overpay</a:t>
             </a:r>
             <a:endParaRPr lang="en-US" sz="2800" dirty="0"/>
           </a:p>
@@ -20957,11 +22142,11 @@
             </a:avLst>
           </a:prstGeom>
           <a:solidFill>
-            <a:srgbClr val="CCFBF1"/>
+            <a:srgbClr val="DDD6FE"/>
           </a:solidFill>
           <a:ln w="19050">
             <a:solidFill>
-              <a:srgbClr val="0D9488"/>
+              <a:srgbClr val="7C3AED"/>
             </a:solidFill>
             <a:prstDash val="solid"/>
           </a:ln>
@@ -21001,13 +22186,13 @@
             <a:r>
               <a:rPr lang="en-US" sz="1300" b="1" dirty="0">
                 <a:solidFill>
-                  <a:srgbClr val="0F766E"/>
+                  <a:srgbClr val="4C1D95"/>
                 </a:solidFill>
                 <a:latin typeface="Trebuchet MS" pitchFamily="34" charset="0"/>
                 <a:ea typeface="Trebuchet MS" pitchFamily="34" charset="-122"/>
                 <a:cs typeface="Trebuchet MS" pitchFamily="34" charset="-120"/>
               </a:rPr>
-              <a:t>pay</a:t>
+              <a:t>over</a:t>
             </a:r>
             <a:endParaRPr lang="en-US" sz="1300" dirty="0"/>
           </a:p>
@@ -21046,7 +22231,7 @@
                 <a:ea typeface="Calibri" pitchFamily="34" charset="-122"/>
                 <a:cs typeface="Calibri" pitchFamily="34" charset="-120"/>
               </a:rPr>
-              <a:t>give money owed</a:t>
+              <a:t>too much</a:t>
             </a:r>
             <a:endParaRPr lang="en-US" sz="850" dirty="0"/>
           </a:p>
@@ -21069,11 +22254,11 @@
             </a:avLst>
           </a:prstGeom>
           <a:solidFill>
-            <a:srgbClr val="FCE7F3"/>
+            <a:srgbClr val="CCFBF1"/>
           </a:solidFill>
           <a:ln w="19050">
             <a:solidFill>
-              <a:srgbClr val="DB2777"/>
+              <a:srgbClr val="0D9488"/>
             </a:solidFill>
             <a:prstDash val="solid"/>
           </a:ln>
@@ -21113,13 +22298,13 @@
             <a:r>
               <a:rPr lang="en-US" sz="1300" b="1" dirty="0">
                 <a:solidFill>
-                  <a:srgbClr val="9D174D"/>
+                  <a:srgbClr val="0F766E"/>
                 </a:solidFill>
                 <a:latin typeface="Trebuchet MS" pitchFamily="34" charset="0"/>
                 <a:ea typeface="Trebuchet MS" pitchFamily="34" charset="-122"/>
                 <a:cs typeface="Trebuchet MS" pitchFamily="34" charset="-120"/>
               </a:rPr>
-              <a:t>day</a:t>
+              <a:t>pay</a:t>
             </a:r>
             <a:endParaRPr lang="en-US" sz="1300" dirty="0"/>
           </a:p>
@@ -21158,7 +22343,7 @@
                 <a:ea typeface="Calibri" pitchFamily="34" charset="-122"/>
                 <a:cs typeface="Calibri" pitchFamily="34" charset="-120"/>
               </a:rPr>
-              <a:t>a period of time</a:t>
+              <a:t>to give money for something</a:t>
             </a:r>
             <a:endParaRPr lang="en-US" sz="850" dirty="0"/>
           </a:p>
@@ -21265,7 +22450,7 @@
         </p:nvSpPr>
         <p:spPr>
           <a:xfrm>
-            <a:off x="2999232" y="3364992"/>
+            <a:off x="2313432" y="3364992"/>
             <a:ext cx="1645920" cy="475488"/>
           </a:xfrm>
           <a:prstGeom prst="rect">
@@ -21292,7 +22477,7 @@
         </p:nvSpPr>
         <p:spPr>
           <a:xfrm>
-            <a:off x="2999232" y="3364992"/>
+            <a:off x="2313432" y="3364992"/>
             <a:ext cx="1645920" cy="475488"/>
           </a:xfrm>
           <a:prstGeom prst="rect">
@@ -21317,7 +22502,7 @@
                 <a:ea typeface="Trebuchet MS" pitchFamily="34" charset="-122"/>
                 <a:cs typeface="Trebuchet MS" pitchFamily="34" charset="-120"/>
               </a:rPr>
-              <a:t>pay</a:t>
+              <a:t>o</a:t>
             </a:r>
             <a:endParaRPr lang="en-US" sz="1400" dirty="0"/>
           </a:p>
@@ -21331,8 +22516,8 @@
         </p:nvSpPr>
         <p:spPr>
           <a:xfrm>
-            <a:off x="4645152" y="3364992"/>
-            <a:ext cx="1097280" cy="475488"/>
+            <a:off x="3959352" y="3364992"/>
+            <a:ext cx="411480" cy="475488"/>
           </a:xfrm>
           <a:prstGeom prst="rect">
             <a:avLst/>
@@ -21370,7 +22555,7 @@
         </p:nvSpPr>
         <p:spPr>
           <a:xfrm>
-            <a:off x="5742432" y="3364992"/>
+            <a:off x="4370832" y="3364992"/>
             <a:ext cx="1645920" cy="475488"/>
           </a:xfrm>
           <a:prstGeom prst="rect">
@@ -21397,7 +22582,7 @@
         </p:nvSpPr>
         <p:spPr>
           <a:xfrm>
-            <a:off x="5742432" y="3364992"/>
+            <a:off x="4370832" y="3364992"/>
             <a:ext cx="1645920" cy="475488"/>
           </a:xfrm>
           <a:prstGeom prst="rect">
@@ -21422,7 +22607,7 @@
                 <a:ea typeface="Trebuchet MS" pitchFamily="34" charset="-122"/>
                 <a:cs typeface="Trebuchet MS" pitchFamily="34" charset="-120"/>
               </a:rPr>
-              <a:t>day</a:t>
+              <a:t>ver</a:t>
             </a:r>
             <a:endParaRPr lang="en-US" sz="1400" dirty="0"/>
           </a:p>
@@ -21430,7 +22615,112 @@
       </p:sp>
       <p:sp>
         <p:nvSpPr>
-          <p:cNvPr id="30" name="Shape 28"/>
+          <p:cNvPr id="30" name="Text 28"/>
+          <p:cNvSpPr/>
+          <p:nvPr/>
+        </p:nvSpPr>
+        <p:spPr>
+          <a:xfrm>
+            <a:off x="6016752" y="3364992"/>
+            <a:ext cx="411480" cy="475488"/>
+          </a:xfrm>
+          <a:prstGeom prst="rect">
+            <a:avLst/>
+          </a:prstGeom>
+          <a:noFill/>
+          <a:ln/>
+        </p:spPr>
+        <p:txBody>
+          <a:bodyPr wrap="square" lIns="0" tIns="0" rIns="0" bIns="0" rtlCol="0" anchor="ctr"/>
+          <a:lstStyle/>
+          <a:p>
+            <a:pPr algn="ctr" indent="0" marL="0">
+              <a:buNone/>
+            </a:pPr>
+            <a:r>
+              <a:rPr lang="en-US" sz="1600" b="1" dirty="0">
+                <a:solidFill>
+                  <a:srgbClr val="0D9488"/>
+                </a:solidFill>
+                <a:latin typeface="Trebuchet MS" pitchFamily="34" charset="0"/>
+                <a:ea typeface="Trebuchet MS" pitchFamily="34" charset="-122"/>
+                <a:cs typeface="Trebuchet MS" pitchFamily="34" charset="-120"/>
+              </a:rPr>
+              <a:t>·</a:t>
+            </a:r>
+            <a:endParaRPr lang="en-US" sz="1600" dirty="0"/>
+          </a:p>
+        </p:txBody>
+      </p:sp>
+      <p:sp>
+        <p:nvSpPr>
+          <p:cNvPr id="31" name="Shape 29"/>
+          <p:cNvSpPr/>
+          <p:nvPr/>
+        </p:nvSpPr>
+        <p:spPr>
+          <a:xfrm>
+            <a:off x="6428232" y="3364992"/>
+            <a:ext cx="1645920" cy="475488"/>
+          </a:xfrm>
+          <a:prstGeom prst="rect">
+            <a:avLst>
+              <a:gd name="adj" fmla="val 9615"/>
+            </a:avLst>
+          </a:prstGeom>
+          <a:solidFill>
+            <a:srgbClr val="FFFFFF"/>
+          </a:solidFill>
+          <a:ln w="12700">
+            <a:solidFill>
+              <a:srgbClr val="0D9488"/>
+            </a:solidFill>
+            <a:prstDash val="solid"/>
+          </a:ln>
+        </p:spPr>
+      </p:sp>
+      <p:sp>
+        <p:nvSpPr>
+          <p:cNvPr id="32" name="Text 30"/>
+          <p:cNvSpPr/>
+          <p:nvPr/>
+        </p:nvSpPr>
+        <p:spPr>
+          <a:xfrm>
+            <a:off x="6428232" y="3364992"/>
+            <a:ext cx="1645920" cy="475488"/>
+          </a:xfrm>
+          <a:prstGeom prst="rect">
+            <a:avLst/>
+          </a:prstGeom>
+          <a:noFill/>
+          <a:ln/>
+        </p:spPr>
+        <p:txBody>
+          <a:bodyPr wrap="square" lIns="0" tIns="0" rIns="0" bIns="0" rtlCol="0" anchor="ctr"/>
+          <a:lstStyle/>
+          <a:p>
+            <a:pPr algn="ctr" indent="0" marL="0">
+              <a:buNone/>
+            </a:pPr>
+            <a:r>
+              <a:rPr lang="en-US" sz="1400" b="1" dirty="0">
+                <a:solidFill>
+                  <a:srgbClr val="0D9488"/>
+                </a:solidFill>
+                <a:latin typeface="Trebuchet MS" pitchFamily="34" charset="0"/>
+                <a:ea typeface="Trebuchet MS" pitchFamily="34" charset="-122"/>
+                <a:cs typeface="Trebuchet MS" pitchFamily="34" charset="-120"/>
+              </a:rPr>
+              <a:t>pay</a:t>
+            </a:r>
+            <a:endParaRPr lang="en-US" sz="1400" dirty="0"/>
+          </a:p>
+        </p:txBody>
+      </p:sp>
+      <p:sp>
+        <p:nvSpPr>
+          <p:cNvPr id="33" name="Shape 31"/>
           <p:cNvSpPr/>
           <p:nvPr/>
         </p:nvSpPr>
@@ -21457,7 +22747,7 @@
       </p:sp>
       <p:sp>
         <p:nvSpPr>
-          <p:cNvPr id="31" name="Text 29"/>
+          <p:cNvPr id="34" name="Text 32"/>
           <p:cNvSpPr/>
           <p:nvPr/>
         </p:nvSpPr>
@@ -21496,7 +22786,7 @@
       </p:sp>
       <p:sp>
         <p:nvSpPr>
-          <p:cNvPr id="32" name="Shape 30"/>
+          <p:cNvPr id="35" name="Shape 33"/>
           <p:cNvSpPr/>
           <p:nvPr/>
         </p:nvSpPr>
@@ -21523,13 +22813,13 @@
       </p:sp>
       <p:sp>
         <p:nvSpPr>
-          <p:cNvPr id="33" name="Shape 31"/>
-          <p:cNvSpPr/>
-          <p:nvPr/>
-        </p:nvSpPr>
-        <p:spPr>
-          <a:xfrm>
-            <a:off x="2670048" y="4169664"/>
+          <p:cNvPr id="36" name="Shape 34"/>
+          <p:cNvSpPr/>
+          <p:nvPr/>
+        </p:nvSpPr>
+        <p:spPr>
+          <a:xfrm>
+            <a:off x="2427732" y="4169664"/>
             <a:ext cx="685800" cy="475488"/>
           </a:xfrm>
           <a:prstGeom prst="rect">
@@ -21550,13 +22840,13 @@
       </p:sp>
       <p:sp>
         <p:nvSpPr>
-          <p:cNvPr id="34" name="Text 32"/>
-          <p:cNvSpPr/>
-          <p:nvPr/>
-        </p:nvSpPr>
-        <p:spPr>
-          <a:xfrm>
-            <a:off x="2670048" y="4169664"/>
+          <p:cNvPr id="37" name="Text 35"/>
+          <p:cNvSpPr/>
+          <p:nvPr/>
+        </p:nvSpPr>
+        <p:spPr>
+          <a:xfrm>
+            <a:off x="2427732" y="4169664"/>
             <a:ext cx="685800" cy="475488"/>
           </a:xfrm>
           <a:prstGeom prst="rect">
@@ -21581,7 +22871,7 @@
                 <a:ea typeface="Trebuchet MS" pitchFamily="34" charset="-122"/>
                 <a:cs typeface="Trebuchet MS" pitchFamily="34" charset="-120"/>
               </a:rPr>
-              <a:t>p</a:t>
+              <a:t>o</a:t>
             </a:r>
             <a:endParaRPr lang="en-US" sz="900" dirty="0"/>
           </a:p>
@@ -21589,13 +22879,13 @@
       </p:sp>
       <p:sp>
         <p:nvSpPr>
-          <p:cNvPr id="35" name="Shape 33"/>
-          <p:cNvSpPr/>
-          <p:nvPr/>
-        </p:nvSpPr>
-        <p:spPr>
-          <a:xfrm>
-            <a:off x="4123944" y="4169664"/>
+          <p:cNvPr id="38" name="Shape 36"/>
+          <p:cNvSpPr/>
+          <p:nvPr/>
+        </p:nvSpPr>
+        <p:spPr>
+          <a:xfrm>
+            <a:off x="3639312" y="4169664"/>
             <a:ext cx="685800" cy="475488"/>
           </a:xfrm>
           <a:prstGeom prst="rect">
@@ -21616,13 +22906,13 @@
       </p:sp>
       <p:sp>
         <p:nvSpPr>
-          <p:cNvPr id="36" name="Text 34"/>
-          <p:cNvSpPr/>
-          <p:nvPr/>
-        </p:nvSpPr>
-        <p:spPr>
-          <a:xfrm>
-            <a:off x="4123944" y="4169664"/>
+          <p:cNvPr id="39" name="Text 37"/>
+          <p:cNvSpPr/>
+          <p:nvPr/>
+        </p:nvSpPr>
+        <p:spPr>
+          <a:xfrm>
+            <a:off x="3639312" y="4169664"/>
             <a:ext cx="685800" cy="475488"/>
           </a:xfrm>
           <a:prstGeom prst="rect">
@@ -21647,7 +22937,7 @@
                 <a:ea typeface="Trebuchet MS" pitchFamily="34" charset="-122"/>
                 <a:cs typeface="Trebuchet MS" pitchFamily="34" charset="-120"/>
               </a:rPr>
-              <a:t>ay</a:t>
+              <a:t>v</a:t>
             </a:r>
             <a:endParaRPr lang="en-US" sz="900" dirty="0"/>
           </a:p>
@@ -21655,13 +22945,13 @@
       </p:sp>
       <p:sp>
         <p:nvSpPr>
-          <p:cNvPr id="37" name="Shape 35"/>
-          <p:cNvSpPr/>
-          <p:nvPr/>
-        </p:nvSpPr>
-        <p:spPr>
-          <a:xfrm>
-            <a:off x="5577840" y="4169664"/>
+          <p:cNvPr id="40" name="Shape 38"/>
+          <p:cNvSpPr/>
+          <p:nvPr/>
+        </p:nvSpPr>
+        <p:spPr>
+          <a:xfrm>
+            <a:off x="4850892" y="4169664"/>
             <a:ext cx="685800" cy="475488"/>
           </a:xfrm>
           <a:prstGeom prst="rect">
@@ -21682,13 +22972,13 @@
       </p:sp>
       <p:sp>
         <p:nvSpPr>
-          <p:cNvPr id="38" name="Text 36"/>
-          <p:cNvSpPr/>
-          <p:nvPr/>
-        </p:nvSpPr>
-        <p:spPr>
-          <a:xfrm>
-            <a:off x="5577840" y="4169664"/>
+          <p:cNvPr id="41" name="Text 39"/>
+          <p:cNvSpPr/>
+          <p:nvPr/>
+        </p:nvSpPr>
+        <p:spPr>
+          <a:xfrm>
+            <a:off x="4850892" y="4169664"/>
             <a:ext cx="685800" cy="475488"/>
           </a:xfrm>
           <a:prstGeom prst="rect">
@@ -21713,7 +23003,7 @@
                 <a:ea typeface="Trebuchet MS" pitchFamily="34" charset="-122"/>
                 <a:cs typeface="Trebuchet MS" pitchFamily="34" charset="-120"/>
               </a:rPr>
-              <a:t>d</a:t>
+              <a:t>er</a:t>
             </a:r>
             <a:endParaRPr lang="en-US" sz="900" dirty="0"/>
           </a:p>
@@ -21721,13 +23011,13 @@
       </p:sp>
       <p:sp>
         <p:nvSpPr>
-          <p:cNvPr id="39" name="Shape 37"/>
-          <p:cNvSpPr/>
-          <p:nvPr/>
-        </p:nvSpPr>
-        <p:spPr>
-          <a:xfrm>
-            <a:off x="7031736" y="4169664"/>
+          <p:cNvPr id="42" name="Shape 40"/>
+          <p:cNvSpPr/>
+          <p:nvPr/>
+        </p:nvSpPr>
+        <p:spPr>
+          <a:xfrm>
+            <a:off x="6062472" y="4169664"/>
             <a:ext cx="685800" cy="475488"/>
           </a:xfrm>
           <a:prstGeom prst="rect">
@@ -21748,13 +23038,79 @@
       </p:sp>
       <p:sp>
         <p:nvSpPr>
-          <p:cNvPr id="40" name="Text 38"/>
-          <p:cNvSpPr/>
-          <p:nvPr/>
-        </p:nvSpPr>
-        <p:spPr>
-          <a:xfrm>
-            <a:off x="7031736" y="4169664"/>
+          <p:cNvPr id="43" name="Text 41"/>
+          <p:cNvSpPr/>
+          <p:nvPr/>
+        </p:nvSpPr>
+        <p:spPr>
+          <a:xfrm>
+            <a:off x="6062472" y="4169664"/>
+            <a:ext cx="685800" cy="475488"/>
+          </a:xfrm>
+          <a:prstGeom prst="rect">
+            <a:avLst/>
+          </a:prstGeom>
+          <a:noFill/>
+          <a:ln/>
+        </p:spPr>
+        <p:txBody>
+          <a:bodyPr wrap="square" lIns="0" tIns="0" rIns="0" bIns="0" rtlCol="0" anchor="ctr"/>
+          <a:lstStyle/>
+          <a:p>
+            <a:pPr algn="ctr" indent="0" marL="0">
+              <a:buNone/>
+            </a:pPr>
+            <a:r>
+              <a:rPr lang="en-US" sz="900" b="1" dirty="0">
+                <a:solidFill>
+                  <a:srgbClr val="9D174D"/>
+                </a:solidFill>
+                <a:latin typeface="Trebuchet MS" pitchFamily="34" charset="0"/>
+                <a:ea typeface="Trebuchet MS" pitchFamily="34" charset="-122"/>
+                <a:cs typeface="Trebuchet MS" pitchFamily="34" charset="-120"/>
+              </a:rPr>
+              <a:t>p</a:t>
+            </a:r>
+            <a:endParaRPr lang="en-US" sz="900" dirty="0"/>
+          </a:p>
+        </p:txBody>
+      </p:sp>
+      <p:sp>
+        <p:nvSpPr>
+          <p:cNvPr id="44" name="Shape 42"/>
+          <p:cNvSpPr/>
+          <p:nvPr/>
+        </p:nvSpPr>
+        <p:spPr>
+          <a:xfrm>
+            <a:off x="7274052" y="4169664"/>
+            <a:ext cx="685800" cy="475488"/>
+          </a:xfrm>
+          <a:prstGeom prst="rect">
+            <a:avLst>
+              <a:gd name="adj" fmla="val 7692"/>
+            </a:avLst>
+          </a:prstGeom>
+          <a:solidFill>
+            <a:srgbClr val="FFFFFF"/>
+          </a:solidFill>
+          <a:ln w="12700">
+            <a:solidFill>
+              <a:srgbClr val="DB2777"/>
+            </a:solidFill>
+            <a:prstDash val="solid"/>
+          </a:ln>
+        </p:spPr>
+      </p:sp>
+      <p:sp>
+        <p:nvSpPr>
+          <p:cNvPr id="45" name="Text 43"/>
+          <p:cNvSpPr/>
+          <p:nvPr/>
+        </p:nvSpPr>
+        <p:spPr>
+          <a:xfrm>
+            <a:off x="7274052" y="4169664"/>
             <a:ext cx="685800" cy="475488"/>
           </a:xfrm>
           <a:prstGeom prst="rect">
@@ -22071,7 +23427,7 @@
                 <a:ea typeface="Calibri" pitchFamily="34" charset="-122"/>
                 <a:cs typeface="Calibri" pitchFamily="34" charset="-120"/>
               </a:rPr>
-              <a:t>Word Labs  •  wordlabs.app  •  Root: 'pay' = give money owed</a:t>
+              <a:t>Word Labs  •  wordlabs.app  •  Root: 'pay' = to give money for something</a:t>
             </a:r>
             <a:endParaRPr lang="en-US" sz="800" dirty="0"/>
           </a:p>
@@ -22210,7 +23566,7 @@
                 <a:ea typeface="Trebuchet MS" pitchFamily="34" charset="-122"/>
                 <a:cs typeface="Trebuchet MS" pitchFamily="34" charset="-120"/>
               </a:rPr>
-              <a:t>repay</a:t>
+              <a:t>payable</a:t>
             </a:r>
             <a:endParaRPr lang="en-US" sz="2800" dirty="0"/>
           </a:p>
@@ -22898,7 +24254,7 @@
                 <a:ea typeface="Calibri" pitchFamily="34" charset="-122"/>
                 <a:cs typeface="Calibri" pitchFamily="34" charset="-120"/>
               </a:rPr>
-              <a:t>Word Labs  •  wordlabs.app  •  Root: 'pay' = give money owed</a:t>
+              <a:t>Word Labs  •  wordlabs.app  •  Root: 'pay' = to give money for something</a:t>
             </a:r>
             <a:endParaRPr lang="en-US" sz="800" dirty="0"/>
           </a:p>
@@ -23037,7 +24393,7 @@
                 <a:ea typeface="Trebuchet MS" pitchFamily="34" charset="-122"/>
                 <a:cs typeface="Trebuchet MS" pitchFamily="34" charset="-120"/>
               </a:rPr>
-              <a:t>repay</a:t>
+              <a:t>payable</a:t>
             </a:r>
             <a:endParaRPr lang="en-US" sz="2800" dirty="0"/>
           </a:p>
@@ -23126,11 +24482,11 @@
             </a:avLst>
           </a:prstGeom>
           <a:solidFill>
-            <a:srgbClr val="DDD6FE"/>
+            <a:srgbClr val="CCFBF1"/>
           </a:solidFill>
           <a:ln w="19050">
             <a:solidFill>
-              <a:srgbClr val="7C3AED"/>
+              <a:srgbClr val="0D9488"/>
             </a:solidFill>
             <a:prstDash val="solid"/>
           </a:ln>
@@ -23170,13 +24526,13 @@
             <a:r>
               <a:rPr lang="en-US" sz="1300" b="1" dirty="0">
                 <a:solidFill>
-                  <a:srgbClr val="4C1D95"/>
+                  <a:srgbClr val="0F766E"/>
                 </a:solidFill>
                 <a:latin typeface="Trebuchet MS" pitchFamily="34" charset="0"/>
                 <a:ea typeface="Trebuchet MS" pitchFamily="34" charset="-122"/>
                 <a:cs typeface="Trebuchet MS" pitchFamily="34" charset="-120"/>
               </a:rPr>
-              <a:t>re</a:t>
+              <a:t>pay</a:t>
             </a:r>
             <a:endParaRPr lang="en-US" sz="1300" dirty="0"/>
           </a:p>
@@ -23215,7 +24571,7 @@
                 <a:ea typeface="Calibri" pitchFamily="34" charset="-122"/>
                 <a:cs typeface="Calibri" pitchFamily="34" charset="-120"/>
               </a:rPr>
-              <a:t>again or back</a:t>
+              <a:t>to give money for something</a:t>
             </a:r>
             <a:endParaRPr lang="en-US" sz="850" dirty="0"/>
           </a:p>
@@ -23238,11 +24594,11 @@
             </a:avLst>
           </a:prstGeom>
           <a:solidFill>
-            <a:srgbClr val="CCFBF1"/>
+            <a:srgbClr val="FCE7F3"/>
           </a:solidFill>
           <a:ln w="19050">
             <a:solidFill>
-              <a:srgbClr val="0D9488"/>
+              <a:srgbClr val="DB2777"/>
             </a:solidFill>
             <a:prstDash val="solid"/>
           </a:ln>
@@ -23282,13 +24638,13 @@
             <a:r>
               <a:rPr lang="en-US" sz="1300" b="1" dirty="0">
                 <a:solidFill>
-                  <a:srgbClr val="0F766E"/>
+                  <a:srgbClr val="9D174D"/>
                 </a:solidFill>
                 <a:latin typeface="Trebuchet MS" pitchFamily="34" charset="0"/>
                 <a:ea typeface="Trebuchet MS" pitchFamily="34" charset="-122"/>
                 <a:cs typeface="Trebuchet MS" pitchFamily="34" charset="-120"/>
               </a:rPr>
-              <a:t>pay</a:t>
+              <a:t>able</a:t>
             </a:r>
             <a:endParaRPr lang="en-US" sz="1300" dirty="0"/>
           </a:p>
@@ -23327,7 +24683,7 @@
                 <a:ea typeface="Calibri" pitchFamily="34" charset="-122"/>
                 <a:cs typeface="Calibri" pitchFamily="34" charset="-120"/>
               </a:rPr>
-              <a:t>give money owed</a:t>
+              <a:t>able to</a:t>
             </a:r>
             <a:endParaRPr lang="en-US" sz="850" dirty="0"/>
           </a:p>
@@ -23883,7 +25239,7 @@
                 <a:ea typeface="Calibri" pitchFamily="34" charset="-122"/>
                 <a:cs typeface="Calibri" pitchFamily="34" charset="-120"/>
               </a:rPr>
-              <a:t>Word Labs  •  wordlabs.app  •  Root: 'pay' = give money owed</a:t>
+              <a:t>Word Labs  •  wordlabs.app  •  Root: 'pay' = to give money for something</a:t>
             </a:r>
             <a:endParaRPr lang="en-US" sz="800" dirty="0"/>
           </a:p>
@@ -23956,7 +25312,7 @@
                 <a:ea typeface="Trebuchet MS" pitchFamily="34" charset="-122"/>
                 <a:cs typeface="Trebuchet MS" pitchFamily="34" charset="-120"/>
               </a:rPr>
-              <a:t>We are learning that the root 'pay' means 'give money owed'.</a:t>
+              <a:t>We are learning that the root 'pay' means 'to give money for something'.</a:t>
             </a:r>
             <a:endParaRPr lang="en-US" sz="2000" dirty="0"/>
           </a:p>
@@ -24602,7 +25958,7 @@
                 <a:ea typeface="Calibri" pitchFamily="34" charset="-122"/>
                 <a:cs typeface="Calibri" pitchFamily="34" charset="-120"/>
               </a:rPr>
-              <a:t>Word Labs  •  wordlabs.app  •  Root: 'pay' = give money owed</a:t>
+              <a:t>Word Labs  •  wordlabs.app  •  Root: 'pay' = to give money for something</a:t>
             </a:r>
             <a:endParaRPr lang="en-US" sz="800" dirty="0"/>
           </a:p>
@@ -24741,7 +26097,7 @@
                 <a:ea typeface="Trebuchet MS" pitchFamily="34" charset="-122"/>
                 <a:cs typeface="Trebuchet MS" pitchFamily="34" charset="-120"/>
               </a:rPr>
-              <a:t>repay</a:t>
+              <a:t>payable</a:t>
             </a:r>
             <a:endParaRPr lang="en-US" sz="2800" dirty="0"/>
           </a:p>
@@ -24830,11 +26186,11 @@
             </a:avLst>
           </a:prstGeom>
           <a:solidFill>
-            <a:srgbClr val="DDD6FE"/>
+            <a:srgbClr val="CCFBF1"/>
           </a:solidFill>
           <a:ln w="19050">
             <a:solidFill>
-              <a:srgbClr val="7C3AED"/>
+              <a:srgbClr val="0D9488"/>
             </a:solidFill>
             <a:prstDash val="solid"/>
           </a:ln>
@@ -24874,13 +26230,13 @@
             <a:r>
               <a:rPr lang="en-US" sz="1300" b="1" dirty="0">
                 <a:solidFill>
-                  <a:srgbClr val="4C1D95"/>
+                  <a:srgbClr val="0F766E"/>
                 </a:solidFill>
                 <a:latin typeface="Trebuchet MS" pitchFamily="34" charset="0"/>
                 <a:ea typeface="Trebuchet MS" pitchFamily="34" charset="-122"/>
                 <a:cs typeface="Trebuchet MS" pitchFamily="34" charset="-120"/>
               </a:rPr>
-              <a:t>re</a:t>
+              <a:t>pay</a:t>
             </a:r>
             <a:endParaRPr lang="en-US" sz="1300" dirty="0"/>
           </a:p>
@@ -24919,7 +26275,7 @@
                 <a:ea typeface="Calibri" pitchFamily="34" charset="-122"/>
                 <a:cs typeface="Calibri" pitchFamily="34" charset="-120"/>
               </a:rPr>
-              <a:t>again or back</a:t>
+              <a:t>to give money for something</a:t>
             </a:r>
             <a:endParaRPr lang="en-US" sz="850" dirty="0"/>
           </a:p>
@@ -24942,11 +26298,11 @@
             </a:avLst>
           </a:prstGeom>
           <a:solidFill>
-            <a:srgbClr val="CCFBF1"/>
+            <a:srgbClr val="FCE7F3"/>
           </a:solidFill>
           <a:ln w="19050">
             <a:solidFill>
-              <a:srgbClr val="0D9488"/>
+              <a:srgbClr val="DB2777"/>
             </a:solidFill>
             <a:prstDash val="solid"/>
           </a:ln>
@@ -24986,13 +26342,13 @@
             <a:r>
               <a:rPr lang="en-US" sz="1300" b="1" dirty="0">
                 <a:solidFill>
-                  <a:srgbClr val="0F766E"/>
+                  <a:srgbClr val="9D174D"/>
                 </a:solidFill>
                 <a:latin typeface="Trebuchet MS" pitchFamily="34" charset="0"/>
                 <a:ea typeface="Trebuchet MS" pitchFamily="34" charset="-122"/>
                 <a:cs typeface="Trebuchet MS" pitchFamily="34" charset="-120"/>
               </a:rPr>
-              <a:t>pay</a:t>
+              <a:t>able</a:t>
             </a:r>
             <a:endParaRPr lang="en-US" sz="1300" dirty="0"/>
           </a:p>
@@ -25031,7 +26387,7 @@
                 <a:ea typeface="Calibri" pitchFamily="34" charset="-122"/>
                 <a:cs typeface="Calibri" pitchFamily="34" charset="-120"/>
               </a:rPr>
-              <a:t>give money owed</a:t>
+              <a:t>able to</a:t>
             </a:r>
             <a:endParaRPr lang="en-US" sz="850" dirty="0"/>
           </a:p>
@@ -25138,7 +26494,7 @@
         </p:nvSpPr>
         <p:spPr>
           <a:xfrm>
-            <a:off x="2999232" y="3364992"/>
+            <a:off x="2313432" y="3364992"/>
             <a:ext cx="1645920" cy="475488"/>
           </a:xfrm>
           <a:prstGeom prst="rect">
@@ -25165,7 +26521,7 @@
         </p:nvSpPr>
         <p:spPr>
           <a:xfrm>
-            <a:off x="2999232" y="3364992"/>
+            <a:off x="2313432" y="3364992"/>
             <a:ext cx="1645920" cy="475488"/>
           </a:xfrm>
           <a:prstGeom prst="rect">
@@ -25190,7 +26546,7 @@
                 <a:ea typeface="Trebuchet MS" pitchFamily="34" charset="-122"/>
                 <a:cs typeface="Trebuchet MS" pitchFamily="34" charset="-120"/>
               </a:rPr>
-              <a:t>re</a:t>
+              <a:t>pay</a:t>
             </a:r>
             <a:endParaRPr lang="en-US" sz="1400" dirty="0"/>
           </a:p>
@@ -25204,8 +26560,8 @@
         </p:nvSpPr>
         <p:spPr>
           <a:xfrm>
-            <a:off x="4645152" y="3364992"/>
-            <a:ext cx="1097280" cy="475488"/>
+            <a:off x="3959352" y="3364992"/>
+            <a:ext cx="411480" cy="475488"/>
           </a:xfrm>
           <a:prstGeom prst="rect">
             <a:avLst/>
@@ -25243,7 +26599,7 @@
         </p:nvSpPr>
         <p:spPr>
           <a:xfrm>
-            <a:off x="5742432" y="3364992"/>
+            <a:off x="4370832" y="3364992"/>
             <a:ext cx="1645920" cy="475488"/>
           </a:xfrm>
           <a:prstGeom prst="rect">
@@ -25270,7 +26626,7 @@
         </p:nvSpPr>
         <p:spPr>
           <a:xfrm>
-            <a:off x="5742432" y="3364992"/>
+            <a:off x="4370832" y="3364992"/>
             <a:ext cx="1645920" cy="475488"/>
           </a:xfrm>
           <a:prstGeom prst="rect">
@@ -25295,7 +26651,7 @@
                 <a:ea typeface="Trebuchet MS" pitchFamily="34" charset="-122"/>
                 <a:cs typeface="Trebuchet MS" pitchFamily="34" charset="-120"/>
               </a:rPr>
-              <a:t>pay</a:t>
+              <a:t>a</a:t>
             </a:r>
             <a:endParaRPr lang="en-US" sz="1400" dirty="0"/>
           </a:p>
@@ -25303,7 +26659,112 @@
       </p:sp>
       <p:sp>
         <p:nvSpPr>
-          <p:cNvPr id="30" name="Shape 28"/>
+          <p:cNvPr id="30" name="Text 28"/>
+          <p:cNvSpPr/>
+          <p:nvPr/>
+        </p:nvSpPr>
+        <p:spPr>
+          <a:xfrm>
+            <a:off x="6016752" y="3364992"/>
+            <a:ext cx="411480" cy="475488"/>
+          </a:xfrm>
+          <a:prstGeom prst="rect">
+            <a:avLst/>
+          </a:prstGeom>
+          <a:noFill/>
+          <a:ln/>
+        </p:spPr>
+        <p:txBody>
+          <a:bodyPr wrap="square" lIns="0" tIns="0" rIns="0" bIns="0" rtlCol="0" anchor="ctr"/>
+          <a:lstStyle/>
+          <a:p>
+            <a:pPr algn="ctr" indent="0" marL="0">
+              <a:buNone/>
+            </a:pPr>
+            <a:r>
+              <a:rPr lang="en-US" sz="1600" b="1" dirty="0">
+                <a:solidFill>
+                  <a:srgbClr val="0D9488"/>
+                </a:solidFill>
+                <a:latin typeface="Trebuchet MS" pitchFamily="34" charset="0"/>
+                <a:ea typeface="Trebuchet MS" pitchFamily="34" charset="-122"/>
+                <a:cs typeface="Trebuchet MS" pitchFamily="34" charset="-120"/>
+              </a:rPr>
+              <a:t>·</a:t>
+            </a:r>
+            <a:endParaRPr lang="en-US" sz="1600" dirty="0"/>
+          </a:p>
+        </p:txBody>
+      </p:sp>
+      <p:sp>
+        <p:nvSpPr>
+          <p:cNvPr id="31" name="Shape 29"/>
+          <p:cNvSpPr/>
+          <p:nvPr/>
+        </p:nvSpPr>
+        <p:spPr>
+          <a:xfrm>
+            <a:off x="6428232" y="3364992"/>
+            <a:ext cx="1645920" cy="475488"/>
+          </a:xfrm>
+          <a:prstGeom prst="rect">
+            <a:avLst>
+              <a:gd name="adj" fmla="val 9615"/>
+            </a:avLst>
+          </a:prstGeom>
+          <a:solidFill>
+            <a:srgbClr val="FFFFFF"/>
+          </a:solidFill>
+          <a:ln w="12700">
+            <a:solidFill>
+              <a:srgbClr val="0D9488"/>
+            </a:solidFill>
+            <a:prstDash val="solid"/>
+          </a:ln>
+        </p:spPr>
+      </p:sp>
+      <p:sp>
+        <p:nvSpPr>
+          <p:cNvPr id="32" name="Text 30"/>
+          <p:cNvSpPr/>
+          <p:nvPr/>
+        </p:nvSpPr>
+        <p:spPr>
+          <a:xfrm>
+            <a:off x="6428232" y="3364992"/>
+            <a:ext cx="1645920" cy="475488"/>
+          </a:xfrm>
+          <a:prstGeom prst="rect">
+            <a:avLst/>
+          </a:prstGeom>
+          <a:noFill/>
+          <a:ln/>
+        </p:spPr>
+        <p:txBody>
+          <a:bodyPr wrap="square" lIns="0" tIns="0" rIns="0" bIns="0" rtlCol="0" anchor="ctr"/>
+          <a:lstStyle/>
+          <a:p>
+            <a:pPr algn="ctr" indent="0" marL="0">
+              <a:buNone/>
+            </a:pPr>
+            <a:r>
+              <a:rPr lang="en-US" sz="1400" b="1" dirty="0">
+                <a:solidFill>
+                  <a:srgbClr val="0D9488"/>
+                </a:solidFill>
+                <a:latin typeface="Trebuchet MS" pitchFamily="34" charset="0"/>
+                <a:ea typeface="Trebuchet MS" pitchFamily="34" charset="-122"/>
+                <a:cs typeface="Trebuchet MS" pitchFamily="34" charset="-120"/>
+              </a:rPr>
+              <a:t>ble</a:t>
+            </a:r>
+            <a:endParaRPr lang="en-US" sz="1400" dirty="0"/>
+          </a:p>
+        </p:txBody>
+      </p:sp>
+      <p:sp>
+        <p:nvSpPr>
+          <p:cNvPr id="33" name="Shape 31"/>
           <p:cNvSpPr/>
           <p:nvPr/>
         </p:nvSpPr>
@@ -25330,7 +26791,7 @@
       </p:sp>
       <p:sp>
         <p:nvSpPr>
-          <p:cNvPr id="31" name="Text 29"/>
+          <p:cNvPr id="34" name="Text 32"/>
           <p:cNvSpPr/>
           <p:nvPr/>
         </p:nvSpPr>
@@ -25369,7 +26830,7 @@
       </p:sp>
       <p:sp>
         <p:nvSpPr>
-          <p:cNvPr id="32" name="Shape 30"/>
+          <p:cNvPr id="35" name="Shape 33"/>
           <p:cNvSpPr/>
           <p:nvPr/>
         </p:nvSpPr>
@@ -25396,7 +26857,7 @@
       </p:sp>
       <p:sp>
         <p:nvSpPr>
-          <p:cNvPr id="33" name="Text 31"/>
+          <p:cNvPr id="36" name="Text 34"/>
           <p:cNvSpPr/>
           <p:nvPr/>
         </p:nvSpPr>
@@ -25719,7 +27180,7 @@
                 <a:ea typeface="Calibri" pitchFamily="34" charset="-122"/>
                 <a:cs typeface="Calibri" pitchFamily="34" charset="-120"/>
               </a:rPr>
-              <a:t>Word Labs  •  wordlabs.app  •  Root: 'pay' = give money owed</a:t>
+              <a:t>Word Labs  •  wordlabs.app  •  Root: 'pay' = to give money for something</a:t>
             </a:r>
             <a:endParaRPr lang="en-US" sz="800" dirty="0"/>
           </a:p>
@@ -25858,7 +27319,7 @@
                 <a:ea typeface="Trebuchet MS" pitchFamily="34" charset="-122"/>
                 <a:cs typeface="Trebuchet MS" pitchFamily="34" charset="-120"/>
               </a:rPr>
-              <a:t>repay</a:t>
+              <a:t>payable</a:t>
             </a:r>
             <a:endParaRPr lang="en-US" sz="2800" dirty="0"/>
           </a:p>
@@ -25947,11 +27408,11 @@
             </a:avLst>
           </a:prstGeom>
           <a:solidFill>
-            <a:srgbClr val="DDD6FE"/>
+            <a:srgbClr val="CCFBF1"/>
           </a:solidFill>
           <a:ln w="19050">
             <a:solidFill>
-              <a:srgbClr val="7C3AED"/>
+              <a:srgbClr val="0D9488"/>
             </a:solidFill>
             <a:prstDash val="solid"/>
           </a:ln>
@@ -25991,13 +27452,13 @@
             <a:r>
               <a:rPr lang="en-US" sz="1300" b="1" dirty="0">
                 <a:solidFill>
-                  <a:srgbClr val="4C1D95"/>
+                  <a:srgbClr val="0F766E"/>
                 </a:solidFill>
                 <a:latin typeface="Trebuchet MS" pitchFamily="34" charset="0"/>
                 <a:ea typeface="Trebuchet MS" pitchFamily="34" charset="-122"/>
                 <a:cs typeface="Trebuchet MS" pitchFamily="34" charset="-120"/>
               </a:rPr>
-              <a:t>re</a:t>
+              <a:t>pay</a:t>
             </a:r>
             <a:endParaRPr lang="en-US" sz="1300" dirty="0"/>
           </a:p>
@@ -26036,7 +27497,7 @@
                 <a:ea typeface="Calibri" pitchFamily="34" charset="-122"/>
                 <a:cs typeface="Calibri" pitchFamily="34" charset="-120"/>
               </a:rPr>
-              <a:t>again or back</a:t>
+              <a:t>to give money for something</a:t>
             </a:r>
             <a:endParaRPr lang="en-US" sz="850" dirty="0"/>
           </a:p>
@@ -26059,11 +27520,11 @@
             </a:avLst>
           </a:prstGeom>
           <a:solidFill>
-            <a:srgbClr val="CCFBF1"/>
+            <a:srgbClr val="FCE7F3"/>
           </a:solidFill>
           <a:ln w="19050">
             <a:solidFill>
-              <a:srgbClr val="0D9488"/>
+              <a:srgbClr val="DB2777"/>
             </a:solidFill>
             <a:prstDash val="solid"/>
           </a:ln>
@@ -26103,13 +27564,13 @@
             <a:r>
               <a:rPr lang="en-US" sz="1300" b="1" dirty="0">
                 <a:solidFill>
-                  <a:srgbClr val="0F766E"/>
+                  <a:srgbClr val="9D174D"/>
                 </a:solidFill>
                 <a:latin typeface="Trebuchet MS" pitchFamily="34" charset="0"/>
                 <a:ea typeface="Trebuchet MS" pitchFamily="34" charset="-122"/>
                 <a:cs typeface="Trebuchet MS" pitchFamily="34" charset="-120"/>
               </a:rPr>
-              <a:t>pay</a:t>
+              <a:t>able</a:t>
             </a:r>
             <a:endParaRPr lang="en-US" sz="1300" dirty="0"/>
           </a:p>
@@ -26148,7 +27609,7 @@
                 <a:ea typeface="Calibri" pitchFamily="34" charset="-122"/>
                 <a:cs typeface="Calibri" pitchFamily="34" charset="-120"/>
               </a:rPr>
-              <a:t>give money owed</a:t>
+              <a:t>able to</a:t>
             </a:r>
             <a:endParaRPr lang="en-US" sz="850" dirty="0"/>
           </a:p>
@@ -26255,7 +27716,7 @@
         </p:nvSpPr>
         <p:spPr>
           <a:xfrm>
-            <a:off x="2999232" y="3364992"/>
+            <a:off x="2313432" y="3364992"/>
             <a:ext cx="1645920" cy="475488"/>
           </a:xfrm>
           <a:prstGeom prst="rect">
@@ -26282,7 +27743,7 @@
         </p:nvSpPr>
         <p:spPr>
           <a:xfrm>
-            <a:off x="2999232" y="3364992"/>
+            <a:off x="2313432" y="3364992"/>
             <a:ext cx="1645920" cy="475488"/>
           </a:xfrm>
           <a:prstGeom prst="rect">
@@ -26307,7 +27768,7 @@
                 <a:ea typeface="Trebuchet MS" pitchFamily="34" charset="-122"/>
                 <a:cs typeface="Trebuchet MS" pitchFamily="34" charset="-120"/>
               </a:rPr>
-              <a:t>re</a:t>
+              <a:t>pay</a:t>
             </a:r>
             <a:endParaRPr lang="en-US" sz="1400" dirty="0"/>
           </a:p>
@@ -26321,8 +27782,8 @@
         </p:nvSpPr>
         <p:spPr>
           <a:xfrm>
-            <a:off x="4645152" y="3364992"/>
-            <a:ext cx="1097280" cy="475488"/>
+            <a:off x="3959352" y="3364992"/>
+            <a:ext cx="411480" cy="475488"/>
           </a:xfrm>
           <a:prstGeom prst="rect">
             <a:avLst/>
@@ -26360,7 +27821,7 @@
         </p:nvSpPr>
         <p:spPr>
           <a:xfrm>
-            <a:off x="5742432" y="3364992"/>
+            <a:off x="4370832" y="3364992"/>
             <a:ext cx="1645920" cy="475488"/>
           </a:xfrm>
           <a:prstGeom prst="rect">
@@ -26387,7 +27848,7 @@
         </p:nvSpPr>
         <p:spPr>
           <a:xfrm>
-            <a:off x="5742432" y="3364992"/>
+            <a:off x="4370832" y="3364992"/>
             <a:ext cx="1645920" cy="475488"/>
           </a:xfrm>
           <a:prstGeom prst="rect">
@@ -26412,7 +27873,7 @@
                 <a:ea typeface="Trebuchet MS" pitchFamily="34" charset="-122"/>
                 <a:cs typeface="Trebuchet MS" pitchFamily="34" charset="-120"/>
               </a:rPr>
-              <a:t>pay</a:t>
+              <a:t>a</a:t>
             </a:r>
             <a:endParaRPr lang="en-US" sz="1400" dirty="0"/>
           </a:p>
@@ -26420,7 +27881,112 @@
       </p:sp>
       <p:sp>
         <p:nvSpPr>
-          <p:cNvPr id="30" name="Shape 28"/>
+          <p:cNvPr id="30" name="Text 28"/>
+          <p:cNvSpPr/>
+          <p:nvPr/>
+        </p:nvSpPr>
+        <p:spPr>
+          <a:xfrm>
+            <a:off x="6016752" y="3364992"/>
+            <a:ext cx="411480" cy="475488"/>
+          </a:xfrm>
+          <a:prstGeom prst="rect">
+            <a:avLst/>
+          </a:prstGeom>
+          <a:noFill/>
+          <a:ln/>
+        </p:spPr>
+        <p:txBody>
+          <a:bodyPr wrap="square" lIns="0" tIns="0" rIns="0" bIns="0" rtlCol="0" anchor="ctr"/>
+          <a:lstStyle/>
+          <a:p>
+            <a:pPr algn="ctr" indent="0" marL="0">
+              <a:buNone/>
+            </a:pPr>
+            <a:r>
+              <a:rPr lang="en-US" sz="1600" b="1" dirty="0">
+                <a:solidFill>
+                  <a:srgbClr val="0D9488"/>
+                </a:solidFill>
+                <a:latin typeface="Trebuchet MS" pitchFamily="34" charset="0"/>
+                <a:ea typeface="Trebuchet MS" pitchFamily="34" charset="-122"/>
+                <a:cs typeface="Trebuchet MS" pitchFamily="34" charset="-120"/>
+              </a:rPr>
+              <a:t>·</a:t>
+            </a:r>
+            <a:endParaRPr lang="en-US" sz="1600" dirty="0"/>
+          </a:p>
+        </p:txBody>
+      </p:sp>
+      <p:sp>
+        <p:nvSpPr>
+          <p:cNvPr id="31" name="Shape 29"/>
+          <p:cNvSpPr/>
+          <p:nvPr/>
+        </p:nvSpPr>
+        <p:spPr>
+          <a:xfrm>
+            <a:off x="6428232" y="3364992"/>
+            <a:ext cx="1645920" cy="475488"/>
+          </a:xfrm>
+          <a:prstGeom prst="rect">
+            <a:avLst>
+              <a:gd name="adj" fmla="val 9615"/>
+            </a:avLst>
+          </a:prstGeom>
+          <a:solidFill>
+            <a:srgbClr val="FFFFFF"/>
+          </a:solidFill>
+          <a:ln w="12700">
+            <a:solidFill>
+              <a:srgbClr val="0D9488"/>
+            </a:solidFill>
+            <a:prstDash val="solid"/>
+          </a:ln>
+        </p:spPr>
+      </p:sp>
+      <p:sp>
+        <p:nvSpPr>
+          <p:cNvPr id="32" name="Text 30"/>
+          <p:cNvSpPr/>
+          <p:nvPr/>
+        </p:nvSpPr>
+        <p:spPr>
+          <a:xfrm>
+            <a:off x="6428232" y="3364992"/>
+            <a:ext cx="1645920" cy="475488"/>
+          </a:xfrm>
+          <a:prstGeom prst="rect">
+            <a:avLst/>
+          </a:prstGeom>
+          <a:noFill/>
+          <a:ln/>
+        </p:spPr>
+        <p:txBody>
+          <a:bodyPr wrap="square" lIns="0" tIns="0" rIns="0" bIns="0" rtlCol="0" anchor="ctr"/>
+          <a:lstStyle/>
+          <a:p>
+            <a:pPr algn="ctr" indent="0" marL="0">
+              <a:buNone/>
+            </a:pPr>
+            <a:r>
+              <a:rPr lang="en-US" sz="1400" b="1" dirty="0">
+                <a:solidFill>
+                  <a:srgbClr val="0D9488"/>
+                </a:solidFill>
+                <a:latin typeface="Trebuchet MS" pitchFamily="34" charset="0"/>
+                <a:ea typeface="Trebuchet MS" pitchFamily="34" charset="-122"/>
+                <a:cs typeface="Trebuchet MS" pitchFamily="34" charset="-120"/>
+              </a:rPr>
+              <a:t>ble</a:t>
+            </a:r>
+            <a:endParaRPr lang="en-US" sz="1400" dirty="0"/>
+          </a:p>
+        </p:txBody>
+      </p:sp>
+      <p:sp>
+        <p:nvSpPr>
+          <p:cNvPr id="33" name="Shape 31"/>
           <p:cNvSpPr/>
           <p:nvPr/>
         </p:nvSpPr>
@@ -26447,7 +28013,7 @@
       </p:sp>
       <p:sp>
         <p:nvSpPr>
-          <p:cNvPr id="31" name="Text 29"/>
+          <p:cNvPr id="34" name="Text 32"/>
           <p:cNvSpPr/>
           <p:nvPr/>
         </p:nvSpPr>
@@ -26486,7 +28052,7 @@
       </p:sp>
       <p:sp>
         <p:nvSpPr>
-          <p:cNvPr id="32" name="Shape 30"/>
+          <p:cNvPr id="35" name="Shape 33"/>
           <p:cNvSpPr/>
           <p:nvPr/>
         </p:nvSpPr>
@@ -26513,13 +28079,13 @@
       </p:sp>
       <p:sp>
         <p:nvSpPr>
-          <p:cNvPr id="33" name="Shape 31"/>
-          <p:cNvSpPr/>
-          <p:nvPr/>
-        </p:nvSpPr>
-        <p:spPr>
-          <a:xfrm>
-            <a:off x="2670048" y="4169664"/>
+          <p:cNvPr id="36" name="Shape 34"/>
+          <p:cNvSpPr/>
+          <p:nvPr/>
+        </p:nvSpPr>
+        <p:spPr>
+          <a:xfrm>
+            <a:off x="2427732" y="4169664"/>
             <a:ext cx="685800" cy="475488"/>
           </a:xfrm>
           <a:prstGeom prst="rect">
@@ -26540,13 +28106,13 @@
       </p:sp>
       <p:sp>
         <p:nvSpPr>
-          <p:cNvPr id="34" name="Text 32"/>
-          <p:cNvSpPr/>
-          <p:nvPr/>
-        </p:nvSpPr>
-        <p:spPr>
-          <a:xfrm>
-            <a:off x="2670048" y="4169664"/>
+          <p:cNvPr id="37" name="Text 35"/>
+          <p:cNvSpPr/>
+          <p:nvPr/>
+        </p:nvSpPr>
+        <p:spPr>
+          <a:xfrm>
+            <a:off x="2427732" y="4169664"/>
             <a:ext cx="685800" cy="475488"/>
           </a:xfrm>
           <a:prstGeom prst="rect">
@@ -26571,7 +28137,7 @@
                 <a:ea typeface="Trebuchet MS" pitchFamily="34" charset="-122"/>
                 <a:cs typeface="Trebuchet MS" pitchFamily="34" charset="-120"/>
               </a:rPr>
-              <a:t>r</a:t>
+              <a:t>p</a:t>
             </a:r>
             <a:endParaRPr lang="en-US" sz="900" dirty="0"/>
           </a:p>
@@ -26579,13 +28145,13 @@
       </p:sp>
       <p:sp>
         <p:nvSpPr>
-          <p:cNvPr id="35" name="Shape 33"/>
-          <p:cNvSpPr/>
-          <p:nvPr/>
-        </p:nvSpPr>
-        <p:spPr>
-          <a:xfrm>
-            <a:off x="4123944" y="4169664"/>
+          <p:cNvPr id="38" name="Shape 36"/>
+          <p:cNvSpPr/>
+          <p:nvPr/>
+        </p:nvSpPr>
+        <p:spPr>
+          <a:xfrm>
+            <a:off x="3639312" y="4169664"/>
             <a:ext cx="685800" cy="475488"/>
           </a:xfrm>
           <a:prstGeom prst="rect">
@@ -26606,13 +28172,13 @@
       </p:sp>
       <p:sp>
         <p:nvSpPr>
-          <p:cNvPr id="36" name="Text 34"/>
-          <p:cNvSpPr/>
-          <p:nvPr/>
-        </p:nvSpPr>
-        <p:spPr>
-          <a:xfrm>
-            <a:off x="4123944" y="4169664"/>
+          <p:cNvPr id="39" name="Text 37"/>
+          <p:cNvSpPr/>
+          <p:nvPr/>
+        </p:nvSpPr>
+        <p:spPr>
+          <a:xfrm>
+            <a:off x="3639312" y="4169664"/>
             <a:ext cx="685800" cy="475488"/>
           </a:xfrm>
           <a:prstGeom prst="rect">
@@ -26637,7 +28203,7 @@
                 <a:ea typeface="Trebuchet MS" pitchFamily="34" charset="-122"/>
                 <a:cs typeface="Trebuchet MS" pitchFamily="34" charset="-120"/>
               </a:rPr>
-              <a:t>e</a:t>
+              <a:t>ay</a:t>
             </a:r>
             <a:endParaRPr lang="en-US" sz="900" dirty="0"/>
           </a:p>
@@ -26645,13 +28211,13 @@
       </p:sp>
       <p:sp>
         <p:nvSpPr>
-          <p:cNvPr id="37" name="Shape 35"/>
-          <p:cNvSpPr/>
-          <p:nvPr/>
-        </p:nvSpPr>
-        <p:spPr>
-          <a:xfrm>
-            <a:off x="5577840" y="4169664"/>
+          <p:cNvPr id="40" name="Shape 38"/>
+          <p:cNvSpPr/>
+          <p:nvPr/>
+        </p:nvSpPr>
+        <p:spPr>
+          <a:xfrm>
+            <a:off x="4850892" y="4169664"/>
             <a:ext cx="685800" cy="475488"/>
           </a:xfrm>
           <a:prstGeom prst="rect">
@@ -26672,13 +28238,13 @@
       </p:sp>
       <p:sp>
         <p:nvSpPr>
-          <p:cNvPr id="38" name="Text 36"/>
-          <p:cNvSpPr/>
-          <p:nvPr/>
-        </p:nvSpPr>
-        <p:spPr>
-          <a:xfrm>
-            <a:off x="5577840" y="4169664"/>
+          <p:cNvPr id="41" name="Text 39"/>
+          <p:cNvSpPr/>
+          <p:nvPr/>
+        </p:nvSpPr>
+        <p:spPr>
+          <a:xfrm>
+            <a:off x="4850892" y="4169664"/>
             <a:ext cx="685800" cy="475488"/>
           </a:xfrm>
           <a:prstGeom prst="rect">
@@ -26703,7 +28269,7 @@
                 <a:ea typeface="Trebuchet MS" pitchFamily="34" charset="-122"/>
                 <a:cs typeface="Trebuchet MS" pitchFamily="34" charset="-120"/>
               </a:rPr>
-              <a:t>p</a:t>
+              <a:t>a</a:t>
             </a:r>
             <a:endParaRPr lang="en-US" sz="900" dirty="0"/>
           </a:p>
@@ -26711,13 +28277,13 @@
       </p:sp>
       <p:sp>
         <p:nvSpPr>
-          <p:cNvPr id="39" name="Shape 37"/>
-          <p:cNvSpPr/>
-          <p:nvPr/>
-        </p:nvSpPr>
-        <p:spPr>
-          <a:xfrm>
-            <a:off x="7031736" y="4169664"/>
+          <p:cNvPr id="42" name="Shape 40"/>
+          <p:cNvSpPr/>
+          <p:nvPr/>
+        </p:nvSpPr>
+        <p:spPr>
+          <a:xfrm>
+            <a:off x="6062472" y="4169664"/>
             <a:ext cx="685800" cy="475488"/>
           </a:xfrm>
           <a:prstGeom prst="rect">
@@ -26738,13 +28304,13 @@
       </p:sp>
       <p:sp>
         <p:nvSpPr>
-          <p:cNvPr id="40" name="Text 38"/>
-          <p:cNvSpPr/>
-          <p:nvPr/>
-        </p:nvSpPr>
-        <p:spPr>
-          <a:xfrm>
-            <a:off x="7031736" y="4169664"/>
+          <p:cNvPr id="43" name="Text 41"/>
+          <p:cNvSpPr/>
+          <p:nvPr/>
+        </p:nvSpPr>
+        <p:spPr>
+          <a:xfrm>
+            <a:off x="6062472" y="4169664"/>
             <a:ext cx="685800" cy="475488"/>
           </a:xfrm>
           <a:prstGeom prst="rect">
@@ -26769,7 +28335,73 @@
                 <a:ea typeface="Trebuchet MS" pitchFamily="34" charset="-122"/>
                 <a:cs typeface="Trebuchet MS" pitchFamily="34" charset="-120"/>
               </a:rPr>
-              <a:t>ay</a:t>
+              <a:t>b</a:t>
+            </a:r>
+            <a:endParaRPr lang="en-US" sz="900" dirty="0"/>
+          </a:p>
+        </p:txBody>
+      </p:sp>
+      <p:sp>
+        <p:nvSpPr>
+          <p:cNvPr id="44" name="Shape 42"/>
+          <p:cNvSpPr/>
+          <p:nvPr/>
+        </p:nvSpPr>
+        <p:spPr>
+          <a:xfrm>
+            <a:off x="7274052" y="4169664"/>
+            <a:ext cx="685800" cy="475488"/>
+          </a:xfrm>
+          <a:prstGeom prst="rect">
+            <a:avLst>
+              <a:gd name="adj" fmla="val 7692"/>
+            </a:avLst>
+          </a:prstGeom>
+          <a:solidFill>
+            <a:srgbClr val="FFFFFF"/>
+          </a:solidFill>
+          <a:ln w="12700">
+            <a:solidFill>
+              <a:srgbClr val="DB2777"/>
+            </a:solidFill>
+            <a:prstDash val="solid"/>
+          </a:ln>
+        </p:spPr>
+      </p:sp>
+      <p:sp>
+        <p:nvSpPr>
+          <p:cNvPr id="45" name="Text 43"/>
+          <p:cNvSpPr/>
+          <p:nvPr/>
+        </p:nvSpPr>
+        <p:spPr>
+          <a:xfrm>
+            <a:off x="7274052" y="4169664"/>
+            <a:ext cx="685800" cy="475488"/>
+          </a:xfrm>
+          <a:prstGeom prst="rect">
+            <a:avLst/>
+          </a:prstGeom>
+          <a:noFill/>
+          <a:ln/>
+        </p:spPr>
+        <p:txBody>
+          <a:bodyPr wrap="square" lIns="0" tIns="0" rIns="0" bIns="0" rtlCol="0" anchor="ctr"/>
+          <a:lstStyle/>
+          <a:p>
+            <a:pPr algn="ctr" indent="0" marL="0">
+              <a:buNone/>
+            </a:pPr>
+            <a:r>
+              <a:rPr lang="en-US" sz="900" b="1" dirty="0">
+                <a:solidFill>
+                  <a:srgbClr val="9D174D"/>
+                </a:solidFill>
+                <a:latin typeface="Trebuchet MS" pitchFamily="34" charset="0"/>
+                <a:ea typeface="Trebuchet MS" pitchFamily="34" charset="-122"/>
+                <a:cs typeface="Trebuchet MS" pitchFamily="34" charset="-120"/>
+              </a:rPr>
+              <a:t>le</a:t>
             </a:r>
             <a:endParaRPr lang="en-US" sz="900" dirty="0"/>
           </a:p>
@@ -27061,7 +28693,7 @@
                 <a:ea typeface="Calibri" pitchFamily="34" charset="-122"/>
                 <a:cs typeface="Calibri" pitchFamily="34" charset="-120"/>
               </a:rPr>
-              <a:t>Word Labs  •  wordlabs.app  •  Root: 'pay' = give money owed</a:t>
+              <a:t>Word Labs  •  wordlabs.app  •  Root: 'pay' = to give money for something</a:t>
             </a:r>
             <a:endParaRPr lang="en-US" sz="800" dirty="0"/>
           </a:p>
@@ -27888,7 +29520,7 @@
                 <a:ea typeface="Calibri" pitchFamily="34" charset="-122"/>
                 <a:cs typeface="Calibri" pitchFamily="34" charset="-120"/>
               </a:rPr>
-              <a:t>Word Labs  •  wordlabs.app  •  Root: 'pay' = give money owed</a:t>
+              <a:t>Word Labs  •  wordlabs.app  •  Root: 'pay' = to give money for something</a:t>
             </a:r>
             <a:endParaRPr lang="en-US" sz="800" dirty="0"/>
           </a:p>
@@ -28205,7 +29837,7 @@
                 <a:ea typeface="Calibri" pitchFamily="34" charset="-122"/>
                 <a:cs typeface="Calibri" pitchFamily="34" charset="-120"/>
               </a:rPr>
-              <a:t>below or less than</a:t>
+              <a:t>below</a:t>
             </a:r>
             <a:endParaRPr lang="en-US" sz="850" dirty="0"/>
           </a:p>
@@ -28317,7 +29949,7 @@
                 <a:ea typeface="Calibri" pitchFamily="34" charset="-122"/>
                 <a:cs typeface="Calibri" pitchFamily="34" charset="-120"/>
               </a:rPr>
-              <a:t>give money owed</a:t>
+              <a:t>to give money for something</a:t>
             </a:r>
             <a:endParaRPr lang="en-US" sz="850" dirty="0"/>
           </a:p>
@@ -28873,7 +30505,7 @@
                 <a:ea typeface="Calibri" pitchFamily="34" charset="-122"/>
                 <a:cs typeface="Calibri" pitchFamily="34" charset="-120"/>
               </a:rPr>
-              <a:t>Word Labs  •  wordlabs.app  •  Root: 'pay' = give money owed</a:t>
+              <a:t>Word Labs  •  wordlabs.app  •  Root: 'pay' = to give money for something</a:t>
             </a:r>
             <a:endParaRPr lang="en-US" sz="800" dirty="0"/>
           </a:p>
@@ -29190,7 +30822,7 @@
                 <a:ea typeface="Calibri" pitchFamily="34" charset="-122"/>
                 <a:cs typeface="Calibri" pitchFamily="34" charset="-120"/>
               </a:rPr>
-              <a:t>below or less than</a:t>
+              <a:t>below</a:t>
             </a:r>
             <a:endParaRPr lang="en-US" sz="850" dirty="0"/>
           </a:p>
@@ -29302,7 +30934,7 @@
                 <a:ea typeface="Calibri" pitchFamily="34" charset="-122"/>
                 <a:cs typeface="Calibri" pitchFamily="34" charset="-120"/>
               </a:rPr>
-              <a:t>give money owed</a:t>
+              <a:t>to give money for something</a:t>
             </a:r>
             <a:endParaRPr lang="en-US" sz="850" dirty="0"/>
           </a:p>
@@ -30095,7 +31727,7 @@
                 <a:ea typeface="Calibri" pitchFamily="34" charset="-122"/>
                 <a:cs typeface="Calibri" pitchFamily="34" charset="-120"/>
               </a:rPr>
-              <a:t>Word Labs  •  wordlabs.app  •  Root: 'pay' = give money owed</a:t>
+              <a:t>Word Labs  •  wordlabs.app  •  Root: 'pay' = to give money for something</a:t>
             </a:r>
             <a:endParaRPr lang="en-US" sz="800" dirty="0"/>
           </a:p>
@@ -30412,7 +32044,7 @@
                 <a:ea typeface="Calibri" pitchFamily="34" charset="-122"/>
                 <a:cs typeface="Calibri" pitchFamily="34" charset="-120"/>
               </a:rPr>
-              <a:t>below or less than</a:t>
+              <a:t>below</a:t>
             </a:r>
             <a:endParaRPr lang="en-US" sz="850" dirty="0"/>
           </a:p>
@@ -30524,7 +32156,7 @@
                 <a:ea typeface="Calibri" pitchFamily="34" charset="-122"/>
                 <a:cs typeface="Calibri" pitchFamily="34" charset="-120"/>
               </a:rPr>
-              <a:t>give money owed</a:t>
+              <a:t>to give money for something</a:t>
             </a:r>
             <a:endParaRPr lang="en-US" sz="850" dirty="0"/>
           </a:p>
@@ -31674,7 +33306,7 @@
                 <a:ea typeface="Calibri" pitchFamily="34" charset="-122"/>
                 <a:cs typeface="Calibri" pitchFamily="34" charset="-120"/>
               </a:rPr>
-              <a:t>Word Labs  •  wordlabs.app  •  Root: 'pay' = give money owed</a:t>
+              <a:t>Word Labs  •  wordlabs.app  •  Root: 'pay' = to give money for something</a:t>
             </a:r>
             <a:endParaRPr lang="en-US" sz="800" dirty="0"/>
           </a:p>
@@ -32843,7 +34475,7 @@
                 <a:ea typeface="Calibri" pitchFamily="34" charset="-122"/>
                 <a:cs typeface="Calibri" pitchFamily="34" charset="-120"/>
               </a:rPr>
-              <a:t>Word Labs  •  wordlabs.app  •  Root: 'pay' = give money owed</a:t>
+              <a:t>Word Labs  •  wordlabs.app  •  Root: 'pay' = to give money for something</a:t>
             </a:r>
             <a:endParaRPr lang="en-US" sz="800" dirty="0"/>
           </a:p>
@@ -33144,7 +34776,7 @@
                 <a:ea typeface="Trebuchet MS" pitchFamily="34" charset="-122"/>
                 <a:cs typeface="Trebuchet MS" pitchFamily="34" charset="-120"/>
               </a:rPr>
-              <a:t>re-</a:t>
+              <a:t>over-</a:t>
             </a:r>
             <a:endParaRPr lang="en-US" sz="1300" dirty="0"/>
           </a:p>
@@ -33272,7 +34904,7 @@
                 <a:ea typeface="Trebuchet MS" pitchFamily="34" charset="-122"/>
                 <a:cs typeface="Trebuchet MS" pitchFamily="34" charset="-120"/>
               </a:rPr>
-              <a:t>-ment</a:t>
+              <a:t>-able</a:t>
             </a:r>
             <a:endParaRPr lang="en-US" sz="1300" dirty="0"/>
           </a:p>
@@ -33425,7 +35057,7 @@
                 <a:ea typeface="Trebuchet MS" pitchFamily="34" charset="-122"/>
                 <a:cs typeface="Trebuchet MS" pitchFamily="34" charset="-120"/>
               </a:rPr>
-              <a:t>-able</a:t>
+              <a:t>-er</a:t>
             </a:r>
             <a:endParaRPr lang="en-US" sz="1300" dirty="0"/>
           </a:p>
@@ -33489,7 +35121,7 @@
                 <a:ea typeface="Trebuchet MS" pitchFamily="34" charset="-122"/>
                 <a:cs typeface="Trebuchet MS" pitchFamily="34" charset="-120"/>
               </a:rPr>
-              <a:t>non-</a:t>
+              <a:t>re-</a:t>
             </a:r>
             <a:endParaRPr lang="en-US" sz="1300" dirty="0"/>
           </a:p>
@@ -33578,7 +35210,7 @@
                 <a:ea typeface="Trebuchet MS" pitchFamily="34" charset="-122"/>
                 <a:cs typeface="Trebuchet MS" pitchFamily="34" charset="-120"/>
               </a:rPr>
-              <a:t>-ee</a:t>
+              <a:t>-ing</a:t>
             </a:r>
             <a:endParaRPr lang="en-US" sz="1300" dirty="0"/>
           </a:p>
@@ -33642,7 +35274,7 @@
                 <a:ea typeface="Trebuchet MS" pitchFamily="34" charset="-122"/>
                 <a:cs typeface="Trebuchet MS" pitchFamily="34" charset="-120"/>
               </a:rPr>
-              <a:t>un-</a:t>
+              <a:t>under-</a:t>
             </a:r>
             <a:endParaRPr lang="en-US" sz="1300" dirty="0"/>
           </a:p>
@@ -33731,7 +35363,7 @@
                 <a:ea typeface="Trebuchet MS" pitchFamily="34" charset="-122"/>
                 <a:cs typeface="Trebuchet MS" pitchFamily="34" charset="-120"/>
               </a:rPr>
-              <a:t>-er</a:t>
+              <a:t>-ment</a:t>
             </a:r>
             <a:endParaRPr lang="en-US" sz="1300" dirty="0"/>
           </a:p>
@@ -33752,7 +35384,7 @@
             <a:avLst/>
           </a:prstGeom>
           <a:solidFill>
-            <a:srgbClr val="DDD6FE"/>
+            <a:srgbClr val="F8FAFC"/>
           </a:solidFill>
           <a:ln w="12700">
             <a:solidFill>
@@ -33764,14 +35396,64 @@
       </p:sp>
       <p:sp>
         <p:nvSpPr>
-          <p:cNvPr id="39" name="Text 37"/>
-          <p:cNvSpPr/>
-          <p:nvPr/>
-        </p:nvSpPr>
-        <p:spPr>
-          <a:xfrm>
-            <a:off x="365760" y="3246120"/>
-            <a:ext cx="2468880" cy="402336"/>
+          <p:cNvPr id="39" name="Shape 37"/>
+          <p:cNvSpPr/>
+          <p:nvPr/>
+        </p:nvSpPr>
+        <p:spPr>
+          <a:xfrm>
+            <a:off x="2971800" y="3246120"/>
+            <a:ext cx="2834640" cy="402336"/>
+          </a:xfrm>
+          <a:prstGeom prst="rect">
+            <a:avLst/>
+          </a:prstGeom>
+          <a:solidFill>
+            <a:srgbClr val="F8FAFC"/>
+          </a:solidFill>
+          <a:ln w="12700">
+            <a:solidFill>
+              <a:srgbClr val="E2E8F0"/>
+            </a:solidFill>
+            <a:prstDash val="solid"/>
+          </a:ln>
+        </p:spPr>
+      </p:sp>
+      <p:sp>
+        <p:nvSpPr>
+          <p:cNvPr id="40" name="Shape 38"/>
+          <p:cNvSpPr/>
+          <p:nvPr/>
+        </p:nvSpPr>
+        <p:spPr>
+          <a:xfrm>
+            <a:off x="5943600" y="3246120"/>
+            <a:ext cx="2834640" cy="402336"/>
+          </a:xfrm>
+          <a:prstGeom prst="rect">
+            <a:avLst/>
+          </a:prstGeom>
+          <a:solidFill>
+            <a:srgbClr val="FCE7F3"/>
+          </a:solidFill>
+          <a:ln w="12700">
+            <a:solidFill>
+              <a:srgbClr val="E2E8F0"/>
+            </a:solidFill>
+            <a:prstDash val="solid"/>
+          </a:ln>
+        </p:spPr>
+      </p:sp>
+      <p:sp>
+        <p:nvSpPr>
+          <p:cNvPr id="41" name="Text 39"/>
+          <p:cNvSpPr/>
+          <p:nvPr/>
+        </p:nvSpPr>
+        <p:spPr>
+          <a:xfrm>
+            <a:off x="5943600" y="3246120"/>
+            <a:ext cx="2834640" cy="402336"/>
           </a:xfrm>
           <a:prstGeom prst="rect">
             <a:avLst/>
@@ -33789,13 +35471,13 @@
             <a:r>
               <a:rPr lang="en-US" sz="1300" b="1" dirty="0">
                 <a:solidFill>
-                  <a:srgbClr val="4C1D95"/>
+                  <a:srgbClr val="9D174D"/>
                 </a:solidFill>
                 <a:latin typeface="Trebuchet MS" pitchFamily="34" charset="0"/>
                 <a:ea typeface="Trebuchet MS" pitchFamily="34" charset="-122"/>
                 <a:cs typeface="Trebuchet MS" pitchFamily="34" charset="-120"/>
               </a:rPr>
-              <a:t>over-</a:t>
+              <a:t>-s</a:t>
             </a:r>
             <a:endParaRPr lang="en-US" sz="1300" dirty="0"/>
           </a:p>
@@ -33803,127 +35485,104 @@
       </p:sp>
       <p:sp>
         <p:nvSpPr>
-          <p:cNvPr id="40" name="Shape 38"/>
-          <p:cNvSpPr/>
-          <p:nvPr/>
-        </p:nvSpPr>
-        <p:spPr>
-          <a:xfrm>
-            <a:off x="2971800" y="3246120"/>
-            <a:ext cx="2834640" cy="402336"/>
-          </a:xfrm>
-          <a:prstGeom prst="rect">
-            <a:avLst/>
-          </a:prstGeom>
-          <a:solidFill>
-            <a:srgbClr val="F8FAFC"/>
-          </a:solidFill>
-          <a:ln w="12700">
-            <a:solidFill>
-              <a:srgbClr val="E2E8F0"/>
-            </a:solidFill>
-            <a:prstDash val="solid"/>
-          </a:ln>
-        </p:spPr>
-      </p:sp>
-      <p:sp>
-        <p:nvSpPr>
-          <p:cNvPr id="41" name="Shape 39"/>
-          <p:cNvSpPr/>
-          <p:nvPr/>
-        </p:nvSpPr>
-        <p:spPr>
-          <a:xfrm>
-            <a:off x="5943600" y="3246120"/>
-            <a:ext cx="2834640" cy="402336"/>
-          </a:xfrm>
-          <a:prstGeom prst="rect">
-            <a:avLst/>
-          </a:prstGeom>
-          <a:solidFill>
-            <a:srgbClr val="FCE7F3"/>
-          </a:solidFill>
-          <a:ln w="12700">
-            <a:solidFill>
-              <a:srgbClr val="E2E8F0"/>
-            </a:solidFill>
-            <a:prstDash val="solid"/>
-          </a:ln>
-        </p:spPr>
-      </p:sp>
-      <p:sp>
-        <p:nvSpPr>
           <p:cNvPr id="42" name="Text 40"/>
           <p:cNvSpPr/>
           <p:nvPr/>
         </p:nvSpPr>
         <p:spPr>
           <a:xfrm>
-            <a:off x="5943600" y="3246120"/>
-            <a:ext cx="2834640" cy="402336"/>
-          </a:xfrm>
-          <a:prstGeom prst="rect">
-            <a:avLst/>
-          </a:prstGeom>
-          <a:noFill/>
-          <a:ln/>
-        </p:spPr>
-        <p:txBody>
-          <a:bodyPr wrap="square" lIns="0" tIns="0" rIns="0" bIns="0" rtlCol="0" anchor="ctr"/>
-          <a:lstStyle/>
-          <a:p>
-            <a:pPr algn="ctr" indent="0" marL="0">
-              <a:buNone/>
-            </a:pPr>
-            <a:r>
-              <a:rPr lang="en-US" sz="1300" b="1" dirty="0">
-                <a:solidFill>
-                  <a:srgbClr val="9D174D"/>
+            <a:off x="365760" y="3611880"/>
+            <a:ext cx="1828800" cy="347472"/>
+          </a:xfrm>
+          <a:prstGeom prst="rect">
+            <a:avLst/>
+          </a:prstGeom>
+          <a:noFill/>
+          <a:ln/>
+        </p:spPr>
+        <p:txBody>
+          <a:bodyPr wrap="square" lIns="0" tIns="0" rIns="0" bIns="0" rtlCol="0" anchor="ctr"/>
+          <a:lstStyle/>
+          <a:p>
+            <a:pPr algn="l" indent="0" marL="0">
+              <a:buNone/>
+            </a:pPr>
+            <a:r>
+              <a:rPr lang="en-US" sz="1200" b="1" dirty="0">
+                <a:solidFill>
+                  <a:srgbClr val="0F172A"/>
                 </a:solidFill>
                 <a:latin typeface="Trebuchet MS" pitchFamily="34" charset="0"/>
                 <a:ea typeface="Trebuchet MS" pitchFamily="34" charset="-122"/>
                 <a:cs typeface="Trebuchet MS" pitchFamily="34" charset="-120"/>
               </a:rPr>
-              <a:t>-day</a:t>
-            </a:r>
-            <a:endParaRPr lang="en-US" sz="1300" dirty="0"/>
-          </a:p>
-        </p:txBody>
-      </p:sp>
-      <p:sp>
-        <p:nvSpPr>
-          <p:cNvPr id="43" name="Text 41"/>
-          <p:cNvSpPr/>
-          <p:nvPr/>
-        </p:nvSpPr>
-        <p:spPr>
-          <a:xfrm>
-            <a:off x="365760" y="3611880"/>
-            <a:ext cx="1828800" cy="347472"/>
-          </a:xfrm>
-          <a:prstGeom prst="rect">
-            <a:avLst/>
-          </a:prstGeom>
-          <a:noFill/>
-          <a:ln/>
-        </p:spPr>
-        <p:txBody>
-          <a:bodyPr wrap="square" lIns="0" tIns="0" rIns="0" bIns="0" rtlCol="0" anchor="ctr"/>
-          <a:lstStyle/>
-          <a:p>
-            <a:pPr algn="l" indent="0" marL="0">
+              <a:t>Sample words:</a:t>
+            </a:r>
+            <a:endParaRPr lang="en-US" sz="1200" dirty="0"/>
+          </a:p>
+        </p:txBody>
+      </p:sp>
+      <p:sp>
+        <p:nvSpPr>
+          <p:cNvPr id="43" name="Shape 41"/>
+          <p:cNvSpPr/>
+          <p:nvPr/>
+        </p:nvSpPr>
+        <p:spPr>
+          <a:xfrm>
+            <a:off x="365760" y="4023360"/>
+            <a:ext cx="2011680" cy="402336"/>
+          </a:xfrm>
+          <a:prstGeom prst="rect">
+            <a:avLst>
+              <a:gd name="adj" fmla="val 13636"/>
+            </a:avLst>
+          </a:prstGeom>
+          <a:solidFill>
+            <a:srgbClr val="EEF2FF"/>
+          </a:solidFill>
+          <a:ln w="12700">
+            <a:solidFill>
+              <a:srgbClr val="6366F1"/>
+            </a:solidFill>
+            <a:prstDash val="solid"/>
+          </a:ln>
+        </p:spPr>
+      </p:sp>
+      <p:sp>
+        <p:nvSpPr>
+          <p:cNvPr id="44" name="Text 42"/>
+          <p:cNvSpPr/>
+          <p:nvPr/>
+        </p:nvSpPr>
+        <p:spPr>
+          <a:xfrm>
+            <a:off x="365760" y="4023360"/>
+            <a:ext cx="2011680" cy="402336"/>
+          </a:xfrm>
+          <a:prstGeom prst="rect">
+            <a:avLst/>
+          </a:prstGeom>
+          <a:noFill/>
+          <a:ln/>
+        </p:spPr>
+        <p:txBody>
+          <a:bodyPr wrap="square" lIns="0" tIns="0" rIns="0" bIns="0" rtlCol="0" anchor="ctr"/>
+          <a:lstStyle/>
+          <a:p>
+            <a:pPr algn="ctr" indent="0" marL="0">
               <a:buNone/>
             </a:pPr>
             <a:r>
               <a:rPr lang="en-US" sz="1200" b="1" dirty="0">
                 <a:solidFill>
-                  <a:srgbClr val="0F172A"/>
+                  <a:srgbClr val="4338CA"/>
                 </a:solidFill>
                 <a:latin typeface="Trebuchet MS" pitchFamily="34" charset="0"/>
                 <a:ea typeface="Trebuchet MS" pitchFamily="34" charset="-122"/>
                 <a:cs typeface="Trebuchet MS" pitchFamily="34" charset="-120"/>
               </a:rPr>
-              <a:t>Sample words:</a:t>
+              <a:t>pay</a:t>
             </a:r>
             <a:endParaRPr lang="en-US" sz="1200" dirty="0"/>
           </a:p>
@@ -33931,13 +35590,13 @@
       </p:sp>
       <p:sp>
         <p:nvSpPr>
-          <p:cNvPr id="44" name="Shape 42"/>
-          <p:cNvSpPr/>
-          <p:nvPr/>
-        </p:nvSpPr>
-        <p:spPr>
-          <a:xfrm>
-            <a:off x="365760" y="4023360"/>
+          <p:cNvPr id="45" name="Shape 43"/>
+          <p:cNvSpPr/>
+          <p:nvPr/>
+        </p:nvSpPr>
+        <p:spPr>
+          <a:xfrm>
+            <a:off x="2542032" y="4023360"/>
             <a:ext cx="2011680" cy="402336"/>
           </a:xfrm>
           <a:prstGeom prst="rect">
@@ -33958,13 +35617,13 @@
       </p:sp>
       <p:sp>
         <p:nvSpPr>
-          <p:cNvPr id="45" name="Text 43"/>
-          <p:cNvSpPr/>
-          <p:nvPr/>
-        </p:nvSpPr>
-        <p:spPr>
-          <a:xfrm>
-            <a:off x="365760" y="4023360"/>
+          <p:cNvPr id="46" name="Text 44"/>
+          <p:cNvSpPr/>
+          <p:nvPr/>
+        </p:nvSpPr>
+        <p:spPr>
+          <a:xfrm>
+            <a:off x="2542032" y="4023360"/>
             <a:ext cx="2011680" cy="402336"/>
           </a:xfrm>
           <a:prstGeom prst="rect">
@@ -33989,7 +35648,7 @@
                 <a:ea typeface="Trebuchet MS" pitchFamily="34" charset="-122"/>
                 <a:cs typeface="Trebuchet MS" pitchFamily="34" charset="-120"/>
               </a:rPr>
-              <a:t>payment</a:t>
+              <a:t>pays</a:t>
             </a:r>
             <a:endParaRPr lang="en-US" sz="1200" dirty="0"/>
           </a:p>
@@ -33997,13 +35656,13 @@
       </p:sp>
       <p:sp>
         <p:nvSpPr>
-          <p:cNvPr id="46" name="Shape 44"/>
-          <p:cNvSpPr/>
-          <p:nvPr/>
-        </p:nvSpPr>
-        <p:spPr>
-          <a:xfrm>
-            <a:off x="2542032" y="4023360"/>
+          <p:cNvPr id="47" name="Shape 45"/>
+          <p:cNvSpPr/>
+          <p:nvPr/>
+        </p:nvSpPr>
+        <p:spPr>
+          <a:xfrm>
+            <a:off x="4718304" y="4023360"/>
             <a:ext cx="2011680" cy="402336"/>
           </a:xfrm>
           <a:prstGeom prst="rect">
@@ -34024,13 +35683,13 @@
       </p:sp>
       <p:sp>
         <p:nvSpPr>
-          <p:cNvPr id="47" name="Text 45"/>
-          <p:cNvSpPr/>
-          <p:nvPr/>
-        </p:nvSpPr>
-        <p:spPr>
-          <a:xfrm>
-            <a:off x="2542032" y="4023360"/>
+          <p:cNvPr id="48" name="Text 46"/>
+          <p:cNvSpPr/>
+          <p:nvPr/>
+        </p:nvSpPr>
+        <p:spPr>
+          <a:xfrm>
+            <a:off x="4718304" y="4023360"/>
             <a:ext cx="2011680" cy="402336"/>
           </a:xfrm>
           <a:prstGeom prst="rect">
@@ -34055,7 +35714,7 @@
                 <a:ea typeface="Trebuchet MS" pitchFamily="34" charset="-122"/>
                 <a:cs typeface="Trebuchet MS" pitchFamily="34" charset="-120"/>
               </a:rPr>
-              <a:t>repay</a:t>
+              <a:t>payer</a:t>
             </a:r>
             <a:endParaRPr lang="en-US" sz="1200" dirty="0"/>
           </a:p>
@@ -34063,13 +35722,13 @@
       </p:sp>
       <p:sp>
         <p:nvSpPr>
-          <p:cNvPr id="48" name="Shape 46"/>
-          <p:cNvSpPr/>
-          <p:nvPr/>
-        </p:nvSpPr>
-        <p:spPr>
-          <a:xfrm>
-            <a:off x="4718304" y="4023360"/>
+          <p:cNvPr id="49" name="Shape 47"/>
+          <p:cNvSpPr/>
+          <p:nvPr/>
+        </p:nvSpPr>
+        <p:spPr>
+          <a:xfrm>
+            <a:off x="6894576" y="4023360"/>
             <a:ext cx="2011680" cy="402336"/>
           </a:xfrm>
           <a:prstGeom prst="rect">
@@ -34090,13 +35749,13 @@
       </p:sp>
       <p:sp>
         <p:nvSpPr>
-          <p:cNvPr id="49" name="Text 47"/>
-          <p:cNvSpPr/>
-          <p:nvPr/>
-        </p:nvSpPr>
-        <p:spPr>
-          <a:xfrm>
-            <a:off x="4718304" y="4023360"/>
+          <p:cNvPr id="50" name="Text 48"/>
+          <p:cNvSpPr/>
+          <p:nvPr/>
+        </p:nvSpPr>
+        <p:spPr>
+          <a:xfrm>
+            <a:off x="6894576" y="4023360"/>
             <a:ext cx="2011680" cy="402336"/>
           </a:xfrm>
           <a:prstGeom prst="rect">
@@ -34121,7 +35780,7 @@
                 <a:ea typeface="Trebuchet MS" pitchFamily="34" charset="-122"/>
                 <a:cs typeface="Trebuchet MS" pitchFamily="34" charset="-120"/>
               </a:rPr>
-              <a:t>prepay</a:t>
+              <a:t>repay</a:t>
             </a:r>
             <a:endParaRPr lang="en-US" sz="1200" dirty="0"/>
           </a:p>
@@ -34129,13 +35788,13 @@
       </p:sp>
       <p:sp>
         <p:nvSpPr>
-          <p:cNvPr id="50" name="Shape 48"/>
-          <p:cNvSpPr/>
-          <p:nvPr/>
-        </p:nvSpPr>
-        <p:spPr>
-          <a:xfrm>
-            <a:off x="6894576" y="4023360"/>
+          <p:cNvPr id="51" name="Shape 49"/>
+          <p:cNvSpPr/>
+          <p:nvPr/>
+        </p:nvSpPr>
+        <p:spPr>
+          <a:xfrm>
+            <a:off x="365760" y="4498848"/>
             <a:ext cx="2011680" cy="402336"/>
           </a:xfrm>
           <a:prstGeom prst="rect">
@@ -34156,13 +35815,13 @@
       </p:sp>
       <p:sp>
         <p:nvSpPr>
-          <p:cNvPr id="51" name="Text 49"/>
-          <p:cNvSpPr/>
-          <p:nvPr/>
-        </p:nvSpPr>
-        <p:spPr>
-          <a:xfrm>
-            <a:off x="6894576" y="4023360"/>
+          <p:cNvPr id="52" name="Text 50"/>
+          <p:cNvSpPr/>
+          <p:nvPr/>
+        </p:nvSpPr>
+        <p:spPr>
+          <a:xfrm>
+            <a:off x="365760" y="4498848"/>
             <a:ext cx="2011680" cy="402336"/>
           </a:xfrm>
           <a:prstGeom prst="rect">
@@ -34187,7 +35846,7 @@
                 <a:ea typeface="Trebuchet MS" pitchFamily="34" charset="-122"/>
                 <a:cs typeface="Trebuchet MS" pitchFamily="34" charset="-120"/>
               </a:rPr>
-              <a:t>payable</a:t>
+              <a:t>payers</a:t>
             </a:r>
             <a:endParaRPr lang="en-US" sz="1200" dirty="0"/>
           </a:p>
@@ -34195,13 +35854,13 @@
       </p:sp>
       <p:sp>
         <p:nvSpPr>
-          <p:cNvPr id="52" name="Shape 50"/>
-          <p:cNvSpPr/>
-          <p:nvPr/>
-        </p:nvSpPr>
-        <p:spPr>
-          <a:xfrm>
-            <a:off x="365760" y="4498848"/>
+          <p:cNvPr id="53" name="Shape 51"/>
+          <p:cNvSpPr/>
+          <p:nvPr/>
+        </p:nvSpPr>
+        <p:spPr>
+          <a:xfrm>
+            <a:off x="2542032" y="4498848"/>
             <a:ext cx="2011680" cy="402336"/>
           </a:xfrm>
           <a:prstGeom prst="rect">
@@ -34222,13 +35881,13 @@
       </p:sp>
       <p:sp>
         <p:nvSpPr>
-          <p:cNvPr id="53" name="Text 51"/>
-          <p:cNvSpPr/>
-          <p:nvPr/>
-        </p:nvSpPr>
-        <p:spPr>
-          <a:xfrm>
-            <a:off x="365760" y="4498848"/>
+          <p:cNvPr id="54" name="Text 52"/>
+          <p:cNvSpPr/>
+          <p:nvPr/>
+        </p:nvSpPr>
+        <p:spPr>
+          <a:xfrm>
+            <a:off x="2542032" y="4498848"/>
             <a:ext cx="2011680" cy="402336"/>
           </a:xfrm>
           <a:prstGeom prst="rect">
@@ -34253,7 +35912,7 @@
                 <a:ea typeface="Trebuchet MS" pitchFamily="34" charset="-122"/>
                 <a:cs typeface="Trebuchet MS" pitchFamily="34" charset="-120"/>
               </a:rPr>
-              <a:t>overpay</a:t>
+              <a:t>paying</a:t>
             </a:r>
             <a:endParaRPr lang="en-US" sz="1200" dirty="0"/>
           </a:p>
@@ -34261,13 +35920,13 @@
       </p:sp>
       <p:sp>
         <p:nvSpPr>
-          <p:cNvPr id="54" name="Shape 52"/>
-          <p:cNvSpPr/>
-          <p:nvPr/>
-        </p:nvSpPr>
-        <p:spPr>
-          <a:xfrm>
-            <a:off x="2542032" y="4498848"/>
+          <p:cNvPr id="55" name="Shape 53"/>
+          <p:cNvSpPr/>
+          <p:nvPr/>
+        </p:nvSpPr>
+        <p:spPr>
+          <a:xfrm>
+            <a:off x="4718304" y="4498848"/>
             <a:ext cx="2011680" cy="402336"/>
           </a:xfrm>
           <a:prstGeom prst="rect">
@@ -34288,13 +35947,13 @@
       </p:sp>
       <p:sp>
         <p:nvSpPr>
-          <p:cNvPr id="55" name="Text 53"/>
-          <p:cNvSpPr/>
-          <p:nvPr/>
-        </p:nvSpPr>
-        <p:spPr>
-          <a:xfrm>
-            <a:off x="2542032" y="4498848"/>
+          <p:cNvPr id="56" name="Text 54"/>
+          <p:cNvSpPr/>
+          <p:nvPr/>
+        </p:nvSpPr>
+        <p:spPr>
+          <a:xfrm>
+            <a:off x="4718304" y="4498848"/>
             <a:ext cx="2011680" cy="402336"/>
           </a:xfrm>
           <a:prstGeom prst="rect">
@@ -34319,139 +35978,7 @@
                 <a:ea typeface="Trebuchet MS" pitchFamily="34" charset="-122"/>
                 <a:cs typeface="Trebuchet MS" pitchFamily="34" charset="-120"/>
               </a:rPr>
-              <a:t>payday</a:t>
-            </a:r>
-            <a:endParaRPr lang="en-US" sz="1200" dirty="0"/>
-          </a:p>
-        </p:txBody>
-      </p:sp>
-      <p:sp>
-        <p:nvSpPr>
-          <p:cNvPr id="56" name="Shape 54"/>
-          <p:cNvSpPr/>
-          <p:nvPr/>
-        </p:nvSpPr>
-        <p:spPr>
-          <a:xfrm>
-            <a:off x="4718304" y="4498848"/>
-            <a:ext cx="2011680" cy="402336"/>
-          </a:xfrm>
-          <a:prstGeom prst="rect">
-            <a:avLst>
-              <a:gd name="adj" fmla="val 13636"/>
-            </a:avLst>
-          </a:prstGeom>
-          <a:solidFill>
-            <a:srgbClr val="EEF2FF"/>
-          </a:solidFill>
-          <a:ln w="12700">
-            <a:solidFill>
-              <a:srgbClr val="6366F1"/>
-            </a:solidFill>
-            <a:prstDash val="solid"/>
-          </a:ln>
-        </p:spPr>
-      </p:sp>
-      <p:sp>
-        <p:nvSpPr>
-          <p:cNvPr id="57" name="Text 55"/>
-          <p:cNvSpPr/>
-          <p:nvPr/>
-        </p:nvSpPr>
-        <p:spPr>
-          <a:xfrm>
-            <a:off x="4718304" y="4498848"/>
-            <a:ext cx="2011680" cy="402336"/>
-          </a:xfrm>
-          <a:prstGeom prst="rect">
-            <a:avLst/>
-          </a:prstGeom>
-          <a:noFill/>
-          <a:ln/>
-        </p:spPr>
-        <p:txBody>
-          <a:bodyPr wrap="square" lIns="0" tIns="0" rIns="0" bIns="0" rtlCol="0" anchor="ctr"/>
-          <a:lstStyle/>
-          <a:p>
-            <a:pPr algn="ctr" indent="0" marL="0">
-              <a:buNone/>
-            </a:pPr>
-            <a:r>
-              <a:rPr lang="en-US" sz="1200" b="1" dirty="0">
-                <a:solidFill>
-                  <a:srgbClr val="4338CA"/>
-                </a:solidFill>
-                <a:latin typeface="Trebuchet MS" pitchFamily="34" charset="0"/>
-                <a:ea typeface="Trebuchet MS" pitchFamily="34" charset="-122"/>
-                <a:cs typeface="Trebuchet MS" pitchFamily="34" charset="-120"/>
-              </a:rPr>
-              <a:t>unpaid</a:t>
-            </a:r>
-            <a:endParaRPr lang="en-US" sz="1200" dirty="0"/>
-          </a:p>
-        </p:txBody>
-      </p:sp>
-      <p:sp>
-        <p:nvSpPr>
-          <p:cNvPr id="58" name="Shape 56"/>
-          <p:cNvSpPr/>
-          <p:nvPr/>
-        </p:nvSpPr>
-        <p:spPr>
-          <a:xfrm>
-            <a:off x="6894576" y="4498848"/>
-            <a:ext cx="2011680" cy="402336"/>
-          </a:xfrm>
-          <a:prstGeom prst="rect">
-            <a:avLst>
-              <a:gd name="adj" fmla="val 13636"/>
-            </a:avLst>
-          </a:prstGeom>
-          <a:solidFill>
-            <a:srgbClr val="EEF2FF"/>
-          </a:solidFill>
-          <a:ln w="12700">
-            <a:solidFill>
-              <a:srgbClr val="6366F1"/>
-            </a:solidFill>
-            <a:prstDash val="solid"/>
-          </a:ln>
-        </p:spPr>
-      </p:sp>
-      <p:sp>
-        <p:nvSpPr>
-          <p:cNvPr id="59" name="Text 57"/>
-          <p:cNvSpPr/>
-          <p:nvPr/>
-        </p:nvSpPr>
-        <p:spPr>
-          <a:xfrm>
-            <a:off x="6894576" y="4498848"/>
-            <a:ext cx="2011680" cy="402336"/>
-          </a:xfrm>
-          <a:prstGeom prst="rect">
-            <a:avLst/>
-          </a:prstGeom>
-          <a:noFill/>
-          <a:ln/>
-        </p:spPr>
-        <p:txBody>
-          <a:bodyPr wrap="square" lIns="0" tIns="0" rIns="0" bIns="0" rtlCol="0" anchor="ctr"/>
-          <a:lstStyle/>
-          <a:p>
-            <a:pPr algn="ctr" indent="0" marL="0">
-              <a:buNone/>
-            </a:pPr>
-            <a:r>
-              <a:rPr lang="en-US" sz="1200" b="1" dirty="0">
-                <a:solidFill>
-                  <a:srgbClr val="4338CA"/>
-                </a:solidFill>
-                <a:latin typeface="Trebuchet MS" pitchFamily="34" charset="0"/>
-                <a:ea typeface="Trebuchet MS" pitchFamily="34" charset="-122"/>
-                <a:cs typeface="Trebuchet MS" pitchFamily="34" charset="-120"/>
-              </a:rPr>
-              <a:t>payee</a:t>
+              <a:t>prepay</a:t>
             </a:r>
             <a:endParaRPr lang="en-US" sz="1200" dirty="0"/>
           </a:p>
@@ -34743,7 +36270,7 @@
                 <a:ea typeface="Calibri" pitchFamily="34" charset="-122"/>
                 <a:cs typeface="Calibri" pitchFamily="34" charset="-120"/>
               </a:rPr>
-              <a:t>Word Labs  •  wordlabs.app  •  Root: 'pay' = give money owed</a:t>
+              <a:t>Word Labs  •  wordlabs.app  •  Root: 'pay' = to give money for something</a:t>
             </a:r>
             <a:endParaRPr lang="en-US" sz="800" dirty="0"/>
           </a:p>
@@ -34907,7 +36434,7 @@
                 <a:ea typeface="Calibri" pitchFamily="34" charset="-122"/>
                 <a:cs typeface="Calibri" pitchFamily="34" charset="-120"/>
               </a:rPr>
-              <a:t>The core part of a word carrying its basic meaning. For example, 'pay' means 'give money owed'.</a:t>
+              <a:t>The core part of a word carrying its basic meaning. For example, 'pay' means 'to give money for something'.</a:t>
             </a:r>
             <a:endParaRPr lang="en-US" sz="1350" dirty="0"/>
           </a:p>
@@ -35527,7 +37054,7 @@
                 <a:ea typeface="Calibri" pitchFamily="34" charset="-122"/>
                 <a:cs typeface="Calibri" pitchFamily="34" charset="-120"/>
               </a:rPr>
-              <a:t>Word Labs  •  wordlabs.app  •  Root: 'pay' = give money owed</a:t>
+              <a:t>Word Labs  •  wordlabs.app  •  Root: 'pay' = to give money for something</a:t>
             </a:r>
             <a:endParaRPr lang="en-US" sz="800" dirty="0"/>
           </a:p>
@@ -35639,7 +37166,7 @@
                 <a:ea typeface="Calibri" pitchFamily="34" charset="-122"/>
                 <a:cs typeface="Calibri" pitchFamily="34" charset="-120"/>
               </a:rPr>
-              <a:t>1.  The root 'pay' comes from an ancient Greek word.</a:t>
+              <a:t>1.  'pays' means 'gives money in exchange for something'.</a:t>
             </a:r>
             <a:endParaRPr lang="en-US" sz="1300" dirty="0"/>
           </a:p>
@@ -35662,11 +37189,11 @@
             </a:avLst>
           </a:prstGeom>
           <a:solidFill>
-            <a:srgbClr val="FEE2E2"/>
-          </a:solidFill>
-          <a:ln w="12700">
-            <a:solidFill>
-              <a:srgbClr val="DC2626"/>
+            <a:srgbClr val="DCFCE7"/>
+          </a:solidFill>
+          <a:ln w="12700">
+            <a:solidFill>
+              <a:srgbClr val="16A34A"/>
             </a:solidFill>
             <a:prstDash val="solid"/>
           </a:ln>
@@ -35699,13 +37226,13 @@
             <a:r>
               <a:rPr lang="en-US" sz="1100" b="1" dirty="0">
                 <a:solidFill>
-                  <a:srgbClr val="DC2626"/>
+                  <a:srgbClr val="16A34A"/>
                 </a:solidFill>
                 <a:latin typeface="Trebuchet MS" pitchFamily="34" charset="0"/>
                 <a:ea typeface="Trebuchet MS" pitchFamily="34" charset="-122"/>
                 <a:cs typeface="Trebuchet MS" pitchFamily="34" charset="-120"/>
               </a:rPr>
-              <a:t>FALSE</a:t>
+              <a:t>TRUE</a:t>
             </a:r>
             <a:endParaRPr lang="en-US" sz="1100" dirty="0"/>
           </a:p>
@@ -35778,7 +37305,7 @@
                 <a:ea typeface="Calibri" pitchFamily="34" charset="-122"/>
                 <a:cs typeface="Calibri" pitchFamily="34" charset="-120"/>
               </a:rPr>
-              <a:t>2.  The word 'payee' refers to the person who sends money rather than receives it.</a:t>
+              <a:t>2.  'pay' means 'to throw something a long distance'.</a:t>
             </a:r>
             <a:endParaRPr lang="en-US" sz="1300" dirty="0"/>
           </a:p>
@@ -35917,7 +37444,7 @@
                 <a:ea typeface="Calibri" pitchFamily="34" charset="-122"/>
                 <a:cs typeface="Calibri" pitchFamily="34" charset="-120"/>
               </a:rPr>
-              <a:t>3.  Adding the prefix 're-' to 'pay' makes the word 'repay', meaning to pay back.</a:t>
+              <a:t>3.  'pay' means 'to give money in exchange for something'.</a:t>
             </a:r>
             <a:endParaRPr lang="en-US" sz="1300" dirty="0"/>
           </a:p>
@@ -36056,7 +37583,7 @@
                 <a:ea typeface="Calibri" pitchFamily="34" charset="-122"/>
                 <a:cs typeface="Calibri" pitchFamily="34" charset="-120"/>
               </a:rPr>
-              <a:t>4.  The word 'payment' uses the suffix '-ment' to turn the verb 'pay' into a noun.</a:t>
+              <a:t>4.  'pays' means 'throws something a long distance'.</a:t>
             </a:r>
             <a:endParaRPr lang="en-US" sz="1300" dirty="0"/>
           </a:p>
@@ -36079,11 +37606,11 @@
             </a:avLst>
           </a:prstGeom>
           <a:solidFill>
-            <a:srgbClr val="DCFCE7"/>
-          </a:solidFill>
-          <a:ln w="12700">
-            <a:solidFill>
-              <a:srgbClr val="16A34A"/>
+            <a:srgbClr val="FEE2E2"/>
+          </a:solidFill>
+          <a:ln w="12700">
+            <a:solidFill>
+              <a:srgbClr val="DC2626"/>
             </a:solidFill>
             <a:prstDash val="solid"/>
           </a:ln>
@@ -36116,13 +37643,13 @@
             <a:r>
               <a:rPr lang="en-US" sz="1100" b="1" dirty="0">
                 <a:solidFill>
-                  <a:srgbClr val="16A34A"/>
+                  <a:srgbClr val="DC2626"/>
                 </a:solidFill>
                 <a:latin typeface="Trebuchet MS" pitchFamily="34" charset="0"/>
                 <a:ea typeface="Trebuchet MS" pitchFamily="34" charset="-122"/>
                 <a:cs typeface="Trebuchet MS" pitchFamily="34" charset="-120"/>
               </a:rPr>
-              <a:t>TRUE</a:t>
+              <a:t>FALSE</a:t>
             </a:r>
             <a:endParaRPr lang="en-US" sz="1100" dirty="0"/>
           </a:p>
@@ -36195,7 +37722,7 @@
                 <a:ea typeface="Calibri" pitchFamily="34" charset="-122"/>
                 <a:cs typeface="Calibri" pitchFamily="34" charset="-120"/>
               </a:rPr>
-              <a:t>5.  The word 'repay' contains the root 'pay' meaning to give money owed.</a:t>
+              <a:t>5.  'pay' means 'to give money for something'.</a:t>
             </a:r>
             <a:endParaRPr lang="en-US" sz="1300" dirty="0"/>
           </a:p>
@@ -36553,7 +38080,7 @@
                 <a:ea typeface="Calibri" pitchFamily="34" charset="-122"/>
                 <a:cs typeface="Calibri" pitchFamily="34" charset="-120"/>
               </a:rPr>
-              <a:t>Word Labs  •  wordlabs.app  •  Root: 'pay' = give money owed</a:t>
+              <a:t>Word Labs  •  wordlabs.app  •  Root: 'pay' = to give money for something</a:t>
             </a:r>
             <a:endParaRPr lang="en-US" sz="800" dirty="0"/>
           </a:p>
@@ -36690,7 +38217,7 @@
                 <a:ea typeface="Trebuchet MS" pitchFamily="34" charset="-122"/>
                 <a:cs typeface="Trebuchet MS" pitchFamily="34" charset="-120"/>
               </a:rPr>
-              <a:t>give money owed</a:t>
+              <a:t>to give money for something</a:t>
             </a:r>
             <a:endParaRPr lang="en-US" sz="2000" dirty="0"/>
           </a:p>
@@ -36729,7 +38256,7 @@
                 <a:ea typeface="Calibri" pitchFamily="34" charset="-122"/>
                 <a:cs typeface="Calibri" pitchFamily="34" charset="-120"/>
               </a:rPr>
-              <a:t>Origin: Latin: pacare</a:t>
+              <a:t>Origin: Anglo-Saxon (Old English) root</a:t>
             </a:r>
             <a:endParaRPr lang="en-US" sz="1100" dirty="0"/>
           </a:p>
@@ -36834,7 +38361,7 @@
                 <a:ea typeface="Trebuchet MS" pitchFamily="34" charset="-122"/>
                 <a:cs typeface="Trebuchet MS" pitchFamily="34" charset="-120"/>
               </a:rPr>
-              <a:t>payment</a:t>
+              <a:t>pay</a:t>
             </a:r>
             <a:endParaRPr lang="en-US" sz="1300" dirty="0"/>
           </a:p>
@@ -36900,7 +38427,7 @@
                 <a:ea typeface="Trebuchet MS" pitchFamily="34" charset="-122"/>
                 <a:cs typeface="Trebuchet MS" pitchFamily="34" charset="-120"/>
               </a:rPr>
-              <a:t>repay</a:t>
+              <a:t>pays</a:t>
             </a:r>
             <a:endParaRPr lang="en-US" sz="1300" dirty="0"/>
           </a:p>
@@ -36966,7 +38493,7 @@
                 <a:ea typeface="Trebuchet MS" pitchFamily="34" charset="-122"/>
                 <a:cs typeface="Trebuchet MS" pitchFamily="34" charset="-120"/>
               </a:rPr>
-              <a:t>prepay</a:t>
+              <a:t>payer</a:t>
             </a:r>
             <a:endParaRPr lang="en-US" sz="1300" dirty="0"/>
           </a:p>
@@ -37032,7 +38559,7 @@
                 <a:ea typeface="Trebuchet MS" pitchFamily="34" charset="-122"/>
                 <a:cs typeface="Trebuchet MS" pitchFamily="34" charset="-120"/>
               </a:rPr>
-              <a:t>payable</a:t>
+              <a:t>repay</a:t>
             </a:r>
             <a:endParaRPr lang="en-US" sz="1300" dirty="0"/>
           </a:p>
@@ -37098,7 +38625,7 @@
                 <a:ea typeface="Trebuchet MS" pitchFamily="34" charset="-122"/>
                 <a:cs typeface="Trebuchet MS" pitchFamily="34" charset="-120"/>
               </a:rPr>
-              <a:t>overpay</a:t>
+              <a:t>payers</a:t>
             </a:r>
             <a:endParaRPr lang="en-US" sz="1300" dirty="0"/>
           </a:p>
@@ -37164,7 +38691,7 @@
                 <a:ea typeface="Trebuchet MS" pitchFamily="34" charset="-122"/>
                 <a:cs typeface="Trebuchet MS" pitchFamily="34" charset="-120"/>
               </a:rPr>
-              <a:t>payday</a:t>
+              <a:t>paying</a:t>
             </a:r>
             <a:endParaRPr lang="en-US" sz="1300" dirty="0"/>
           </a:p>
@@ -37230,7 +38757,7 @@
                 <a:ea typeface="Trebuchet MS" pitchFamily="34" charset="-122"/>
                 <a:cs typeface="Trebuchet MS" pitchFamily="34" charset="-120"/>
               </a:rPr>
-              <a:t>unpaid</a:t>
+              <a:t>prepay</a:t>
             </a:r>
             <a:endParaRPr lang="en-US" sz="1300" dirty="0"/>
           </a:p>
@@ -37522,7 +39049,7 @@
                 <a:ea typeface="Calibri" pitchFamily="34" charset="-122"/>
                 <a:cs typeface="Calibri" pitchFamily="34" charset="-120"/>
               </a:rPr>
-              <a:t>Word Labs  •  wordlabs.app  •  Root: 'pay' = give money owed</a:t>
+              <a:t>Word Labs  •  wordlabs.app  •  Root: 'pay' = to give money for something</a:t>
             </a:r>
             <a:endParaRPr lang="en-US" sz="800" dirty="0"/>
           </a:p>
@@ -37823,7 +39350,7 @@
                 <a:ea typeface="Trebuchet MS" pitchFamily="34" charset="-122"/>
                 <a:cs typeface="Trebuchet MS" pitchFamily="34" charset="-120"/>
               </a:rPr>
-              <a:t>re-</a:t>
+              <a:t>over-</a:t>
             </a:r>
             <a:endParaRPr lang="en-US" sz="1300" dirty="0"/>
           </a:p>
@@ -37951,7 +39478,7 @@
                 <a:ea typeface="Trebuchet MS" pitchFamily="34" charset="-122"/>
                 <a:cs typeface="Trebuchet MS" pitchFamily="34" charset="-120"/>
               </a:rPr>
-              <a:t>-ment</a:t>
+              <a:t>-able</a:t>
             </a:r>
             <a:endParaRPr lang="en-US" sz="1300" dirty="0"/>
           </a:p>
@@ -38104,7 +39631,7 @@
                 <a:ea typeface="Trebuchet MS" pitchFamily="34" charset="-122"/>
                 <a:cs typeface="Trebuchet MS" pitchFamily="34" charset="-120"/>
               </a:rPr>
-              <a:t>-able</a:t>
+              <a:t>-er</a:t>
             </a:r>
             <a:endParaRPr lang="en-US" sz="1300" dirty="0"/>
           </a:p>
@@ -38168,7 +39695,7 @@
                 <a:ea typeface="Trebuchet MS" pitchFamily="34" charset="-122"/>
                 <a:cs typeface="Trebuchet MS" pitchFamily="34" charset="-120"/>
               </a:rPr>
-              <a:t>non-</a:t>
+              <a:t>re-</a:t>
             </a:r>
             <a:endParaRPr lang="en-US" sz="1300" dirty="0"/>
           </a:p>
@@ -38257,7 +39784,7 @@
                 <a:ea typeface="Trebuchet MS" pitchFamily="34" charset="-122"/>
                 <a:cs typeface="Trebuchet MS" pitchFamily="34" charset="-120"/>
               </a:rPr>
-              <a:t>-ee</a:t>
+              <a:t>-ing</a:t>
             </a:r>
             <a:endParaRPr lang="en-US" sz="1300" dirty="0"/>
           </a:p>
@@ -38321,7 +39848,7 @@
                 <a:ea typeface="Trebuchet MS" pitchFamily="34" charset="-122"/>
                 <a:cs typeface="Trebuchet MS" pitchFamily="34" charset="-120"/>
               </a:rPr>
-              <a:t>un-</a:t>
+              <a:t>under-</a:t>
             </a:r>
             <a:endParaRPr lang="en-US" sz="1300" dirty="0"/>
           </a:p>
@@ -38410,7 +39937,7 @@
                 <a:ea typeface="Trebuchet MS" pitchFamily="34" charset="-122"/>
                 <a:cs typeface="Trebuchet MS" pitchFamily="34" charset="-120"/>
               </a:rPr>
-              <a:t>-er</a:t>
+              <a:t>-ment</a:t>
             </a:r>
             <a:endParaRPr lang="en-US" sz="1300" dirty="0"/>
           </a:p>
@@ -38431,7 +39958,7 @@
             <a:avLst/>
           </a:prstGeom>
           <a:solidFill>
-            <a:srgbClr val="DDD6FE"/>
+            <a:srgbClr val="F8FAFC"/>
           </a:solidFill>
           <a:ln w="12700">
             <a:solidFill>
@@ -38443,18 +39970,68 @@
       </p:sp>
       <p:sp>
         <p:nvSpPr>
-          <p:cNvPr id="39" name="Text 37"/>
-          <p:cNvSpPr/>
-          <p:nvPr/>
-        </p:nvSpPr>
-        <p:spPr>
-          <a:xfrm>
-            <a:off x="640080" y="3584448"/>
+          <p:cNvPr id="39" name="Shape 37"/>
+          <p:cNvSpPr/>
+          <p:nvPr/>
+        </p:nvSpPr>
+        <p:spPr>
+          <a:xfrm>
+            <a:off x="3291840" y="3584448"/>
+            <a:ext cx="1645920" cy="420624"/>
+          </a:xfrm>
+          <a:prstGeom prst="rect">
+            <a:avLst/>
+          </a:prstGeom>
+          <a:solidFill>
+            <a:srgbClr val="F8FAFC"/>
+          </a:solidFill>
+          <a:ln w="12700">
+            <a:solidFill>
+              <a:srgbClr val="E5E7EB"/>
+            </a:solidFill>
+            <a:prstDash val="solid"/>
+          </a:ln>
+        </p:spPr>
+      </p:sp>
+      <p:sp>
+        <p:nvSpPr>
+          <p:cNvPr id="40" name="Shape 38"/>
+          <p:cNvSpPr/>
+          <p:nvPr/>
+        </p:nvSpPr>
+        <p:spPr>
+          <a:xfrm>
+            <a:off x="5943600" y="3584448"/>
             <a:ext cx="1463040" cy="420624"/>
           </a:xfrm>
           <a:prstGeom prst="rect">
             <a:avLst/>
           </a:prstGeom>
+          <a:solidFill>
+            <a:srgbClr val="FCE7F3"/>
+          </a:solidFill>
+          <a:ln w="12700">
+            <a:solidFill>
+              <a:srgbClr val="E5E7EB"/>
+            </a:solidFill>
+            <a:prstDash val="solid"/>
+          </a:ln>
+        </p:spPr>
+      </p:sp>
+      <p:sp>
+        <p:nvSpPr>
+          <p:cNvPr id="41" name="Text 39"/>
+          <p:cNvSpPr/>
+          <p:nvPr/>
+        </p:nvSpPr>
+        <p:spPr>
+          <a:xfrm>
+            <a:off x="5943600" y="3584448"/>
+            <a:ext cx="1463040" cy="420624"/>
+          </a:xfrm>
+          <a:prstGeom prst="rect">
+            <a:avLst/>
+          </a:prstGeom>
           <a:noFill/>
           <a:ln/>
         </p:spPr>
@@ -38468,13 +40045,13 @@
             <a:r>
               <a:rPr lang="en-US" sz="1300" b="1" dirty="0">
                 <a:solidFill>
-                  <a:srgbClr val="4C1D95"/>
+                  <a:srgbClr val="9D174D"/>
                 </a:solidFill>
                 <a:latin typeface="Trebuchet MS" pitchFamily="34" charset="0"/>
                 <a:ea typeface="Trebuchet MS" pitchFamily="34" charset="-122"/>
                 <a:cs typeface="Trebuchet MS" pitchFamily="34" charset="-120"/>
               </a:rPr>
-              <a:t>over-</a:t>
+              <a:t>-s</a:t>
             </a:r>
             <a:endParaRPr lang="en-US" sz="1300" dirty="0"/>
           </a:p>
@@ -38482,96 +40059,7 @@
       </p:sp>
       <p:sp>
         <p:nvSpPr>
-          <p:cNvPr id="40" name="Shape 38"/>
-          <p:cNvSpPr/>
-          <p:nvPr/>
-        </p:nvSpPr>
-        <p:spPr>
-          <a:xfrm>
-            <a:off x="3291840" y="3584448"/>
-            <a:ext cx="1645920" cy="420624"/>
-          </a:xfrm>
-          <a:prstGeom prst="rect">
-            <a:avLst/>
-          </a:prstGeom>
-          <a:solidFill>
-            <a:srgbClr val="F8FAFC"/>
-          </a:solidFill>
-          <a:ln w="12700">
-            <a:solidFill>
-              <a:srgbClr val="E5E7EB"/>
-            </a:solidFill>
-            <a:prstDash val="solid"/>
-          </a:ln>
-        </p:spPr>
-      </p:sp>
-      <p:sp>
-        <p:nvSpPr>
-          <p:cNvPr id="41" name="Shape 39"/>
-          <p:cNvSpPr/>
-          <p:nvPr/>
-        </p:nvSpPr>
-        <p:spPr>
-          <a:xfrm>
-            <a:off x="5943600" y="3584448"/>
-            <a:ext cx="1463040" cy="420624"/>
-          </a:xfrm>
-          <a:prstGeom prst="rect">
-            <a:avLst/>
-          </a:prstGeom>
-          <a:solidFill>
-            <a:srgbClr val="FCE7F3"/>
-          </a:solidFill>
-          <a:ln w="12700">
-            <a:solidFill>
-              <a:srgbClr val="E5E7EB"/>
-            </a:solidFill>
-            <a:prstDash val="solid"/>
-          </a:ln>
-        </p:spPr>
-      </p:sp>
-      <p:sp>
-        <p:nvSpPr>
           <p:cNvPr id="42" name="Text 40"/>
-          <p:cNvSpPr/>
-          <p:nvPr/>
-        </p:nvSpPr>
-        <p:spPr>
-          <a:xfrm>
-            <a:off x="5943600" y="3584448"/>
-            <a:ext cx="1463040" cy="420624"/>
-          </a:xfrm>
-          <a:prstGeom prst="rect">
-            <a:avLst/>
-          </a:prstGeom>
-          <a:noFill/>
-          <a:ln/>
-        </p:spPr>
-        <p:txBody>
-          <a:bodyPr wrap="square" lIns="0" tIns="0" rIns="0" bIns="0" rtlCol="0" anchor="ctr"/>
-          <a:lstStyle/>
-          <a:p>
-            <a:pPr algn="ctr" indent="0" marL="0">
-              <a:buNone/>
-            </a:pPr>
-            <a:r>
-              <a:rPr lang="en-US" sz="1300" b="1" dirty="0">
-                <a:solidFill>
-                  <a:srgbClr val="9D174D"/>
-                </a:solidFill>
-                <a:latin typeface="Trebuchet MS" pitchFamily="34" charset="0"/>
-                <a:ea typeface="Trebuchet MS" pitchFamily="34" charset="-122"/>
-                <a:cs typeface="Trebuchet MS" pitchFamily="34" charset="-120"/>
-              </a:rPr>
-              <a:t>-day</a:t>
-            </a:r>
-            <a:endParaRPr lang="en-US" sz="1300" dirty="0"/>
-          </a:p>
-        </p:txBody>
-      </p:sp>
-      <p:sp>
-        <p:nvSpPr>
-          <p:cNvPr id="43" name="Text 41"/>
           <p:cNvSpPr/>
           <p:nvPr/>
         </p:nvSpPr>
@@ -38610,14 +40098,14 @@
       </p:sp>
       <p:sp>
         <p:nvSpPr>
-          <p:cNvPr id="44" name="Shape 42"/>
+          <p:cNvPr id="43" name="Shape 41"/>
           <p:cNvSpPr/>
           <p:nvPr/>
         </p:nvSpPr>
         <p:spPr>
           <a:xfrm>
             <a:off x="1508760" y="4178808"/>
-            <a:ext cx="822960" cy="420624"/>
+            <a:ext cx="1097280" cy="420624"/>
           </a:xfrm>
           <a:prstGeom prst="rect">
             <a:avLst>
@@ -38644,14 +40132,14 @@
       </p:sp>
       <p:sp>
         <p:nvSpPr>
-          <p:cNvPr id="45" name="Text 43"/>
+          <p:cNvPr id="44" name="Text 42"/>
           <p:cNvSpPr/>
           <p:nvPr/>
         </p:nvSpPr>
         <p:spPr>
           <a:xfrm>
             <a:off x="1508760" y="4178808"/>
-            <a:ext cx="822960" cy="420624"/>
+            <a:ext cx="1097280" cy="420624"/>
           </a:xfrm>
           <a:prstGeom prst="rect">
             <a:avLst/>
@@ -38675,7 +40163,7 @@
                 <a:ea typeface="Trebuchet MS" pitchFamily="34" charset="-122"/>
                 <a:cs typeface="Trebuchet MS" pitchFamily="34" charset="-120"/>
               </a:rPr>
-              <a:t>re-</a:t>
+              <a:t>over-</a:t>
             </a:r>
             <a:endParaRPr lang="en-US" sz="1300" dirty="0"/>
           </a:p>
@@ -38683,13 +40171,13 @@
       </p:sp>
       <p:sp>
         <p:nvSpPr>
-          <p:cNvPr id="46" name="Text 44"/>
-          <p:cNvSpPr/>
-          <p:nvPr/>
-        </p:nvSpPr>
-        <p:spPr>
-          <a:xfrm>
-            <a:off x="2359152" y="4178808"/>
+          <p:cNvPr id="45" name="Text 43"/>
+          <p:cNvSpPr/>
+          <p:nvPr/>
+        </p:nvSpPr>
+        <p:spPr>
+          <a:xfrm>
+            <a:off x="2633472" y="4178808"/>
             <a:ext cx="320040" cy="420624"/>
           </a:xfrm>
           <a:prstGeom prst="rect">
@@ -38722,13 +40210,13 @@
       </p:sp>
       <p:sp>
         <p:nvSpPr>
-          <p:cNvPr id="47" name="Shape 45"/>
-          <p:cNvSpPr/>
-          <p:nvPr/>
-        </p:nvSpPr>
-        <p:spPr>
-          <a:xfrm>
-            <a:off x="2706624" y="4178808"/>
+          <p:cNvPr id="46" name="Shape 44"/>
+          <p:cNvSpPr/>
+          <p:nvPr/>
+        </p:nvSpPr>
+        <p:spPr>
+          <a:xfrm>
+            <a:off x="2980944" y="4178808"/>
             <a:ext cx="1097280" cy="420624"/>
           </a:xfrm>
           <a:prstGeom prst="rect">
@@ -38756,13 +40244,13 @@
       </p:sp>
       <p:sp>
         <p:nvSpPr>
-          <p:cNvPr id="48" name="Text 46"/>
-          <p:cNvSpPr/>
-          <p:nvPr/>
-        </p:nvSpPr>
-        <p:spPr>
-          <a:xfrm>
-            <a:off x="2706624" y="4178808"/>
+          <p:cNvPr id="47" name="Text 45"/>
+          <p:cNvSpPr/>
+          <p:nvPr/>
+        </p:nvSpPr>
+        <p:spPr>
+          <a:xfrm>
+            <a:off x="2980944" y="4178808"/>
             <a:ext cx="1097280" cy="420624"/>
           </a:xfrm>
           <a:prstGeom prst="rect">
@@ -38795,13 +40283,13 @@
       </p:sp>
       <p:sp>
         <p:nvSpPr>
-          <p:cNvPr id="49" name="Text 47"/>
-          <p:cNvSpPr/>
-          <p:nvPr/>
-        </p:nvSpPr>
-        <p:spPr>
-          <a:xfrm>
-            <a:off x="3831336" y="4178808"/>
+          <p:cNvPr id="48" name="Text 46"/>
+          <p:cNvSpPr/>
+          <p:nvPr/>
+        </p:nvSpPr>
+        <p:spPr>
+          <a:xfrm>
+            <a:off x="4105656" y="4178808"/>
             <a:ext cx="320040" cy="420624"/>
           </a:xfrm>
           <a:prstGeom prst="rect">
@@ -38834,13 +40322,13 @@
       </p:sp>
       <p:sp>
         <p:nvSpPr>
-          <p:cNvPr id="50" name="Shape 48"/>
-          <p:cNvSpPr/>
-          <p:nvPr/>
-        </p:nvSpPr>
-        <p:spPr>
-          <a:xfrm>
-            <a:off x="4178808" y="4178808"/>
+          <p:cNvPr id="49" name="Shape 47"/>
+          <p:cNvSpPr/>
+          <p:nvPr/>
+        </p:nvSpPr>
+        <p:spPr>
+          <a:xfrm>
+            <a:off x="4453128" y="4178808"/>
             <a:ext cx="1097280" cy="420624"/>
           </a:xfrm>
           <a:prstGeom prst="rect">
@@ -38868,13 +40356,13 @@
       </p:sp>
       <p:sp>
         <p:nvSpPr>
-          <p:cNvPr id="51" name="Text 49"/>
-          <p:cNvSpPr/>
-          <p:nvPr/>
-        </p:nvSpPr>
-        <p:spPr>
-          <a:xfrm>
-            <a:off x="4178808" y="4178808"/>
+          <p:cNvPr id="50" name="Text 48"/>
+          <p:cNvSpPr/>
+          <p:nvPr/>
+        </p:nvSpPr>
+        <p:spPr>
+          <a:xfrm>
+            <a:off x="4453128" y="4178808"/>
             <a:ext cx="1097280" cy="420624"/>
           </a:xfrm>
           <a:prstGeom prst="rect">
@@ -38899,7 +40387,7 @@
                 <a:ea typeface="Trebuchet MS" pitchFamily="34" charset="-122"/>
                 <a:cs typeface="Trebuchet MS" pitchFamily="34" charset="-120"/>
               </a:rPr>
-              <a:t>-ment</a:t>
+              <a:t>-able</a:t>
             </a:r>
             <a:endParaRPr lang="en-US" sz="1300" dirty="0"/>
           </a:p>
@@ -38907,13 +40395,13 @@
       </p:sp>
       <p:sp>
         <p:nvSpPr>
-          <p:cNvPr id="52" name="Text 50"/>
-          <p:cNvSpPr/>
-          <p:nvPr/>
-        </p:nvSpPr>
-        <p:spPr>
-          <a:xfrm>
-            <a:off x="5349240" y="4178808"/>
+          <p:cNvPr id="51" name="Text 49"/>
+          <p:cNvSpPr/>
+          <p:nvPr/>
+        </p:nvSpPr>
+        <p:spPr>
+          <a:xfrm>
+            <a:off x="5623560" y="4178808"/>
             <a:ext cx="365760" cy="420624"/>
           </a:xfrm>
           <a:prstGeom prst="rect">
@@ -38946,13 +40434,13 @@
       </p:sp>
       <p:sp>
         <p:nvSpPr>
-          <p:cNvPr id="53" name="Shape 51"/>
-          <p:cNvSpPr/>
-          <p:nvPr/>
-        </p:nvSpPr>
-        <p:spPr>
-          <a:xfrm>
-            <a:off x="5760720" y="4178808"/>
+          <p:cNvPr id="52" name="Shape 50"/>
+          <p:cNvSpPr/>
+          <p:nvPr/>
+        </p:nvSpPr>
+        <p:spPr>
+          <a:xfrm>
+            <a:off x="6035040" y="4178808"/>
             <a:ext cx="2194560" cy="420624"/>
           </a:xfrm>
           <a:prstGeom prst="rect">
@@ -38973,13 +40461,13 @@
       </p:sp>
       <p:sp>
         <p:nvSpPr>
-          <p:cNvPr id="54" name="Text 52"/>
-          <p:cNvSpPr/>
-          <p:nvPr/>
-        </p:nvSpPr>
-        <p:spPr>
-          <a:xfrm>
-            <a:off x="5760720" y="4178808"/>
+          <p:cNvPr id="53" name="Text 51"/>
+          <p:cNvSpPr/>
+          <p:nvPr/>
+        </p:nvSpPr>
+        <p:spPr>
+          <a:xfrm>
+            <a:off x="6035040" y="4178808"/>
             <a:ext cx="2194560" cy="420624"/>
           </a:xfrm>
           <a:prstGeom prst="rect">
@@ -39004,7 +40492,7 @@
                 <a:ea typeface="Trebuchet MS" pitchFamily="34" charset="-122"/>
                 <a:cs typeface="Trebuchet MS" pitchFamily="34" charset="-120"/>
               </a:rPr>
-              <a:t>payment</a:t>
+              <a:t>pay</a:t>
             </a:r>
             <a:endParaRPr lang="en-US" sz="1400" dirty="0"/>
           </a:p>
@@ -39296,7 +40784,7 @@
                 <a:ea typeface="Calibri" pitchFamily="34" charset="-122"/>
                 <a:cs typeface="Calibri" pitchFamily="34" charset="-120"/>
               </a:rPr>
-              <a:t>Word Labs  •  wordlabs.app  •  Root: 'pay' = give money owed</a:t>
+              <a:t>Word Labs  •  wordlabs.app  •  Root: 'pay' = to give money for something</a:t>
             </a:r>
             <a:endParaRPr lang="en-US" sz="800" dirty="0"/>
           </a:p>
@@ -39408,7 +40896,7 @@
                 <a:ea typeface="Trebuchet MS" pitchFamily="34" charset="-122"/>
                 <a:cs typeface="Trebuchet MS" pitchFamily="34" charset="-120"/>
               </a:rPr>
-              <a:t>payment</a:t>
+              <a:t>pay</a:t>
             </a:r>
             <a:endParaRPr lang="en-US" sz="1200" dirty="0"/>
           </a:p>
@@ -39474,7 +40962,7 @@
                 <a:ea typeface="Calibri" pitchFamily="34" charset="-122"/>
                 <a:cs typeface="Calibri" pitchFamily="34" charset="-120"/>
               </a:rPr>
-              <a:t>To pay for something before you receive it or use it.</a:t>
+              <a:t>a person or organisation that pays for something</a:t>
             </a:r>
             <a:endParaRPr lang="en-US" sz="1200" dirty="0"/>
           </a:p>
@@ -39547,7 +41035,7 @@
                 <a:ea typeface="Trebuchet MS" pitchFamily="34" charset="-122"/>
                 <a:cs typeface="Trebuchet MS" pitchFamily="34" charset="-120"/>
               </a:rPr>
-              <a:t>repay</a:t>
+              <a:t>pays</a:t>
             </a:r>
             <a:endParaRPr lang="en-US" sz="1200" dirty="0"/>
           </a:p>
@@ -39613,7 +41101,7 @@
                 <a:ea typeface="Calibri" pitchFamily="34" charset="-122"/>
                 <a:cs typeface="Calibri" pitchFamily="34" charset="-120"/>
               </a:rPr>
-              <a:t>To pay more money than something is actually worth.</a:t>
+              <a:t>people or organisations that pay for something, more than one</a:t>
             </a:r>
             <a:endParaRPr lang="en-US" sz="1200" dirty="0"/>
           </a:p>
@@ -39686,7 +41174,7 @@
                 <a:ea typeface="Trebuchet MS" pitchFamily="34" charset="-122"/>
                 <a:cs typeface="Trebuchet MS" pitchFamily="34" charset="-120"/>
               </a:rPr>
-              <a:t>prepay</a:t>
+              <a:t>payer</a:t>
             </a:r>
             <a:endParaRPr lang="en-US" sz="1200" dirty="0"/>
           </a:p>
@@ -39752,7 +41240,7 @@
                 <a:ea typeface="Calibri" pitchFamily="34" charset="-122"/>
                 <a:cs typeface="Calibri" pitchFamily="34" charset="-120"/>
               </a:rPr>
-              <a:t>Money given to someone for goods or work done.</a:t>
+              <a:t>to give money in exchange for something</a:t>
             </a:r>
             <a:endParaRPr lang="en-US" sz="1200" dirty="0"/>
           </a:p>
@@ -39825,7 +41313,7 @@
                 <a:ea typeface="Trebuchet MS" pitchFamily="34" charset="-122"/>
                 <a:cs typeface="Trebuchet MS" pitchFamily="34" charset="-120"/>
               </a:rPr>
-              <a:t>payable</a:t>
+              <a:t>repay</a:t>
             </a:r>
             <a:endParaRPr lang="en-US" sz="1200" dirty="0"/>
           </a:p>
@@ -39891,7 +41379,7 @@
                 <a:ea typeface="Calibri" pitchFamily="34" charset="-122"/>
                 <a:cs typeface="Calibri" pitchFamily="34" charset="-120"/>
               </a:rPr>
-              <a:t>The special day when workers receive their wages or salary.</a:t>
+              <a:t>giving money in exchange for something, happening now</a:t>
             </a:r>
             <a:endParaRPr lang="en-US" sz="1200" dirty="0"/>
           </a:p>
@@ -39964,7 +41452,7 @@
                 <a:ea typeface="Trebuchet MS" pitchFamily="34" charset="-122"/>
                 <a:cs typeface="Trebuchet MS" pitchFamily="34" charset="-120"/>
               </a:rPr>
-              <a:t>overpay</a:t>
+              <a:t>payers</a:t>
             </a:r>
             <a:endParaRPr lang="en-US" sz="1200" dirty="0"/>
           </a:p>
@@ -40030,7 +41518,7 @@
                 <a:ea typeface="Calibri" pitchFamily="34" charset="-122"/>
                 <a:cs typeface="Calibri" pitchFamily="34" charset="-120"/>
               </a:rPr>
-              <a:t>Describing work or a bill that has not been paid yet.</a:t>
+              <a:t>to pay for something before receiving it</a:t>
             </a:r>
             <a:endParaRPr lang="en-US" sz="1200" dirty="0"/>
           </a:p>
@@ -40103,7 +41591,7 @@
                 <a:ea typeface="Trebuchet MS" pitchFamily="34" charset="-122"/>
                 <a:cs typeface="Trebuchet MS" pitchFamily="34" charset="-120"/>
               </a:rPr>
-              <a:t>payday</a:t>
+              <a:t>paying</a:t>
             </a:r>
             <a:endParaRPr lang="en-US" sz="1200" dirty="0"/>
           </a:p>
@@ -40169,7 +41657,7 @@
                 <a:ea typeface="Calibri" pitchFamily="34" charset="-122"/>
                 <a:cs typeface="Calibri" pitchFamily="34" charset="-120"/>
               </a:rPr>
-              <a:t>Describing money that needs to be paid or is ready to be paid.</a:t>
+              <a:t>to pay back money that is owed</a:t>
             </a:r>
             <a:endParaRPr lang="en-US" sz="1200" dirty="0"/>
           </a:p>
@@ -40242,7 +41730,7 @@
                 <a:ea typeface="Trebuchet MS" pitchFamily="34" charset="-122"/>
                 <a:cs typeface="Trebuchet MS" pitchFamily="34" charset="-120"/>
               </a:rPr>
-              <a:t>unpaid</a:t>
+              <a:t>prepay</a:t>
             </a:r>
             <a:endParaRPr lang="en-US" sz="1200" dirty="0"/>
           </a:p>
@@ -40308,7 +41796,7 @@
                 <a:ea typeface="Calibri" pitchFamily="34" charset="-122"/>
                 <a:cs typeface="Calibri" pitchFamily="34" charset="-120"/>
               </a:rPr>
-              <a:t>To pay back money that you borrowed from someone.</a:t>
+              <a:t>gives money in exchange for something</a:t>
             </a:r>
             <a:endParaRPr lang="en-US" sz="1200" dirty="0"/>
           </a:p>
@@ -40600,7 +42088,7 @@
                 <a:ea typeface="Calibri" pitchFamily="34" charset="-122"/>
                 <a:cs typeface="Calibri" pitchFamily="34" charset="-120"/>
               </a:rPr>
-              <a:t>Word Labs  •  wordlabs.app  •  Root: 'pay' = give money owed</a:t>
+              <a:t>Word Labs  •  wordlabs.app  •  Root: 'pay' = to give money for something</a:t>
             </a:r>
             <a:endParaRPr lang="en-US" sz="800" dirty="0"/>
           </a:p>
@@ -40803,7 +42291,7 @@
                 <a:ea typeface="Calibri" pitchFamily="34" charset="-122"/>
                 <a:cs typeface="Calibri" pitchFamily="34" charset="-120"/>
               </a:rPr>
-              <a:t>Mia received her first payment for helping at the school canteen all week.</a:t>
+              <a:t>I need to pay for my lunch at the canteen.</a:t>
             </a:r>
             <a:endParaRPr lang="en-US" sz="1500" dirty="0"/>
           </a:p>
@@ -40967,7 +42455,7 @@
                 <a:ea typeface="Calibri" pitchFamily="34" charset="-122"/>
                 <a:cs typeface="Calibri" pitchFamily="34" charset="-120"/>
               </a:rPr>
-              <a:t>Dad had to repay the money he borrowed from Grandma after his car was fixed.</a:t>
+              <a:t>He always pays for his own lunch.</a:t>
             </a:r>
             <a:endParaRPr lang="en-US" sz="1500" dirty="0"/>
           </a:p>
@@ -41131,7 +42619,7 @@
                 <a:ea typeface="Calibri" pitchFamily="34" charset="-122"/>
                 <a:cs typeface="Calibri" pitchFamily="34" charset="-120"/>
               </a:rPr>
-              <a:t>The family chose to prepay for their holiday activities so they would not have to worry later.</a:t>
+              <a:t>The taxpayer is the payer of income tax to the government.</a:t>
             </a:r>
             <a:endParaRPr lang="en-US" sz="1500" dirty="0"/>
           </a:p>
